--- a/tests/report_generator/integration/reference_objectives.pptx
+++ b/tests/report_generator/integration/reference_objectives.pptx
@@ -213,7 +213,7 @@
                 </a:outerShdw>
               </a:effectLst>
             </c:spPr>
-            <c:extLst xmlns:w="http://schemas.openxmlformats.org/wordprocessingml/2006/main" xmlns:w15="http://schemas.microsoft.com/office/word/2012/wordml" xmlns:w14="http://schemas.microsoft.com/office/word/2010/wordml" xmlns:m="http://schemas.openxmlformats.org/officeDocument/2006/math" xmlns:wp="http://schemas.openxmlformats.org/drawingml/2006/wordprocessingDrawing" xmlns:wp14="http://schemas.microsoft.com/office/word/2010/wordprocessingDrawing" xmlns:mc="http://schemas.openxmlformats.org/markup-compatibility/2006" xmlns:sl="http://schemas.openxmlformats.org/schemaLibrary/2006/main" xmlns:wne="http://schemas.microsoft.com/office/word/2006/wordml" xmlns:cdr="http://schemas.openxmlformats.org/drawingml/2006/chartDrawing" xmlns:c14="http://schemas.microsoft.com/office/drawing/2007/8/2/chart" xmlns:dgm="http://schemas.openxmlformats.org/drawingml/2006/diagram" xmlns:pic="http://schemas.openxmlformats.org/drawingml/2006/picture" xmlns:xdr="http://schemas.openxmlformats.org/drawingml/2006/spreadsheetDrawing" xmlns:dsp="http://schemas.microsoft.com/office/drawing/2008/diagram" xmlns:xvml="urn:schemas-microsoft-com:office:excel" xmlns:o="urn:schemas-microsoft-com:office:office" xmlns:v="urn:schemas-microsoft-com:vml" xmlns:w10="urn:schemas-microsoft-com:office:word" xmlns:pvml="urn:schemas-microsoft-com:office:powerpoint" xmlns:cppr="http://schemas.microsoft.com/office/2006/coverPageProps" xmlns:odx="http://opendope.org/xpaths" xmlns:odc="http://opendope.org/conditions" xmlns:odq="http://opendope.org/questions" xmlns:oda="http://opendope.org/answers" xmlns:odi="http://opendope.org/components" xmlns:odgm="http://opendope.org/SmartArt/DataHierarchy" xmlns:b="http://schemas.openxmlformats.org/officeDocument/2006/bibliography" xmlns:wps="http://schemas.microsoft.com/office/word/2010/wordprocessingShape" xmlns:w16se="http://schemas.microsoft.com/office/word/2015/wordml/symex" xmlns:w16cid="http://schemas.microsoft.com/office/word/2016/wordml/cid" xmlns:wetp="http://schemas.microsoft.com/office/webextensions/taskpanes/2010/11" xmlns:we="http://schemas.microsoft.com/office/webextensions/webextension/2010/11" xmlns:comp="http://schemas.openxmlformats.org/drawingml/2006/compatibility" xmlns:lc="http://schemas.openxmlformats.org/drawingml/2006/lockedCanvas">
+            <c:extLst xmlns:lc="http://schemas.openxmlformats.org/drawingml/2006/lockedCanvas" xmlns:comp="http://schemas.openxmlformats.org/drawingml/2006/compatibility" xmlns:we="http://schemas.microsoft.com/office/webextensions/webextension/2010/11" xmlns:wetp="http://schemas.microsoft.com/office/webextensions/taskpanes/2010/11" xmlns:w16cid="http://schemas.microsoft.com/office/word/2016/wordml/cid" xmlns:w16se="http://schemas.microsoft.com/office/word/2015/wordml/symex" xmlns:wps="http://schemas.microsoft.com/office/word/2010/wordprocessingShape" xmlns:b="http://schemas.openxmlformats.org/officeDocument/2006/bibliography" xmlns:odgm="http://opendope.org/SmartArt/DataHierarchy" xmlns:odi="http://opendope.org/components" xmlns:oda="http://opendope.org/answers" xmlns:odq="http://opendope.org/questions" xmlns:odc="http://opendope.org/conditions" xmlns:odx="http://opendope.org/xpaths" xmlns:cppr="http://schemas.microsoft.com/office/2006/coverPageProps" xmlns:pvml="urn:schemas-microsoft-com:office:powerpoint" xmlns:w10="urn:schemas-microsoft-com:office:word" xmlns:v="urn:schemas-microsoft-com:vml" xmlns:o="urn:schemas-microsoft-com:office:office" xmlns:xvml="urn:schemas-microsoft-com:office:excel" xmlns:dsp="http://schemas.microsoft.com/office/drawing/2008/diagram" xmlns:xdr="http://schemas.openxmlformats.org/drawingml/2006/spreadsheetDrawing" xmlns:pic="http://schemas.openxmlformats.org/drawingml/2006/picture" xmlns:dgm="http://schemas.openxmlformats.org/drawingml/2006/diagram" xmlns:c14="http://schemas.microsoft.com/office/drawing/2007/8/2/chart" xmlns:cdr="http://schemas.openxmlformats.org/drawingml/2006/chartDrawing" xmlns:wne="http://schemas.microsoft.com/office/word/2006/wordml" xmlns:sl="http://schemas.openxmlformats.org/schemaLibrary/2006/main" xmlns:mc="http://schemas.openxmlformats.org/markup-compatibility/2006" xmlns:wp14="http://schemas.microsoft.com/office/word/2010/wordprocessingDrawing" xmlns:wp="http://schemas.openxmlformats.org/drawingml/2006/wordprocessingDrawing" xmlns:m="http://schemas.openxmlformats.org/officeDocument/2006/math" xmlns:w14="http://schemas.microsoft.com/office/word/2010/wordml" xmlns:w15="http://schemas.microsoft.com/office/word/2012/wordml" xmlns:w="http://schemas.openxmlformats.org/wordprocessingml/2006/main">
               <c:ext xmlns:c16="http://schemas.microsoft.com/office/drawing/2014/chart" uri="{C3380CC4-5D6E-409C-BE32-E72D297353CC}">
                 <c16:uniqueId val="{00000001-6147-E74A-AA7B-5531F0E4EE0C}"/>
               </c:ext>
@@ -242,7 +242,7 @@
               </c:numCache>
             </c:numRef>
           </c:val>
-          <c:extLst xmlns:w="http://schemas.openxmlformats.org/wordprocessingml/2006/main" xmlns:w15="http://schemas.microsoft.com/office/word/2012/wordml" xmlns:w14="http://schemas.microsoft.com/office/word/2010/wordml" xmlns:m="http://schemas.openxmlformats.org/officeDocument/2006/math" xmlns:wp="http://schemas.openxmlformats.org/drawingml/2006/wordprocessingDrawing" xmlns:wp14="http://schemas.microsoft.com/office/word/2010/wordprocessingDrawing" xmlns:mc="http://schemas.openxmlformats.org/markup-compatibility/2006" xmlns:sl="http://schemas.openxmlformats.org/schemaLibrary/2006/main" xmlns:wne="http://schemas.microsoft.com/office/word/2006/wordml" xmlns:cdr="http://schemas.openxmlformats.org/drawingml/2006/chartDrawing" xmlns:c14="http://schemas.microsoft.com/office/drawing/2007/8/2/chart" xmlns:dgm="http://schemas.openxmlformats.org/drawingml/2006/diagram" xmlns:pic="http://schemas.openxmlformats.org/drawingml/2006/picture" xmlns:xdr="http://schemas.openxmlformats.org/drawingml/2006/spreadsheetDrawing" xmlns:dsp="http://schemas.microsoft.com/office/drawing/2008/diagram" xmlns:xvml="urn:schemas-microsoft-com:office:excel" xmlns:o="urn:schemas-microsoft-com:office:office" xmlns:v="urn:schemas-microsoft-com:vml" xmlns:w10="urn:schemas-microsoft-com:office:word" xmlns:pvml="urn:schemas-microsoft-com:office:powerpoint" xmlns:cppr="http://schemas.microsoft.com/office/2006/coverPageProps" xmlns:odx="http://opendope.org/xpaths" xmlns:odc="http://opendope.org/conditions" xmlns:odq="http://opendope.org/questions" xmlns:oda="http://opendope.org/answers" xmlns:odi="http://opendope.org/components" xmlns:odgm="http://opendope.org/SmartArt/DataHierarchy" xmlns:b="http://schemas.openxmlformats.org/officeDocument/2006/bibliography" xmlns:wps="http://schemas.microsoft.com/office/word/2010/wordprocessingShape" xmlns:w16se="http://schemas.microsoft.com/office/word/2015/wordml/symex" xmlns:w16cid="http://schemas.microsoft.com/office/word/2016/wordml/cid" xmlns:wetp="http://schemas.microsoft.com/office/webextensions/taskpanes/2010/11" xmlns:we="http://schemas.microsoft.com/office/webextensions/webextension/2010/11" xmlns:comp="http://schemas.openxmlformats.org/drawingml/2006/compatibility" xmlns:lc="http://schemas.openxmlformats.org/drawingml/2006/lockedCanvas">
+          <c:extLst xmlns:lc="http://schemas.openxmlformats.org/drawingml/2006/lockedCanvas" xmlns:comp="http://schemas.openxmlformats.org/drawingml/2006/compatibility" xmlns:we="http://schemas.microsoft.com/office/webextensions/webextension/2010/11" xmlns:wetp="http://schemas.microsoft.com/office/webextensions/taskpanes/2010/11" xmlns:w16cid="http://schemas.microsoft.com/office/word/2016/wordml/cid" xmlns:w16se="http://schemas.microsoft.com/office/word/2015/wordml/symex" xmlns:wps="http://schemas.microsoft.com/office/word/2010/wordprocessingShape" xmlns:b="http://schemas.openxmlformats.org/officeDocument/2006/bibliography" xmlns:odgm="http://opendope.org/SmartArt/DataHierarchy" xmlns:odi="http://opendope.org/components" xmlns:oda="http://opendope.org/answers" xmlns:odq="http://opendope.org/questions" xmlns:odc="http://opendope.org/conditions" xmlns:odx="http://opendope.org/xpaths" xmlns:cppr="http://schemas.microsoft.com/office/2006/coverPageProps" xmlns:pvml="urn:schemas-microsoft-com:office:powerpoint" xmlns:w10="urn:schemas-microsoft-com:office:word" xmlns:v="urn:schemas-microsoft-com:vml" xmlns:o="urn:schemas-microsoft-com:office:office" xmlns:xvml="urn:schemas-microsoft-com:office:excel" xmlns:dsp="http://schemas.microsoft.com/office/drawing/2008/diagram" xmlns:xdr="http://schemas.openxmlformats.org/drawingml/2006/spreadsheetDrawing" xmlns:pic="http://schemas.openxmlformats.org/drawingml/2006/picture" xmlns:dgm="http://schemas.openxmlformats.org/drawingml/2006/diagram" xmlns:c14="http://schemas.microsoft.com/office/drawing/2007/8/2/chart" xmlns:cdr="http://schemas.openxmlformats.org/drawingml/2006/chartDrawing" xmlns:wne="http://schemas.microsoft.com/office/word/2006/wordml" xmlns:sl="http://schemas.openxmlformats.org/schemaLibrary/2006/main" xmlns:mc="http://schemas.openxmlformats.org/markup-compatibility/2006" xmlns:wp14="http://schemas.microsoft.com/office/word/2010/wordprocessingDrawing" xmlns:wp="http://schemas.openxmlformats.org/drawingml/2006/wordprocessingDrawing" xmlns:m="http://schemas.openxmlformats.org/officeDocument/2006/math" xmlns:w14="http://schemas.microsoft.com/office/word/2010/wordml" xmlns:w15="http://schemas.microsoft.com/office/word/2012/wordml" xmlns:w="http://schemas.openxmlformats.org/wordprocessingml/2006/main">
             <c:ext xmlns:c16="http://schemas.microsoft.com/office/drawing/2014/chart" uri="{C3380CC4-5D6E-409C-BE32-E72D297353CC}">
               <c16:uniqueId val="{00000002-6147-E74A-AA7B-5531F0E4EE0C}"/>
             </c:ext>
@@ -290,7 +290,7 @@
                 <c:formatCode>General</c:formatCode>
                 <c:ptCount val="1"/>
                 <c:pt idx="0">
-                  <c:v>0.830367734282325</c:v>
+                  <c:v>0.83036773428232502</c:v>
                 </c:pt>
               </c:numCache>
             </c:numRef>
@@ -343,7 +343,7 @@
                 <c:formatCode>General</c:formatCode>
                 <c:ptCount val="1"/>
                 <c:pt idx="0">
-                  <c:v>41.99288256227758</c:v>
+                  <c:v>41.992882562277579</c:v>
                 </c:pt>
               </c:numCache>
             </c:numRef>
@@ -451,7 +451,7 @@
                 <c:formatCode>General</c:formatCode>
                 <c:ptCount val="1"/>
                 <c:pt idx="0">
-                  <c:v>8.303677342823251</c:v>
+                  <c:v>8.3036773428232511</c:v>
                 </c:pt>
               </c:numCache>
             </c:numRef>
@@ -558,14 +558,14 @@
     </c:plotArea>
     <c:plotVisOnly val="1"/>
     <c:dispBlanksAs val="gap"/>
-    <c:extLst xmlns:w="http://schemas.openxmlformats.org/wordprocessingml/2006/main" xmlns:w15="http://schemas.microsoft.com/office/word/2012/wordml" xmlns:w14="http://schemas.microsoft.com/office/word/2010/wordml" xmlns:m="http://schemas.openxmlformats.org/officeDocument/2006/math" xmlns:wp="http://schemas.openxmlformats.org/drawingml/2006/wordprocessingDrawing" xmlns:wp14="http://schemas.microsoft.com/office/word/2010/wordprocessingDrawing" xmlns:mc="http://schemas.openxmlformats.org/markup-compatibility/2006" xmlns:sl="http://schemas.openxmlformats.org/schemaLibrary/2006/main" xmlns:wne="http://schemas.microsoft.com/office/word/2006/wordml" xmlns:cdr="http://schemas.openxmlformats.org/drawingml/2006/chartDrawing" xmlns:c14="http://schemas.microsoft.com/office/drawing/2007/8/2/chart" xmlns:dgm="http://schemas.openxmlformats.org/drawingml/2006/diagram" xmlns:pic="http://schemas.openxmlformats.org/drawingml/2006/picture" xmlns:xdr="http://schemas.openxmlformats.org/drawingml/2006/spreadsheetDrawing" xmlns:dsp="http://schemas.microsoft.com/office/drawing/2008/diagram" xmlns:xvml="urn:schemas-microsoft-com:office:excel" xmlns:o="urn:schemas-microsoft-com:office:office" xmlns:v="urn:schemas-microsoft-com:vml" xmlns:w10="urn:schemas-microsoft-com:office:word" xmlns:pvml="urn:schemas-microsoft-com:office:powerpoint" xmlns:cppr="http://schemas.microsoft.com/office/2006/coverPageProps" xmlns:odx="http://opendope.org/xpaths" xmlns:odc="http://opendope.org/conditions" xmlns:odq="http://opendope.org/questions" xmlns:oda="http://opendope.org/answers" xmlns:odi="http://opendope.org/components" xmlns:odgm="http://opendope.org/SmartArt/DataHierarchy" xmlns:b="http://schemas.openxmlformats.org/officeDocument/2006/bibliography" xmlns:wps="http://schemas.microsoft.com/office/word/2010/wordprocessingShape" xmlns:w16se="http://schemas.microsoft.com/office/word/2015/wordml/symex" xmlns:w16cid="http://schemas.microsoft.com/office/word/2016/wordml/cid" xmlns:wetp="http://schemas.microsoft.com/office/webextensions/taskpanes/2010/11" xmlns:we="http://schemas.microsoft.com/office/webextensions/webextension/2010/11" xmlns:comp="http://schemas.openxmlformats.org/drawingml/2006/compatibility" xmlns:lc="http://schemas.openxmlformats.org/drawingml/2006/lockedCanvas">
+    <c:showDLblsOverMax val="0"/>
+    <c:extLst xmlns:lc="http://schemas.openxmlformats.org/drawingml/2006/lockedCanvas" xmlns:comp="http://schemas.openxmlformats.org/drawingml/2006/compatibility" xmlns:we="http://schemas.microsoft.com/office/webextensions/webextension/2010/11" xmlns:wetp="http://schemas.microsoft.com/office/webextensions/taskpanes/2010/11" xmlns:w16cid="http://schemas.microsoft.com/office/word/2016/wordml/cid" xmlns:w16se="http://schemas.microsoft.com/office/word/2015/wordml/symex" xmlns:wps="http://schemas.microsoft.com/office/word/2010/wordprocessingShape" xmlns:b="http://schemas.openxmlformats.org/officeDocument/2006/bibliography" xmlns:odgm="http://opendope.org/SmartArt/DataHierarchy" xmlns:odi="http://opendope.org/components" xmlns:oda="http://opendope.org/answers" xmlns:odq="http://opendope.org/questions" xmlns:odc="http://opendope.org/conditions" xmlns:odx="http://opendope.org/xpaths" xmlns:cppr="http://schemas.microsoft.com/office/2006/coverPageProps" xmlns:pvml="urn:schemas-microsoft-com:office:powerpoint" xmlns:w10="urn:schemas-microsoft-com:office:word" xmlns:v="urn:schemas-microsoft-com:vml" xmlns:o="urn:schemas-microsoft-com:office:office" xmlns:xvml="urn:schemas-microsoft-com:office:excel" xmlns:dsp="http://schemas.microsoft.com/office/drawing/2008/diagram" xmlns:xdr="http://schemas.openxmlformats.org/drawingml/2006/spreadsheetDrawing" xmlns:pic="http://schemas.openxmlformats.org/drawingml/2006/picture" xmlns:dgm="http://schemas.openxmlformats.org/drawingml/2006/diagram" xmlns:c14="http://schemas.microsoft.com/office/drawing/2007/8/2/chart" xmlns:cdr="http://schemas.openxmlformats.org/drawingml/2006/chartDrawing" xmlns:wne="http://schemas.microsoft.com/office/word/2006/wordml" xmlns:sl="http://schemas.openxmlformats.org/schemaLibrary/2006/main" xmlns:mc="http://schemas.openxmlformats.org/markup-compatibility/2006" xmlns:wp14="http://schemas.microsoft.com/office/word/2010/wordprocessingDrawing" xmlns:wp="http://schemas.openxmlformats.org/drawingml/2006/wordprocessingDrawing" xmlns:m="http://schemas.openxmlformats.org/officeDocument/2006/math" xmlns:w14="http://schemas.microsoft.com/office/word/2010/wordml" xmlns:w15="http://schemas.microsoft.com/office/word/2012/wordml" xmlns:w="http://schemas.openxmlformats.org/wordprocessingml/2006/main">
       <c:ext xmlns:c16r3="http://schemas.microsoft.com/office/drawing/2017/03/chart" uri="{56B9EC1D-385E-4148-901F-78D8002777C0}">
         <c16r3:dataDisplayOptions16>
           <c16r3:dispNaAsBlank val="1"/>
         </c16r3:dataDisplayOptions16>
       </c:ext>
     </c:extLst>
-    <c:showDLblsOverMax val="0"/>
   </c:chart>
   <c:spPr>
     <a:noFill/>
@@ -661,7 +661,7 @@
                 </a:outerShdw>
               </a:effectLst>
             </c:spPr>
-            <c:extLst xmlns:lc="http://schemas.openxmlformats.org/drawingml/2006/lockedCanvas" xmlns:comp="http://schemas.openxmlformats.org/drawingml/2006/compatibility" xmlns:we="http://schemas.microsoft.com/office/webextensions/webextension/2010/11" xmlns:wetp="http://schemas.microsoft.com/office/webextensions/taskpanes/2010/11" xmlns:w16cid="http://schemas.microsoft.com/office/word/2016/wordml/cid" xmlns:w16se="http://schemas.microsoft.com/office/word/2015/wordml/symex" xmlns:wps="http://schemas.microsoft.com/office/word/2010/wordprocessingShape" xmlns:b="http://schemas.openxmlformats.org/officeDocument/2006/bibliography" xmlns:odgm="http://opendope.org/SmartArt/DataHierarchy" xmlns:odi="http://opendope.org/components" xmlns:oda="http://opendope.org/answers" xmlns:odq="http://opendope.org/questions" xmlns:odc="http://opendope.org/conditions" xmlns:odx="http://opendope.org/xpaths" xmlns:cppr="http://schemas.microsoft.com/office/2006/coverPageProps" xmlns:pvml="urn:schemas-microsoft-com:office:powerpoint" xmlns:w10="urn:schemas-microsoft-com:office:word" xmlns:v="urn:schemas-microsoft-com:vml" xmlns:o="urn:schemas-microsoft-com:office:office" xmlns:xvml="urn:schemas-microsoft-com:office:excel" xmlns:dsp="http://schemas.microsoft.com/office/drawing/2008/diagram" xmlns:xdr="http://schemas.openxmlformats.org/drawingml/2006/spreadsheetDrawing" xmlns:pic="http://schemas.openxmlformats.org/drawingml/2006/picture" xmlns:dgm="http://schemas.openxmlformats.org/drawingml/2006/diagram" xmlns:c14="http://schemas.microsoft.com/office/drawing/2007/8/2/chart" xmlns:cdr="http://schemas.openxmlformats.org/drawingml/2006/chartDrawing" xmlns:wne="http://schemas.microsoft.com/office/word/2006/wordml" xmlns:sl="http://schemas.openxmlformats.org/schemaLibrary/2006/main" xmlns:mc="http://schemas.openxmlformats.org/markup-compatibility/2006" xmlns:wp14="http://schemas.microsoft.com/office/word/2010/wordprocessingDrawing" xmlns:wp="http://schemas.openxmlformats.org/drawingml/2006/wordprocessingDrawing" xmlns:m="http://schemas.openxmlformats.org/officeDocument/2006/math" xmlns:w14="http://schemas.microsoft.com/office/word/2010/wordml" xmlns:w15="http://schemas.microsoft.com/office/word/2012/wordml" xmlns:w="http://schemas.openxmlformats.org/wordprocessingml/2006/main">
+            <c:extLst xmlns:w="http://schemas.openxmlformats.org/wordprocessingml/2006/main" xmlns:w15="http://schemas.microsoft.com/office/word/2012/wordml" xmlns:w14="http://schemas.microsoft.com/office/word/2010/wordml" xmlns:m="http://schemas.openxmlformats.org/officeDocument/2006/math" xmlns:wp="http://schemas.openxmlformats.org/drawingml/2006/wordprocessingDrawing" xmlns:wp14="http://schemas.microsoft.com/office/word/2010/wordprocessingDrawing" xmlns:mc="http://schemas.openxmlformats.org/markup-compatibility/2006" xmlns:sl="http://schemas.openxmlformats.org/schemaLibrary/2006/main" xmlns:wne="http://schemas.microsoft.com/office/word/2006/wordml" xmlns:cdr="http://schemas.openxmlformats.org/drawingml/2006/chartDrawing" xmlns:c14="http://schemas.microsoft.com/office/drawing/2007/8/2/chart" xmlns:dgm="http://schemas.openxmlformats.org/drawingml/2006/diagram" xmlns:pic="http://schemas.openxmlformats.org/drawingml/2006/picture" xmlns:xdr="http://schemas.openxmlformats.org/drawingml/2006/spreadsheetDrawing" xmlns:dsp="http://schemas.microsoft.com/office/drawing/2008/diagram" xmlns:xvml="urn:schemas-microsoft-com:office:excel" xmlns:o="urn:schemas-microsoft-com:office:office" xmlns:v="urn:schemas-microsoft-com:vml" xmlns:w10="urn:schemas-microsoft-com:office:word" xmlns:pvml="urn:schemas-microsoft-com:office:powerpoint" xmlns:cppr="http://schemas.microsoft.com/office/2006/coverPageProps" xmlns:odx="http://opendope.org/xpaths" xmlns:odc="http://opendope.org/conditions" xmlns:odq="http://opendope.org/questions" xmlns:oda="http://opendope.org/answers" xmlns:odi="http://opendope.org/components" xmlns:odgm="http://opendope.org/SmartArt/DataHierarchy" xmlns:b="http://schemas.openxmlformats.org/officeDocument/2006/bibliography" xmlns:wps="http://schemas.microsoft.com/office/word/2010/wordprocessingShape" xmlns:w16se="http://schemas.microsoft.com/office/word/2015/wordml/symex" xmlns:w16cid="http://schemas.microsoft.com/office/word/2016/wordml/cid" xmlns:wetp="http://schemas.microsoft.com/office/webextensions/taskpanes/2010/11" xmlns:we="http://schemas.microsoft.com/office/webextensions/webextension/2010/11" xmlns:comp="http://schemas.openxmlformats.org/drawingml/2006/compatibility" xmlns:lc="http://schemas.openxmlformats.org/drawingml/2006/lockedCanvas">
               <c:ext xmlns:c16="http://schemas.microsoft.com/office/drawing/2014/chart" uri="{C3380CC4-5D6E-409C-BE32-E72D297353CC}">
                 <c16:uniqueId val="{00000001-6147-E74A-AA7B-5531F0E4EE0C}"/>
               </c:ext>
@@ -739,28 +739,28 @@
                   <c:v>26.923076923076923</c:v>
                 </c:pt>
                 <c:pt idx="1">
-                  <c:v>47.72727272727273</c:v>
+                  <c:v>47.727272727272727</c:v>
                 </c:pt>
                 <c:pt idx="2">
                   <c:v>39.42307692307692</c:v>
                 </c:pt>
                 <c:pt idx="3">
-                  <c:v>0.0</c:v>
+                  <c:v>0</c:v>
                 </c:pt>
                 <c:pt idx="4">
                   <c:v>18.181818181818183</c:v>
                 </c:pt>
                 <c:pt idx="5">
-                  <c:v>81.81818181818181</c:v>
+                  <c:v>81.818181818181813</c:v>
                 </c:pt>
                 <c:pt idx="6">
-                  <c:v>50.0</c:v>
+                  <c:v>50</c:v>
                 </c:pt>
                 <c:pt idx="7">
-                  <c:v>75.80645161290323</c:v>
+                  <c:v>75.806451612903231</c:v>
                 </c:pt>
                 <c:pt idx="8">
-                  <c:v>54.83870967741935</c:v>
+                  <c:v>54.838709677419352</c:v>
                 </c:pt>
                 <c:pt idx="9">
                   <c:v>40.625</c:v>
@@ -769,19 +769,19 @@
                   <c:v>51.724137931034484</c:v>
                 </c:pt>
                 <c:pt idx="11">
-                  <c:v>0.0</c:v>
+                  <c:v>0</c:v>
                 </c:pt>
                 <c:pt idx="12">
-                  <c:v>47.36842105263158</c:v>
+                  <c:v>47.368421052631582</c:v>
                 </c:pt>
                 <c:pt idx="13">
-                  <c:v>49.54128440366973</c:v>
+                  <c:v>49.541284403669728</c:v>
                 </c:pt>
                 <c:pt idx="14">
                   <c:v>61.29032258064516</c:v>
                 </c:pt>
                 <c:pt idx="15">
-                  <c:v>11.11111111111111</c:v>
+                  <c:v>11.111111111111111</c:v>
                 </c:pt>
                 <c:pt idx="16">
                   <c:v>40.090090090090094</c:v>
@@ -792,7 +792,7 @@
               </c:numCache>
             </c:numRef>
           </c:val>
-          <c:extLst xmlns:lc="http://schemas.openxmlformats.org/drawingml/2006/lockedCanvas" xmlns:comp="http://schemas.openxmlformats.org/drawingml/2006/compatibility" xmlns:we="http://schemas.microsoft.com/office/webextensions/webextension/2010/11" xmlns:wetp="http://schemas.microsoft.com/office/webextensions/taskpanes/2010/11" xmlns:w16cid="http://schemas.microsoft.com/office/word/2016/wordml/cid" xmlns:w16se="http://schemas.microsoft.com/office/word/2015/wordml/symex" xmlns:wps="http://schemas.microsoft.com/office/word/2010/wordprocessingShape" xmlns:b="http://schemas.openxmlformats.org/officeDocument/2006/bibliography" xmlns:odgm="http://opendope.org/SmartArt/DataHierarchy" xmlns:odi="http://opendope.org/components" xmlns:oda="http://opendope.org/answers" xmlns:odq="http://opendope.org/questions" xmlns:odc="http://opendope.org/conditions" xmlns:odx="http://opendope.org/xpaths" xmlns:cppr="http://schemas.microsoft.com/office/2006/coverPageProps" xmlns:pvml="urn:schemas-microsoft-com:office:powerpoint" xmlns:w10="urn:schemas-microsoft-com:office:word" xmlns:v="urn:schemas-microsoft-com:vml" xmlns:o="urn:schemas-microsoft-com:office:office" xmlns:xvml="urn:schemas-microsoft-com:office:excel" xmlns:dsp="http://schemas.microsoft.com/office/drawing/2008/diagram" xmlns:xdr="http://schemas.openxmlformats.org/drawingml/2006/spreadsheetDrawing" xmlns:pic="http://schemas.openxmlformats.org/drawingml/2006/picture" xmlns:dgm="http://schemas.openxmlformats.org/drawingml/2006/diagram" xmlns:c14="http://schemas.microsoft.com/office/drawing/2007/8/2/chart" xmlns:cdr="http://schemas.openxmlformats.org/drawingml/2006/chartDrawing" xmlns:wne="http://schemas.microsoft.com/office/word/2006/wordml" xmlns:sl="http://schemas.openxmlformats.org/schemaLibrary/2006/main" xmlns:mc="http://schemas.openxmlformats.org/markup-compatibility/2006" xmlns:wp14="http://schemas.microsoft.com/office/word/2010/wordprocessingDrawing" xmlns:wp="http://schemas.openxmlformats.org/drawingml/2006/wordprocessingDrawing" xmlns:m="http://schemas.openxmlformats.org/officeDocument/2006/math" xmlns:w14="http://schemas.microsoft.com/office/word/2010/wordml" xmlns:w15="http://schemas.microsoft.com/office/word/2012/wordml" xmlns:w="http://schemas.openxmlformats.org/wordprocessingml/2006/main">
+          <c:extLst xmlns:w="http://schemas.openxmlformats.org/wordprocessingml/2006/main" xmlns:w15="http://schemas.microsoft.com/office/word/2012/wordml" xmlns:w14="http://schemas.microsoft.com/office/word/2010/wordml" xmlns:m="http://schemas.openxmlformats.org/officeDocument/2006/math" xmlns:wp="http://schemas.openxmlformats.org/drawingml/2006/wordprocessingDrawing" xmlns:wp14="http://schemas.microsoft.com/office/word/2010/wordprocessingDrawing" xmlns:mc="http://schemas.openxmlformats.org/markup-compatibility/2006" xmlns:sl="http://schemas.openxmlformats.org/schemaLibrary/2006/main" xmlns:wne="http://schemas.microsoft.com/office/word/2006/wordml" xmlns:cdr="http://schemas.openxmlformats.org/drawingml/2006/chartDrawing" xmlns:c14="http://schemas.microsoft.com/office/drawing/2007/8/2/chart" xmlns:dgm="http://schemas.openxmlformats.org/drawingml/2006/diagram" xmlns:pic="http://schemas.openxmlformats.org/drawingml/2006/picture" xmlns:xdr="http://schemas.openxmlformats.org/drawingml/2006/spreadsheetDrawing" xmlns:dsp="http://schemas.microsoft.com/office/drawing/2008/diagram" xmlns:xvml="urn:schemas-microsoft-com:office:excel" xmlns:o="urn:schemas-microsoft-com:office:office" xmlns:v="urn:schemas-microsoft-com:vml" xmlns:w10="urn:schemas-microsoft-com:office:word" xmlns:pvml="urn:schemas-microsoft-com:office:powerpoint" xmlns:cppr="http://schemas.microsoft.com/office/2006/coverPageProps" xmlns:odx="http://opendope.org/xpaths" xmlns:odc="http://opendope.org/conditions" xmlns:odq="http://opendope.org/questions" xmlns:oda="http://opendope.org/answers" xmlns:odi="http://opendope.org/components" xmlns:odgm="http://opendope.org/SmartArt/DataHierarchy" xmlns:b="http://schemas.openxmlformats.org/officeDocument/2006/bibliography" xmlns:wps="http://schemas.microsoft.com/office/word/2010/wordprocessingShape" xmlns:w16se="http://schemas.microsoft.com/office/word/2015/wordml/symex" xmlns:w16cid="http://schemas.microsoft.com/office/word/2016/wordml/cid" xmlns:wetp="http://schemas.microsoft.com/office/webextensions/taskpanes/2010/11" xmlns:we="http://schemas.microsoft.com/office/webextensions/webextension/2010/11" xmlns:comp="http://schemas.openxmlformats.org/drawingml/2006/compatibility" xmlns:lc="http://schemas.openxmlformats.org/drawingml/2006/lockedCanvas">
             <c:ext xmlns:c16="http://schemas.microsoft.com/office/drawing/2014/chart" uri="{C3380CC4-5D6E-409C-BE32-E72D297353CC}">
               <c16:uniqueId val="{00000002-6147-E74A-AA7B-5531F0E4EE0C}"/>
             </c:ext>
@@ -897,52 +897,52 @@
                   <c:v>1.1363636363636365</c:v>
                 </c:pt>
                 <c:pt idx="2">
-                  <c:v>0.0</c:v>
+                  <c:v>0</c:v>
                 </c:pt>
                 <c:pt idx="3">
-                  <c:v>0.0</c:v>
+                  <c:v>0</c:v>
                 </c:pt>
                 <c:pt idx="4">
-                  <c:v>0.0</c:v>
+                  <c:v>0</c:v>
                 </c:pt>
                 <c:pt idx="5">
-                  <c:v>0.0</c:v>
+                  <c:v>0</c:v>
                 </c:pt>
                 <c:pt idx="6">
                   <c:v>12.5</c:v>
                 </c:pt>
                 <c:pt idx="7">
-                  <c:v>0.0</c:v>
+                  <c:v>0</c:v>
                 </c:pt>
                 <c:pt idx="8">
-                  <c:v>0.0</c:v>
+                  <c:v>0</c:v>
                 </c:pt>
                 <c:pt idx="9">
-                  <c:v>0.0</c:v>
+                  <c:v>0</c:v>
                 </c:pt>
                 <c:pt idx="10">
-                  <c:v>0.0</c:v>
+                  <c:v>0</c:v>
                 </c:pt>
                 <c:pt idx="11">
-                  <c:v>0.0</c:v>
+                  <c:v>0</c:v>
                 </c:pt>
                 <c:pt idx="12">
-                  <c:v>0.0</c:v>
+                  <c:v>0</c:v>
                 </c:pt>
                 <c:pt idx="13">
-                  <c:v>0.9174311926605505</c:v>
+                  <c:v>0.91743119266055051</c:v>
                 </c:pt>
                 <c:pt idx="14">
                   <c:v>3.225806451612903</c:v>
                 </c:pt>
                 <c:pt idx="15">
-                  <c:v>0.0</c:v>
+                  <c:v>0</c:v>
                 </c:pt>
                 <c:pt idx="16">
-                  <c:v>0.9009009009009009</c:v>
+                  <c:v>0.90090090090090091</c:v>
                 </c:pt>
                 <c:pt idx="17">
-                  <c:v>0.0</c:v>
+                  <c:v>0</c:v>
                 </c:pt>
               </c:numCache>
             </c:numRef>
@@ -1055,10 +1055,10 @@
                   <c:v>35.57692307692308</c:v>
                 </c:pt>
                 <c:pt idx="3">
-                  <c:v>50.0</c:v>
+                  <c:v>50</c:v>
                 </c:pt>
                 <c:pt idx="4">
-                  <c:v>59.09090909090909</c:v>
+                  <c:v>59.090909090909093</c:v>
                 </c:pt>
                 <c:pt idx="5">
                   <c:v>18.181818181818183</c:v>
@@ -1079,10 +1079,10 @@
                   <c:v>48.275862068965516</c:v>
                 </c:pt>
                 <c:pt idx="11">
-                  <c:v>50.0</c:v>
+                  <c:v>50</c:v>
                 </c:pt>
                 <c:pt idx="12">
-                  <c:v>52.63157894736842</c:v>
+                  <c:v>52.631578947368418</c:v>
                 </c:pt>
                 <c:pt idx="13">
                   <c:v>34.862385321100916</c:v>
@@ -1091,10 +1091,10 @@
                   <c:v>25.806451612903224</c:v>
                 </c:pt>
                 <c:pt idx="15">
-                  <c:v>88.88888888888889</c:v>
+                  <c:v>88.888888888888886</c:v>
                 </c:pt>
                 <c:pt idx="16">
-                  <c:v>51.8018018018018</c:v>
+                  <c:v>51.801801801801801</c:v>
                 </c:pt>
                 <c:pt idx="17">
                   <c:v>59.25925925925926</c:v>
@@ -1204,55 +1204,55 @@
                   <c:v>3.8461538461538463</c:v>
                 </c:pt>
                 <c:pt idx="1">
-                  <c:v>2.272727272727273</c:v>
+                  <c:v>2.2727272727272729</c:v>
                 </c:pt>
                 <c:pt idx="2">
-                  <c:v>0.0</c:v>
+                  <c:v>0</c:v>
                 </c:pt>
                 <c:pt idx="3">
-                  <c:v>0.0</c:v>
+                  <c:v>0</c:v>
                 </c:pt>
                 <c:pt idx="4">
-                  <c:v>0.0</c:v>
+                  <c:v>0</c:v>
                 </c:pt>
                 <c:pt idx="5">
-                  <c:v>0.0</c:v>
+                  <c:v>0</c:v>
                 </c:pt>
                 <c:pt idx="6">
-                  <c:v>0.0</c:v>
+                  <c:v>0</c:v>
                 </c:pt>
                 <c:pt idx="7">
-                  <c:v>0.0</c:v>
+                  <c:v>0</c:v>
                 </c:pt>
                 <c:pt idx="8">
-                  <c:v>0.0</c:v>
+                  <c:v>0</c:v>
                 </c:pt>
                 <c:pt idx="9">
                   <c:v>6.25</c:v>
                 </c:pt>
                 <c:pt idx="10">
-                  <c:v>0.0</c:v>
+                  <c:v>0</c:v>
                 </c:pt>
                 <c:pt idx="11">
-                  <c:v>0.0</c:v>
+                  <c:v>0</c:v>
                 </c:pt>
                 <c:pt idx="12">
-                  <c:v>0.0</c:v>
+                  <c:v>0</c:v>
                 </c:pt>
                 <c:pt idx="13">
-                  <c:v>8.256880733944953</c:v>
+                  <c:v>8.2568807339449535</c:v>
                 </c:pt>
                 <c:pt idx="14">
-                  <c:v>6.451612903225806</c:v>
+                  <c:v>6.4516129032258061</c:v>
                 </c:pt>
                 <c:pt idx="15">
-                  <c:v>0.0</c:v>
+                  <c:v>0</c:v>
                 </c:pt>
                 <c:pt idx="16">
                   <c:v>2.7027027027027026</c:v>
                 </c:pt>
                 <c:pt idx="17">
-                  <c:v>0.0</c:v>
+                  <c:v>0</c:v>
                 </c:pt>
               </c:numCache>
             </c:numRef>
@@ -1361,22 +1361,22 @@
                   <c:v>3.8461538461538463</c:v>
                 </c:pt>
                 <c:pt idx="1">
-                  <c:v>5.681818181818182</c:v>
+                  <c:v>5.6818181818181817</c:v>
                 </c:pt>
                 <c:pt idx="2">
-                  <c:v>25.0</c:v>
+                  <c:v>25</c:v>
                 </c:pt>
                 <c:pt idx="3">
-                  <c:v>50.0</c:v>
+                  <c:v>50</c:v>
                 </c:pt>
                 <c:pt idx="4">
                   <c:v>22.727272727272727</c:v>
                 </c:pt>
                 <c:pt idx="5">
-                  <c:v>0.0</c:v>
+                  <c:v>0</c:v>
                 </c:pt>
                 <c:pt idx="6">
-                  <c:v>0.0</c:v>
+                  <c:v>0</c:v>
                 </c:pt>
                 <c:pt idx="7">
                   <c:v>1.6129032258064515</c:v>
@@ -1388,28 +1388,28 @@
                   <c:v>10.9375</c:v>
                 </c:pt>
                 <c:pt idx="10">
-                  <c:v>0.0</c:v>
+                  <c:v>0</c:v>
                 </c:pt>
                 <c:pt idx="11">
-                  <c:v>50.0</c:v>
+                  <c:v>50</c:v>
                 </c:pt>
                 <c:pt idx="12">
-                  <c:v>0.0</c:v>
+                  <c:v>0</c:v>
                 </c:pt>
                 <c:pt idx="13">
-                  <c:v>6.422018348623853</c:v>
+                  <c:v>6.4220183486238529</c:v>
                 </c:pt>
                 <c:pt idx="14">
                   <c:v>3.225806451612903</c:v>
                 </c:pt>
                 <c:pt idx="15">
-                  <c:v>0.0</c:v>
+                  <c:v>0</c:v>
                 </c:pt>
                 <c:pt idx="16">
-                  <c:v>4.504504504504505</c:v>
+                  <c:v>4.5045045045045047</c:v>
                 </c:pt>
                 <c:pt idx="17">
-                  <c:v>7.407407407407407</c:v>
+                  <c:v>7.4074074074074074</c:v>
                 </c:pt>
               </c:numCache>
             </c:numRef>
@@ -1546,14 +1546,14 @@
     </c:plotArea>
     <c:plotVisOnly val="1"/>
     <c:dispBlanksAs val="gap"/>
-    <c:extLst xmlns:lc="http://schemas.openxmlformats.org/drawingml/2006/lockedCanvas" xmlns:comp="http://schemas.openxmlformats.org/drawingml/2006/compatibility" xmlns:we="http://schemas.microsoft.com/office/webextensions/webextension/2010/11" xmlns:wetp="http://schemas.microsoft.com/office/webextensions/taskpanes/2010/11" xmlns:w16cid="http://schemas.microsoft.com/office/word/2016/wordml/cid" xmlns:w16se="http://schemas.microsoft.com/office/word/2015/wordml/symex" xmlns:wps="http://schemas.microsoft.com/office/word/2010/wordprocessingShape" xmlns:b="http://schemas.openxmlformats.org/officeDocument/2006/bibliography" xmlns:odgm="http://opendope.org/SmartArt/DataHierarchy" xmlns:odi="http://opendope.org/components" xmlns:oda="http://opendope.org/answers" xmlns:odq="http://opendope.org/questions" xmlns:odc="http://opendope.org/conditions" xmlns:odx="http://opendope.org/xpaths" xmlns:cppr="http://schemas.microsoft.com/office/2006/coverPageProps" xmlns:pvml="urn:schemas-microsoft-com:office:powerpoint" xmlns:w10="urn:schemas-microsoft-com:office:word" xmlns:v="urn:schemas-microsoft-com:vml" xmlns:o="urn:schemas-microsoft-com:office:office" xmlns:xvml="urn:schemas-microsoft-com:office:excel" xmlns:dsp="http://schemas.microsoft.com/office/drawing/2008/diagram" xmlns:xdr="http://schemas.openxmlformats.org/drawingml/2006/spreadsheetDrawing" xmlns:pic="http://schemas.openxmlformats.org/drawingml/2006/picture" xmlns:dgm="http://schemas.openxmlformats.org/drawingml/2006/diagram" xmlns:c14="http://schemas.microsoft.com/office/drawing/2007/8/2/chart" xmlns:cdr="http://schemas.openxmlformats.org/drawingml/2006/chartDrawing" xmlns:wne="http://schemas.microsoft.com/office/word/2006/wordml" xmlns:sl="http://schemas.openxmlformats.org/schemaLibrary/2006/main" xmlns:mc="http://schemas.openxmlformats.org/markup-compatibility/2006" xmlns:wp14="http://schemas.microsoft.com/office/word/2010/wordprocessingDrawing" xmlns:wp="http://schemas.openxmlformats.org/drawingml/2006/wordprocessingDrawing" xmlns:m="http://schemas.openxmlformats.org/officeDocument/2006/math" xmlns:w14="http://schemas.microsoft.com/office/word/2010/wordml" xmlns:w15="http://schemas.microsoft.com/office/word/2012/wordml" xmlns:w="http://schemas.openxmlformats.org/wordprocessingml/2006/main">
+    <c:showDLblsOverMax val="0"/>
+    <c:extLst xmlns:w="http://schemas.openxmlformats.org/wordprocessingml/2006/main" xmlns:w15="http://schemas.microsoft.com/office/word/2012/wordml" xmlns:w14="http://schemas.microsoft.com/office/word/2010/wordml" xmlns:m="http://schemas.openxmlformats.org/officeDocument/2006/math" xmlns:wp="http://schemas.openxmlformats.org/drawingml/2006/wordprocessingDrawing" xmlns:wp14="http://schemas.microsoft.com/office/word/2010/wordprocessingDrawing" xmlns:mc="http://schemas.openxmlformats.org/markup-compatibility/2006" xmlns:sl="http://schemas.openxmlformats.org/schemaLibrary/2006/main" xmlns:wne="http://schemas.microsoft.com/office/word/2006/wordml" xmlns:cdr="http://schemas.openxmlformats.org/drawingml/2006/chartDrawing" xmlns:c14="http://schemas.microsoft.com/office/drawing/2007/8/2/chart" xmlns:dgm="http://schemas.openxmlformats.org/drawingml/2006/diagram" xmlns:pic="http://schemas.openxmlformats.org/drawingml/2006/picture" xmlns:xdr="http://schemas.openxmlformats.org/drawingml/2006/spreadsheetDrawing" xmlns:dsp="http://schemas.microsoft.com/office/drawing/2008/diagram" xmlns:xvml="urn:schemas-microsoft-com:office:excel" xmlns:o="urn:schemas-microsoft-com:office:office" xmlns:v="urn:schemas-microsoft-com:vml" xmlns:w10="urn:schemas-microsoft-com:office:word" xmlns:pvml="urn:schemas-microsoft-com:office:powerpoint" xmlns:cppr="http://schemas.microsoft.com/office/2006/coverPageProps" xmlns:odx="http://opendope.org/xpaths" xmlns:odc="http://opendope.org/conditions" xmlns:odq="http://opendope.org/questions" xmlns:oda="http://opendope.org/answers" xmlns:odi="http://opendope.org/components" xmlns:odgm="http://opendope.org/SmartArt/DataHierarchy" xmlns:b="http://schemas.openxmlformats.org/officeDocument/2006/bibliography" xmlns:wps="http://schemas.microsoft.com/office/word/2010/wordprocessingShape" xmlns:w16se="http://schemas.microsoft.com/office/word/2015/wordml/symex" xmlns:w16cid="http://schemas.microsoft.com/office/word/2016/wordml/cid" xmlns:wetp="http://schemas.microsoft.com/office/webextensions/taskpanes/2010/11" xmlns:we="http://schemas.microsoft.com/office/webextensions/webextension/2010/11" xmlns:comp="http://schemas.openxmlformats.org/drawingml/2006/compatibility" xmlns:lc="http://schemas.openxmlformats.org/drawingml/2006/lockedCanvas">
       <c:ext xmlns:c16r3="http://schemas.microsoft.com/office/drawing/2017/03/chart" uri="{56B9EC1D-385E-4148-901F-78D8002777C0}">
         <c16r3:dataDisplayOptions16>
           <c16r3:dispNaAsBlank val="1"/>
         </c16r3:dataDisplayOptions16>
       </c:ext>
     </c:extLst>
-    <c:showDLblsOverMax val="0"/>
   </c:chart>
   <c:spPr>
     <a:noFill/>
@@ -1649,7 +1649,7 @@
                 </a:outerShdw>
               </a:effectLst>
             </c:spPr>
-            <c:extLst xmlns:w="http://schemas.openxmlformats.org/wordprocessingml/2006/main" xmlns:w15="http://schemas.microsoft.com/office/word/2012/wordml" xmlns:w14="http://schemas.microsoft.com/office/word/2010/wordml" xmlns:m="http://schemas.openxmlformats.org/officeDocument/2006/math" xmlns:wp="http://schemas.openxmlformats.org/drawingml/2006/wordprocessingDrawing" xmlns:wp14="http://schemas.microsoft.com/office/word/2010/wordprocessingDrawing" xmlns:mc="http://schemas.openxmlformats.org/markup-compatibility/2006" xmlns:sl="http://schemas.openxmlformats.org/schemaLibrary/2006/main" xmlns:wne="http://schemas.microsoft.com/office/word/2006/wordml" xmlns:cdr="http://schemas.openxmlformats.org/drawingml/2006/chartDrawing" xmlns:c14="http://schemas.microsoft.com/office/drawing/2007/8/2/chart" xmlns:dgm="http://schemas.openxmlformats.org/drawingml/2006/diagram" xmlns:pic="http://schemas.openxmlformats.org/drawingml/2006/picture" xmlns:xdr="http://schemas.openxmlformats.org/drawingml/2006/spreadsheetDrawing" xmlns:dsp="http://schemas.microsoft.com/office/drawing/2008/diagram" xmlns:xvml="urn:schemas-microsoft-com:office:excel" xmlns:o="urn:schemas-microsoft-com:office:office" xmlns:v="urn:schemas-microsoft-com:vml" xmlns:w10="urn:schemas-microsoft-com:office:word" xmlns:pvml="urn:schemas-microsoft-com:office:powerpoint" xmlns:cppr="http://schemas.microsoft.com/office/2006/coverPageProps" xmlns:odx="http://opendope.org/xpaths" xmlns:odc="http://opendope.org/conditions" xmlns:odq="http://opendope.org/questions" xmlns:oda="http://opendope.org/answers" xmlns:odi="http://opendope.org/components" xmlns:odgm="http://opendope.org/SmartArt/DataHierarchy" xmlns:b="http://schemas.openxmlformats.org/officeDocument/2006/bibliography" xmlns:wps="http://schemas.microsoft.com/office/word/2010/wordprocessingShape" xmlns:w16se="http://schemas.microsoft.com/office/word/2015/wordml/symex" xmlns:w16cid="http://schemas.microsoft.com/office/word/2016/wordml/cid" xmlns:wetp="http://schemas.microsoft.com/office/webextensions/taskpanes/2010/11" xmlns:we="http://schemas.microsoft.com/office/webextensions/webextension/2010/11" xmlns:comp="http://schemas.openxmlformats.org/drawingml/2006/compatibility" xmlns:lc="http://schemas.openxmlformats.org/drawingml/2006/lockedCanvas">
+            <c:extLst xmlns:lc="http://schemas.openxmlformats.org/drawingml/2006/lockedCanvas" xmlns:comp="http://schemas.openxmlformats.org/drawingml/2006/compatibility" xmlns:we="http://schemas.microsoft.com/office/webextensions/webextension/2010/11" xmlns:wetp="http://schemas.microsoft.com/office/webextensions/taskpanes/2010/11" xmlns:w16cid="http://schemas.microsoft.com/office/word/2016/wordml/cid" xmlns:w16se="http://schemas.microsoft.com/office/word/2015/wordml/symex" xmlns:wps="http://schemas.microsoft.com/office/word/2010/wordprocessingShape" xmlns:b="http://schemas.openxmlformats.org/officeDocument/2006/bibliography" xmlns:odgm="http://opendope.org/SmartArt/DataHierarchy" xmlns:odi="http://opendope.org/components" xmlns:oda="http://opendope.org/answers" xmlns:odq="http://opendope.org/questions" xmlns:odc="http://opendope.org/conditions" xmlns:odx="http://opendope.org/xpaths" xmlns:cppr="http://schemas.microsoft.com/office/2006/coverPageProps" xmlns:pvml="urn:schemas-microsoft-com:office:powerpoint" xmlns:w10="urn:schemas-microsoft-com:office:word" xmlns:v="urn:schemas-microsoft-com:vml" xmlns:o="urn:schemas-microsoft-com:office:office" xmlns:xvml="urn:schemas-microsoft-com:office:excel" xmlns:dsp="http://schemas.microsoft.com/office/drawing/2008/diagram" xmlns:xdr="http://schemas.openxmlformats.org/drawingml/2006/spreadsheetDrawing" xmlns:pic="http://schemas.openxmlformats.org/drawingml/2006/picture" xmlns:dgm="http://schemas.openxmlformats.org/drawingml/2006/diagram" xmlns:c14="http://schemas.microsoft.com/office/drawing/2007/8/2/chart" xmlns:cdr="http://schemas.openxmlformats.org/drawingml/2006/chartDrawing" xmlns:wne="http://schemas.microsoft.com/office/word/2006/wordml" xmlns:sl="http://schemas.openxmlformats.org/schemaLibrary/2006/main" xmlns:mc="http://schemas.openxmlformats.org/markup-compatibility/2006" xmlns:wp14="http://schemas.microsoft.com/office/word/2010/wordprocessingDrawing" xmlns:wp="http://schemas.openxmlformats.org/drawingml/2006/wordprocessingDrawing" xmlns:m="http://schemas.openxmlformats.org/officeDocument/2006/math" xmlns:w14="http://schemas.microsoft.com/office/word/2010/wordml" xmlns:w15="http://schemas.microsoft.com/office/word/2012/wordml" xmlns:w="http://schemas.openxmlformats.org/wordprocessingml/2006/main">
               <c:ext xmlns:c16="http://schemas.microsoft.com/office/drawing/2014/chart" uri="{C3380CC4-5D6E-409C-BE32-E72D297353CC}">
                 <c16:uniqueId val="{00000001-6147-E74A-AA7B-5531F0E4EE0C}"/>
               </c:ext>
@@ -1685,7 +1685,7 @@
                   <c:v>53.191489361702125</c:v>
                 </c:pt>
                 <c:pt idx="1">
-                  <c:v>34.86590038314176</c:v>
+                  <c:v>34.865900383141764</c:v>
                 </c:pt>
                 <c:pt idx="2">
                   <c:v>48.559670781893004</c:v>
@@ -1696,7 +1696,7 @@
               </c:numCache>
             </c:numRef>
           </c:val>
-          <c:extLst xmlns:w="http://schemas.openxmlformats.org/wordprocessingml/2006/main" xmlns:w15="http://schemas.microsoft.com/office/word/2012/wordml" xmlns:w14="http://schemas.microsoft.com/office/word/2010/wordml" xmlns:m="http://schemas.openxmlformats.org/officeDocument/2006/math" xmlns:wp="http://schemas.openxmlformats.org/drawingml/2006/wordprocessingDrawing" xmlns:wp14="http://schemas.microsoft.com/office/word/2010/wordprocessingDrawing" xmlns:mc="http://schemas.openxmlformats.org/markup-compatibility/2006" xmlns:sl="http://schemas.openxmlformats.org/schemaLibrary/2006/main" xmlns:wne="http://schemas.microsoft.com/office/word/2006/wordml" xmlns:cdr="http://schemas.openxmlformats.org/drawingml/2006/chartDrawing" xmlns:c14="http://schemas.microsoft.com/office/drawing/2007/8/2/chart" xmlns:dgm="http://schemas.openxmlformats.org/drawingml/2006/diagram" xmlns:pic="http://schemas.openxmlformats.org/drawingml/2006/picture" xmlns:xdr="http://schemas.openxmlformats.org/drawingml/2006/spreadsheetDrawing" xmlns:dsp="http://schemas.microsoft.com/office/drawing/2008/diagram" xmlns:xvml="urn:schemas-microsoft-com:office:excel" xmlns:o="urn:schemas-microsoft-com:office:office" xmlns:v="urn:schemas-microsoft-com:vml" xmlns:w10="urn:schemas-microsoft-com:office:word" xmlns:pvml="urn:schemas-microsoft-com:office:powerpoint" xmlns:cppr="http://schemas.microsoft.com/office/2006/coverPageProps" xmlns:odx="http://opendope.org/xpaths" xmlns:odc="http://opendope.org/conditions" xmlns:odq="http://opendope.org/questions" xmlns:oda="http://opendope.org/answers" xmlns:odi="http://opendope.org/components" xmlns:odgm="http://opendope.org/SmartArt/DataHierarchy" xmlns:b="http://schemas.openxmlformats.org/officeDocument/2006/bibliography" xmlns:wps="http://schemas.microsoft.com/office/word/2010/wordprocessingShape" xmlns:w16se="http://schemas.microsoft.com/office/word/2015/wordml/symex" xmlns:w16cid="http://schemas.microsoft.com/office/word/2016/wordml/cid" xmlns:wetp="http://schemas.microsoft.com/office/webextensions/taskpanes/2010/11" xmlns:we="http://schemas.microsoft.com/office/webextensions/webextension/2010/11" xmlns:comp="http://schemas.openxmlformats.org/drawingml/2006/compatibility" xmlns:lc="http://schemas.openxmlformats.org/drawingml/2006/lockedCanvas">
+          <c:extLst xmlns:lc="http://schemas.openxmlformats.org/drawingml/2006/lockedCanvas" xmlns:comp="http://schemas.openxmlformats.org/drawingml/2006/compatibility" xmlns:we="http://schemas.microsoft.com/office/webextensions/webextension/2010/11" xmlns:wetp="http://schemas.microsoft.com/office/webextensions/taskpanes/2010/11" xmlns:w16cid="http://schemas.microsoft.com/office/word/2016/wordml/cid" xmlns:w16se="http://schemas.microsoft.com/office/word/2015/wordml/symex" xmlns:wps="http://schemas.microsoft.com/office/word/2010/wordprocessingShape" xmlns:b="http://schemas.openxmlformats.org/officeDocument/2006/bibliography" xmlns:odgm="http://opendope.org/SmartArt/DataHierarchy" xmlns:odi="http://opendope.org/components" xmlns:oda="http://opendope.org/answers" xmlns:odq="http://opendope.org/questions" xmlns:odc="http://opendope.org/conditions" xmlns:odx="http://opendope.org/xpaths" xmlns:cppr="http://schemas.microsoft.com/office/2006/coverPageProps" xmlns:pvml="urn:schemas-microsoft-com:office:powerpoint" xmlns:w10="urn:schemas-microsoft-com:office:word" xmlns:v="urn:schemas-microsoft-com:vml" xmlns:o="urn:schemas-microsoft-com:office:office" xmlns:xvml="urn:schemas-microsoft-com:office:excel" xmlns:dsp="http://schemas.microsoft.com/office/drawing/2008/diagram" xmlns:xdr="http://schemas.openxmlformats.org/drawingml/2006/spreadsheetDrawing" xmlns:pic="http://schemas.openxmlformats.org/drawingml/2006/picture" xmlns:dgm="http://schemas.openxmlformats.org/drawingml/2006/diagram" xmlns:c14="http://schemas.microsoft.com/office/drawing/2007/8/2/chart" xmlns:cdr="http://schemas.openxmlformats.org/drawingml/2006/chartDrawing" xmlns:wne="http://schemas.microsoft.com/office/word/2006/wordml" xmlns:sl="http://schemas.openxmlformats.org/schemaLibrary/2006/main" xmlns:mc="http://schemas.openxmlformats.org/markup-compatibility/2006" xmlns:wp14="http://schemas.microsoft.com/office/word/2010/wordprocessingDrawing" xmlns:wp="http://schemas.openxmlformats.org/drawingml/2006/wordprocessingDrawing" xmlns:m="http://schemas.openxmlformats.org/officeDocument/2006/math" xmlns:w14="http://schemas.microsoft.com/office/word/2010/wordml" xmlns:w15="http://schemas.microsoft.com/office/word/2012/wordml" xmlns:w="http://schemas.openxmlformats.org/wordprocessingml/2006/main">
             <c:ext xmlns:c16="http://schemas.microsoft.com/office/drawing/2014/chart" uri="{C3380CC4-5D6E-409C-BE32-E72D297353CC}">
               <c16:uniqueId val="{00000002-6147-E74A-AA7B-5531F0E4EE0C}"/>
             </c:ext>
@@ -1756,13 +1756,13 @@
                   <c:v>2.6595744680851063</c:v>
                 </c:pt>
                 <c:pt idx="1">
-                  <c:v>0.7662835249042146</c:v>
+                  <c:v>0.76628352490421459</c:v>
                 </c:pt>
                 <c:pt idx="2">
-                  <c:v>0.0</c:v>
+                  <c:v>0</c:v>
                 </c:pt>
                 <c:pt idx="3">
-                  <c:v>0.0</c:v>
+                  <c:v>0</c:v>
                 </c:pt>
               </c:numCache>
             </c:numRef>
@@ -1824,13 +1824,13 @@
                 <c:formatCode>General</c:formatCode>
                 <c:ptCount val="4"/>
                 <c:pt idx="0">
-                  <c:v>17.5531914893617</c:v>
+                  <c:v>17.553191489361701</c:v>
                 </c:pt>
                 <c:pt idx="1">
-                  <c:v>58.62068965517241</c:v>
+                  <c:v>58.620689655172413</c:v>
                 </c:pt>
                 <c:pt idx="2">
-                  <c:v>44.03292181069959</c:v>
+                  <c:v>44.032921810699591</c:v>
                 </c:pt>
                 <c:pt idx="3">
                   <c:v>56.578947368421055</c:v>
@@ -1895,7 +1895,7 @@
                 <c:formatCode>General</c:formatCode>
                 <c:ptCount val="4"/>
                 <c:pt idx="0">
-                  <c:v>5.851063829787234</c:v>
+                  <c:v>5.8510638297872344</c:v>
                 </c:pt>
                 <c:pt idx="1">
                   <c:v>1.1494252873563218</c:v>
@@ -1904,7 +1904,7 @@
                   <c:v>1.2345679012345678</c:v>
                 </c:pt>
                 <c:pt idx="3">
-                  <c:v>7.894736842105263</c:v>
+                  <c:v>7.8947368421052628</c:v>
                 </c:pt>
               </c:numCache>
             </c:numRef>
@@ -1971,10 +1971,10 @@
                   <c:v>20.74468085106383</c:v>
                 </c:pt>
                 <c:pt idx="1">
-                  <c:v>4.597701149425287</c:v>
+                  <c:v>4.5977011494252871</c:v>
                 </c:pt>
                 <c:pt idx="2">
-                  <c:v>6.172839506172839</c:v>
+                  <c:v>6.1728395061728394</c:v>
                 </c:pt>
                 <c:pt idx="3">
                   <c:v>2.6315789473684212</c:v>
@@ -2114,14 +2114,14 @@
     </c:plotArea>
     <c:plotVisOnly val="1"/>
     <c:dispBlanksAs val="gap"/>
-    <c:extLst xmlns:w="http://schemas.openxmlformats.org/wordprocessingml/2006/main" xmlns:w15="http://schemas.microsoft.com/office/word/2012/wordml" xmlns:w14="http://schemas.microsoft.com/office/word/2010/wordml" xmlns:m="http://schemas.openxmlformats.org/officeDocument/2006/math" xmlns:wp="http://schemas.openxmlformats.org/drawingml/2006/wordprocessingDrawing" xmlns:wp14="http://schemas.microsoft.com/office/word/2010/wordprocessingDrawing" xmlns:mc="http://schemas.openxmlformats.org/markup-compatibility/2006" xmlns:sl="http://schemas.openxmlformats.org/schemaLibrary/2006/main" xmlns:wne="http://schemas.microsoft.com/office/word/2006/wordml" xmlns:cdr="http://schemas.openxmlformats.org/drawingml/2006/chartDrawing" xmlns:c14="http://schemas.microsoft.com/office/drawing/2007/8/2/chart" xmlns:dgm="http://schemas.openxmlformats.org/drawingml/2006/diagram" xmlns:pic="http://schemas.openxmlformats.org/drawingml/2006/picture" xmlns:xdr="http://schemas.openxmlformats.org/drawingml/2006/spreadsheetDrawing" xmlns:dsp="http://schemas.microsoft.com/office/drawing/2008/diagram" xmlns:xvml="urn:schemas-microsoft-com:office:excel" xmlns:o="urn:schemas-microsoft-com:office:office" xmlns:v="urn:schemas-microsoft-com:vml" xmlns:w10="urn:schemas-microsoft-com:office:word" xmlns:pvml="urn:schemas-microsoft-com:office:powerpoint" xmlns:cppr="http://schemas.microsoft.com/office/2006/coverPageProps" xmlns:odx="http://opendope.org/xpaths" xmlns:odc="http://opendope.org/conditions" xmlns:odq="http://opendope.org/questions" xmlns:oda="http://opendope.org/answers" xmlns:odi="http://opendope.org/components" xmlns:odgm="http://opendope.org/SmartArt/DataHierarchy" xmlns:b="http://schemas.openxmlformats.org/officeDocument/2006/bibliography" xmlns:wps="http://schemas.microsoft.com/office/word/2010/wordprocessingShape" xmlns:w16se="http://schemas.microsoft.com/office/word/2015/wordml/symex" xmlns:w16cid="http://schemas.microsoft.com/office/word/2016/wordml/cid" xmlns:wetp="http://schemas.microsoft.com/office/webextensions/taskpanes/2010/11" xmlns:we="http://schemas.microsoft.com/office/webextensions/webextension/2010/11" xmlns:comp="http://schemas.openxmlformats.org/drawingml/2006/compatibility" xmlns:lc="http://schemas.openxmlformats.org/drawingml/2006/lockedCanvas">
+    <c:showDLblsOverMax val="0"/>
+    <c:extLst xmlns:lc="http://schemas.openxmlformats.org/drawingml/2006/lockedCanvas" xmlns:comp="http://schemas.openxmlformats.org/drawingml/2006/compatibility" xmlns:we="http://schemas.microsoft.com/office/webextensions/webextension/2010/11" xmlns:wetp="http://schemas.microsoft.com/office/webextensions/taskpanes/2010/11" xmlns:w16cid="http://schemas.microsoft.com/office/word/2016/wordml/cid" xmlns:w16se="http://schemas.microsoft.com/office/word/2015/wordml/symex" xmlns:wps="http://schemas.microsoft.com/office/word/2010/wordprocessingShape" xmlns:b="http://schemas.openxmlformats.org/officeDocument/2006/bibliography" xmlns:odgm="http://opendope.org/SmartArt/DataHierarchy" xmlns:odi="http://opendope.org/components" xmlns:oda="http://opendope.org/answers" xmlns:odq="http://opendope.org/questions" xmlns:odc="http://opendope.org/conditions" xmlns:odx="http://opendope.org/xpaths" xmlns:cppr="http://schemas.microsoft.com/office/2006/coverPageProps" xmlns:pvml="urn:schemas-microsoft-com:office:powerpoint" xmlns:w10="urn:schemas-microsoft-com:office:word" xmlns:v="urn:schemas-microsoft-com:vml" xmlns:o="urn:schemas-microsoft-com:office:office" xmlns:xvml="urn:schemas-microsoft-com:office:excel" xmlns:dsp="http://schemas.microsoft.com/office/drawing/2008/diagram" xmlns:xdr="http://schemas.openxmlformats.org/drawingml/2006/spreadsheetDrawing" xmlns:pic="http://schemas.openxmlformats.org/drawingml/2006/picture" xmlns:dgm="http://schemas.openxmlformats.org/drawingml/2006/diagram" xmlns:c14="http://schemas.microsoft.com/office/drawing/2007/8/2/chart" xmlns:cdr="http://schemas.openxmlformats.org/drawingml/2006/chartDrawing" xmlns:wne="http://schemas.microsoft.com/office/word/2006/wordml" xmlns:sl="http://schemas.openxmlformats.org/schemaLibrary/2006/main" xmlns:mc="http://schemas.openxmlformats.org/markup-compatibility/2006" xmlns:wp14="http://schemas.microsoft.com/office/word/2010/wordprocessingDrawing" xmlns:wp="http://schemas.openxmlformats.org/drawingml/2006/wordprocessingDrawing" xmlns:m="http://schemas.openxmlformats.org/officeDocument/2006/math" xmlns:w14="http://schemas.microsoft.com/office/word/2010/wordml" xmlns:w15="http://schemas.microsoft.com/office/word/2012/wordml" xmlns:w="http://schemas.openxmlformats.org/wordprocessingml/2006/main">
       <c:ext xmlns:c16r3="http://schemas.microsoft.com/office/drawing/2017/03/chart" uri="{56B9EC1D-385E-4148-901F-78D8002777C0}">
         <c16r3:dataDisplayOptions16>
           <c16r3:dispNaAsBlank val="1"/>
         </c16r3:dataDisplayOptions16>
       </c:ext>
     </c:extLst>
-    <c:showDLblsOverMax val="0"/>
   </c:chart>
   <c:spPr>
     <a:noFill/>
@@ -2217,7 +2217,7 @@
                 </a:outerShdw>
               </a:effectLst>
             </c:spPr>
-            <c:extLst xmlns:lc="http://schemas.openxmlformats.org/drawingml/2006/lockedCanvas" xmlns:comp="http://schemas.openxmlformats.org/drawingml/2006/compatibility" xmlns:we="http://schemas.microsoft.com/office/webextensions/webextension/2010/11" xmlns:wetp="http://schemas.microsoft.com/office/webextensions/taskpanes/2010/11" xmlns:w16cid="http://schemas.microsoft.com/office/word/2016/wordml/cid" xmlns:w16se="http://schemas.microsoft.com/office/word/2015/wordml/symex" xmlns:wps="http://schemas.microsoft.com/office/word/2010/wordprocessingShape" xmlns:b="http://schemas.openxmlformats.org/officeDocument/2006/bibliography" xmlns:odgm="http://opendope.org/SmartArt/DataHierarchy" xmlns:odi="http://opendope.org/components" xmlns:oda="http://opendope.org/answers" xmlns:odq="http://opendope.org/questions" xmlns:odc="http://opendope.org/conditions" xmlns:odx="http://opendope.org/xpaths" xmlns:cppr="http://schemas.microsoft.com/office/2006/coverPageProps" xmlns:pvml="urn:schemas-microsoft-com:office:powerpoint" xmlns:w10="urn:schemas-microsoft-com:office:word" xmlns:v="urn:schemas-microsoft-com:vml" xmlns:o="urn:schemas-microsoft-com:office:office" xmlns:xvml="urn:schemas-microsoft-com:office:excel" xmlns:dsp="http://schemas.microsoft.com/office/drawing/2008/diagram" xmlns:xdr="http://schemas.openxmlformats.org/drawingml/2006/spreadsheetDrawing" xmlns:pic="http://schemas.openxmlformats.org/drawingml/2006/picture" xmlns:dgm="http://schemas.openxmlformats.org/drawingml/2006/diagram" xmlns:c14="http://schemas.microsoft.com/office/drawing/2007/8/2/chart" xmlns:cdr="http://schemas.openxmlformats.org/drawingml/2006/chartDrawing" xmlns:wne="http://schemas.microsoft.com/office/word/2006/wordml" xmlns:sl="http://schemas.openxmlformats.org/schemaLibrary/2006/main" xmlns:mc="http://schemas.openxmlformats.org/markup-compatibility/2006" xmlns:wp14="http://schemas.microsoft.com/office/word/2010/wordprocessingDrawing" xmlns:wp="http://schemas.openxmlformats.org/drawingml/2006/wordprocessingDrawing" xmlns:m="http://schemas.openxmlformats.org/officeDocument/2006/math" xmlns:w14="http://schemas.microsoft.com/office/word/2010/wordml" xmlns:w15="http://schemas.microsoft.com/office/word/2012/wordml" xmlns:w="http://schemas.openxmlformats.org/wordprocessingml/2006/main">
+            <c:extLst xmlns:w="http://schemas.openxmlformats.org/wordprocessingml/2006/main" xmlns:w15="http://schemas.microsoft.com/office/word/2012/wordml" xmlns:w14="http://schemas.microsoft.com/office/word/2010/wordml" xmlns:m="http://schemas.openxmlformats.org/officeDocument/2006/math" xmlns:wp="http://schemas.openxmlformats.org/drawingml/2006/wordprocessingDrawing" xmlns:wp14="http://schemas.microsoft.com/office/word/2010/wordprocessingDrawing" xmlns:mc="http://schemas.openxmlformats.org/markup-compatibility/2006" xmlns:sl="http://schemas.openxmlformats.org/schemaLibrary/2006/main" xmlns:wne="http://schemas.microsoft.com/office/word/2006/wordml" xmlns:cdr="http://schemas.openxmlformats.org/drawingml/2006/chartDrawing" xmlns:c14="http://schemas.microsoft.com/office/drawing/2007/8/2/chart" xmlns:dgm="http://schemas.openxmlformats.org/drawingml/2006/diagram" xmlns:pic="http://schemas.openxmlformats.org/drawingml/2006/picture" xmlns:xdr="http://schemas.openxmlformats.org/drawingml/2006/spreadsheetDrawing" xmlns:dsp="http://schemas.microsoft.com/office/drawing/2008/diagram" xmlns:xvml="urn:schemas-microsoft-com:office:excel" xmlns:o="urn:schemas-microsoft-com:office:office" xmlns:v="urn:schemas-microsoft-com:vml" xmlns:w10="urn:schemas-microsoft-com:office:word" xmlns:pvml="urn:schemas-microsoft-com:office:powerpoint" xmlns:cppr="http://schemas.microsoft.com/office/2006/coverPageProps" xmlns:odx="http://opendope.org/xpaths" xmlns:odc="http://opendope.org/conditions" xmlns:odq="http://opendope.org/questions" xmlns:oda="http://opendope.org/answers" xmlns:odi="http://opendope.org/components" xmlns:odgm="http://opendope.org/SmartArt/DataHierarchy" xmlns:b="http://schemas.openxmlformats.org/officeDocument/2006/bibliography" xmlns:wps="http://schemas.microsoft.com/office/word/2010/wordprocessingShape" xmlns:w16se="http://schemas.microsoft.com/office/word/2015/wordml/symex" xmlns:w16cid="http://schemas.microsoft.com/office/word/2016/wordml/cid" xmlns:wetp="http://schemas.microsoft.com/office/webextensions/taskpanes/2010/11" xmlns:we="http://schemas.microsoft.com/office/webextensions/webextension/2010/11" xmlns:comp="http://schemas.openxmlformats.org/drawingml/2006/compatibility" xmlns:lc="http://schemas.openxmlformats.org/drawingml/2006/lockedCanvas">
               <c:ext xmlns:c16="http://schemas.microsoft.com/office/drawing/2014/chart" uri="{C3380CC4-5D6E-409C-BE32-E72D297353CC}">
                 <c16:uniqueId val="{00000001-6147-E74A-AA7B-5531F0E4EE0C}"/>
               </c:ext>
@@ -2274,10 +2274,10 @@
                 <c:formatCode>General</c:formatCode>
                 <c:ptCount val="12"/>
                 <c:pt idx="0">
-                  <c:v>44.83985765124555</c:v>
+                  <c:v>44.839857651245552</c:v>
                 </c:pt>
                 <c:pt idx="1">
-                  <c:v>44.60260972716489</c:v>
+                  <c:v>44.602609727164889</c:v>
                 </c:pt>
                 <c:pt idx="2">
                   <c:v>45.195729537366546</c:v>
@@ -2298,13 +2298,13 @@
                   <c:v>46.500593119810205</c:v>
                 </c:pt>
                 <c:pt idx="8">
-                  <c:v>46.8564650059312</c:v>
+                  <c:v>46.856465005931199</c:v>
                 </c:pt>
                 <c:pt idx="9">
-                  <c:v>46.8564650059312</c:v>
+                  <c:v>46.856465005931199</c:v>
                 </c:pt>
                 <c:pt idx="10">
-                  <c:v>46.02609727164887</c:v>
+                  <c:v>46.026097271648872</c:v>
                 </c:pt>
                 <c:pt idx="11">
                   <c:v>46.144721233689204</c:v>
@@ -2312,7 +2312,7 @@
               </c:numCache>
             </c:numRef>
           </c:val>
-          <c:extLst xmlns:lc="http://schemas.openxmlformats.org/drawingml/2006/lockedCanvas" xmlns:comp="http://schemas.openxmlformats.org/drawingml/2006/compatibility" xmlns:we="http://schemas.microsoft.com/office/webextensions/webextension/2010/11" xmlns:wetp="http://schemas.microsoft.com/office/webextensions/taskpanes/2010/11" xmlns:w16cid="http://schemas.microsoft.com/office/word/2016/wordml/cid" xmlns:w16se="http://schemas.microsoft.com/office/word/2015/wordml/symex" xmlns:wps="http://schemas.microsoft.com/office/word/2010/wordprocessingShape" xmlns:b="http://schemas.openxmlformats.org/officeDocument/2006/bibliography" xmlns:odgm="http://opendope.org/SmartArt/DataHierarchy" xmlns:odi="http://opendope.org/components" xmlns:oda="http://opendope.org/answers" xmlns:odq="http://opendope.org/questions" xmlns:odc="http://opendope.org/conditions" xmlns:odx="http://opendope.org/xpaths" xmlns:cppr="http://schemas.microsoft.com/office/2006/coverPageProps" xmlns:pvml="urn:schemas-microsoft-com:office:powerpoint" xmlns:w10="urn:schemas-microsoft-com:office:word" xmlns:v="urn:schemas-microsoft-com:vml" xmlns:o="urn:schemas-microsoft-com:office:office" xmlns:xvml="urn:schemas-microsoft-com:office:excel" xmlns:dsp="http://schemas.microsoft.com/office/drawing/2008/diagram" xmlns:xdr="http://schemas.openxmlformats.org/drawingml/2006/spreadsheetDrawing" xmlns:pic="http://schemas.openxmlformats.org/drawingml/2006/picture" xmlns:dgm="http://schemas.openxmlformats.org/drawingml/2006/diagram" xmlns:c14="http://schemas.microsoft.com/office/drawing/2007/8/2/chart" xmlns:cdr="http://schemas.openxmlformats.org/drawingml/2006/chartDrawing" xmlns:wne="http://schemas.microsoft.com/office/word/2006/wordml" xmlns:sl="http://schemas.openxmlformats.org/schemaLibrary/2006/main" xmlns:mc="http://schemas.openxmlformats.org/markup-compatibility/2006" xmlns:wp14="http://schemas.microsoft.com/office/word/2010/wordprocessingDrawing" xmlns:wp="http://schemas.openxmlformats.org/drawingml/2006/wordprocessingDrawing" xmlns:m="http://schemas.openxmlformats.org/officeDocument/2006/math" xmlns:w14="http://schemas.microsoft.com/office/word/2010/wordml" xmlns:w15="http://schemas.microsoft.com/office/word/2012/wordml" xmlns:w="http://schemas.openxmlformats.org/wordprocessingml/2006/main">
+          <c:extLst xmlns:w="http://schemas.openxmlformats.org/wordprocessingml/2006/main" xmlns:w15="http://schemas.microsoft.com/office/word/2012/wordml" xmlns:w14="http://schemas.microsoft.com/office/word/2010/wordml" xmlns:m="http://schemas.openxmlformats.org/officeDocument/2006/math" xmlns:wp="http://schemas.openxmlformats.org/drawingml/2006/wordprocessingDrawing" xmlns:wp14="http://schemas.microsoft.com/office/word/2010/wordprocessingDrawing" xmlns:mc="http://schemas.openxmlformats.org/markup-compatibility/2006" xmlns:sl="http://schemas.openxmlformats.org/schemaLibrary/2006/main" xmlns:wne="http://schemas.microsoft.com/office/word/2006/wordml" xmlns:cdr="http://schemas.openxmlformats.org/drawingml/2006/chartDrawing" xmlns:c14="http://schemas.microsoft.com/office/drawing/2007/8/2/chart" xmlns:dgm="http://schemas.openxmlformats.org/drawingml/2006/diagram" xmlns:pic="http://schemas.openxmlformats.org/drawingml/2006/picture" xmlns:xdr="http://schemas.openxmlformats.org/drawingml/2006/spreadsheetDrawing" xmlns:dsp="http://schemas.microsoft.com/office/drawing/2008/diagram" xmlns:xvml="urn:schemas-microsoft-com:office:excel" xmlns:o="urn:schemas-microsoft-com:office:office" xmlns:v="urn:schemas-microsoft-com:vml" xmlns:w10="urn:schemas-microsoft-com:office:word" xmlns:pvml="urn:schemas-microsoft-com:office:powerpoint" xmlns:cppr="http://schemas.microsoft.com/office/2006/coverPageProps" xmlns:odx="http://opendope.org/xpaths" xmlns:odc="http://opendope.org/conditions" xmlns:odq="http://opendope.org/questions" xmlns:oda="http://opendope.org/answers" xmlns:odi="http://opendope.org/components" xmlns:odgm="http://opendope.org/SmartArt/DataHierarchy" xmlns:b="http://schemas.openxmlformats.org/officeDocument/2006/bibliography" xmlns:wps="http://schemas.microsoft.com/office/word/2010/wordprocessingShape" xmlns:w16se="http://schemas.microsoft.com/office/word/2015/wordml/symex" xmlns:w16cid="http://schemas.microsoft.com/office/word/2016/wordml/cid" xmlns:wetp="http://schemas.microsoft.com/office/webextensions/taskpanes/2010/11" xmlns:we="http://schemas.microsoft.com/office/webextensions/webextension/2010/11" xmlns:comp="http://schemas.openxmlformats.org/drawingml/2006/compatibility" xmlns:lc="http://schemas.openxmlformats.org/drawingml/2006/lockedCanvas">
             <c:ext xmlns:c16="http://schemas.microsoft.com/office/drawing/2014/chart" uri="{C3380CC4-5D6E-409C-BE32-E72D297353CC}">
               <c16:uniqueId val="{00000002-6147-E74A-AA7B-5531F0E4EE0C}"/>
             </c:ext>
@@ -2396,7 +2396,7 @@
                   <c:v>0.35587188612099646</c:v>
                 </c:pt>
                 <c:pt idx="1">
-                  <c:v>0.4744958481613286</c:v>
+                  <c:v>0.47449584816132861</c:v>
                 </c:pt>
                 <c:pt idx="2">
                   <c:v>0.11862396204033215</c:v>
@@ -2408,25 +2408,25 @@
                   <c:v>1.7793594306049823</c:v>
                 </c:pt>
                 <c:pt idx="5">
-                  <c:v>0.830367734282325</c:v>
+                  <c:v>0.83036773428232502</c:v>
                 </c:pt>
                 <c:pt idx="6">
-                  <c:v>0.7117437722419929</c:v>
+                  <c:v>0.71174377224199292</c:v>
                 </c:pt>
                 <c:pt idx="7">
                   <c:v>2.6097271648873073</c:v>
                 </c:pt>
                 <c:pt idx="8">
-                  <c:v>0.9489916963226572</c:v>
+                  <c:v>0.94899169632265723</c:v>
                 </c:pt>
                 <c:pt idx="9">
                   <c:v>1.0676156583629892</c:v>
                 </c:pt>
                 <c:pt idx="10">
-                  <c:v>0.2372479240806643</c:v>
+                  <c:v>0.23724792408066431</c:v>
                 </c:pt>
                 <c:pt idx="11">
-                  <c:v>0.9489916963226572</c:v>
+                  <c:v>0.94899169632265723</c:v>
                 </c:pt>
               </c:numCache>
             </c:numRef>
@@ -2521,10 +2521,10 @@
                   <c:v>36.29893238434164</c:v>
                 </c:pt>
                 <c:pt idx="3">
-                  <c:v>38.90865954922894</c:v>
+                  <c:v>38.908659549228943</c:v>
                 </c:pt>
                 <c:pt idx="4">
-                  <c:v>37.72241992882562</c:v>
+                  <c:v>37.722419928825623</c:v>
                 </c:pt>
                 <c:pt idx="5">
                   <c:v>41.755634638196916</c:v>
@@ -2533,19 +2533,19 @@
                   <c:v>41.755634638196916</c:v>
                 </c:pt>
                 <c:pt idx="7">
-                  <c:v>37.72241992882562</c:v>
+                  <c:v>37.722419928825623</c:v>
                 </c:pt>
                 <c:pt idx="8">
-                  <c:v>42.94187425860024</c:v>
+                  <c:v>42.941874258600237</c:v>
                 </c:pt>
                 <c:pt idx="9">
                   <c:v>42.823250296559905</c:v>
                 </c:pt>
                 <c:pt idx="10">
-                  <c:v>43.77224199288256</c:v>
+                  <c:v>43.772241992882563</c:v>
                 </c:pt>
                 <c:pt idx="11">
-                  <c:v>43.65361803084223</c:v>
+                  <c:v>43.653618030842232</c:v>
                 </c:pt>
               </c:numCache>
             </c:numRef>
@@ -2631,34 +2631,34 @@
                 <c:formatCode>General</c:formatCode>
                 <c:ptCount val="12"/>
                 <c:pt idx="0">
-                  <c:v>0.5931198102016607</c:v>
+                  <c:v>0.59311981020166071</c:v>
                 </c:pt>
                 <c:pt idx="1">
                   <c:v>0.35587188612099646</c:v>
                 </c:pt>
                 <c:pt idx="2">
-                  <c:v>2.965599051008304</c:v>
+                  <c:v>2.9655990510083039</c:v>
                 </c:pt>
                 <c:pt idx="3">
                   <c:v>1.66073546856465</c:v>
                 </c:pt>
                 <c:pt idx="4">
-                  <c:v>3.3214709371293</c:v>
+                  <c:v>3.3214709371293001</c:v>
                 </c:pt>
                 <c:pt idx="5">
                   <c:v>1.0676156583629892</c:v>
                 </c:pt>
                 <c:pt idx="6">
-                  <c:v>0.9489916963226572</c:v>
+                  <c:v>0.94899169632265723</c:v>
                 </c:pt>
                 <c:pt idx="7">
-                  <c:v>4.507710557532621</c:v>
+                  <c:v>4.5077105575326213</c:v>
                 </c:pt>
                 <c:pt idx="8">
-                  <c:v>0.830367734282325</c:v>
+                  <c:v>0.83036773428232502</c:v>
                 </c:pt>
                 <c:pt idx="9">
-                  <c:v>0.7117437722419929</c:v>
+                  <c:v>0.71174377224199292</c:v>
                 </c:pt>
                 <c:pt idx="10">
                   <c:v>1.66073546856465</c:v>
@@ -2767,25 +2767,25 @@
                   <c:v>10.794780545670225</c:v>
                 </c:pt>
                 <c:pt idx="5">
-                  <c:v>9.9644128113879</c:v>
+                  <c:v>9.9644128113879002</c:v>
                 </c:pt>
                 <c:pt idx="6">
                   <c:v>10.201660735468565</c:v>
                 </c:pt>
                 <c:pt idx="7">
-                  <c:v>8.659549228944247</c:v>
+                  <c:v>8.6595492289442468</c:v>
                 </c:pt>
                 <c:pt idx="8">
-                  <c:v>8.422301304863582</c:v>
+                  <c:v>8.4223013048635824</c:v>
                 </c:pt>
                 <c:pt idx="9">
-                  <c:v>8.540925266903914</c:v>
+                  <c:v>8.5409252669039137</c:v>
                 </c:pt>
                 <c:pt idx="10">
-                  <c:v>8.303677342823251</c:v>
+                  <c:v>8.3036773428232511</c:v>
                 </c:pt>
                 <c:pt idx="11">
-                  <c:v>7.829181494661921</c:v>
+                  <c:v>7.8291814946619214</c:v>
                 </c:pt>
               </c:numCache>
             </c:numRef>
@@ -2922,14 +2922,14 @@
     </c:plotArea>
     <c:plotVisOnly val="1"/>
     <c:dispBlanksAs val="gap"/>
-    <c:extLst xmlns:lc="http://schemas.openxmlformats.org/drawingml/2006/lockedCanvas" xmlns:comp="http://schemas.openxmlformats.org/drawingml/2006/compatibility" xmlns:we="http://schemas.microsoft.com/office/webextensions/webextension/2010/11" xmlns:wetp="http://schemas.microsoft.com/office/webextensions/taskpanes/2010/11" xmlns:w16cid="http://schemas.microsoft.com/office/word/2016/wordml/cid" xmlns:w16se="http://schemas.microsoft.com/office/word/2015/wordml/symex" xmlns:wps="http://schemas.microsoft.com/office/word/2010/wordprocessingShape" xmlns:b="http://schemas.openxmlformats.org/officeDocument/2006/bibliography" xmlns:odgm="http://opendope.org/SmartArt/DataHierarchy" xmlns:odi="http://opendope.org/components" xmlns:oda="http://opendope.org/answers" xmlns:odq="http://opendope.org/questions" xmlns:odc="http://opendope.org/conditions" xmlns:odx="http://opendope.org/xpaths" xmlns:cppr="http://schemas.microsoft.com/office/2006/coverPageProps" xmlns:pvml="urn:schemas-microsoft-com:office:powerpoint" xmlns:w10="urn:schemas-microsoft-com:office:word" xmlns:v="urn:schemas-microsoft-com:vml" xmlns:o="urn:schemas-microsoft-com:office:office" xmlns:xvml="urn:schemas-microsoft-com:office:excel" xmlns:dsp="http://schemas.microsoft.com/office/drawing/2008/diagram" xmlns:xdr="http://schemas.openxmlformats.org/drawingml/2006/spreadsheetDrawing" xmlns:pic="http://schemas.openxmlformats.org/drawingml/2006/picture" xmlns:dgm="http://schemas.openxmlformats.org/drawingml/2006/diagram" xmlns:c14="http://schemas.microsoft.com/office/drawing/2007/8/2/chart" xmlns:cdr="http://schemas.openxmlformats.org/drawingml/2006/chartDrawing" xmlns:wne="http://schemas.microsoft.com/office/word/2006/wordml" xmlns:sl="http://schemas.openxmlformats.org/schemaLibrary/2006/main" xmlns:mc="http://schemas.openxmlformats.org/markup-compatibility/2006" xmlns:wp14="http://schemas.microsoft.com/office/word/2010/wordprocessingDrawing" xmlns:wp="http://schemas.openxmlformats.org/drawingml/2006/wordprocessingDrawing" xmlns:m="http://schemas.openxmlformats.org/officeDocument/2006/math" xmlns:w14="http://schemas.microsoft.com/office/word/2010/wordml" xmlns:w15="http://schemas.microsoft.com/office/word/2012/wordml" xmlns:w="http://schemas.openxmlformats.org/wordprocessingml/2006/main">
+    <c:showDLblsOverMax val="0"/>
+    <c:extLst xmlns:w="http://schemas.openxmlformats.org/wordprocessingml/2006/main" xmlns:w15="http://schemas.microsoft.com/office/word/2012/wordml" xmlns:w14="http://schemas.microsoft.com/office/word/2010/wordml" xmlns:m="http://schemas.openxmlformats.org/officeDocument/2006/math" xmlns:wp="http://schemas.openxmlformats.org/drawingml/2006/wordprocessingDrawing" xmlns:wp14="http://schemas.microsoft.com/office/word/2010/wordprocessingDrawing" xmlns:mc="http://schemas.openxmlformats.org/markup-compatibility/2006" xmlns:sl="http://schemas.openxmlformats.org/schemaLibrary/2006/main" xmlns:wne="http://schemas.microsoft.com/office/word/2006/wordml" xmlns:cdr="http://schemas.openxmlformats.org/drawingml/2006/chartDrawing" xmlns:c14="http://schemas.microsoft.com/office/drawing/2007/8/2/chart" xmlns:dgm="http://schemas.openxmlformats.org/drawingml/2006/diagram" xmlns:pic="http://schemas.openxmlformats.org/drawingml/2006/picture" xmlns:xdr="http://schemas.openxmlformats.org/drawingml/2006/spreadsheetDrawing" xmlns:dsp="http://schemas.microsoft.com/office/drawing/2008/diagram" xmlns:xvml="urn:schemas-microsoft-com:office:excel" xmlns:o="urn:schemas-microsoft-com:office:office" xmlns:v="urn:schemas-microsoft-com:vml" xmlns:w10="urn:schemas-microsoft-com:office:word" xmlns:pvml="urn:schemas-microsoft-com:office:powerpoint" xmlns:cppr="http://schemas.microsoft.com/office/2006/coverPageProps" xmlns:odx="http://opendope.org/xpaths" xmlns:odc="http://opendope.org/conditions" xmlns:odq="http://opendope.org/questions" xmlns:oda="http://opendope.org/answers" xmlns:odi="http://opendope.org/components" xmlns:odgm="http://opendope.org/SmartArt/DataHierarchy" xmlns:b="http://schemas.openxmlformats.org/officeDocument/2006/bibliography" xmlns:wps="http://schemas.microsoft.com/office/word/2010/wordprocessingShape" xmlns:w16se="http://schemas.microsoft.com/office/word/2015/wordml/symex" xmlns:w16cid="http://schemas.microsoft.com/office/word/2016/wordml/cid" xmlns:wetp="http://schemas.microsoft.com/office/webextensions/taskpanes/2010/11" xmlns:we="http://schemas.microsoft.com/office/webextensions/webextension/2010/11" xmlns:comp="http://schemas.openxmlformats.org/drawingml/2006/compatibility" xmlns:lc="http://schemas.openxmlformats.org/drawingml/2006/lockedCanvas">
       <c:ext xmlns:c16r3="http://schemas.microsoft.com/office/drawing/2017/03/chart" uri="{56B9EC1D-385E-4148-901F-78D8002777C0}">
         <c16r3:dataDisplayOptions16>
           <c16r3:dispNaAsBlank val="1"/>
         </c16r3:dataDisplayOptions16>
       </c:ext>
     </c:extLst>
-    <c:showDLblsOverMax val="0"/>
   </c:chart>
   <c:spPr>
     <a:noFill/>
@@ -3025,7 +3025,7 @@
                 </a:outerShdw>
               </a:effectLst>
             </c:spPr>
-            <c:extLst xmlns:lc="http://schemas.openxmlformats.org/drawingml/2006/lockedCanvas" xmlns:comp="http://schemas.openxmlformats.org/drawingml/2006/compatibility" xmlns:we="http://schemas.microsoft.com/office/webextensions/webextension/2010/11" xmlns:wetp="http://schemas.microsoft.com/office/webextensions/taskpanes/2010/11" xmlns:w16cid="http://schemas.microsoft.com/office/word/2016/wordml/cid" xmlns:w16se="http://schemas.microsoft.com/office/word/2015/wordml/symex" xmlns:wps="http://schemas.microsoft.com/office/word/2010/wordprocessingShape" xmlns:b="http://schemas.openxmlformats.org/officeDocument/2006/bibliography" xmlns:odgm="http://opendope.org/SmartArt/DataHierarchy" xmlns:odi="http://opendope.org/components" xmlns:oda="http://opendope.org/answers" xmlns:odq="http://opendope.org/questions" xmlns:odc="http://opendope.org/conditions" xmlns:odx="http://opendope.org/xpaths" xmlns:cppr="http://schemas.microsoft.com/office/2006/coverPageProps" xmlns:pvml="urn:schemas-microsoft-com:office:powerpoint" xmlns:w10="urn:schemas-microsoft-com:office:word" xmlns:v="urn:schemas-microsoft-com:vml" xmlns:o="urn:schemas-microsoft-com:office:office" xmlns:xvml="urn:schemas-microsoft-com:office:excel" xmlns:dsp="http://schemas.microsoft.com/office/drawing/2008/diagram" xmlns:xdr="http://schemas.openxmlformats.org/drawingml/2006/spreadsheetDrawing" xmlns:pic="http://schemas.openxmlformats.org/drawingml/2006/picture" xmlns:dgm="http://schemas.openxmlformats.org/drawingml/2006/diagram" xmlns:c14="http://schemas.microsoft.com/office/drawing/2007/8/2/chart" xmlns:cdr="http://schemas.openxmlformats.org/drawingml/2006/chartDrawing" xmlns:wne="http://schemas.microsoft.com/office/word/2006/wordml" xmlns:sl="http://schemas.openxmlformats.org/schemaLibrary/2006/main" xmlns:mc="http://schemas.openxmlformats.org/markup-compatibility/2006" xmlns:wp14="http://schemas.microsoft.com/office/word/2010/wordprocessingDrawing" xmlns:wp="http://schemas.openxmlformats.org/drawingml/2006/wordprocessingDrawing" xmlns:m="http://schemas.openxmlformats.org/officeDocument/2006/math" xmlns:w14="http://schemas.microsoft.com/office/word/2010/wordml" xmlns:w15="http://schemas.microsoft.com/office/word/2012/wordml" xmlns:w="http://schemas.openxmlformats.org/wordprocessingml/2006/main">
+            <c:extLst xmlns:w="http://schemas.openxmlformats.org/wordprocessingml/2006/main" xmlns:w15="http://schemas.microsoft.com/office/word/2012/wordml" xmlns:w14="http://schemas.microsoft.com/office/word/2010/wordml" xmlns:m="http://schemas.openxmlformats.org/officeDocument/2006/math" xmlns:wp="http://schemas.openxmlformats.org/drawingml/2006/wordprocessingDrawing" xmlns:wp14="http://schemas.microsoft.com/office/word/2010/wordprocessingDrawing" xmlns:mc="http://schemas.openxmlformats.org/markup-compatibility/2006" xmlns:sl="http://schemas.openxmlformats.org/schemaLibrary/2006/main" xmlns:wne="http://schemas.microsoft.com/office/word/2006/wordml" xmlns:cdr="http://schemas.openxmlformats.org/drawingml/2006/chartDrawing" xmlns:c14="http://schemas.microsoft.com/office/drawing/2007/8/2/chart" xmlns:dgm="http://schemas.openxmlformats.org/drawingml/2006/diagram" xmlns:pic="http://schemas.openxmlformats.org/drawingml/2006/picture" xmlns:xdr="http://schemas.openxmlformats.org/drawingml/2006/spreadsheetDrawing" xmlns:dsp="http://schemas.microsoft.com/office/drawing/2008/diagram" xmlns:xvml="urn:schemas-microsoft-com:office:excel" xmlns:o="urn:schemas-microsoft-com:office:office" xmlns:v="urn:schemas-microsoft-com:vml" xmlns:w10="urn:schemas-microsoft-com:office:word" xmlns:pvml="urn:schemas-microsoft-com:office:powerpoint" xmlns:cppr="http://schemas.microsoft.com/office/2006/coverPageProps" xmlns:odx="http://opendope.org/xpaths" xmlns:odc="http://opendope.org/conditions" xmlns:odq="http://opendope.org/questions" xmlns:oda="http://opendope.org/answers" xmlns:odi="http://opendope.org/components" xmlns:odgm="http://opendope.org/SmartArt/DataHierarchy" xmlns:b="http://schemas.openxmlformats.org/officeDocument/2006/bibliography" xmlns:wps="http://schemas.microsoft.com/office/word/2010/wordprocessingShape" xmlns:w16se="http://schemas.microsoft.com/office/word/2015/wordml/symex" xmlns:w16cid="http://schemas.microsoft.com/office/word/2016/wordml/cid" xmlns:wetp="http://schemas.microsoft.com/office/webextensions/taskpanes/2010/11" xmlns:we="http://schemas.microsoft.com/office/webextensions/webextension/2010/11" xmlns:comp="http://schemas.openxmlformats.org/drawingml/2006/compatibility" xmlns:lc="http://schemas.openxmlformats.org/drawingml/2006/lockedCanvas">
               <c:ext xmlns:c16="http://schemas.microsoft.com/office/drawing/2014/chart" uri="{C3380CC4-5D6E-409C-BE32-E72D297353CC}">
                 <c16:uniqueId val="{00000001-6147-E74A-AA7B-5531F0E4EE0C}"/>
               </c:ext>
@@ -3100,16 +3100,16 @@
                   <c:v>35.526315789473685</c:v>
                 </c:pt>
                 <c:pt idx="6">
-                  <c:v>36.8421052631579</c:v>
+                  <c:v>36.842105263157897</c:v>
                 </c:pt>
                 <c:pt idx="7">
-                  <c:v>38.1578947368421</c:v>
+                  <c:v>38.157894736842103</c:v>
                 </c:pt>
                 <c:pt idx="8">
-                  <c:v>38.1578947368421</c:v>
+                  <c:v>38.157894736842103</c:v>
                 </c:pt>
                 <c:pt idx="9">
-                  <c:v>38.1578947368421</c:v>
+                  <c:v>38.157894736842103</c:v>
                 </c:pt>
                 <c:pt idx="10">
                   <c:v>32.89473684210526</c:v>
@@ -3120,7 +3120,7 @@
               </c:numCache>
             </c:numRef>
           </c:val>
-          <c:extLst xmlns:lc="http://schemas.openxmlformats.org/drawingml/2006/lockedCanvas" xmlns:comp="http://schemas.openxmlformats.org/drawingml/2006/compatibility" xmlns:we="http://schemas.microsoft.com/office/webextensions/webextension/2010/11" xmlns:wetp="http://schemas.microsoft.com/office/webextensions/taskpanes/2010/11" xmlns:w16cid="http://schemas.microsoft.com/office/word/2016/wordml/cid" xmlns:w16se="http://schemas.microsoft.com/office/word/2015/wordml/symex" xmlns:wps="http://schemas.microsoft.com/office/word/2010/wordprocessingShape" xmlns:b="http://schemas.openxmlformats.org/officeDocument/2006/bibliography" xmlns:odgm="http://opendope.org/SmartArt/DataHierarchy" xmlns:odi="http://opendope.org/components" xmlns:oda="http://opendope.org/answers" xmlns:odq="http://opendope.org/questions" xmlns:odc="http://opendope.org/conditions" xmlns:odx="http://opendope.org/xpaths" xmlns:cppr="http://schemas.microsoft.com/office/2006/coverPageProps" xmlns:pvml="urn:schemas-microsoft-com:office:powerpoint" xmlns:w10="urn:schemas-microsoft-com:office:word" xmlns:v="urn:schemas-microsoft-com:vml" xmlns:o="urn:schemas-microsoft-com:office:office" xmlns:xvml="urn:schemas-microsoft-com:office:excel" xmlns:dsp="http://schemas.microsoft.com/office/drawing/2008/diagram" xmlns:xdr="http://schemas.openxmlformats.org/drawingml/2006/spreadsheetDrawing" xmlns:pic="http://schemas.openxmlformats.org/drawingml/2006/picture" xmlns:dgm="http://schemas.openxmlformats.org/drawingml/2006/diagram" xmlns:c14="http://schemas.microsoft.com/office/drawing/2007/8/2/chart" xmlns:cdr="http://schemas.openxmlformats.org/drawingml/2006/chartDrawing" xmlns:wne="http://schemas.microsoft.com/office/word/2006/wordml" xmlns:sl="http://schemas.openxmlformats.org/schemaLibrary/2006/main" xmlns:mc="http://schemas.openxmlformats.org/markup-compatibility/2006" xmlns:wp14="http://schemas.microsoft.com/office/word/2010/wordprocessingDrawing" xmlns:wp="http://schemas.openxmlformats.org/drawingml/2006/wordprocessingDrawing" xmlns:m="http://schemas.openxmlformats.org/officeDocument/2006/math" xmlns:w14="http://schemas.microsoft.com/office/word/2010/wordml" xmlns:w15="http://schemas.microsoft.com/office/word/2012/wordml" xmlns:w="http://schemas.openxmlformats.org/wordprocessingml/2006/main">
+          <c:extLst xmlns:w="http://schemas.openxmlformats.org/wordprocessingml/2006/main" xmlns:w15="http://schemas.microsoft.com/office/word/2012/wordml" xmlns:w14="http://schemas.microsoft.com/office/word/2010/wordml" xmlns:m="http://schemas.openxmlformats.org/officeDocument/2006/math" xmlns:wp="http://schemas.openxmlformats.org/drawingml/2006/wordprocessingDrawing" xmlns:wp14="http://schemas.microsoft.com/office/word/2010/wordprocessingDrawing" xmlns:mc="http://schemas.openxmlformats.org/markup-compatibility/2006" xmlns:sl="http://schemas.openxmlformats.org/schemaLibrary/2006/main" xmlns:wne="http://schemas.microsoft.com/office/word/2006/wordml" xmlns:cdr="http://schemas.openxmlformats.org/drawingml/2006/chartDrawing" xmlns:c14="http://schemas.microsoft.com/office/drawing/2007/8/2/chart" xmlns:dgm="http://schemas.openxmlformats.org/drawingml/2006/diagram" xmlns:pic="http://schemas.openxmlformats.org/drawingml/2006/picture" xmlns:xdr="http://schemas.openxmlformats.org/drawingml/2006/spreadsheetDrawing" xmlns:dsp="http://schemas.microsoft.com/office/drawing/2008/diagram" xmlns:xvml="urn:schemas-microsoft-com:office:excel" xmlns:o="urn:schemas-microsoft-com:office:office" xmlns:v="urn:schemas-microsoft-com:vml" xmlns:w10="urn:schemas-microsoft-com:office:word" xmlns:pvml="urn:schemas-microsoft-com:office:powerpoint" xmlns:cppr="http://schemas.microsoft.com/office/2006/coverPageProps" xmlns:odx="http://opendope.org/xpaths" xmlns:odc="http://opendope.org/conditions" xmlns:odq="http://opendope.org/questions" xmlns:oda="http://opendope.org/answers" xmlns:odi="http://opendope.org/components" xmlns:odgm="http://opendope.org/SmartArt/DataHierarchy" xmlns:b="http://schemas.openxmlformats.org/officeDocument/2006/bibliography" xmlns:wps="http://schemas.microsoft.com/office/word/2010/wordprocessingShape" xmlns:w16se="http://schemas.microsoft.com/office/word/2015/wordml/symex" xmlns:w16cid="http://schemas.microsoft.com/office/word/2016/wordml/cid" xmlns:wetp="http://schemas.microsoft.com/office/webextensions/taskpanes/2010/11" xmlns:we="http://schemas.microsoft.com/office/webextensions/webextension/2010/11" xmlns:comp="http://schemas.openxmlformats.org/drawingml/2006/compatibility" xmlns:lc="http://schemas.openxmlformats.org/drawingml/2006/lockedCanvas">
             <c:ext xmlns:c16="http://schemas.microsoft.com/office/drawing/2014/chart" uri="{C3380CC4-5D6E-409C-BE32-E72D297353CC}">
               <c16:uniqueId val="{00000002-6147-E74A-AA7B-5531F0E4EE0C}"/>
             </c:ext>
@@ -3201,40 +3201,40 @@
                 <c:formatCode>General</c:formatCode>
                 <c:ptCount val="12"/>
                 <c:pt idx="0">
-                  <c:v>0.0</c:v>
+                  <c:v>0</c:v>
                 </c:pt>
                 <c:pt idx="1">
-                  <c:v>0.0</c:v>
+                  <c:v>0</c:v>
                 </c:pt>
                 <c:pt idx="2">
-                  <c:v>0.0</c:v>
+                  <c:v>0</c:v>
                 </c:pt>
                 <c:pt idx="3">
-                  <c:v>0.0</c:v>
+                  <c:v>0</c:v>
                 </c:pt>
                 <c:pt idx="4">
-                  <c:v>0.0</c:v>
+                  <c:v>0</c:v>
                 </c:pt>
                 <c:pt idx="5">
-                  <c:v>0.0</c:v>
+                  <c:v>0</c:v>
                 </c:pt>
                 <c:pt idx="6">
-                  <c:v>0.0</c:v>
+                  <c:v>0</c:v>
                 </c:pt>
                 <c:pt idx="7">
-                  <c:v>0.0</c:v>
+                  <c:v>0</c:v>
                 </c:pt>
                 <c:pt idx="8">
                   <c:v>1.3157894736842106</c:v>
                 </c:pt>
                 <c:pt idx="9">
-                  <c:v>0.0</c:v>
+                  <c:v>0</c:v>
                 </c:pt>
                 <c:pt idx="10">
-                  <c:v>0.0</c:v>
+                  <c:v>0</c:v>
                 </c:pt>
                 <c:pt idx="11">
-                  <c:v>0.0</c:v>
+                  <c:v>0</c:v>
                 </c:pt>
               </c:numCache>
             </c:numRef>
@@ -3320,31 +3320,31 @@
                 <c:formatCode>General</c:formatCode>
                 <c:ptCount val="12"/>
                 <c:pt idx="0">
-                  <c:v>63.1578947368421</c:v>
+                  <c:v>63.157894736842103</c:v>
                 </c:pt>
                 <c:pt idx="1">
-                  <c:v>63.1578947368421</c:v>
+                  <c:v>63.157894736842103</c:v>
                 </c:pt>
                 <c:pt idx="2">
-                  <c:v>63.1578947368421</c:v>
+                  <c:v>63.157894736842103</c:v>
                 </c:pt>
                 <c:pt idx="3">
-                  <c:v>63.1578947368421</c:v>
+                  <c:v>63.157894736842103</c:v>
                 </c:pt>
                 <c:pt idx="4">
-                  <c:v>63.1578947368421</c:v>
+                  <c:v>63.157894736842103</c:v>
                 </c:pt>
                 <c:pt idx="5">
-                  <c:v>63.1578947368421</c:v>
+                  <c:v>63.157894736842103</c:v>
                 </c:pt>
                 <c:pt idx="6">
-                  <c:v>61.8421052631579</c:v>
+                  <c:v>61.842105263157897</c:v>
                 </c:pt>
                 <c:pt idx="7">
                   <c:v>57.89473684210526</c:v>
                 </c:pt>
                 <c:pt idx="8">
-                  <c:v>59.21052631578947</c:v>
+                  <c:v>59.210526315789473</c:v>
                 </c:pt>
                 <c:pt idx="9">
                   <c:v>60.526315789473685</c:v>
@@ -3439,40 +3439,40 @@
                 <c:formatCode>General</c:formatCode>
                 <c:ptCount val="12"/>
                 <c:pt idx="0">
-                  <c:v>0.0</c:v>
+                  <c:v>0</c:v>
                 </c:pt>
                 <c:pt idx="1">
-                  <c:v>0.0</c:v>
+                  <c:v>0</c:v>
                 </c:pt>
                 <c:pt idx="2">
-                  <c:v>0.0</c:v>
+                  <c:v>0</c:v>
                 </c:pt>
                 <c:pt idx="3">
-                  <c:v>0.0</c:v>
+                  <c:v>0</c:v>
                 </c:pt>
                 <c:pt idx="4">
-                  <c:v>0.0</c:v>
+                  <c:v>0</c:v>
                 </c:pt>
                 <c:pt idx="5">
-                  <c:v>0.0</c:v>
+                  <c:v>0</c:v>
                 </c:pt>
                 <c:pt idx="6">
-                  <c:v>0.0</c:v>
+                  <c:v>0</c:v>
                 </c:pt>
                 <c:pt idx="7">
                   <c:v>2.6315789473684212</c:v>
                 </c:pt>
                 <c:pt idx="8">
-                  <c:v>0.0</c:v>
+                  <c:v>0</c:v>
                 </c:pt>
                 <c:pt idx="9">
-                  <c:v>0.0</c:v>
+                  <c:v>0</c:v>
                 </c:pt>
                 <c:pt idx="10">
-                  <c:v>7.894736842105263</c:v>
+                  <c:v>7.8947368421052628</c:v>
                 </c:pt>
                 <c:pt idx="11">
-                  <c:v>0.0</c:v>
+                  <c:v>0</c:v>
                 </c:pt>
               </c:numCache>
             </c:numRef>
@@ -3593,7 +3593,7 @@
                   <c:v>2.6315789473684212</c:v>
                 </c:pt>
                 <c:pt idx="11">
-                  <c:v>0.0</c:v>
+                  <c:v>0</c:v>
                 </c:pt>
               </c:numCache>
             </c:numRef>
@@ -3730,14 +3730,14 @@
     </c:plotArea>
     <c:plotVisOnly val="1"/>
     <c:dispBlanksAs val="gap"/>
-    <c:extLst xmlns:lc="http://schemas.openxmlformats.org/drawingml/2006/lockedCanvas" xmlns:comp="http://schemas.openxmlformats.org/drawingml/2006/compatibility" xmlns:we="http://schemas.microsoft.com/office/webextensions/webextension/2010/11" xmlns:wetp="http://schemas.microsoft.com/office/webextensions/taskpanes/2010/11" xmlns:w16cid="http://schemas.microsoft.com/office/word/2016/wordml/cid" xmlns:w16se="http://schemas.microsoft.com/office/word/2015/wordml/symex" xmlns:wps="http://schemas.microsoft.com/office/word/2010/wordprocessingShape" xmlns:b="http://schemas.openxmlformats.org/officeDocument/2006/bibliography" xmlns:odgm="http://opendope.org/SmartArt/DataHierarchy" xmlns:odi="http://opendope.org/components" xmlns:oda="http://opendope.org/answers" xmlns:odq="http://opendope.org/questions" xmlns:odc="http://opendope.org/conditions" xmlns:odx="http://opendope.org/xpaths" xmlns:cppr="http://schemas.microsoft.com/office/2006/coverPageProps" xmlns:pvml="urn:schemas-microsoft-com:office:powerpoint" xmlns:w10="urn:schemas-microsoft-com:office:word" xmlns:v="urn:schemas-microsoft-com:vml" xmlns:o="urn:schemas-microsoft-com:office:office" xmlns:xvml="urn:schemas-microsoft-com:office:excel" xmlns:dsp="http://schemas.microsoft.com/office/drawing/2008/diagram" xmlns:xdr="http://schemas.openxmlformats.org/drawingml/2006/spreadsheetDrawing" xmlns:pic="http://schemas.openxmlformats.org/drawingml/2006/picture" xmlns:dgm="http://schemas.openxmlformats.org/drawingml/2006/diagram" xmlns:c14="http://schemas.microsoft.com/office/drawing/2007/8/2/chart" xmlns:cdr="http://schemas.openxmlformats.org/drawingml/2006/chartDrawing" xmlns:wne="http://schemas.microsoft.com/office/word/2006/wordml" xmlns:sl="http://schemas.openxmlformats.org/schemaLibrary/2006/main" xmlns:mc="http://schemas.openxmlformats.org/markup-compatibility/2006" xmlns:wp14="http://schemas.microsoft.com/office/word/2010/wordprocessingDrawing" xmlns:wp="http://schemas.openxmlformats.org/drawingml/2006/wordprocessingDrawing" xmlns:m="http://schemas.openxmlformats.org/officeDocument/2006/math" xmlns:w14="http://schemas.microsoft.com/office/word/2010/wordml" xmlns:w15="http://schemas.microsoft.com/office/word/2012/wordml" xmlns:w="http://schemas.openxmlformats.org/wordprocessingml/2006/main">
+    <c:showDLblsOverMax val="0"/>
+    <c:extLst xmlns:w="http://schemas.openxmlformats.org/wordprocessingml/2006/main" xmlns:w15="http://schemas.microsoft.com/office/word/2012/wordml" xmlns:w14="http://schemas.microsoft.com/office/word/2010/wordml" xmlns:m="http://schemas.openxmlformats.org/officeDocument/2006/math" xmlns:wp="http://schemas.openxmlformats.org/drawingml/2006/wordprocessingDrawing" xmlns:wp14="http://schemas.microsoft.com/office/word/2010/wordprocessingDrawing" xmlns:mc="http://schemas.openxmlformats.org/markup-compatibility/2006" xmlns:sl="http://schemas.openxmlformats.org/schemaLibrary/2006/main" xmlns:wne="http://schemas.microsoft.com/office/word/2006/wordml" xmlns:cdr="http://schemas.openxmlformats.org/drawingml/2006/chartDrawing" xmlns:c14="http://schemas.microsoft.com/office/drawing/2007/8/2/chart" xmlns:dgm="http://schemas.openxmlformats.org/drawingml/2006/diagram" xmlns:pic="http://schemas.openxmlformats.org/drawingml/2006/picture" xmlns:xdr="http://schemas.openxmlformats.org/drawingml/2006/spreadsheetDrawing" xmlns:dsp="http://schemas.microsoft.com/office/drawing/2008/diagram" xmlns:xvml="urn:schemas-microsoft-com:office:excel" xmlns:o="urn:schemas-microsoft-com:office:office" xmlns:v="urn:schemas-microsoft-com:vml" xmlns:w10="urn:schemas-microsoft-com:office:word" xmlns:pvml="urn:schemas-microsoft-com:office:powerpoint" xmlns:cppr="http://schemas.microsoft.com/office/2006/coverPageProps" xmlns:odx="http://opendope.org/xpaths" xmlns:odc="http://opendope.org/conditions" xmlns:odq="http://opendope.org/questions" xmlns:oda="http://opendope.org/answers" xmlns:odi="http://opendope.org/components" xmlns:odgm="http://opendope.org/SmartArt/DataHierarchy" xmlns:b="http://schemas.openxmlformats.org/officeDocument/2006/bibliography" xmlns:wps="http://schemas.microsoft.com/office/word/2010/wordprocessingShape" xmlns:w16se="http://schemas.microsoft.com/office/word/2015/wordml/symex" xmlns:w16cid="http://schemas.microsoft.com/office/word/2016/wordml/cid" xmlns:wetp="http://schemas.microsoft.com/office/webextensions/taskpanes/2010/11" xmlns:we="http://schemas.microsoft.com/office/webextensions/webextension/2010/11" xmlns:comp="http://schemas.openxmlformats.org/drawingml/2006/compatibility" xmlns:lc="http://schemas.openxmlformats.org/drawingml/2006/lockedCanvas">
       <c:ext xmlns:c16r3="http://schemas.microsoft.com/office/drawing/2017/03/chart" uri="{56B9EC1D-385E-4148-901F-78D8002777C0}">
         <c16r3:dataDisplayOptions16>
           <c16r3:dispNaAsBlank val="1"/>
         </c16r3:dataDisplayOptions16>
       </c:ext>
     </c:extLst>
-    <c:showDLblsOverMax val="0"/>
   </c:chart>
   <c:spPr>
     <a:noFill/>
@@ -3833,7 +3833,7 @@
                 </a:outerShdw>
               </a:effectLst>
             </c:spPr>
-            <c:extLst xmlns:w="http://schemas.openxmlformats.org/wordprocessingml/2006/main" xmlns:w15="http://schemas.microsoft.com/office/word/2012/wordml" xmlns:w14="http://schemas.microsoft.com/office/word/2010/wordml" xmlns:m="http://schemas.openxmlformats.org/officeDocument/2006/math" xmlns:wp="http://schemas.openxmlformats.org/drawingml/2006/wordprocessingDrawing" xmlns:wp14="http://schemas.microsoft.com/office/word/2010/wordprocessingDrawing" xmlns:mc="http://schemas.openxmlformats.org/markup-compatibility/2006" xmlns:sl="http://schemas.openxmlformats.org/schemaLibrary/2006/main" xmlns:wne="http://schemas.microsoft.com/office/word/2006/wordml" xmlns:cdr="http://schemas.openxmlformats.org/drawingml/2006/chartDrawing" xmlns:c14="http://schemas.microsoft.com/office/drawing/2007/8/2/chart" xmlns:dgm="http://schemas.openxmlformats.org/drawingml/2006/diagram" xmlns:pic="http://schemas.openxmlformats.org/drawingml/2006/picture" xmlns:xdr="http://schemas.openxmlformats.org/drawingml/2006/spreadsheetDrawing" xmlns:dsp="http://schemas.microsoft.com/office/drawing/2008/diagram" xmlns:xvml="urn:schemas-microsoft-com:office:excel" xmlns:o="urn:schemas-microsoft-com:office:office" xmlns:v="urn:schemas-microsoft-com:vml" xmlns:w10="urn:schemas-microsoft-com:office:word" xmlns:pvml="urn:schemas-microsoft-com:office:powerpoint" xmlns:cppr="http://schemas.microsoft.com/office/2006/coverPageProps" xmlns:odx="http://opendope.org/xpaths" xmlns:odc="http://opendope.org/conditions" xmlns:odq="http://opendope.org/questions" xmlns:oda="http://opendope.org/answers" xmlns:odi="http://opendope.org/components" xmlns:odgm="http://opendope.org/SmartArt/DataHierarchy" xmlns:b="http://schemas.openxmlformats.org/officeDocument/2006/bibliography" xmlns:wps="http://schemas.microsoft.com/office/word/2010/wordprocessingShape" xmlns:w16se="http://schemas.microsoft.com/office/word/2015/wordml/symex" xmlns:w16cid="http://schemas.microsoft.com/office/word/2016/wordml/cid" xmlns:wetp="http://schemas.microsoft.com/office/webextensions/taskpanes/2010/11" xmlns:we="http://schemas.microsoft.com/office/webextensions/webextension/2010/11" xmlns:comp="http://schemas.openxmlformats.org/drawingml/2006/compatibility" xmlns:lc="http://schemas.openxmlformats.org/drawingml/2006/lockedCanvas">
+            <c:extLst xmlns:lc="http://schemas.openxmlformats.org/drawingml/2006/lockedCanvas" xmlns:comp="http://schemas.openxmlformats.org/drawingml/2006/compatibility" xmlns:we="http://schemas.microsoft.com/office/webextensions/webextension/2010/11" xmlns:wetp="http://schemas.microsoft.com/office/webextensions/taskpanes/2010/11" xmlns:w16cid="http://schemas.microsoft.com/office/word/2016/wordml/cid" xmlns:w16se="http://schemas.microsoft.com/office/word/2015/wordml/symex" xmlns:wps="http://schemas.microsoft.com/office/word/2010/wordprocessingShape" xmlns:b="http://schemas.openxmlformats.org/officeDocument/2006/bibliography" xmlns:odgm="http://opendope.org/SmartArt/DataHierarchy" xmlns:odi="http://opendope.org/components" xmlns:oda="http://opendope.org/answers" xmlns:odq="http://opendope.org/questions" xmlns:odc="http://opendope.org/conditions" xmlns:odx="http://opendope.org/xpaths" xmlns:cppr="http://schemas.microsoft.com/office/2006/coverPageProps" xmlns:pvml="urn:schemas-microsoft-com:office:powerpoint" xmlns:w10="urn:schemas-microsoft-com:office:word" xmlns:v="urn:schemas-microsoft-com:vml" xmlns:o="urn:schemas-microsoft-com:office:office" xmlns:xvml="urn:schemas-microsoft-com:office:excel" xmlns:dsp="http://schemas.microsoft.com/office/drawing/2008/diagram" xmlns:xdr="http://schemas.openxmlformats.org/drawingml/2006/spreadsheetDrawing" xmlns:pic="http://schemas.openxmlformats.org/drawingml/2006/picture" xmlns:dgm="http://schemas.openxmlformats.org/drawingml/2006/diagram" xmlns:c14="http://schemas.microsoft.com/office/drawing/2007/8/2/chart" xmlns:cdr="http://schemas.openxmlformats.org/drawingml/2006/chartDrawing" xmlns:wne="http://schemas.microsoft.com/office/word/2006/wordml" xmlns:sl="http://schemas.openxmlformats.org/schemaLibrary/2006/main" xmlns:mc="http://schemas.openxmlformats.org/markup-compatibility/2006" xmlns:wp14="http://schemas.microsoft.com/office/word/2010/wordprocessingDrawing" xmlns:wp="http://schemas.openxmlformats.org/drawingml/2006/wordprocessingDrawing" xmlns:m="http://schemas.openxmlformats.org/officeDocument/2006/math" xmlns:w14="http://schemas.microsoft.com/office/word/2010/wordml" xmlns:w15="http://schemas.microsoft.com/office/word/2012/wordml" xmlns:w="http://schemas.openxmlformats.org/wordprocessingml/2006/main">
               <c:ext xmlns:c16="http://schemas.microsoft.com/office/drawing/2014/chart" uri="{C3380CC4-5D6E-409C-BE32-E72D297353CC}">
                 <c16:uniqueId val="{00000001-6147-E74A-AA7B-5531F0E4EE0C}"/>
               </c:ext>
@@ -3893,7 +3893,7 @@
                   <c:v>49.794238683127574</c:v>
                 </c:pt>
                 <c:pt idx="1">
-                  <c:v>48.97119341563786</c:v>
+                  <c:v>48.971193415637863</c:v>
                 </c:pt>
                 <c:pt idx="2">
                   <c:v>49.382716049382715</c:v>
@@ -3917,10 +3917,10 @@
                   <c:v>49.382716049382715</c:v>
                 </c:pt>
                 <c:pt idx="9">
-                  <c:v>48.97119341563786</c:v>
+                  <c:v>48.971193415637863</c:v>
                 </c:pt>
                 <c:pt idx="10">
-                  <c:v>48.97119341563786</c:v>
+                  <c:v>48.971193415637863</c:v>
                 </c:pt>
                 <c:pt idx="11">
                   <c:v>48.559670781893004</c:v>
@@ -3928,7 +3928,7 @@
               </c:numCache>
             </c:numRef>
           </c:val>
-          <c:extLst xmlns:w="http://schemas.openxmlformats.org/wordprocessingml/2006/main" xmlns:w15="http://schemas.microsoft.com/office/word/2012/wordml" xmlns:w14="http://schemas.microsoft.com/office/word/2010/wordml" xmlns:m="http://schemas.openxmlformats.org/officeDocument/2006/math" xmlns:wp="http://schemas.openxmlformats.org/drawingml/2006/wordprocessingDrawing" xmlns:wp14="http://schemas.microsoft.com/office/word/2010/wordprocessingDrawing" xmlns:mc="http://schemas.openxmlformats.org/markup-compatibility/2006" xmlns:sl="http://schemas.openxmlformats.org/schemaLibrary/2006/main" xmlns:wne="http://schemas.microsoft.com/office/word/2006/wordml" xmlns:cdr="http://schemas.openxmlformats.org/drawingml/2006/chartDrawing" xmlns:c14="http://schemas.microsoft.com/office/drawing/2007/8/2/chart" xmlns:dgm="http://schemas.openxmlformats.org/drawingml/2006/diagram" xmlns:pic="http://schemas.openxmlformats.org/drawingml/2006/picture" xmlns:xdr="http://schemas.openxmlformats.org/drawingml/2006/spreadsheetDrawing" xmlns:dsp="http://schemas.microsoft.com/office/drawing/2008/diagram" xmlns:xvml="urn:schemas-microsoft-com:office:excel" xmlns:o="urn:schemas-microsoft-com:office:office" xmlns:v="urn:schemas-microsoft-com:vml" xmlns:w10="urn:schemas-microsoft-com:office:word" xmlns:pvml="urn:schemas-microsoft-com:office:powerpoint" xmlns:cppr="http://schemas.microsoft.com/office/2006/coverPageProps" xmlns:odx="http://opendope.org/xpaths" xmlns:odc="http://opendope.org/conditions" xmlns:odq="http://opendope.org/questions" xmlns:oda="http://opendope.org/answers" xmlns:odi="http://opendope.org/components" xmlns:odgm="http://opendope.org/SmartArt/DataHierarchy" xmlns:b="http://schemas.openxmlformats.org/officeDocument/2006/bibliography" xmlns:wps="http://schemas.microsoft.com/office/word/2010/wordprocessingShape" xmlns:w16se="http://schemas.microsoft.com/office/word/2015/wordml/symex" xmlns:w16cid="http://schemas.microsoft.com/office/word/2016/wordml/cid" xmlns:wetp="http://schemas.microsoft.com/office/webextensions/taskpanes/2010/11" xmlns:we="http://schemas.microsoft.com/office/webextensions/webextension/2010/11" xmlns:comp="http://schemas.openxmlformats.org/drawingml/2006/compatibility" xmlns:lc="http://schemas.openxmlformats.org/drawingml/2006/lockedCanvas">
+          <c:extLst xmlns:lc="http://schemas.openxmlformats.org/drawingml/2006/lockedCanvas" xmlns:comp="http://schemas.openxmlformats.org/drawingml/2006/compatibility" xmlns:we="http://schemas.microsoft.com/office/webextensions/webextension/2010/11" xmlns:wetp="http://schemas.microsoft.com/office/webextensions/taskpanes/2010/11" xmlns:w16cid="http://schemas.microsoft.com/office/word/2016/wordml/cid" xmlns:w16se="http://schemas.microsoft.com/office/word/2015/wordml/symex" xmlns:wps="http://schemas.microsoft.com/office/word/2010/wordprocessingShape" xmlns:b="http://schemas.openxmlformats.org/officeDocument/2006/bibliography" xmlns:odgm="http://opendope.org/SmartArt/DataHierarchy" xmlns:odi="http://opendope.org/components" xmlns:oda="http://opendope.org/answers" xmlns:odq="http://opendope.org/questions" xmlns:odc="http://opendope.org/conditions" xmlns:odx="http://opendope.org/xpaths" xmlns:cppr="http://schemas.microsoft.com/office/2006/coverPageProps" xmlns:pvml="urn:schemas-microsoft-com:office:powerpoint" xmlns:w10="urn:schemas-microsoft-com:office:word" xmlns:v="urn:schemas-microsoft-com:vml" xmlns:o="urn:schemas-microsoft-com:office:office" xmlns:xvml="urn:schemas-microsoft-com:office:excel" xmlns:dsp="http://schemas.microsoft.com/office/drawing/2008/diagram" xmlns:xdr="http://schemas.openxmlformats.org/drawingml/2006/spreadsheetDrawing" xmlns:pic="http://schemas.openxmlformats.org/drawingml/2006/picture" xmlns:dgm="http://schemas.openxmlformats.org/drawingml/2006/diagram" xmlns:c14="http://schemas.microsoft.com/office/drawing/2007/8/2/chart" xmlns:cdr="http://schemas.openxmlformats.org/drawingml/2006/chartDrawing" xmlns:wne="http://schemas.microsoft.com/office/word/2006/wordml" xmlns:sl="http://schemas.openxmlformats.org/schemaLibrary/2006/main" xmlns:mc="http://schemas.openxmlformats.org/markup-compatibility/2006" xmlns:wp14="http://schemas.microsoft.com/office/word/2010/wordprocessingDrawing" xmlns:wp="http://schemas.openxmlformats.org/drawingml/2006/wordprocessingDrawing" xmlns:m="http://schemas.openxmlformats.org/officeDocument/2006/math" xmlns:w14="http://schemas.microsoft.com/office/word/2010/wordml" xmlns:w15="http://schemas.microsoft.com/office/word/2012/wordml" xmlns:w="http://schemas.openxmlformats.org/wordprocessingml/2006/main">
             <c:ext xmlns:c16="http://schemas.microsoft.com/office/drawing/2014/chart" uri="{C3380CC4-5D6E-409C-BE32-E72D297353CC}">
               <c16:uniqueId val="{00000002-6147-E74A-AA7B-5531F0E4EE0C}"/>
             </c:ext>
@@ -4009,40 +4009,40 @@
                 <c:formatCode>General</c:formatCode>
                 <c:ptCount val="12"/>
                 <c:pt idx="0">
-                  <c:v>0.0</c:v>
+                  <c:v>0</c:v>
                 </c:pt>
                 <c:pt idx="1">
-                  <c:v>0.0</c:v>
+                  <c:v>0</c:v>
                 </c:pt>
                 <c:pt idx="2">
-                  <c:v>0.0</c:v>
+                  <c:v>0</c:v>
                 </c:pt>
                 <c:pt idx="3">
-                  <c:v>0.0</c:v>
+                  <c:v>0</c:v>
                 </c:pt>
                 <c:pt idx="4">
-                  <c:v>0.0</c:v>
+                  <c:v>0</c:v>
                 </c:pt>
                 <c:pt idx="5">
-                  <c:v>0.0</c:v>
+                  <c:v>0</c:v>
                 </c:pt>
                 <c:pt idx="6">
-                  <c:v>0.0</c:v>
+                  <c:v>0</c:v>
                 </c:pt>
                 <c:pt idx="7">
                   <c:v>1.2345679012345678</c:v>
                 </c:pt>
                 <c:pt idx="8">
-                  <c:v>0.0</c:v>
+                  <c:v>0</c:v>
                 </c:pt>
                 <c:pt idx="9">
-                  <c:v>0.0</c:v>
+                  <c:v>0</c:v>
                 </c:pt>
                 <c:pt idx="10">
-                  <c:v>0.411522633744856</c:v>
+                  <c:v>0.41152263374485598</c:v>
                 </c:pt>
                 <c:pt idx="11">
-                  <c:v>0.0</c:v>
+                  <c:v>0</c:v>
                 </c:pt>
               </c:numCache>
             </c:numRef>
@@ -4137,31 +4137,31 @@
                   <c:v>40.74074074074074</c:v>
                 </c:pt>
                 <c:pt idx="3">
-                  <c:v>40.32921810699588</c:v>
+                  <c:v>40.329218106995881</c:v>
                 </c:pt>
                 <c:pt idx="4">
-                  <c:v>40.32921810699588</c:v>
+                  <c:v>40.329218106995881</c:v>
                 </c:pt>
                 <c:pt idx="5">
                   <c:v>41.97530864197531</c:v>
                 </c:pt>
                 <c:pt idx="6">
-                  <c:v>42.38683127572016</c:v>
+                  <c:v>42.386831275720162</c:v>
                 </c:pt>
                 <c:pt idx="7">
                   <c:v>39.91769547325103</c:v>
                 </c:pt>
                 <c:pt idx="8">
-                  <c:v>42.38683127572016</c:v>
+                  <c:v>42.386831275720162</c:v>
                 </c:pt>
                 <c:pt idx="9">
-                  <c:v>43.20987654320987</c:v>
+                  <c:v>43.209876543209873</c:v>
                 </c:pt>
                 <c:pt idx="10">
-                  <c:v>44.44444444444444</c:v>
+                  <c:v>44.444444444444443</c:v>
                 </c:pt>
                 <c:pt idx="11">
-                  <c:v>44.8559670781893</c:v>
+                  <c:v>44.855967078189302</c:v>
                 </c:pt>
               </c:numCache>
             </c:numRef>
@@ -4247,40 +4247,40 @@
                 <c:formatCode>General</c:formatCode>
                 <c:ptCount val="12"/>
                 <c:pt idx="0">
-                  <c:v>0.411522633744856</c:v>
+                  <c:v>0.41152263374485598</c:v>
                 </c:pt>
                 <c:pt idx="1">
                   <c:v>1.2345679012345678</c:v>
                 </c:pt>
                 <c:pt idx="2">
-                  <c:v>0.0</c:v>
+                  <c:v>0</c:v>
                 </c:pt>
                 <c:pt idx="3">
-                  <c:v>0.0</c:v>
+                  <c:v>0</c:v>
                 </c:pt>
                 <c:pt idx="4">
-                  <c:v>0.411522633744856</c:v>
+                  <c:v>0.41152263374485598</c:v>
                 </c:pt>
                 <c:pt idx="5">
-                  <c:v>0.411522633744856</c:v>
+                  <c:v>0.41152263374485598</c:v>
                 </c:pt>
                 <c:pt idx="6">
-                  <c:v>0.411522633744856</c:v>
+                  <c:v>0.41152263374485598</c:v>
                 </c:pt>
                 <c:pt idx="7">
-                  <c:v>1.646090534979424</c:v>
+                  <c:v>1.6460905349794239</c:v>
                 </c:pt>
                 <c:pt idx="8">
-                  <c:v>0.823045267489712</c:v>
+                  <c:v>0.82304526748971196</c:v>
                 </c:pt>
                 <c:pt idx="9">
-                  <c:v>0.411522633744856</c:v>
+                  <c:v>0.41152263374485598</c:v>
                 </c:pt>
                 <c:pt idx="10">
-                  <c:v>0.0</c:v>
+                  <c:v>0</c:v>
                 </c:pt>
                 <c:pt idx="11">
-                  <c:v>0.411522633744856</c:v>
+                  <c:v>0.41152263374485598</c:v>
                 </c:pt>
               </c:numCache>
             </c:numRef>
@@ -4368,40 +4368,40 @@
                 <c:formatCode>General</c:formatCode>
                 <c:ptCount val="12"/>
                 <c:pt idx="0">
-                  <c:v>9.876543209876543</c:v>
+                  <c:v>9.8765432098765427</c:v>
                 </c:pt>
                 <c:pt idx="1">
-                  <c:v>9.876543209876543</c:v>
+                  <c:v>9.8765432098765427</c:v>
                 </c:pt>
                 <c:pt idx="2">
-                  <c:v>9.876543209876543</c:v>
+                  <c:v>9.8765432098765427</c:v>
                 </c:pt>
                 <c:pt idx="3">
-                  <c:v>9.876543209876543</c:v>
+                  <c:v>9.8765432098765427</c:v>
                 </c:pt>
                 <c:pt idx="4">
-                  <c:v>9.465020576131687</c:v>
+                  <c:v>9.4650205761316872</c:v>
                 </c:pt>
                 <c:pt idx="5">
-                  <c:v>7.407407407407407</c:v>
+                  <c:v>7.4074074074074074</c:v>
                 </c:pt>
                 <c:pt idx="6">
-                  <c:v>7.407407407407407</c:v>
+                  <c:v>7.4074074074074074</c:v>
                 </c:pt>
                 <c:pt idx="7">
-                  <c:v>7.407407407407407</c:v>
+                  <c:v>7.4074074074074074</c:v>
                 </c:pt>
                 <c:pt idx="8">
-                  <c:v>7.407407407407407</c:v>
+                  <c:v>7.4074074074074074</c:v>
                 </c:pt>
                 <c:pt idx="9">
-                  <c:v>7.407407407407407</c:v>
+                  <c:v>7.4074074074074074</c:v>
                 </c:pt>
                 <c:pt idx="10">
-                  <c:v>6.172839506172839</c:v>
+                  <c:v>6.1728395061728394</c:v>
                 </c:pt>
                 <c:pt idx="11">
-                  <c:v>6.172839506172839</c:v>
+                  <c:v>6.1728395061728394</c:v>
                 </c:pt>
               </c:numCache>
             </c:numRef>
@@ -4538,14 +4538,14 @@
     </c:plotArea>
     <c:plotVisOnly val="1"/>
     <c:dispBlanksAs val="gap"/>
-    <c:extLst xmlns:w="http://schemas.openxmlformats.org/wordprocessingml/2006/main" xmlns:w15="http://schemas.microsoft.com/office/word/2012/wordml" xmlns:w14="http://schemas.microsoft.com/office/word/2010/wordml" xmlns:m="http://schemas.openxmlformats.org/officeDocument/2006/math" xmlns:wp="http://schemas.openxmlformats.org/drawingml/2006/wordprocessingDrawing" xmlns:wp14="http://schemas.microsoft.com/office/word/2010/wordprocessingDrawing" xmlns:mc="http://schemas.openxmlformats.org/markup-compatibility/2006" xmlns:sl="http://schemas.openxmlformats.org/schemaLibrary/2006/main" xmlns:wne="http://schemas.microsoft.com/office/word/2006/wordml" xmlns:cdr="http://schemas.openxmlformats.org/drawingml/2006/chartDrawing" xmlns:c14="http://schemas.microsoft.com/office/drawing/2007/8/2/chart" xmlns:dgm="http://schemas.openxmlformats.org/drawingml/2006/diagram" xmlns:pic="http://schemas.openxmlformats.org/drawingml/2006/picture" xmlns:xdr="http://schemas.openxmlformats.org/drawingml/2006/spreadsheetDrawing" xmlns:dsp="http://schemas.microsoft.com/office/drawing/2008/diagram" xmlns:xvml="urn:schemas-microsoft-com:office:excel" xmlns:o="urn:schemas-microsoft-com:office:office" xmlns:v="urn:schemas-microsoft-com:vml" xmlns:w10="urn:schemas-microsoft-com:office:word" xmlns:pvml="urn:schemas-microsoft-com:office:powerpoint" xmlns:cppr="http://schemas.microsoft.com/office/2006/coverPageProps" xmlns:odx="http://opendope.org/xpaths" xmlns:odc="http://opendope.org/conditions" xmlns:odq="http://opendope.org/questions" xmlns:oda="http://opendope.org/answers" xmlns:odi="http://opendope.org/components" xmlns:odgm="http://opendope.org/SmartArt/DataHierarchy" xmlns:b="http://schemas.openxmlformats.org/officeDocument/2006/bibliography" xmlns:wps="http://schemas.microsoft.com/office/word/2010/wordprocessingShape" xmlns:w16se="http://schemas.microsoft.com/office/word/2015/wordml/symex" xmlns:w16cid="http://schemas.microsoft.com/office/word/2016/wordml/cid" xmlns:wetp="http://schemas.microsoft.com/office/webextensions/taskpanes/2010/11" xmlns:we="http://schemas.microsoft.com/office/webextensions/webextension/2010/11" xmlns:comp="http://schemas.openxmlformats.org/drawingml/2006/compatibility" xmlns:lc="http://schemas.openxmlformats.org/drawingml/2006/lockedCanvas">
+    <c:showDLblsOverMax val="0"/>
+    <c:extLst xmlns:lc="http://schemas.openxmlformats.org/drawingml/2006/lockedCanvas" xmlns:comp="http://schemas.openxmlformats.org/drawingml/2006/compatibility" xmlns:we="http://schemas.microsoft.com/office/webextensions/webextension/2010/11" xmlns:wetp="http://schemas.microsoft.com/office/webextensions/taskpanes/2010/11" xmlns:w16cid="http://schemas.microsoft.com/office/word/2016/wordml/cid" xmlns:w16se="http://schemas.microsoft.com/office/word/2015/wordml/symex" xmlns:wps="http://schemas.microsoft.com/office/word/2010/wordprocessingShape" xmlns:b="http://schemas.openxmlformats.org/officeDocument/2006/bibliography" xmlns:odgm="http://opendope.org/SmartArt/DataHierarchy" xmlns:odi="http://opendope.org/components" xmlns:oda="http://opendope.org/answers" xmlns:odq="http://opendope.org/questions" xmlns:odc="http://opendope.org/conditions" xmlns:odx="http://opendope.org/xpaths" xmlns:cppr="http://schemas.microsoft.com/office/2006/coverPageProps" xmlns:pvml="urn:schemas-microsoft-com:office:powerpoint" xmlns:w10="urn:schemas-microsoft-com:office:word" xmlns:v="urn:schemas-microsoft-com:vml" xmlns:o="urn:schemas-microsoft-com:office:office" xmlns:xvml="urn:schemas-microsoft-com:office:excel" xmlns:dsp="http://schemas.microsoft.com/office/drawing/2008/diagram" xmlns:xdr="http://schemas.openxmlformats.org/drawingml/2006/spreadsheetDrawing" xmlns:pic="http://schemas.openxmlformats.org/drawingml/2006/picture" xmlns:dgm="http://schemas.openxmlformats.org/drawingml/2006/diagram" xmlns:c14="http://schemas.microsoft.com/office/drawing/2007/8/2/chart" xmlns:cdr="http://schemas.openxmlformats.org/drawingml/2006/chartDrawing" xmlns:wne="http://schemas.microsoft.com/office/word/2006/wordml" xmlns:sl="http://schemas.openxmlformats.org/schemaLibrary/2006/main" xmlns:mc="http://schemas.openxmlformats.org/markup-compatibility/2006" xmlns:wp14="http://schemas.microsoft.com/office/word/2010/wordprocessingDrawing" xmlns:wp="http://schemas.openxmlformats.org/drawingml/2006/wordprocessingDrawing" xmlns:m="http://schemas.openxmlformats.org/officeDocument/2006/math" xmlns:w14="http://schemas.microsoft.com/office/word/2010/wordml" xmlns:w15="http://schemas.microsoft.com/office/word/2012/wordml" xmlns:w="http://schemas.openxmlformats.org/wordprocessingml/2006/main">
       <c:ext xmlns:c16r3="http://schemas.microsoft.com/office/drawing/2017/03/chart" uri="{56B9EC1D-385E-4148-901F-78D8002777C0}">
         <c16r3:dataDisplayOptions16>
           <c16r3:dispNaAsBlank val="1"/>
         </c16r3:dataDisplayOptions16>
       </c:ext>
     </c:extLst>
-    <c:showDLblsOverMax val="0"/>
   </c:chart>
   <c:spPr>
     <a:noFill/>
@@ -4641,7 +4641,7 @@
                 </a:outerShdw>
               </a:effectLst>
             </c:spPr>
-            <c:extLst xmlns:w="http://schemas.openxmlformats.org/wordprocessingml/2006/main" xmlns:w15="http://schemas.microsoft.com/office/word/2012/wordml" xmlns:w14="http://schemas.microsoft.com/office/word/2010/wordml" xmlns:m="http://schemas.openxmlformats.org/officeDocument/2006/math" xmlns:wp="http://schemas.openxmlformats.org/drawingml/2006/wordprocessingDrawing" xmlns:wp14="http://schemas.microsoft.com/office/word/2010/wordprocessingDrawing" xmlns:mc="http://schemas.openxmlformats.org/markup-compatibility/2006" xmlns:sl="http://schemas.openxmlformats.org/schemaLibrary/2006/main" xmlns:wne="http://schemas.microsoft.com/office/word/2006/wordml" xmlns:cdr="http://schemas.openxmlformats.org/drawingml/2006/chartDrawing" xmlns:c14="http://schemas.microsoft.com/office/drawing/2007/8/2/chart" xmlns:dgm="http://schemas.openxmlformats.org/drawingml/2006/diagram" xmlns:pic="http://schemas.openxmlformats.org/drawingml/2006/picture" xmlns:xdr="http://schemas.openxmlformats.org/drawingml/2006/spreadsheetDrawing" xmlns:dsp="http://schemas.microsoft.com/office/drawing/2008/diagram" xmlns:xvml="urn:schemas-microsoft-com:office:excel" xmlns:o="urn:schemas-microsoft-com:office:office" xmlns:v="urn:schemas-microsoft-com:vml" xmlns:w10="urn:schemas-microsoft-com:office:word" xmlns:pvml="urn:schemas-microsoft-com:office:powerpoint" xmlns:cppr="http://schemas.microsoft.com/office/2006/coverPageProps" xmlns:odx="http://opendope.org/xpaths" xmlns:odc="http://opendope.org/conditions" xmlns:odq="http://opendope.org/questions" xmlns:oda="http://opendope.org/answers" xmlns:odi="http://opendope.org/components" xmlns:odgm="http://opendope.org/SmartArt/DataHierarchy" xmlns:b="http://schemas.openxmlformats.org/officeDocument/2006/bibliography" xmlns:wps="http://schemas.microsoft.com/office/word/2010/wordprocessingShape" xmlns:w16se="http://schemas.microsoft.com/office/word/2015/wordml/symex" xmlns:w16cid="http://schemas.microsoft.com/office/word/2016/wordml/cid" xmlns:wetp="http://schemas.microsoft.com/office/webextensions/taskpanes/2010/11" xmlns:we="http://schemas.microsoft.com/office/webextensions/webextension/2010/11" xmlns:comp="http://schemas.openxmlformats.org/drawingml/2006/compatibility" xmlns:lc="http://schemas.openxmlformats.org/drawingml/2006/lockedCanvas">
+            <c:extLst xmlns:lc="http://schemas.openxmlformats.org/drawingml/2006/lockedCanvas" xmlns:comp="http://schemas.openxmlformats.org/drawingml/2006/compatibility" xmlns:we="http://schemas.microsoft.com/office/webextensions/webextension/2010/11" xmlns:wetp="http://schemas.microsoft.com/office/webextensions/taskpanes/2010/11" xmlns:w16cid="http://schemas.microsoft.com/office/word/2016/wordml/cid" xmlns:w16se="http://schemas.microsoft.com/office/word/2015/wordml/symex" xmlns:wps="http://schemas.microsoft.com/office/word/2010/wordprocessingShape" xmlns:b="http://schemas.openxmlformats.org/officeDocument/2006/bibliography" xmlns:odgm="http://opendope.org/SmartArt/DataHierarchy" xmlns:odi="http://opendope.org/components" xmlns:oda="http://opendope.org/answers" xmlns:odq="http://opendope.org/questions" xmlns:odc="http://opendope.org/conditions" xmlns:odx="http://opendope.org/xpaths" xmlns:cppr="http://schemas.microsoft.com/office/2006/coverPageProps" xmlns:pvml="urn:schemas-microsoft-com:office:powerpoint" xmlns:w10="urn:schemas-microsoft-com:office:word" xmlns:v="urn:schemas-microsoft-com:vml" xmlns:o="urn:schemas-microsoft-com:office:office" xmlns:xvml="urn:schemas-microsoft-com:office:excel" xmlns:dsp="http://schemas.microsoft.com/office/drawing/2008/diagram" xmlns:xdr="http://schemas.openxmlformats.org/drawingml/2006/spreadsheetDrawing" xmlns:pic="http://schemas.openxmlformats.org/drawingml/2006/picture" xmlns:dgm="http://schemas.openxmlformats.org/drawingml/2006/diagram" xmlns:c14="http://schemas.microsoft.com/office/drawing/2007/8/2/chart" xmlns:cdr="http://schemas.openxmlformats.org/drawingml/2006/chartDrawing" xmlns:wne="http://schemas.microsoft.com/office/word/2006/wordml" xmlns:sl="http://schemas.openxmlformats.org/schemaLibrary/2006/main" xmlns:mc="http://schemas.openxmlformats.org/markup-compatibility/2006" xmlns:wp14="http://schemas.microsoft.com/office/word/2010/wordprocessingDrawing" xmlns:wp="http://schemas.openxmlformats.org/drawingml/2006/wordprocessingDrawing" xmlns:m="http://schemas.openxmlformats.org/officeDocument/2006/math" xmlns:w14="http://schemas.microsoft.com/office/word/2010/wordml" xmlns:w15="http://schemas.microsoft.com/office/word/2012/wordml" xmlns:w="http://schemas.openxmlformats.org/wordprocessingml/2006/main">
               <c:ext xmlns:c16="http://schemas.microsoft.com/office/drawing/2014/chart" uri="{C3380CC4-5D6E-409C-BE32-E72D297353CC}">
                 <c16:uniqueId val="{00000001-6147-E74A-AA7B-5531F0E4EE0C}"/>
               </c:ext>
@@ -4713,30 +4713,30 @@
                   <c:v>34.099616858237546</c:v>
                 </c:pt>
                 <c:pt idx="5">
-                  <c:v>33.71647509578544</c:v>
+                  <c:v>33.716475095785441</c:v>
                 </c:pt>
                 <c:pt idx="6">
-                  <c:v>33.71647509578544</c:v>
+                  <c:v>33.716475095785441</c:v>
                 </c:pt>
                 <c:pt idx="7">
                   <c:v>34.099616858237546</c:v>
                 </c:pt>
                 <c:pt idx="8">
-                  <c:v>34.48275862068966</c:v>
+                  <c:v>34.482758620689658</c:v>
                 </c:pt>
                 <c:pt idx="9">
-                  <c:v>34.86590038314176</c:v>
+                  <c:v>34.865900383141764</c:v>
                 </c:pt>
                 <c:pt idx="10">
-                  <c:v>34.86590038314176</c:v>
+                  <c:v>34.865900383141764</c:v>
                 </c:pt>
                 <c:pt idx="11">
-                  <c:v>34.86590038314176</c:v>
+                  <c:v>34.865900383141764</c:v>
                 </c:pt>
               </c:numCache>
             </c:numRef>
           </c:val>
-          <c:extLst xmlns:w="http://schemas.openxmlformats.org/wordprocessingml/2006/main" xmlns:w15="http://schemas.microsoft.com/office/word/2012/wordml" xmlns:w14="http://schemas.microsoft.com/office/word/2010/wordml" xmlns:m="http://schemas.openxmlformats.org/officeDocument/2006/math" xmlns:wp="http://schemas.openxmlformats.org/drawingml/2006/wordprocessingDrawing" xmlns:wp14="http://schemas.microsoft.com/office/word/2010/wordprocessingDrawing" xmlns:mc="http://schemas.openxmlformats.org/markup-compatibility/2006" xmlns:sl="http://schemas.openxmlformats.org/schemaLibrary/2006/main" xmlns:wne="http://schemas.microsoft.com/office/word/2006/wordml" xmlns:cdr="http://schemas.openxmlformats.org/drawingml/2006/chartDrawing" xmlns:c14="http://schemas.microsoft.com/office/drawing/2007/8/2/chart" xmlns:dgm="http://schemas.openxmlformats.org/drawingml/2006/diagram" xmlns:pic="http://schemas.openxmlformats.org/drawingml/2006/picture" xmlns:xdr="http://schemas.openxmlformats.org/drawingml/2006/spreadsheetDrawing" xmlns:dsp="http://schemas.microsoft.com/office/drawing/2008/diagram" xmlns:xvml="urn:schemas-microsoft-com:office:excel" xmlns:o="urn:schemas-microsoft-com:office:office" xmlns:v="urn:schemas-microsoft-com:vml" xmlns:w10="urn:schemas-microsoft-com:office:word" xmlns:pvml="urn:schemas-microsoft-com:office:powerpoint" xmlns:cppr="http://schemas.microsoft.com/office/2006/coverPageProps" xmlns:odx="http://opendope.org/xpaths" xmlns:odc="http://opendope.org/conditions" xmlns:odq="http://opendope.org/questions" xmlns:oda="http://opendope.org/answers" xmlns:odi="http://opendope.org/components" xmlns:odgm="http://opendope.org/SmartArt/DataHierarchy" xmlns:b="http://schemas.openxmlformats.org/officeDocument/2006/bibliography" xmlns:wps="http://schemas.microsoft.com/office/word/2010/wordprocessingShape" xmlns:w16se="http://schemas.microsoft.com/office/word/2015/wordml/symex" xmlns:w16cid="http://schemas.microsoft.com/office/word/2016/wordml/cid" xmlns:wetp="http://schemas.microsoft.com/office/webextensions/taskpanes/2010/11" xmlns:we="http://schemas.microsoft.com/office/webextensions/webextension/2010/11" xmlns:comp="http://schemas.openxmlformats.org/drawingml/2006/compatibility" xmlns:lc="http://schemas.openxmlformats.org/drawingml/2006/lockedCanvas">
+          <c:extLst xmlns:lc="http://schemas.openxmlformats.org/drawingml/2006/lockedCanvas" xmlns:comp="http://schemas.openxmlformats.org/drawingml/2006/compatibility" xmlns:we="http://schemas.microsoft.com/office/webextensions/webextension/2010/11" xmlns:wetp="http://schemas.microsoft.com/office/webextensions/taskpanes/2010/11" xmlns:w16cid="http://schemas.microsoft.com/office/word/2016/wordml/cid" xmlns:w16se="http://schemas.microsoft.com/office/word/2015/wordml/symex" xmlns:wps="http://schemas.microsoft.com/office/word/2010/wordprocessingShape" xmlns:b="http://schemas.openxmlformats.org/officeDocument/2006/bibliography" xmlns:odgm="http://opendope.org/SmartArt/DataHierarchy" xmlns:odi="http://opendope.org/components" xmlns:oda="http://opendope.org/answers" xmlns:odq="http://opendope.org/questions" xmlns:odc="http://opendope.org/conditions" xmlns:odx="http://opendope.org/xpaths" xmlns:cppr="http://schemas.microsoft.com/office/2006/coverPageProps" xmlns:pvml="urn:schemas-microsoft-com:office:powerpoint" xmlns:w10="urn:schemas-microsoft-com:office:word" xmlns:v="urn:schemas-microsoft-com:vml" xmlns:o="urn:schemas-microsoft-com:office:office" xmlns:xvml="urn:schemas-microsoft-com:office:excel" xmlns:dsp="http://schemas.microsoft.com/office/drawing/2008/diagram" xmlns:xdr="http://schemas.openxmlformats.org/drawingml/2006/spreadsheetDrawing" xmlns:pic="http://schemas.openxmlformats.org/drawingml/2006/picture" xmlns:dgm="http://schemas.openxmlformats.org/drawingml/2006/diagram" xmlns:c14="http://schemas.microsoft.com/office/drawing/2007/8/2/chart" xmlns:cdr="http://schemas.openxmlformats.org/drawingml/2006/chartDrawing" xmlns:wne="http://schemas.microsoft.com/office/word/2006/wordml" xmlns:sl="http://schemas.openxmlformats.org/schemaLibrary/2006/main" xmlns:mc="http://schemas.openxmlformats.org/markup-compatibility/2006" xmlns:wp14="http://schemas.microsoft.com/office/word/2010/wordprocessingDrawing" xmlns:wp="http://schemas.openxmlformats.org/drawingml/2006/wordprocessingDrawing" xmlns:m="http://schemas.openxmlformats.org/officeDocument/2006/math" xmlns:w14="http://schemas.microsoft.com/office/word/2010/wordml" xmlns:w15="http://schemas.microsoft.com/office/word/2012/wordml" xmlns:w="http://schemas.openxmlformats.org/wordprocessingml/2006/main">
             <c:ext xmlns:c16="http://schemas.microsoft.com/office/drawing/2014/chart" uri="{C3380CC4-5D6E-409C-BE32-E72D297353CC}">
               <c16:uniqueId val="{00000002-6147-E74A-AA7B-5531F0E4EE0C}"/>
             </c:ext>
@@ -4817,19 +4817,19 @@
                 <c:formatCode>General</c:formatCode>
                 <c:ptCount val="12"/>
                 <c:pt idx="0">
-                  <c:v>0.7662835249042146</c:v>
+                  <c:v>0.76628352490421459</c:v>
                 </c:pt>
                 <c:pt idx="1">
                   <c:v>1.5325670498084292</c:v>
                 </c:pt>
                 <c:pt idx="2">
-                  <c:v>0.3831417624521073</c:v>
+                  <c:v>0.38314176245210729</c:v>
                 </c:pt>
                 <c:pt idx="3">
                   <c:v>2.2988505747126435</c:v>
                 </c:pt>
                 <c:pt idx="4">
-                  <c:v>4.597701149425287</c:v>
+                  <c:v>4.5977011494252871</c:v>
                 </c:pt>
                 <c:pt idx="5">
                   <c:v>1.1494252873563218</c:v>
@@ -4841,16 +4841,16 @@
                   <c:v>2.2988505747126435</c:v>
                 </c:pt>
                 <c:pt idx="8">
-                  <c:v>0.3831417624521073</c:v>
+                  <c:v>0.38314176245210729</c:v>
                 </c:pt>
                 <c:pt idx="9">
                   <c:v>1.5325670498084292</c:v>
                 </c:pt>
                 <c:pt idx="10">
-                  <c:v>0.3831417624521073</c:v>
+                  <c:v>0.38314176245210729</c:v>
                 </c:pt>
                 <c:pt idx="11">
-                  <c:v>0.3831417624521073</c:v>
+                  <c:v>0.38314176245210729</c:v>
                 </c:pt>
               </c:numCache>
             </c:numRef>
@@ -4936,16 +4936,16 @@
                 <c:formatCode>General</c:formatCode>
                 <c:ptCount val="12"/>
                 <c:pt idx="0">
-                  <c:v>54.02298850574713</c:v>
+                  <c:v>54.022988505747129</c:v>
                 </c:pt>
                 <c:pt idx="1">
                   <c:v>54.406130268199234</c:v>
                 </c:pt>
                 <c:pt idx="2">
-                  <c:v>54.02298850574713</c:v>
+                  <c:v>54.022988505747129</c:v>
                 </c:pt>
                 <c:pt idx="3">
-                  <c:v>52.10727969348659</c:v>
+                  <c:v>52.107279693486589</c:v>
                 </c:pt>
                 <c:pt idx="4">
                   <c:v>45.21072796934866</c:v>
@@ -4954,19 +4954,19 @@
                   <c:v>56.70498084291188</c:v>
                 </c:pt>
                 <c:pt idx="6">
-                  <c:v>56.32183908045977</c:v>
+                  <c:v>56.321839080459768</c:v>
                 </c:pt>
                 <c:pt idx="7">
                   <c:v>52.490421455938694</c:v>
                 </c:pt>
                 <c:pt idx="8">
-                  <c:v>59.00383141762452</c:v>
+                  <c:v>59.003831417624518</c:v>
                 </c:pt>
                 <c:pt idx="9">
                   <c:v>57.47126436781609</c:v>
                 </c:pt>
                 <c:pt idx="10">
-                  <c:v>58.62068965517241</c:v>
+                  <c:v>58.620689655172413</c:v>
                 </c:pt>
                 <c:pt idx="11">
                   <c:v>59.38697318007663</c:v>
@@ -5058,7 +5058,7 @@
                   <c:v>1.1494252873563218</c:v>
                 </c:pt>
                 <c:pt idx="1">
-                  <c:v>0.0</c:v>
+                  <c:v>0</c:v>
                 </c:pt>
                 <c:pt idx="2">
                   <c:v>1.5325670498084292</c:v>
@@ -5067,7 +5067,7 @@
                   <c:v>1.5325670498084292</c:v>
                 </c:pt>
                 <c:pt idx="4">
-                  <c:v>8.045977011494253</c:v>
+                  <c:v>8.0459770114942533</c:v>
                 </c:pt>
                 <c:pt idx="5">
                   <c:v>1.1494252873563218</c:v>
@@ -5076,19 +5076,19 @@
                   <c:v>1.5325670498084292</c:v>
                 </c:pt>
                 <c:pt idx="7">
-                  <c:v>4.597701149425287</c:v>
+                  <c:v>4.5977011494252871</c:v>
                 </c:pt>
                 <c:pt idx="8">
-                  <c:v>0.3831417624521073</c:v>
+                  <c:v>0.38314176245210729</c:v>
                 </c:pt>
                 <c:pt idx="9">
-                  <c:v>0.7662835249042146</c:v>
+                  <c:v>0.76628352490421459</c:v>
                 </c:pt>
                 <c:pt idx="10">
                   <c:v>1.5325670498084292</c:v>
                 </c:pt>
                 <c:pt idx="11">
-                  <c:v>0.7662835249042146</c:v>
+                  <c:v>0.76628352490421459</c:v>
                 </c:pt>
               </c:numCache>
             </c:numRef>
@@ -5188,7 +5188,7 @@
                   <c:v>10.727969348659004</c:v>
                 </c:pt>
                 <c:pt idx="4">
-                  <c:v>8.045977011494253</c:v>
+                  <c:v>8.0459770114942533</c:v>
                 </c:pt>
                 <c:pt idx="5">
                   <c:v>7.2796934865900385</c:v>
@@ -5197,19 +5197,19 @@
                   <c:v>7.2796934865900385</c:v>
                 </c:pt>
                 <c:pt idx="7">
-                  <c:v>6.513409961685824</c:v>
+                  <c:v>6.5134099616858236</c:v>
                 </c:pt>
                 <c:pt idx="8">
-                  <c:v>5.747126436781609</c:v>
+                  <c:v>5.7471264367816088</c:v>
                 </c:pt>
                 <c:pt idx="9">
-                  <c:v>5.363984674329502</c:v>
+                  <c:v>5.3639846743295019</c:v>
                 </c:pt>
                 <c:pt idx="10">
-                  <c:v>4.597701149425287</c:v>
+                  <c:v>4.5977011494252871</c:v>
                 </c:pt>
                 <c:pt idx="11">
-                  <c:v>4.597701149425287</c:v>
+                  <c:v>4.5977011494252871</c:v>
                 </c:pt>
               </c:numCache>
             </c:numRef>
@@ -5346,14 +5346,14 @@
     </c:plotArea>
     <c:plotVisOnly val="1"/>
     <c:dispBlanksAs val="gap"/>
-    <c:extLst xmlns:w="http://schemas.openxmlformats.org/wordprocessingml/2006/main" xmlns:w15="http://schemas.microsoft.com/office/word/2012/wordml" xmlns:w14="http://schemas.microsoft.com/office/word/2010/wordml" xmlns:m="http://schemas.openxmlformats.org/officeDocument/2006/math" xmlns:wp="http://schemas.openxmlformats.org/drawingml/2006/wordprocessingDrawing" xmlns:wp14="http://schemas.microsoft.com/office/word/2010/wordprocessingDrawing" xmlns:mc="http://schemas.openxmlformats.org/markup-compatibility/2006" xmlns:sl="http://schemas.openxmlformats.org/schemaLibrary/2006/main" xmlns:wne="http://schemas.microsoft.com/office/word/2006/wordml" xmlns:cdr="http://schemas.openxmlformats.org/drawingml/2006/chartDrawing" xmlns:c14="http://schemas.microsoft.com/office/drawing/2007/8/2/chart" xmlns:dgm="http://schemas.openxmlformats.org/drawingml/2006/diagram" xmlns:pic="http://schemas.openxmlformats.org/drawingml/2006/picture" xmlns:xdr="http://schemas.openxmlformats.org/drawingml/2006/spreadsheetDrawing" xmlns:dsp="http://schemas.microsoft.com/office/drawing/2008/diagram" xmlns:xvml="urn:schemas-microsoft-com:office:excel" xmlns:o="urn:schemas-microsoft-com:office:office" xmlns:v="urn:schemas-microsoft-com:vml" xmlns:w10="urn:schemas-microsoft-com:office:word" xmlns:pvml="urn:schemas-microsoft-com:office:powerpoint" xmlns:cppr="http://schemas.microsoft.com/office/2006/coverPageProps" xmlns:odx="http://opendope.org/xpaths" xmlns:odc="http://opendope.org/conditions" xmlns:odq="http://opendope.org/questions" xmlns:oda="http://opendope.org/answers" xmlns:odi="http://opendope.org/components" xmlns:odgm="http://opendope.org/SmartArt/DataHierarchy" xmlns:b="http://schemas.openxmlformats.org/officeDocument/2006/bibliography" xmlns:wps="http://schemas.microsoft.com/office/word/2010/wordprocessingShape" xmlns:w16se="http://schemas.microsoft.com/office/word/2015/wordml/symex" xmlns:w16cid="http://schemas.microsoft.com/office/word/2016/wordml/cid" xmlns:wetp="http://schemas.microsoft.com/office/webextensions/taskpanes/2010/11" xmlns:we="http://schemas.microsoft.com/office/webextensions/webextension/2010/11" xmlns:comp="http://schemas.openxmlformats.org/drawingml/2006/compatibility" xmlns:lc="http://schemas.openxmlformats.org/drawingml/2006/lockedCanvas">
+    <c:showDLblsOverMax val="0"/>
+    <c:extLst xmlns:lc="http://schemas.openxmlformats.org/drawingml/2006/lockedCanvas" xmlns:comp="http://schemas.openxmlformats.org/drawingml/2006/compatibility" xmlns:we="http://schemas.microsoft.com/office/webextensions/webextension/2010/11" xmlns:wetp="http://schemas.microsoft.com/office/webextensions/taskpanes/2010/11" xmlns:w16cid="http://schemas.microsoft.com/office/word/2016/wordml/cid" xmlns:w16se="http://schemas.microsoft.com/office/word/2015/wordml/symex" xmlns:wps="http://schemas.microsoft.com/office/word/2010/wordprocessingShape" xmlns:b="http://schemas.openxmlformats.org/officeDocument/2006/bibliography" xmlns:odgm="http://opendope.org/SmartArt/DataHierarchy" xmlns:odi="http://opendope.org/components" xmlns:oda="http://opendope.org/answers" xmlns:odq="http://opendope.org/questions" xmlns:odc="http://opendope.org/conditions" xmlns:odx="http://opendope.org/xpaths" xmlns:cppr="http://schemas.microsoft.com/office/2006/coverPageProps" xmlns:pvml="urn:schemas-microsoft-com:office:powerpoint" xmlns:w10="urn:schemas-microsoft-com:office:word" xmlns:v="urn:schemas-microsoft-com:vml" xmlns:o="urn:schemas-microsoft-com:office:office" xmlns:xvml="urn:schemas-microsoft-com:office:excel" xmlns:dsp="http://schemas.microsoft.com/office/drawing/2008/diagram" xmlns:xdr="http://schemas.openxmlformats.org/drawingml/2006/spreadsheetDrawing" xmlns:pic="http://schemas.openxmlformats.org/drawingml/2006/picture" xmlns:dgm="http://schemas.openxmlformats.org/drawingml/2006/diagram" xmlns:c14="http://schemas.microsoft.com/office/drawing/2007/8/2/chart" xmlns:cdr="http://schemas.openxmlformats.org/drawingml/2006/chartDrawing" xmlns:wne="http://schemas.microsoft.com/office/word/2006/wordml" xmlns:sl="http://schemas.openxmlformats.org/schemaLibrary/2006/main" xmlns:mc="http://schemas.openxmlformats.org/markup-compatibility/2006" xmlns:wp14="http://schemas.microsoft.com/office/word/2010/wordprocessingDrawing" xmlns:wp="http://schemas.openxmlformats.org/drawingml/2006/wordprocessingDrawing" xmlns:m="http://schemas.openxmlformats.org/officeDocument/2006/math" xmlns:w14="http://schemas.microsoft.com/office/word/2010/wordml" xmlns:w15="http://schemas.microsoft.com/office/word/2012/wordml" xmlns:w="http://schemas.openxmlformats.org/wordprocessingml/2006/main">
       <c:ext xmlns:c16r3="http://schemas.microsoft.com/office/drawing/2017/03/chart" uri="{56B9EC1D-385E-4148-901F-78D8002777C0}">
         <c16r3:dataDisplayOptions16>
           <c16r3:dispNaAsBlank val="1"/>
         </c16r3:dataDisplayOptions16>
       </c:ext>
     </c:extLst>
-    <c:showDLblsOverMax val="0"/>
   </c:chart>
   <c:spPr>
     <a:noFill/>
@@ -5449,7 +5449,7 @@
                 </a:outerShdw>
               </a:effectLst>
             </c:spPr>
-            <c:extLst xmlns:w="http://schemas.openxmlformats.org/wordprocessingml/2006/main" xmlns:w15="http://schemas.microsoft.com/office/word/2012/wordml" xmlns:w14="http://schemas.microsoft.com/office/word/2010/wordml" xmlns:m="http://schemas.openxmlformats.org/officeDocument/2006/math" xmlns:wp="http://schemas.openxmlformats.org/drawingml/2006/wordprocessingDrawing" xmlns:wp14="http://schemas.microsoft.com/office/word/2010/wordprocessingDrawing" xmlns:mc="http://schemas.openxmlformats.org/markup-compatibility/2006" xmlns:sl="http://schemas.openxmlformats.org/schemaLibrary/2006/main" xmlns:wne="http://schemas.microsoft.com/office/word/2006/wordml" xmlns:cdr="http://schemas.openxmlformats.org/drawingml/2006/chartDrawing" xmlns:c14="http://schemas.microsoft.com/office/drawing/2007/8/2/chart" xmlns:dgm="http://schemas.openxmlformats.org/drawingml/2006/diagram" xmlns:pic="http://schemas.openxmlformats.org/drawingml/2006/picture" xmlns:xdr="http://schemas.openxmlformats.org/drawingml/2006/spreadsheetDrawing" xmlns:dsp="http://schemas.microsoft.com/office/drawing/2008/diagram" xmlns:xvml="urn:schemas-microsoft-com:office:excel" xmlns:o="urn:schemas-microsoft-com:office:office" xmlns:v="urn:schemas-microsoft-com:vml" xmlns:w10="urn:schemas-microsoft-com:office:word" xmlns:pvml="urn:schemas-microsoft-com:office:powerpoint" xmlns:cppr="http://schemas.microsoft.com/office/2006/coverPageProps" xmlns:odx="http://opendope.org/xpaths" xmlns:odc="http://opendope.org/conditions" xmlns:odq="http://opendope.org/questions" xmlns:oda="http://opendope.org/answers" xmlns:odi="http://opendope.org/components" xmlns:odgm="http://opendope.org/SmartArt/DataHierarchy" xmlns:b="http://schemas.openxmlformats.org/officeDocument/2006/bibliography" xmlns:wps="http://schemas.microsoft.com/office/word/2010/wordprocessingShape" xmlns:w16se="http://schemas.microsoft.com/office/word/2015/wordml/symex" xmlns:w16cid="http://schemas.microsoft.com/office/word/2016/wordml/cid" xmlns:wetp="http://schemas.microsoft.com/office/webextensions/taskpanes/2010/11" xmlns:we="http://schemas.microsoft.com/office/webextensions/webextension/2010/11" xmlns:comp="http://schemas.openxmlformats.org/drawingml/2006/compatibility" xmlns:lc="http://schemas.openxmlformats.org/drawingml/2006/lockedCanvas">
+            <c:extLst xmlns:lc="http://schemas.openxmlformats.org/drawingml/2006/lockedCanvas" xmlns:comp="http://schemas.openxmlformats.org/drawingml/2006/compatibility" xmlns:we="http://schemas.microsoft.com/office/webextensions/webextension/2010/11" xmlns:wetp="http://schemas.microsoft.com/office/webextensions/taskpanes/2010/11" xmlns:w16cid="http://schemas.microsoft.com/office/word/2016/wordml/cid" xmlns:w16se="http://schemas.microsoft.com/office/word/2015/wordml/symex" xmlns:wps="http://schemas.microsoft.com/office/word/2010/wordprocessingShape" xmlns:b="http://schemas.openxmlformats.org/officeDocument/2006/bibliography" xmlns:odgm="http://opendope.org/SmartArt/DataHierarchy" xmlns:odi="http://opendope.org/components" xmlns:oda="http://opendope.org/answers" xmlns:odq="http://opendope.org/questions" xmlns:odc="http://opendope.org/conditions" xmlns:odx="http://opendope.org/xpaths" xmlns:cppr="http://schemas.microsoft.com/office/2006/coverPageProps" xmlns:pvml="urn:schemas-microsoft-com:office:powerpoint" xmlns:w10="urn:schemas-microsoft-com:office:word" xmlns:v="urn:schemas-microsoft-com:vml" xmlns:o="urn:schemas-microsoft-com:office:office" xmlns:xvml="urn:schemas-microsoft-com:office:excel" xmlns:dsp="http://schemas.microsoft.com/office/drawing/2008/diagram" xmlns:xdr="http://schemas.openxmlformats.org/drawingml/2006/spreadsheetDrawing" xmlns:pic="http://schemas.openxmlformats.org/drawingml/2006/picture" xmlns:dgm="http://schemas.openxmlformats.org/drawingml/2006/diagram" xmlns:c14="http://schemas.microsoft.com/office/drawing/2007/8/2/chart" xmlns:cdr="http://schemas.openxmlformats.org/drawingml/2006/chartDrawing" xmlns:wne="http://schemas.microsoft.com/office/word/2006/wordml" xmlns:sl="http://schemas.openxmlformats.org/schemaLibrary/2006/main" xmlns:mc="http://schemas.openxmlformats.org/markup-compatibility/2006" xmlns:wp14="http://schemas.microsoft.com/office/word/2010/wordprocessingDrawing" xmlns:wp="http://schemas.openxmlformats.org/drawingml/2006/wordprocessingDrawing" xmlns:m="http://schemas.openxmlformats.org/officeDocument/2006/math" xmlns:w14="http://schemas.microsoft.com/office/word/2010/wordml" xmlns:w15="http://schemas.microsoft.com/office/word/2012/wordml" xmlns:w="http://schemas.openxmlformats.org/wordprocessingml/2006/main">
               <c:ext xmlns:c16="http://schemas.microsoft.com/office/drawing/2014/chart" uri="{C3380CC4-5D6E-409C-BE32-E72D297353CC}">
                 <c16:uniqueId val="{00000001-6147-E74A-AA7B-5531F0E4EE0C}"/>
               </c:ext>
@@ -5512,22 +5512,22 @@
                   <c:v>45.744680851063826</c:v>
                 </c:pt>
                 <c:pt idx="2">
-                  <c:v>47.87234042553192</c:v>
+                  <c:v>47.872340425531917</c:v>
                 </c:pt>
                 <c:pt idx="3">
                   <c:v>47.340425531914896</c:v>
                 </c:pt>
                 <c:pt idx="4">
-                  <c:v>51.59574468085106</c:v>
+                  <c:v>51.595744680851062</c:v>
                 </c:pt>
                 <c:pt idx="5">
-                  <c:v>51.59574468085106</c:v>
+                  <c:v>51.595744680851062</c:v>
                 </c:pt>
                 <c:pt idx="6">
-                  <c:v>51.59574468085106</c:v>
+                  <c:v>51.595744680851062</c:v>
                 </c:pt>
                 <c:pt idx="7">
-                  <c:v>51.06382978723404</c:v>
+                  <c:v>51.063829787234042</c:v>
                 </c:pt>
                 <c:pt idx="8">
                   <c:v>52.659574468085104</c:v>
@@ -5536,7 +5536,7 @@
                   <c:v>52.659574468085104</c:v>
                 </c:pt>
                 <c:pt idx="10">
-                  <c:v>52.12765957446808</c:v>
+                  <c:v>52.127659574468083</c:v>
                 </c:pt>
                 <c:pt idx="11">
                   <c:v>53.191489361702125</c:v>
@@ -5544,7 +5544,7 @@
               </c:numCache>
             </c:numRef>
           </c:val>
-          <c:extLst xmlns:w="http://schemas.openxmlformats.org/wordprocessingml/2006/main" xmlns:w15="http://schemas.microsoft.com/office/word/2012/wordml" xmlns:w14="http://schemas.microsoft.com/office/word/2010/wordml" xmlns:m="http://schemas.openxmlformats.org/officeDocument/2006/math" xmlns:wp="http://schemas.openxmlformats.org/drawingml/2006/wordprocessingDrawing" xmlns:wp14="http://schemas.microsoft.com/office/word/2010/wordprocessingDrawing" xmlns:mc="http://schemas.openxmlformats.org/markup-compatibility/2006" xmlns:sl="http://schemas.openxmlformats.org/schemaLibrary/2006/main" xmlns:wne="http://schemas.microsoft.com/office/word/2006/wordml" xmlns:cdr="http://schemas.openxmlformats.org/drawingml/2006/chartDrawing" xmlns:c14="http://schemas.microsoft.com/office/drawing/2007/8/2/chart" xmlns:dgm="http://schemas.openxmlformats.org/drawingml/2006/diagram" xmlns:pic="http://schemas.openxmlformats.org/drawingml/2006/picture" xmlns:xdr="http://schemas.openxmlformats.org/drawingml/2006/spreadsheetDrawing" xmlns:dsp="http://schemas.microsoft.com/office/drawing/2008/diagram" xmlns:xvml="urn:schemas-microsoft-com:office:excel" xmlns:o="urn:schemas-microsoft-com:office:office" xmlns:v="urn:schemas-microsoft-com:vml" xmlns:w10="urn:schemas-microsoft-com:office:word" xmlns:pvml="urn:schemas-microsoft-com:office:powerpoint" xmlns:cppr="http://schemas.microsoft.com/office/2006/coverPageProps" xmlns:odx="http://opendope.org/xpaths" xmlns:odc="http://opendope.org/conditions" xmlns:odq="http://opendope.org/questions" xmlns:oda="http://opendope.org/answers" xmlns:odi="http://opendope.org/components" xmlns:odgm="http://opendope.org/SmartArt/DataHierarchy" xmlns:b="http://schemas.openxmlformats.org/officeDocument/2006/bibliography" xmlns:wps="http://schemas.microsoft.com/office/word/2010/wordprocessingShape" xmlns:w16se="http://schemas.microsoft.com/office/word/2015/wordml/symex" xmlns:w16cid="http://schemas.microsoft.com/office/word/2016/wordml/cid" xmlns:wetp="http://schemas.microsoft.com/office/webextensions/taskpanes/2010/11" xmlns:we="http://schemas.microsoft.com/office/webextensions/webextension/2010/11" xmlns:comp="http://schemas.openxmlformats.org/drawingml/2006/compatibility" xmlns:lc="http://schemas.openxmlformats.org/drawingml/2006/lockedCanvas">
+          <c:extLst xmlns:lc="http://schemas.openxmlformats.org/drawingml/2006/lockedCanvas" xmlns:comp="http://schemas.openxmlformats.org/drawingml/2006/compatibility" xmlns:we="http://schemas.microsoft.com/office/webextensions/webextension/2010/11" xmlns:wetp="http://schemas.microsoft.com/office/webextensions/taskpanes/2010/11" xmlns:w16cid="http://schemas.microsoft.com/office/word/2016/wordml/cid" xmlns:w16se="http://schemas.microsoft.com/office/word/2015/wordml/symex" xmlns:wps="http://schemas.microsoft.com/office/word/2010/wordprocessingShape" xmlns:b="http://schemas.openxmlformats.org/officeDocument/2006/bibliography" xmlns:odgm="http://opendope.org/SmartArt/DataHierarchy" xmlns:odi="http://opendope.org/components" xmlns:oda="http://opendope.org/answers" xmlns:odq="http://opendope.org/questions" xmlns:odc="http://opendope.org/conditions" xmlns:odx="http://opendope.org/xpaths" xmlns:cppr="http://schemas.microsoft.com/office/2006/coverPageProps" xmlns:pvml="urn:schemas-microsoft-com:office:powerpoint" xmlns:w10="urn:schemas-microsoft-com:office:word" xmlns:v="urn:schemas-microsoft-com:vml" xmlns:o="urn:schemas-microsoft-com:office:office" xmlns:xvml="urn:schemas-microsoft-com:office:excel" xmlns:dsp="http://schemas.microsoft.com/office/drawing/2008/diagram" xmlns:xdr="http://schemas.openxmlformats.org/drawingml/2006/spreadsheetDrawing" xmlns:pic="http://schemas.openxmlformats.org/drawingml/2006/picture" xmlns:dgm="http://schemas.openxmlformats.org/drawingml/2006/diagram" xmlns:c14="http://schemas.microsoft.com/office/drawing/2007/8/2/chart" xmlns:cdr="http://schemas.openxmlformats.org/drawingml/2006/chartDrawing" xmlns:wne="http://schemas.microsoft.com/office/word/2006/wordml" xmlns:sl="http://schemas.openxmlformats.org/schemaLibrary/2006/main" xmlns:mc="http://schemas.openxmlformats.org/markup-compatibility/2006" xmlns:wp14="http://schemas.microsoft.com/office/word/2010/wordprocessingDrawing" xmlns:wp="http://schemas.openxmlformats.org/drawingml/2006/wordprocessingDrawing" xmlns:m="http://schemas.openxmlformats.org/officeDocument/2006/math" xmlns:w14="http://schemas.microsoft.com/office/word/2010/wordml" xmlns:w15="http://schemas.microsoft.com/office/word/2012/wordml" xmlns:w="http://schemas.openxmlformats.org/wordprocessingml/2006/main">
             <c:ext xmlns:c16="http://schemas.microsoft.com/office/drawing/2014/chart" uri="{C3380CC4-5D6E-409C-BE32-E72D297353CC}">
               <c16:uniqueId val="{00000002-6147-E74A-AA7B-5531F0E4EE0C}"/>
             </c:ext>
@@ -5625,13 +5625,13 @@
                 <c:formatCode>General</c:formatCode>
                 <c:ptCount val="12"/>
                 <c:pt idx="0">
-                  <c:v>0.5319148936170213</c:v>
+                  <c:v>0.53191489361702127</c:v>
                 </c:pt>
                 <c:pt idx="1">
-                  <c:v>0.0</c:v>
+                  <c:v>0</c:v>
                 </c:pt>
                 <c:pt idx="2">
-                  <c:v>0.0</c:v>
+                  <c:v>0</c:v>
                 </c:pt>
                 <c:pt idx="3">
                   <c:v>3.1914893617021276</c:v>
@@ -5640,13 +5640,13 @@
                   <c:v>1.5957446808510638</c:v>
                 </c:pt>
                 <c:pt idx="5">
-                  <c:v>2.127659574468085</c:v>
+                  <c:v>2.1276595744680851</c:v>
                 </c:pt>
                 <c:pt idx="6">
                   <c:v>1.5957446808510638</c:v>
                 </c:pt>
                 <c:pt idx="7">
-                  <c:v>6.914893617021277</c:v>
+                  <c:v>6.9148936170212769</c:v>
                 </c:pt>
                 <c:pt idx="8">
                   <c:v>3.1914893617021276</c:v>
@@ -5655,10 +5655,10 @@
                   <c:v>2.6595744680851063</c:v>
                 </c:pt>
                 <c:pt idx="10">
-                  <c:v>0.0</c:v>
+                  <c:v>0</c:v>
                 </c:pt>
                 <c:pt idx="11">
-                  <c:v>3.723404255319149</c:v>
+                  <c:v>3.7234042553191489</c:v>
                 </c:pt>
               </c:numCache>
             </c:numRef>
@@ -5744,13 +5744,13 @@
                 <c:formatCode>General</c:formatCode>
                 <c:ptCount val="12"/>
                 <c:pt idx="0">
-                  <c:v>6.382978723404255</c:v>
+                  <c:v>6.3829787234042552</c:v>
                 </c:pt>
                 <c:pt idx="1">
-                  <c:v>7.446808510638298</c:v>
+                  <c:v>7.4468085106382977</c:v>
                 </c:pt>
                 <c:pt idx="2">
-                  <c:v>0.0</c:v>
+                  <c:v>0</c:v>
                 </c:pt>
                 <c:pt idx="3">
                   <c:v>14.893617021276595</c:v>
@@ -5774,10 +5774,10 @@
                   <c:v>22.340425531914892</c:v>
                 </c:pt>
                 <c:pt idx="10">
-                  <c:v>25.0</c:v>
+                  <c:v>25</c:v>
                 </c:pt>
                 <c:pt idx="11">
-                  <c:v>17.5531914893617</c:v>
+                  <c:v>17.553191489361701</c:v>
                 </c:pt>
               </c:numCache>
             </c:numRef>
@@ -5863,16 +5863,16 @@
                 <c:formatCode>General</c:formatCode>
                 <c:ptCount val="12"/>
                 <c:pt idx="0">
-                  <c:v>0.5319148936170213</c:v>
+                  <c:v>0.53191489361702127</c:v>
                 </c:pt>
                 <c:pt idx="1">
-                  <c:v>0.0</c:v>
+                  <c:v>0</c:v>
                 </c:pt>
                 <c:pt idx="2">
                   <c:v>11.170212765957446</c:v>
                 </c:pt>
                 <c:pt idx="3">
-                  <c:v>5.319148936170213</c:v>
+                  <c:v>5.3191489361702127</c:v>
                 </c:pt>
                 <c:pt idx="4">
                   <c:v>3.1914893617021276</c:v>
@@ -5887,16 +5887,16 @@
                   <c:v>10.106382978723405</c:v>
                 </c:pt>
                 <c:pt idx="8">
-                  <c:v>2.127659574468085</c:v>
+                  <c:v>2.1276595744680851</c:v>
                 </c:pt>
                 <c:pt idx="9">
                   <c:v>1.5957446808510638</c:v>
                 </c:pt>
                 <c:pt idx="10">
-                  <c:v>2.127659574468085</c:v>
+                  <c:v>2.1276595744680851</c:v>
                 </c:pt>
                 <c:pt idx="11">
-                  <c:v>4.787234042553192</c:v>
+                  <c:v>4.7872340425531918</c:v>
                 </c:pt>
               </c:numCache>
             </c:numRef>
@@ -5990,19 +5990,19 @@
                   <c:v>46.808510638297875</c:v>
                 </c:pt>
                 <c:pt idx="2">
-                  <c:v>40.95744680851064</c:v>
+                  <c:v>40.957446808510639</c:v>
                 </c:pt>
                 <c:pt idx="3">
                   <c:v>29.25531914893617</c:v>
                 </c:pt>
                 <c:pt idx="4">
-                  <c:v>24.46808510638298</c:v>
+                  <c:v>24.468085106382979</c:v>
                 </c:pt>
                 <c:pt idx="5">
-                  <c:v>24.46808510638298</c:v>
+                  <c:v>24.468085106382979</c:v>
                 </c:pt>
                 <c:pt idx="6">
-                  <c:v>25.53191489361702</c:v>
+                  <c:v>25.531914893617021</c:v>
                 </c:pt>
                 <c:pt idx="7">
                   <c:v>19.680851063829788</c:v>
@@ -6154,14 +6154,14 @@
     </c:plotArea>
     <c:plotVisOnly val="1"/>
     <c:dispBlanksAs val="gap"/>
-    <c:extLst xmlns:w="http://schemas.openxmlformats.org/wordprocessingml/2006/main" xmlns:w15="http://schemas.microsoft.com/office/word/2012/wordml" xmlns:w14="http://schemas.microsoft.com/office/word/2010/wordml" xmlns:m="http://schemas.openxmlformats.org/officeDocument/2006/math" xmlns:wp="http://schemas.openxmlformats.org/drawingml/2006/wordprocessingDrawing" xmlns:wp14="http://schemas.microsoft.com/office/word/2010/wordprocessingDrawing" xmlns:mc="http://schemas.openxmlformats.org/markup-compatibility/2006" xmlns:sl="http://schemas.openxmlformats.org/schemaLibrary/2006/main" xmlns:wne="http://schemas.microsoft.com/office/word/2006/wordml" xmlns:cdr="http://schemas.openxmlformats.org/drawingml/2006/chartDrawing" xmlns:c14="http://schemas.microsoft.com/office/drawing/2007/8/2/chart" xmlns:dgm="http://schemas.openxmlformats.org/drawingml/2006/diagram" xmlns:pic="http://schemas.openxmlformats.org/drawingml/2006/picture" xmlns:xdr="http://schemas.openxmlformats.org/drawingml/2006/spreadsheetDrawing" xmlns:dsp="http://schemas.microsoft.com/office/drawing/2008/diagram" xmlns:xvml="urn:schemas-microsoft-com:office:excel" xmlns:o="urn:schemas-microsoft-com:office:office" xmlns:v="urn:schemas-microsoft-com:vml" xmlns:w10="urn:schemas-microsoft-com:office:word" xmlns:pvml="urn:schemas-microsoft-com:office:powerpoint" xmlns:cppr="http://schemas.microsoft.com/office/2006/coverPageProps" xmlns:odx="http://opendope.org/xpaths" xmlns:odc="http://opendope.org/conditions" xmlns:odq="http://opendope.org/questions" xmlns:oda="http://opendope.org/answers" xmlns:odi="http://opendope.org/components" xmlns:odgm="http://opendope.org/SmartArt/DataHierarchy" xmlns:b="http://schemas.openxmlformats.org/officeDocument/2006/bibliography" xmlns:wps="http://schemas.microsoft.com/office/word/2010/wordprocessingShape" xmlns:w16se="http://schemas.microsoft.com/office/word/2015/wordml/symex" xmlns:w16cid="http://schemas.microsoft.com/office/word/2016/wordml/cid" xmlns:wetp="http://schemas.microsoft.com/office/webextensions/taskpanes/2010/11" xmlns:we="http://schemas.microsoft.com/office/webextensions/webextension/2010/11" xmlns:comp="http://schemas.openxmlformats.org/drawingml/2006/compatibility" xmlns:lc="http://schemas.openxmlformats.org/drawingml/2006/lockedCanvas">
+    <c:showDLblsOverMax val="0"/>
+    <c:extLst xmlns:lc="http://schemas.openxmlformats.org/drawingml/2006/lockedCanvas" xmlns:comp="http://schemas.openxmlformats.org/drawingml/2006/compatibility" xmlns:we="http://schemas.microsoft.com/office/webextensions/webextension/2010/11" xmlns:wetp="http://schemas.microsoft.com/office/webextensions/taskpanes/2010/11" xmlns:w16cid="http://schemas.microsoft.com/office/word/2016/wordml/cid" xmlns:w16se="http://schemas.microsoft.com/office/word/2015/wordml/symex" xmlns:wps="http://schemas.microsoft.com/office/word/2010/wordprocessingShape" xmlns:b="http://schemas.openxmlformats.org/officeDocument/2006/bibliography" xmlns:odgm="http://opendope.org/SmartArt/DataHierarchy" xmlns:odi="http://opendope.org/components" xmlns:oda="http://opendope.org/answers" xmlns:odq="http://opendope.org/questions" xmlns:odc="http://opendope.org/conditions" xmlns:odx="http://opendope.org/xpaths" xmlns:cppr="http://schemas.microsoft.com/office/2006/coverPageProps" xmlns:pvml="urn:schemas-microsoft-com:office:powerpoint" xmlns:w10="urn:schemas-microsoft-com:office:word" xmlns:v="urn:schemas-microsoft-com:vml" xmlns:o="urn:schemas-microsoft-com:office:office" xmlns:xvml="urn:schemas-microsoft-com:office:excel" xmlns:dsp="http://schemas.microsoft.com/office/drawing/2008/diagram" xmlns:xdr="http://schemas.openxmlformats.org/drawingml/2006/spreadsheetDrawing" xmlns:pic="http://schemas.openxmlformats.org/drawingml/2006/picture" xmlns:dgm="http://schemas.openxmlformats.org/drawingml/2006/diagram" xmlns:c14="http://schemas.microsoft.com/office/drawing/2007/8/2/chart" xmlns:cdr="http://schemas.openxmlformats.org/drawingml/2006/chartDrawing" xmlns:wne="http://schemas.microsoft.com/office/word/2006/wordml" xmlns:sl="http://schemas.openxmlformats.org/schemaLibrary/2006/main" xmlns:mc="http://schemas.openxmlformats.org/markup-compatibility/2006" xmlns:wp14="http://schemas.microsoft.com/office/word/2010/wordprocessingDrawing" xmlns:wp="http://schemas.openxmlformats.org/drawingml/2006/wordprocessingDrawing" xmlns:m="http://schemas.openxmlformats.org/officeDocument/2006/math" xmlns:w14="http://schemas.microsoft.com/office/word/2010/wordml" xmlns:w15="http://schemas.microsoft.com/office/word/2012/wordml" xmlns:w="http://schemas.openxmlformats.org/wordprocessingml/2006/main">
       <c:ext xmlns:c16r3="http://schemas.microsoft.com/office/drawing/2017/03/chart" uri="{56B9EC1D-385E-4148-901F-78D8002777C0}">
         <c16r3:dataDisplayOptions16>
           <c16r3:dispNaAsBlank val="1"/>
         </c16r3:dataDisplayOptions16>
       </c:ext>
     </c:extLst>
-    <c:showDLblsOverMax val="0"/>
   </c:chart>
   <c:spPr>
     <a:noFill/>
@@ -10480,7 +10480,7 @@
           <a:p>
             <a:fld id="{C1255C68-584F-174D-BB81-51BF91708794}" type="datetimeFigureOut">
               <a:rPr lang="en-US" smtClean="0"/>
-              <a:t>8/8/25</a:t>
+              <a:t>3/12/26</a:t>
             </a:fld>
             <a:endParaRPr lang="en-US"/>
           </a:p>
@@ -10657,7 +10657,7 @@
           <a:p>
             <a:fld id="{A1EDAAC4-819D-C544-9EA1-C73624CFD70B}" type="datetimeFigureOut">
               <a:rPr lang="en-US" smtClean="0"/>
-              <a:t>8/8/25</a:t>
+              <a:t>3/12/26</a:t>
             </a:fld>
             <a:endParaRPr lang="en-US"/>
           </a:p>
@@ -20618,12 +20618,12 @@
             <p:nvPr userDrawn="1"/>
           </p:nvPicPr>
           <p:blipFill>
-            <a:blip r:embed="rId2">
+            <a:blip>
               <a:lum bright="100000"/>
               <a:alphaModFix amt="80000"/>
               <a:extLst>
                 <a:ext uri="{96DAC541-7B7A-43D3-8B79-37D633B846F1}">
-                  <asvg:svgBlip xmlns:asvg="http://schemas.microsoft.com/office/drawing/2016/SVG/main" r:embed="rId3"/>
+                  <asvg:svgBlip xmlns:asvg="http://schemas.microsoft.com/office/drawing/2016/SVG/main" r:embed="rId2"/>
                 </a:ext>
               </a:extLst>
             </a:blip>
@@ -20735,12 +20735,12 @@
             <p:nvPr userDrawn="1"/>
           </p:nvPicPr>
           <p:blipFill>
-            <a:blip r:embed="rId4">
+            <a:blip>
               <a:lum bright="100000"/>
               <a:alphaModFix amt="80000"/>
               <a:extLst>
                 <a:ext uri="{96DAC541-7B7A-43D3-8B79-37D633B846F1}">
-                  <asvg:svgBlip xmlns:asvg="http://schemas.microsoft.com/office/drawing/2016/SVG/main" r:embed="rId5"/>
+                  <asvg:svgBlip xmlns:asvg="http://schemas.microsoft.com/office/drawing/2016/SVG/main" r:embed="rId3"/>
                 </a:ext>
               </a:extLst>
             </a:blip>
@@ -20852,12 +20852,12 @@
             <p:nvPr userDrawn="1"/>
           </p:nvPicPr>
           <p:blipFill>
-            <a:blip r:embed="rId6">
+            <a:blip>
               <a:lum bright="100000"/>
               <a:alphaModFix amt="80000"/>
               <a:extLst>
                 <a:ext uri="{96DAC541-7B7A-43D3-8B79-37D633B846F1}">
-                  <asvg:svgBlip xmlns:asvg="http://schemas.microsoft.com/office/drawing/2016/SVG/main" r:embed="rId7"/>
+                  <asvg:svgBlip xmlns:asvg="http://schemas.microsoft.com/office/drawing/2016/SVG/main" r:embed="rId4"/>
                 </a:ext>
               </a:extLst>
             </a:blip>
@@ -20958,12 +20958,12 @@
             <p:nvPr userDrawn="1"/>
           </p:nvPicPr>
           <p:blipFill>
-            <a:blip r:embed="rId8">
+            <a:blip>
               <a:lum bright="100000"/>
               <a:alphaModFix amt="80000"/>
               <a:extLst>
                 <a:ext uri="{96DAC541-7B7A-43D3-8B79-37D633B846F1}">
-                  <asvg:svgBlip xmlns:asvg="http://schemas.microsoft.com/office/drawing/2016/SVG/main" r:embed="rId9"/>
+                  <asvg:svgBlip xmlns:asvg="http://schemas.microsoft.com/office/drawing/2016/SVG/main" r:embed="rId5"/>
                 </a:ext>
               </a:extLst>
             </a:blip>
@@ -21086,12 +21086,12 @@
             <p:nvPr userDrawn="1"/>
           </p:nvPicPr>
           <p:blipFill>
-            <a:blip r:embed="rId10">
+            <a:blip>
               <a:lum bright="100000"/>
               <a:alphaModFix amt="80000"/>
               <a:extLst>
                 <a:ext uri="{96DAC541-7B7A-43D3-8B79-37D633B846F1}">
-                  <asvg:svgBlip xmlns:asvg="http://schemas.microsoft.com/office/drawing/2016/SVG/main" r:embed="rId11"/>
+                  <asvg:svgBlip xmlns:asvg="http://schemas.microsoft.com/office/drawing/2016/SVG/main" r:embed="rId6"/>
                 </a:ext>
               </a:extLst>
             </a:blip>
@@ -21192,12 +21192,12 @@
             <p:nvPr userDrawn="1"/>
           </p:nvPicPr>
           <p:blipFill>
-            <a:blip r:embed="rId12">
+            <a:blip>
               <a:lum bright="100000"/>
               <a:alphaModFix amt="80000"/>
               <a:extLst>
                 <a:ext uri="{96DAC541-7B7A-43D3-8B79-37D633B846F1}">
-                  <asvg:svgBlip xmlns:asvg="http://schemas.microsoft.com/office/drawing/2016/SVG/main" r:embed="rId13"/>
+                  <asvg:svgBlip xmlns:asvg="http://schemas.microsoft.com/office/drawing/2016/SVG/main" r:embed="rId7"/>
                 </a:ext>
               </a:extLst>
             </a:blip>
@@ -32139,42 +32139,6 @@
       </p:graphicFrame>
       <p:sp>
         <p:nvSpPr>
-          <p:cNvPr id="7" name="TextBox 6">
-            <a:extLst>
-              <a:ext uri="{FF2B5EF4-FFF2-40B4-BE49-F238E27FC236}">
-                <a16:creationId xmlns:a16="http://schemas.microsoft.com/office/drawing/2014/main" id="{41183F90-63B2-0646-9068-7E4E2BCF14D9}"/>
-              </a:ext>
-            </a:extLst>
-          </p:cNvPr>
-          <p:cNvSpPr txBox="1"/>
-          <p:nvPr/>
-        </p:nvSpPr>
-        <p:spPr>
-          <a:xfrm>
-            <a:off x="8958648" y="-525758"/>
-            <a:ext cx="3635054" cy="369332"/>
-          </a:xfrm>
-          <a:prstGeom prst="rect">
-            <a:avLst/>
-          </a:prstGeom>
-          <a:noFill/>
-        </p:spPr>
-        <p:txBody>
-          <a:bodyPr wrap="none" lIns="90000" rtlCol="0" anchor="t">
-            <a:spAutoFit/>
-          </a:bodyPr>
-          <a:lstStyle/>
-          <a:p>
-            <a:r>
-              <a:rPr lang="en-US" b="1"/>
-              <a:t>OBJECTIVES_ARCHITECTURE_CHART</a:t>
-            </a:r>
-            <a:endParaRPr lang="en-US"/>
-          </a:p>
-        </p:txBody>
-      </p:sp>
-      <p:sp>
-        <p:nvSpPr>
           <p:cNvPr id="8" name="TextBox 7">
             <a:extLst>
               <a:ext uri="{FF2B5EF4-FFF2-40B4-BE49-F238E27FC236}">
@@ -32476,7 +32440,6 @@
               <a:rPr lang="en-US"/>
               <a:t>Progress towards objectives between February 2026 and March 2026</a:t>
             </a:r>
-            <a:endParaRPr lang="en-US"/>
           </a:p>
         </p:txBody>
       </p:sp>
@@ -32508,42 +32471,6 @@
           </a:graphicData>
         </a:graphic>
       </p:graphicFrame>
-      <p:sp>
-        <p:nvSpPr>
-          <p:cNvPr id="7" name="TextBox 6">
-            <a:extLst>
-              <a:ext uri="{FF2B5EF4-FFF2-40B4-BE49-F238E27FC236}">
-                <a16:creationId xmlns:a16="http://schemas.microsoft.com/office/drawing/2014/main" id="{1352F2E2-69B9-D866-7D75-24F10BB85A60}"/>
-              </a:ext>
-            </a:extLst>
-          </p:cNvPr>
-          <p:cNvSpPr txBox="1"/>
-          <p:nvPr/>
-        </p:nvSpPr>
-        <p:spPr>
-          <a:xfrm>
-            <a:off x="8958648" y="-525758"/>
-            <a:ext cx="2884016" cy="369332"/>
-          </a:xfrm>
-          <a:prstGeom prst="rect">
-            <a:avLst/>
-          </a:prstGeom>
-          <a:noFill/>
-        </p:spPr>
-        <p:txBody>
-          <a:bodyPr wrap="none" lIns="90000" rtlCol="0" anchor="t">
-            <a:spAutoFit/>
-          </a:bodyPr>
-          <a:lstStyle/>
-          <a:p>
-            <a:r>
-              <a:rPr lang="en-US" b="1"/>
-              <a:t>OBJECTIVES_STATUS_CHART</a:t>
-            </a:r>
-            <a:endParaRPr lang="en-US"/>
-          </a:p>
-        </p:txBody>
-      </p:sp>
       <p:sp>
         <p:nvSpPr>
           <p:cNvPr id="8" name="TextBox 7">
@@ -32823,7 +32750,6 @@
               <a:rPr lang="en-US"/>
               <a:t>Progress towards objectives per team between February 2026 and March 2026</a:t>
             </a:r>
-            <a:endParaRPr lang="en-US"/>
           </a:p>
         </p:txBody>
       </p:sp>
@@ -32855,42 +32781,6 @@
           </a:graphicData>
         </a:graphic>
       </p:graphicFrame>
-      <p:sp>
-        <p:nvSpPr>
-          <p:cNvPr id="7" name="TextBox 6">
-            <a:extLst>
-              <a:ext uri="{FF2B5EF4-FFF2-40B4-BE49-F238E27FC236}">
-                <a16:creationId xmlns:a16="http://schemas.microsoft.com/office/drawing/2014/main" id="{680F10C8-8291-84BB-615B-4FE46E9122C0}"/>
-              </a:ext>
-            </a:extLst>
-          </p:cNvPr>
-          <p:cNvSpPr txBox="1"/>
-          <p:nvPr/>
-        </p:nvSpPr>
-        <p:spPr>
-          <a:xfrm>
-            <a:off x="8958648" y="-525758"/>
-            <a:ext cx="2751287" cy="369332"/>
-          </a:xfrm>
-          <a:prstGeom prst="rect">
-            <a:avLst/>
-          </a:prstGeom>
-          <a:noFill/>
-        </p:spPr>
-        <p:txBody>
-          <a:bodyPr wrap="none" lIns="90000" rtlCol="0" anchor="t">
-            <a:spAutoFit/>
-          </a:bodyPr>
-          <a:lstStyle/>
-          <a:p>
-            <a:r>
-              <a:rPr lang="en-US" b="1"/>
-              <a:t>OBJECTIVES_TEAM_CHART</a:t>
-            </a:r>
-            <a:endParaRPr lang="en-US"/>
-          </a:p>
-        </p:txBody>
-      </p:sp>
       <p:sp>
         <p:nvSpPr>
           <p:cNvPr id="8" name="TextBox 7">
@@ -33170,7 +33060,6 @@
               <a:rPr lang="en-US"/>
               <a:t>Progress towards objectives per capability between February 2026 and March 2026</a:t>
             </a:r>
-            <a:endParaRPr lang="en-US"/>
           </a:p>
         </p:txBody>
       </p:sp>
@@ -33202,42 +33091,6 @@
           </a:graphicData>
         </a:graphic>
       </p:graphicFrame>
-      <p:sp>
-        <p:nvSpPr>
-          <p:cNvPr id="7" name="TextBox 6">
-            <a:extLst>
-              <a:ext uri="{FF2B5EF4-FFF2-40B4-BE49-F238E27FC236}">
-                <a16:creationId xmlns:a16="http://schemas.microsoft.com/office/drawing/2014/main" id="{E75AA9D8-EEB6-8709-C209-D32FF5C291E0}"/>
-              </a:ext>
-            </a:extLst>
-          </p:cNvPr>
-          <p:cNvSpPr txBox="1"/>
-          <p:nvPr/>
-        </p:nvSpPr>
-        <p:spPr>
-          <a:xfrm>
-            <a:off x="8958648" y="-525758"/>
-            <a:ext cx="3278675" cy="369332"/>
-          </a:xfrm>
-          <a:prstGeom prst="rect">
-            <a:avLst/>
-          </a:prstGeom>
-          <a:noFill/>
-        </p:spPr>
-        <p:txBody>
-          <a:bodyPr wrap="none" lIns="90000" rtlCol="0" anchor="t">
-            <a:spAutoFit/>
-          </a:bodyPr>
-          <a:lstStyle/>
-          <a:p>
-            <a:r>
-              <a:rPr lang="en-US" b="1"/>
-              <a:t>OBJECTIVES_CAPABILITY_CHART</a:t>
-            </a:r>
-            <a:endParaRPr lang="en-US"/>
-          </a:p>
-        </p:txBody>
-      </p:sp>
       <p:sp>
         <p:nvSpPr>
           <p:cNvPr id="8" name="TextBox 7">
@@ -33542,42 +33395,6 @@
           </a:graphicData>
         </a:graphic>
       </p:graphicFrame>
-      <p:sp>
-        <p:nvSpPr>
-          <p:cNvPr id="7" name="TextBox 6">
-            <a:extLst>
-              <a:ext uri="{FF2B5EF4-FFF2-40B4-BE49-F238E27FC236}">
-                <a16:creationId xmlns:a16="http://schemas.microsoft.com/office/drawing/2014/main" id="{025FA84B-5F3F-E103-125D-195720E3F1F8}"/>
-              </a:ext>
-            </a:extLst>
-          </p:cNvPr>
-          <p:cNvSpPr txBox="1"/>
-          <p:nvPr/>
-        </p:nvSpPr>
-        <p:spPr>
-          <a:xfrm>
-            <a:off x="8958648" y="-525758"/>
-            <a:ext cx="3051498" cy="369332"/>
-          </a:xfrm>
-          <a:prstGeom prst="rect">
-            <a:avLst/>
-          </a:prstGeom>
-          <a:noFill/>
-        </p:spPr>
-        <p:txBody>
-          <a:bodyPr wrap="none" lIns="90000" rtlCol="0" anchor="t">
-            <a:spAutoFit/>
-          </a:bodyPr>
-          <a:lstStyle/>
-          <a:p>
-            <a:r>
-              <a:rPr lang="en-US" b="1"/>
-              <a:t>OBJECTIVES_OVERALL_CHART</a:t>
-            </a:r>
-            <a:endParaRPr lang="en-US"/>
-          </a:p>
-        </p:txBody>
-      </p:sp>
       <p:sp>
         <p:nvSpPr>
           <p:cNvPr id="8" name="TextBox 7">
@@ -34099,42 +33916,6 @@
       </p:graphicFrame>
       <p:sp>
         <p:nvSpPr>
-          <p:cNvPr id="7" name="TextBox 6">
-            <a:extLst>
-              <a:ext uri="{FF2B5EF4-FFF2-40B4-BE49-F238E27FC236}">
-                <a16:creationId xmlns:a16="http://schemas.microsoft.com/office/drawing/2014/main" id="{659FCAA8-D0E0-3539-B820-DF6D6318129E}"/>
-              </a:ext>
-            </a:extLst>
-          </p:cNvPr>
-          <p:cNvSpPr txBox="1"/>
-          <p:nvPr/>
-        </p:nvSpPr>
-        <p:spPr>
-          <a:xfrm>
-            <a:off x="8958648" y="-525758"/>
-            <a:ext cx="3101768" cy="369332"/>
-          </a:xfrm>
-          <a:prstGeom prst="rect">
-            <a:avLst/>
-          </a:prstGeom>
-          <a:noFill/>
-        </p:spPr>
-        <p:txBody>
-          <a:bodyPr wrap="none" lIns="90000" rtlCol="0" anchor="t">
-            <a:spAutoFit/>
-          </a:bodyPr>
-          <a:lstStyle/>
-          <a:p>
-            <a:r>
-              <a:rPr lang="en-US" b="1"/>
-              <a:t>OBJECTIVES_SECURITY_CHART</a:t>
-            </a:r>
-            <a:endParaRPr lang="en-US"/>
-          </a:p>
-        </p:txBody>
-      </p:sp>
-      <p:sp>
-        <p:nvSpPr>
           <p:cNvPr id="8" name="TextBox 7">
             <a:extLst>
               <a:ext uri="{FF2B5EF4-FFF2-40B4-BE49-F238E27FC236}">
@@ -34439,42 +34220,6 @@
       </p:graphicFrame>
       <p:sp>
         <p:nvSpPr>
-          <p:cNvPr id="7" name="TextBox 6">
-            <a:extLst>
-              <a:ext uri="{FF2B5EF4-FFF2-40B4-BE49-F238E27FC236}">
-                <a16:creationId xmlns:a16="http://schemas.microsoft.com/office/drawing/2014/main" id="{AAE381E8-8BDC-C11E-0B4E-573D2927E3C8}"/>
-              </a:ext>
-            </a:extLst>
-          </p:cNvPr>
-          <p:cNvSpPr txBox="1"/>
-          <p:nvPr/>
-        </p:nvSpPr>
-        <p:spPr>
-          <a:xfrm>
-            <a:off x="8958648" y="-525758"/>
-            <a:ext cx="2597014" cy="369332"/>
-          </a:xfrm>
-          <a:prstGeom prst="rect">
-            <a:avLst/>
-          </a:prstGeom>
-          <a:noFill/>
-        </p:spPr>
-        <p:txBody>
-          <a:bodyPr wrap="none" lIns="90000" rtlCol="0" anchor="t">
-            <a:spAutoFit/>
-          </a:bodyPr>
-          <a:lstStyle/>
-          <a:p>
-            <a:r>
-              <a:rPr lang="en-US" b="1"/>
-              <a:t>OBJECTIVES_OSH_CHART</a:t>
-            </a:r>
-            <a:endParaRPr lang="en-US"/>
-          </a:p>
-        </p:txBody>
-      </p:sp>
-      <p:sp>
-        <p:nvSpPr>
           <p:cNvPr id="8" name="TextBox 7">
             <a:extLst>
               <a:ext uri="{FF2B5EF4-FFF2-40B4-BE49-F238E27FC236}">
@@ -34777,42 +34522,6 @@
           </a:graphicData>
         </a:graphic>
       </p:graphicFrame>
-      <p:sp>
-        <p:nvSpPr>
-          <p:cNvPr id="7" name="TextBox 6">
-            <a:extLst>
-              <a:ext uri="{FF2B5EF4-FFF2-40B4-BE49-F238E27FC236}">
-                <a16:creationId xmlns:a16="http://schemas.microsoft.com/office/drawing/2014/main" id="{FBB95D9E-971C-257B-3338-71CD7C91C015}"/>
-              </a:ext>
-            </a:extLst>
-          </p:cNvPr>
-          <p:cNvSpPr txBox="1"/>
-          <p:nvPr/>
-        </p:nvSpPr>
-        <p:spPr>
-          <a:xfrm>
-            <a:off x="8958648" y="-525758"/>
-            <a:ext cx="3912566" cy="369332"/>
-          </a:xfrm>
-          <a:prstGeom prst="rect">
-            <a:avLst/>
-          </a:prstGeom>
-          <a:noFill/>
-        </p:spPr>
-        <p:txBody>
-          <a:bodyPr wrap="none" lIns="90000" rtlCol="0" anchor="t">
-            <a:spAutoFit/>
-          </a:bodyPr>
-          <a:lstStyle/>
-          <a:p>
-            <a:r>
-              <a:rPr lang="en-US" b="1"/>
-              <a:t>OBJECTIVES_MAINTAINABILITY_CHART</a:t>
-            </a:r>
-            <a:endParaRPr lang="en-US"/>
-          </a:p>
-        </p:txBody>
-      </p:sp>
       <p:sp>
         <p:nvSpPr>
           <p:cNvPr id="8" name="TextBox 7">
@@ -35887,12 +35596,14 @@
 </file>
 
 <file path=customXml/item1.xml><?xml version="1.0" encoding="utf-8"?>
-<?mso-contentType ?>
-<FormTemplates xmlns="http://schemas.microsoft.com/sharepoint/v3/contenttype/forms">
-  <Display>DocumentLibraryForm</Display>
-  <Edit>DocumentLibraryForm</Edit>
-  <New>DocumentLibraryForm</New>
-</FormTemplates>
+<p:properties xmlns:p="http://schemas.microsoft.com/office/2006/metadata/properties" xmlns:xsi="http://www.w3.org/2001/XMLSchema-instance" xmlns:pc="http://schemas.microsoft.com/office/infopath/2007/PartnerControls">
+  <documentManagement>
+    <lcf76f155ced4ddcb4097134ff3c332f xmlns="fa937df2-abe2-4d38-b5f4-c228acba3827">
+      <Terms xmlns="http://schemas.microsoft.com/office/infopath/2007/PartnerControls"/>
+    </lcf76f155ced4ddcb4097134ff3c332f>
+    <TaxCatchAll xmlns="bc8ba18a-4a58-4ad2-bfc0-6516af8e7dc2" xsi:nil="true"/>
+  </documentManagement>
+</p:properties>
 </file>
 
 <file path=customXml/item2.xml><?xml version="1.0" encoding="utf-8"?>
@@ -36119,20 +35830,27 @@
 </file>
 
 <file path=customXml/item3.xml><?xml version="1.0" encoding="utf-8"?>
-<p:properties xmlns:p="http://schemas.microsoft.com/office/2006/metadata/properties" xmlns:xsi="http://www.w3.org/2001/XMLSchema-instance" xmlns:pc="http://schemas.microsoft.com/office/infopath/2007/PartnerControls">
-  <documentManagement>
-    <lcf76f155ced4ddcb4097134ff3c332f xmlns="fa937df2-abe2-4d38-b5f4-c228acba3827">
-      <Terms xmlns="http://schemas.microsoft.com/office/infopath/2007/PartnerControls"/>
-    </lcf76f155ced4ddcb4097134ff3c332f>
-    <TaxCatchAll xmlns="bc8ba18a-4a58-4ad2-bfc0-6516af8e7dc2" xsi:nil="true"/>
-  </documentManagement>
-</p:properties>
+<?mso-contentType ?>
+<FormTemplates xmlns="http://schemas.microsoft.com/sharepoint/v3/contenttype/forms">
+  <Display>DocumentLibraryForm</Display>
+  <Edit>DocumentLibraryForm</Edit>
+  <New>DocumentLibraryForm</New>
+</FormTemplates>
 </file>
 
 <file path=customXml/itemProps1.xml><?xml version="1.0" encoding="utf-8"?>
-<ds:datastoreItem xmlns:ds="http://schemas.openxmlformats.org/officeDocument/2006/customXml" ds:itemID="{570928F0-D7CA-4732-B7F3-1F945720D0AA}">
+<ds:datastoreItem xmlns:ds="http://schemas.openxmlformats.org/officeDocument/2006/customXml" ds:itemID="{4B629362-CF15-4610-8FAC-A8E699942233}">
   <ds:schemaRefs>
-    <ds:schemaRef ds:uri="http://schemas.microsoft.com/sharepoint/v3/contenttype/forms"/>
+    <ds:schemaRef ds:uri="http://schemas.microsoft.com/office/2006/documentManagement/types"/>
+    <ds:schemaRef ds:uri="http://purl.org/dc/elements/1.1/"/>
+    <ds:schemaRef ds:uri="bc8ba18a-4a58-4ad2-bfc0-6516af8e7dc2"/>
+    <ds:schemaRef ds:uri="http://purl.org/dc/terms/"/>
+    <ds:schemaRef ds:uri="http://www.w3.org/XML/1998/namespace"/>
+    <ds:schemaRef ds:uri="http://schemas.microsoft.com/office/2006/metadata/properties"/>
+    <ds:schemaRef ds:uri="http://schemas.microsoft.com/office/infopath/2007/PartnerControls"/>
+    <ds:schemaRef ds:uri="http://schemas.openxmlformats.org/package/2006/metadata/core-properties"/>
+    <ds:schemaRef ds:uri="fa937df2-abe2-4d38-b5f4-c228acba3827"/>
+    <ds:schemaRef ds:uri="http://purl.org/dc/dcmitype/"/>
   </ds:schemaRefs>
 </ds:datastoreItem>
 </file>
@@ -36157,18 +35875,9 @@
 </file>
 
 <file path=customXml/itemProps3.xml><?xml version="1.0" encoding="utf-8"?>
-<ds:datastoreItem xmlns:ds="http://schemas.openxmlformats.org/officeDocument/2006/customXml" ds:itemID="{4B629362-CF15-4610-8FAC-A8E699942233}">
+<ds:datastoreItem xmlns:ds="http://schemas.openxmlformats.org/officeDocument/2006/customXml" ds:itemID="{570928F0-D7CA-4732-B7F3-1F945720D0AA}">
   <ds:schemaRefs>
-    <ds:schemaRef ds:uri="http://schemas.microsoft.com/office/2006/documentManagement/types"/>
-    <ds:schemaRef ds:uri="http://purl.org/dc/elements/1.1/"/>
-    <ds:schemaRef ds:uri="bc8ba18a-4a58-4ad2-bfc0-6516af8e7dc2"/>
-    <ds:schemaRef ds:uri="http://purl.org/dc/terms/"/>
-    <ds:schemaRef ds:uri="http://www.w3.org/XML/1998/namespace"/>
-    <ds:schemaRef ds:uri="http://schemas.microsoft.com/office/2006/metadata/properties"/>
-    <ds:schemaRef ds:uri="http://schemas.microsoft.com/office/infopath/2007/PartnerControls"/>
-    <ds:schemaRef ds:uri="http://schemas.openxmlformats.org/package/2006/metadata/core-properties"/>
-    <ds:schemaRef ds:uri="fa937df2-abe2-4d38-b5f4-c228acba3827"/>
-    <ds:schemaRef ds:uri="http://purl.org/dc/dcmitype/"/>
+    <ds:schemaRef ds:uri="http://schemas.microsoft.com/sharepoint/v3/contenttype/forms"/>
   </ds:schemaRefs>
 </ds:datastoreItem>
 </file>
--- a/tests/report_generator/integration/reference_objectives.pptx
+++ b/tests/report_generator/integration/reference_objectives.pptx
@@ -213,7 +213,7 @@
                 </a:outerShdw>
               </a:effectLst>
             </c:spPr>
-            <c:extLst xmlns:lc="http://schemas.openxmlformats.org/drawingml/2006/lockedCanvas" xmlns:comp="http://schemas.openxmlformats.org/drawingml/2006/compatibility" xmlns:we="http://schemas.microsoft.com/office/webextensions/webextension/2010/11" xmlns:wetp="http://schemas.microsoft.com/office/webextensions/taskpanes/2010/11" xmlns:w16cid="http://schemas.microsoft.com/office/word/2016/wordml/cid" xmlns:w16se="http://schemas.microsoft.com/office/word/2015/wordml/symex" xmlns:wps="http://schemas.microsoft.com/office/word/2010/wordprocessingShape" xmlns:b="http://schemas.openxmlformats.org/officeDocument/2006/bibliography" xmlns:odgm="http://opendope.org/SmartArt/DataHierarchy" xmlns:odi="http://opendope.org/components" xmlns:oda="http://opendope.org/answers" xmlns:odq="http://opendope.org/questions" xmlns:odc="http://opendope.org/conditions" xmlns:odx="http://opendope.org/xpaths" xmlns:cppr="http://schemas.microsoft.com/office/2006/coverPageProps" xmlns:pvml="urn:schemas-microsoft-com:office:powerpoint" xmlns:w10="urn:schemas-microsoft-com:office:word" xmlns:v="urn:schemas-microsoft-com:vml" xmlns:o="urn:schemas-microsoft-com:office:office" xmlns:xvml="urn:schemas-microsoft-com:office:excel" xmlns:dsp="http://schemas.microsoft.com/office/drawing/2008/diagram" xmlns:xdr="http://schemas.openxmlformats.org/drawingml/2006/spreadsheetDrawing" xmlns:pic="http://schemas.openxmlformats.org/drawingml/2006/picture" xmlns:dgm="http://schemas.openxmlformats.org/drawingml/2006/diagram" xmlns:c14="http://schemas.microsoft.com/office/drawing/2007/8/2/chart" xmlns:cdr="http://schemas.openxmlformats.org/drawingml/2006/chartDrawing" xmlns:wne="http://schemas.microsoft.com/office/word/2006/wordml" xmlns:sl="http://schemas.openxmlformats.org/schemaLibrary/2006/main" xmlns:mc="http://schemas.openxmlformats.org/markup-compatibility/2006" xmlns:wp14="http://schemas.microsoft.com/office/word/2010/wordprocessingDrawing" xmlns:wp="http://schemas.openxmlformats.org/drawingml/2006/wordprocessingDrawing" xmlns:m="http://schemas.openxmlformats.org/officeDocument/2006/math" xmlns:w14="http://schemas.microsoft.com/office/word/2010/wordml" xmlns:w15="http://schemas.microsoft.com/office/word/2012/wordml" xmlns:w="http://schemas.openxmlformats.org/wordprocessingml/2006/main">
+            <c:extLst xmlns:w="http://schemas.openxmlformats.org/wordprocessingml/2006/main" xmlns:w15="http://schemas.microsoft.com/office/word/2012/wordml" xmlns:w14="http://schemas.microsoft.com/office/word/2010/wordml" xmlns:m="http://schemas.openxmlformats.org/officeDocument/2006/math" xmlns:wp="http://schemas.openxmlformats.org/drawingml/2006/wordprocessingDrawing" xmlns:wp14="http://schemas.microsoft.com/office/word/2010/wordprocessingDrawing" xmlns:mc="http://schemas.openxmlformats.org/markup-compatibility/2006" xmlns:sl="http://schemas.openxmlformats.org/schemaLibrary/2006/main" xmlns:wne="http://schemas.microsoft.com/office/word/2006/wordml" xmlns:cdr="http://schemas.openxmlformats.org/drawingml/2006/chartDrawing" xmlns:c14="http://schemas.microsoft.com/office/drawing/2007/8/2/chart" xmlns:dgm="http://schemas.openxmlformats.org/drawingml/2006/diagram" xmlns:pic="http://schemas.openxmlformats.org/drawingml/2006/picture" xmlns:xdr="http://schemas.openxmlformats.org/drawingml/2006/spreadsheetDrawing" xmlns:dsp="http://schemas.microsoft.com/office/drawing/2008/diagram" xmlns:xvml="urn:schemas-microsoft-com:office:excel" xmlns:o="urn:schemas-microsoft-com:office:office" xmlns:v="urn:schemas-microsoft-com:vml" xmlns:w10="urn:schemas-microsoft-com:office:word" xmlns:pvml="urn:schemas-microsoft-com:office:powerpoint" xmlns:cppr="http://schemas.microsoft.com/office/2006/coverPageProps" xmlns:odx="http://opendope.org/xpaths" xmlns:odc="http://opendope.org/conditions" xmlns:odq="http://opendope.org/questions" xmlns:oda="http://opendope.org/answers" xmlns:odi="http://opendope.org/components" xmlns:odgm="http://opendope.org/SmartArt/DataHierarchy" xmlns:b="http://schemas.openxmlformats.org/officeDocument/2006/bibliography" xmlns:wps="http://schemas.microsoft.com/office/word/2010/wordprocessingShape" xmlns:w16se="http://schemas.microsoft.com/office/word/2015/wordml/symex" xmlns:w16cid="http://schemas.microsoft.com/office/word/2016/wordml/cid" xmlns:wetp="http://schemas.microsoft.com/office/webextensions/taskpanes/2010/11" xmlns:we="http://schemas.microsoft.com/office/webextensions/webextension/2010/11" xmlns:comp="http://schemas.openxmlformats.org/drawingml/2006/compatibility" xmlns:lc="http://schemas.openxmlformats.org/drawingml/2006/lockedCanvas">
               <c:ext xmlns:c16="http://schemas.microsoft.com/office/drawing/2014/chart" uri="{C3380CC4-5D6E-409C-BE32-E72D297353CC}">
                 <c16:uniqueId val="{00000001-6147-E74A-AA7B-5531F0E4EE0C}"/>
               </c:ext>
@@ -242,7 +242,7 @@
               </c:numCache>
             </c:numRef>
           </c:val>
-          <c:extLst xmlns:lc="http://schemas.openxmlformats.org/drawingml/2006/lockedCanvas" xmlns:comp="http://schemas.openxmlformats.org/drawingml/2006/compatibility" xmlns:we="http://schemas.microsoft.com/office/webextensions/webextension/2010/11" xmlns:wetp="http://schemas.microsoft.com/office/webextensions/taskpanes/2010/11" xmlns:w16cid="http://schemas.microsoft.com/office/word/2016/wordml/cid" xmlns:w16se="http://schemas.microsoft.com/office/word/2015/wordml/symex" xmlns:wps="http://schemas.microsoft.com/office/word/2010/wordprocessingShape" xmlns:b="http://schemas.openxmlformats.org/officeDocument/2006/bibliography" xmlns:odgm="http://opendope.org/SmartArt/DataHierarchy" xmlns:odi="http://opendope.org/components" xmlns:oda="http://opendope.org/answers" xmlns:odq="http://opendope.org/questions" xmlns:odc="http://opendope.org/conditions" xmlns:odx="http://opendope.org/xpaths" xmlns:cppr="http://schemas.microsoft.com/office/2006/coverPageProps" xmlns:pvml="urn:schemas-microsoft-com:office:powerpoint" xmlns:w10="urn:schemas-microsoft-com:office:word" xmlns:v="urn:schemas-microsoft-com:vml" xmlns:o="urn:schemas-microsoft-com:office:office" xmlns:xvml="urn:schemas-microsoft-com:office:excel" xmlns:dsp="http://schemas.microsoft.com/office/drawing/2008/diagram" xmlns:xdr="http://schemas.openxmlformats.org/drawingml/2006/spreadsheetDrawing" xmlns:pic="http://schemas.openxmlformats.org/drawingml/2006/picture" xmlns:dgm="http://schemas.openxmlformats.org/drawingml/2006/diagram" xmlns:c14="http://schemas.microsoft.com/office/drawing/2007/8/2/chart" xmlns:cdr="http://schemas.openxmlformats.org/drawingml/2006/chartDrawing" xmlns:wne="http://schemas.microsoft.com/office/word/2006/wordml" xmlns:sl="http://schemas.openxmlformats.org/schemaLibrary/2006/main" xmlns:mc="http://schemas.openxmlformats.org/markup-compatibility/2006" xmlns:wp14="http://schemas.microsoft.com/office/word/2010/wordprocessingDrawing" xmlns:wp="http://schemas.openxmlformats.org/drawingml/2006/wordprocessingDrawing" xmlns:m="http://schemas.openxmlformats.org/officeDocument/2006/math" xmlns:w14="http://schemas.microsoft.com/office/word/2010/wordml" xmlns:w15="http://schemas.microsoft.com/office/word/2012/wordml" xmlns:w="http://schemas.openxmlformats.org/wordprocessingml/2006/main">
+          <c:extLst xmlns:w="http://schemas.openxmlformats.org/wordprocessingml/2006/main" xmlns:w15="http://schemas.microsoft.com/office/word/2012/wordml" xmlns:w14="http://schemas.microsoft.com/office/word/2010/wordml" xmlns:m="http://schemas.openxmlformats.org/officeDocument/2006/math" xmlns:wp="http://schemas.openxmlformats.org/drawingml/2006/wordprocessingDrawing" xmlns:wp14="http://schemas.microsoft.com/office/word/2010/wordprocessingDrawing" xmlns:mc="http://schemas.openxmlformats.org/markup-compatibility/2006" xmlns:sl="http://schemas.openxmlformats.org/schemaLibrary/2006/main" xmlns:wne="http://schemas.microsoft.com/office/word/2006/wordml" xmlns:cdr="http://schemas.openxmlformats.org/drawingml/2006/chartDrawing" xmlns:c14="http://schemas.microsoft.com/office/drawing/2007/8/2/chart" xmlns:dgm="http://schemas.openxmlformats.org/drawingml/2006/diagram" xmlns:pic="http://schemas.openxmlformats.org/drawingml/2006/picture" xmlns:xdr="http://schemas.openxmlformats.org/drawingml/2006/spreadsheetDrawing" xmlns:dsp="http://schemas.microsoft.com/office/drawing/2008/diagram" xmlns:xvml="urn:schemas-microsoft-com:office:excel" xmlns:o="urn:schemas-microsoft-com:office:office" xmlns:v="urn:schemas-microsoft-com:vml" xmlns:w10="urn:schemas-microsoft-com:office:word" xmlns:pvml="urn:schemas-microsoft-com:office:powerpoint" xmlns:cppr="http://schemas.microsoft.com/office/2006/coverPageProps" xmlns:odx="http://opendope.org/xpaths" xmlns:odc="http://opendope.org/conditions" xmlns:odq="http://opendope.org/questions" xmlns:oda="http://opendope.org/answers" xmlns:odi="http://opendope.org/components" xmlns:odgm="http://opendope.org/SmartArt/DataHierarchy" xmlns:b="http://schemas.openxmlformats.org/officeDocument/2006/bibliography" xmlns:wps="http://schemas.microsoft.com/office/word/2010/wordprocessingShape" xmlns:w16se="http://schemas.microsoft.com/office/word/2015/wordml/symex" xmlns:w16cid="http://schemas.microsoft.com/office/word/2016/wordml/cid" xmlns:wetp="http://schemas.microsoft.com/office/webextensions/taskpanes/2010/11" xmlns:we="http://schemas.microsoft.com/office/webextensions/webextension/2010/11" xmlns:comp="http://schemas.openxmlformats.org/drawingml/2006/compatibility" xmlns:lc="http://schemas.openxmlformats.org/drawingml/2006/lockedCanvas">
             <c:ext xmlns:c16="http://schemas.microsoft.com/office/drawing/2014/chart" uri="{C3380CC4-5D6E-409C-BE32-E72D297353CC}">
               <c16:uniqueId val="{00000002-6147-E74A-AA7B-5531F0E4EE0C}"/>
             </c:ext>
@@ -290,7 +290,7 @@
                 <c:formatCode>General</c:formatCode>
                 <c:ptCount val="1"/>
                 <c:pt idx="0">
-                  <c:v>0.83036773428232502</c:v>
+                  <c:v>0.830367734282325</c:v>
                 </c:pt>
               </c:numCache>
             </c:numRef>
@@ -343,7 +343,7 @@
                 <c:formatCode>General</c:formatCode>
                 <c:ptCount val="1"/>
                 <c:pt idx="0">
-                  <c:v>41.992882562277579</c:v>
+                  <c:v>41.99288256227758</c:v>
                 </c:pt>
               </c:numCache>
             </c:numRef>
@@ -451,7 +451,7 @@
                 <c:formatCode>General</c:formatCode>
                 <c:ptCount val="1"/>
                 <c:pt idx="0">
-                  <c:v>8.3036773428232511</c:v>
+                  <c:v>8.303677342823251</c:v>
                 </c:pt>
               </c:numCache>
             </c:numRef>
@@ -558,14 +558,14 @@
     </c:plotArea>
     <c:plotVisOnly val="1"/>
     <c:dispBlanksAs val="gap"/>
-    <c:showDLblsOverMax val="0"/>
-    <c:extLst xmlns:lc="http://schemas.openxmlformats.org/drawingml/2006/lockedCanvas" xmlns:comp="http://schemas.openxmlformats.org/drawingml/2006/compatibility" xmlns:we="http://schemas.microsoft.com/office/webextensions/webextension/2010/11" xmlns:wetp="http://schemas.microsoft.com/office/webextensions/taskpanes/2010/11" xmlns:w16cid="http://schemas.microsoft.com/office/word/2016/wordml/cid" xmlns:w16se="http://schemas.microsoft.com/office/word/2015/wordml/symex" xmlns:wps="http://schemas.microsoft.com/office/word/2010/wordprocessingShape" xmlns:b="http://schemas.openxmlformats.org/officeDocument/2006/bibliography" xmlns:odgm="http://opendope.org/SmartArt/DataHierarchy" xmlns:odi="http://opendope.org/components" xmlns:oda="http://opendope.org/answers" xmlns:odq="http://opendope.org/questions" xmlns:odc="http://opendope.org/conditions" xmlns:odx="http://opendope.org/xpaths" xmlns:cppr="http://schemas.microsoft.com/office/2006/coverPageProps" xmlns:pvml="urn:schemas-microsoft-com:office:powerpoint" xmlns:w10="urn:schemas-microsoft-com:office:word" xmlns:v="urn:schemas-microsoft-com:vml" xmlns:o="urn:schemas-microsoft-com:office:office" xmlns:xvml="urn:schemas-microsoft-com:office:excel" xmlns:dsp="http://schemas.microsoft.com/office/drawing/2008/diagram" xmlns:xdr="http://schemas.openxmlformats.org/drawingml/2006/spreadsheetDrawing" xmlns:pic="http://schemas.openxmlformats.org/drawingml/2006/picture" xmlns:dgm="http://schemas.openxmlformats.org/drawingml/2006/diagram" xmlns:c14="http://schemas.microsoft.com/office/drawing/2007/8/2/chart" xmlns:cdr="http://schemas.openxmlformats.org/drawingml/2006/chartDrawing" xmlns:wne="http://schemas.microsoft.com/office/word/2006/wordml" xmlns:sl="http://schemas.openxmlformats.org/schemaLibrary/2006/main" xmlns:mc="http://schemas.openxmlformats.org/markup-compatibility/2006" xmlns:wp14="http://schemas.microsoft.com/office/word/2010/wordprocessingDrawing" xmlns:wp="http://schemas.openxmlformats.org/drawingml/2006/wordprocessingDrawing" xmlns:m="http://schemas.openxmlformats.org/officeDocument/2006/math" xmlns:w14="http://schemas.microsoft.com/office/word/2010/wordml" xmlns:w15="http://schemas.microsoft.com/office/word/2012/wordml" xmlns:w="http://schemas.openxmlformats.org/wordprocessingml/2006/main">
+    <c:extLst xmlns:w="http://schemas.openxmlformats.org/wordprocessingml/2006/main" xmlns:w15="http://schemas.microsoft.com/office/word/2012/wordml" xmlns:w14="http://schemas.microsoft.com/office/word/2010/wordml" xmlns:m="http://schemas.openxmlformats.org/officeDocument/2006/math" xmlns:wp="http://schemas.openxmlformats.org/drawingml/2006/wordprocessingDrawing" xmlns:wp14="http://schemas.microsoft.com/office/word/2010/wordprocessingDrawing" xmlns:mc="http://schemas.openxmlformats.org/markup-compatibility/2006" xmlns:sl="http://schemas.openxmlformats.org/schemaLibrary/2006/main" xmlns:wne="http://schemas.microsoft.com/office/word/2006/wordml" xmlns:cdr="http://schemas.openxmlformats.org/drawingml/2006/chartDrawing" xmlns:c14="http://schemas.microsoft.com/office/drawing/2007/8/2/chart" xmlns:dgm="http://schemas.openxmlformats.org/drawingml/2006/diagram" xmlns:pic="http://schemas.openxmlformats.org/drawingml/2006/picture" xmlns:xdr="http://schemas.openxmlformats.org/drawingml/2006/spreadsheetDrawing" xmlns:dsp="http://schemas.microsoft.com/office/drawing/2008/diagram" xmlns:xvml="urn:schemas-microsoft-com:office:excel" xmlns:o="urn:schemas-microsoft-com:office:office" xmlns:v="urn:schemas-microsoft-com:vml" xmlns:w10="urn:schemas-microsoft-com:office:word" xmlns:pvml="urn:schemas-microsoft-com:office:powerpoint" xmlns:cppr="http://schemas.microsoft.com/office/2006/coverPageProps" xmlns:odx="http://opendope.org/xpaths" xmlns:odc="http://opendope.org/conditions" xmlns:odq="http://opendope.org/questions" xmlns:oda="http://opendope.org/answers" xmlns:odi="http://opendope.org/components" xmlns:odgm="http://opendope.org/SmartArt/DataHierarchy" xmlns:b="http://schemas.openxmlformats.org/officeDocument/2006/bibliography" xmlns:wps="http://schemas.microsoft.com/office/word/2010/wordprocessingShape" xmlns:w16se="http://schemas.microsoft.com/office/word/2015/wordml/symex" xmlns:w16cid="http://schemas.microsoft.com/office/word/2016/wordml/cid" xmlns:wetp="http://schemas.microsoft.com/office/webextensions/taskpanes/2010/11" xmlns:we="http://schemas.microsoft.com/office/webextensions/webextension/2010/11" xmlns:comp="http://schemas.openxmlformats.org/drawingml/2006/compatibility" xmlns:lc="http://schemas.openxmlformats.org/drawingml/2006/lockedCanvas">
       <c:ext xmlns:c16r3="http://schemas.microsoft.com/office/drawing/2017/03/chart" uri="{56B9EC1D-385E-4148-901F-78D8002777C0}">
         <c16r3:dataDisplayOptions16>
           <c16r3:dispNaAsBlank val="1"/>
         </c16r3:dataDisplayOptions16>
       </c:ext>
     </c:extLst>
+    <c:showDLblsOverMax val="0"/>
   </c:chart>
   <c:spPr>
     <a:noFill/>
@@ -661,7 +661,7 @@
                 </a:outerShdw>
               </a:effectLst>
             </c:spPr>
-            <c:extLst xmlns:w="http://schemas.openxmlformats.org/wordprocessingml/2006/main" xmlns:w15="http://schemas.microsoft.com/office/word/2012/wordml" xmlns:w14="http://schemas.microsoft.com/office/word/2010/wordml" xmlns:m="http://schemas.openxmlformats.org/officeDocument/2006/math" xmlns:wp="http://schemas.openxmlformats.org/drawingml/2006/wordprocessingDrawing" xmlns:wp14="http://schemas.microsoft.com/office/word/2010/wordprocessingDrawing" xmlns:mc="http://schemas.openxmlformats.org/markup-compatibility/2006" xmlns:sl="http://schemas.openxmlformats.org/schemaLibrary/2006/main" xmlns:wne="http://schemas.microsoft.com/office/word/2006/wordml" xmlns:cdr="http://schemas.openxmlformats.org/drawingml/2006/chartDrawing" xmlns:c14="http://schemas.microsoft.com/office/drawing/2007/8/2/chart" xmlns:dgm="http://schemas.openxmlformats.org/drawingml/2006/diagram" xmlns:pic="http://schemas.openxmlformats.org/drawingml/2006/picture" xmlns:xdr="http://schemas.openxmlformats.org/drawingml/2006/spreadsheetDrawing" xmlns:dsp="http://schemas.microsoft.com/office/drawing/2008/diagram" xmlns:xvml="urn:schemas-microsoft-com:office:excel" xmlns:o="urn:schemas-microsoft-com:office:office" xmlns:v="urn:schemas-microsoft-com:vml" xmlns:w10="urn:schemas-microsoft-com:office:word" xmlns:pvml="urn:schemas-microsoft-com:office:powerpoint" xmlns:cppr="http://schemas.microsoft.com/office/2006/coverPageProps" xmlns:odx="http://opendope.org/xpaths" xmlns:odc="http://opendope.org/conditions" xmlns:odq="http://opendope.org/questions" xmlns:oda="http://opendope.org/answers" xmlns:odi="http://opendope.org/components" xmlns:odgm="http://opendope.org/SmartArt/DataHierarchy" xmlns:b="http://schemas.openxmlformats.org/officeDocument/2006/bibliography" xmlns:wps="http://schemas.microsoft.com/office/word/2010/wordprocessingShape" xmlns:w16se="http://schemas.microsoft.com/office/word/2015/wordml/symex" xmlns:w16cid="http://schemas.microsoft.com/office/word/2016/wordml/cid" xmlns:wetp="http://schemas.microsoft.com/office/webextensions/taskpanes/2010/11" xmlns:we="http://schemas.microsoft.com/office/webextensions/webextension/2010/11" xmlns:comp="http://schemas.openxmlformats.org/drawingml/2006/compatibility" xmlns:lc="http://schemas.openxmlformats.org/drawingml/2006/lockedCanvas">
+            <c:extLst xmlns:lc="http://schemas.openxmlformats.org/drawingml/2006/lockedCanvas" xmlns:comp="http://schemas.openxmlformats.org/drawingml/2006/compatibility" xmlns:we="http://schemas.microsoft.com/office/webextensions/webextension/2010/11" xmlns:wetp="http://schemas.microsoft.com/office/webextensions/taskpanes/2010/11" xmlns:w16cid="http://schemas.microsoft.com/office/word/2016/wordml/cid" xmlns:w16se="http://schemas.microsoft.com/office/word/2015/wordml/symex" xmlns:wps="http://schemas.microsoft.com/office/word/2010/wordprocessingShape" xmlns:b="http://schemas.openxmlformats.org/officeDocument/2006/bibliography" xmlns:odgm="http://opendope.org/SmartArt/DataHierarchy" xmlns:odi="http://opendope.org/components" xmlns:oda="http://opendope.org/answers" xmlns:odq="http://opendope.org/questions" xmlns:odc="http://opendope.org/conditions" xmlns:odx="http://opendope.org/xpaths" xmlns:cppr="http://schemas.microsoft.com/office/2006/coverPageProps" xmlns:pvml="urn:schemas-microsoft-com:office:powerpoint" xmlns:w10="urn:schemas-microsoft-com:office:word" xmlns:v="urn:schemas-microsoft-com:vml" xmlns:o="urn:schemas-microsoft-com:office:office" xmlns:xvml="urn:schemas-microsoft-com:office:excel" xmlns:dsp="http://schemas.microsoft.com/office/drawing/2008/diagram" xmlns:xdr="http://schemas.openxmlformats.org/drawingml/2006/spreadsheetDrawing" xmlns:pic="http://schemas.openxmlformats.org/drawingml/2006/picture" xmlns:dgm="http://schemas.openxmlformats.org/drawingml/2006/diagram" xmlns:c14="http://schemas.microsoft.com/office/drawing/2007/8/2/chart" xmlns:cdr="http://schemas.openxmlformats.org/drawingml/2006/chartDrawing" xmlns:wne="http://schemas.microsoft.com/office/word/2006/wordml" xmlns:sl="http://schemas.openxmlformats.org/schemaLibrary/2006/main" xmlns:mc="http://schemas.openxmlformats.org/markup-compatibility/2006" xmlns:wp14="http://schemas.microsoft.com/office/word/2010/wordprocessingDrawing" xmlns:wp="http://schemas.openxmlformats.org/drawingml/2006/wordprocessingDrawing" xmlns:m="http://schemas.openxmlformats.org/officeDocument/2006/math" xmlns:w14="http://schemas.microsoft.com/office/word/2010/wordml" xmlns:w15="http://schemas.microsoft.com/office/word/2012/wordml" xmlns:w="http://schemas.openxmlformats.org/wordprocessingml/2006/main">
               <c:ext xmlns:c16="http://schemas.microsoft.com/office/drawing/2014/chart" uri="{C3380CC4-5D6E-409C-BE32-E72D297353CC}">
                 <c16:uniqueId val="{00000001-6147-E74A-AA7B-5531F0E4EE0C}"/>
               </c:ext>
@@ -739,28 +739,28 @@
                   <c:v>26.923076923076923</c:v>
                 </c:pt>
                 <c:pt idx="1">
-                  <c:v>47.727272727272727</c:v>
+                  <c:v>47.72727272727273</c:v>
                 </c:pt>
                 <c:pt idx="2">
                   <c:v>39.42307692307692</c:v>
                 </c:pt>
                 <c:pt idx="3">
-                  <c:v>0</c:v>
+                  <c:v>0.0</c:v>
                 </c:pt>
                 <c:pt idx="4">
                   <c:v>18.181818181818183</c:v>
                 </c:pt>
                 <c:pt idx="5">
-                  <c:v>81.818181818181813</c:v>
+                  <c:v>81.81818181818181</c:v>
                 </c:pt>
                 <c:pt idx="6">
-                  <c:v>50</c:v>
+                  <c:v>50.0</c:v>
                 </c:pt>
                 <c:pt idx="7">
-                  <c:v>75.806451612903231</c:v>
+                  <c:v>75.80645161290323</c:v>
                 </c:pt>
                 <c:pt idx="8">
-                  <c:v>54.838709677419352</c:v>
+                  <c:v>54.83870967741935</c:v>
                 </c:pt>
                 <c:pt idx="9">
                   <c:v>40.625</c:v>
@@ -769,19 +769,19 @@
                   <c:v>51.724137931034484</c:v>
                 </c:pt>
                 <c:pt idx="11">
-                  <c:v>0</c:v>
+                  <c:v>0.0</c:v>
                 </c:pt>
                 <c:pt idx="12">
-                  <c:v>47.368421052631582</c:v>
+                  <c:v>47.36842105263158</c:v>
                 </c:pt>
                 <c:pt idx="13">
-                  <c:v>49.541284403669728</c:v>
+                  <c:v>49.54128440366973</c:v>
                 </c:pt>
                 <c:pt idx="14">
                   <c:v>61.29032258064516</c:v>
                 </c:pt>
                 <c:pt idx="15">
-                  <c:v>11.111111111111111</c:v>
+                  <c:v>11.11111111111111</c:v>
                 </c:pt>
                 <c:pt idx="16">
                   <c:v>40.090090090090094</c:v>
@@ -792,7 +792,7 @@
               </c:numCache>
             </c:numRef>
           </c:val>
-          <c:extLst xmlns:w="http://schemas.openxmlformats.org/wordprocessingml/2006/main" xmlns:w15="http://schemas.microsoft.com/office/word/2012/wordml" xmlns:w14="http://schemas.microsoft.com/office/word/2010/wordml" xmlns:m="http://schemas.openxmlformats.org/officeDocument/2006/math" xmlns:wp="http://schemas.openxmlformats.org/drawingml/2006/wordprocessingDrawing" xmlns:wp14="http://schemas.microsoft.com/office/word/2010/wordprocessingDrawing" xmlns:mc="http://schemas.openxmlformats.org/markup-compatibility/2006" xmlns:sl="http://schemas.openxmlformats.org/schemaLibrary/2006/main" xmlns:wne="http://schemas.microsoft.com/office/word/2006/wordml" xmlns:cdr="http://schemas.openxmlformats.org/drawingml/2006/chartDrawing" xmlns:c14="http://schemas.microsoft.com/office/drawing/2007/8/2/chart" xmlns:dgm="http://schemas.openxmlformats.org/drawingml/2006/diagram" xmlns:pic="http://schemas.openxmlformats.org/drawingml/2006/picture" xmlns:xdr="http://schemas.openxmlformats.org/drawingml/2006/spreadsheetDrawing" xmlns:dsp="http://schemas.microsoft.com/office/drawing/2008/diagram" xmlns:xvml="urn:schemas-microsoft-com:office:excel" xmlns:o="urn:schemas-microsoft-com:office:office" xmlns:v="urn:schemas-microsoft-com:vml" xmlns:w10="urn:schemas-microsoft-com:office:word" xmlns:pvml="urn:schemas-microsoft-com:office:powerpoint" xmlns:cppr="http://schemas.microsoft.com/office/2006/coverPageProps" xmlns:odx="http://opendope.org/xpaths" xmlns:odc="http://opendope.org/conditions" xmlns:odq="http://opendope.org/questions" xmlns:oda="http://opendope.org/answers" xmlns:odi="http://opendope.org/components" xmlns:odgm="http://opendope.org/SmartArt/DataHierarchy" xmlns:b="http://schemas.openxmlformats.org/officeDocument/2006/bibliography" xmlns:wps="http://schemas.microsoft.com/office/word/2010/wordprocessingShape" xmlns:w16se="http://schemas.microsoft.com/office/word/2015/wordml/symex" xmlns:w16cid="http://schemas.microsoft.com/office/word/2016/wordml/cid" xmlns:wetp="http://schemas.microsoft.com/office/webextensions/taskpanes/2010/11" xmlns:we="http://schemas.microsoft.com/office/webextensions/webextension/2010/11" xmlns:comp="http://schemas.openxmlformats.org/drawingml/2006/compatibility" xmlns:lc="http://schemas.openxmlformats.org/drawingml/2006/lockedCanvas">
+          <c:extLst xmlns:lc="http://schemas.openxmlformats.org/drawingml/2006/lockedCanvas" xmlns:comp="http://schemas.openxmlformats.org/drawingml/2006/compatibility" xmlns:we="http://schemas.microsoft.com/office/webextensions/webextension/2010/11" xmlns:wetp="http://schemas.microsoft.com/office/webextensions/taskpanes/2010/11" xmlns:w16cid="http://schemas.microsoft.com/office/word/2016/wordml/cid" xmlns:w16se="http://schemas.microsoft.com/office/word/2015/wordml/symex" xmlns:wps="http://schemas.microsoft.com/office/word/2010/wordprocessingShape" xmlns:b="http://schemas.openxmlformats.org/officeDocument/2006/bibliography" xmlns:odgm="http://opendope.org/SmartArt/DataHierarchy" xmlns:odi="http://opendope.org/components" xmlns:oda="http://opendope.org/answers" xmlns:odq="http://opendope.org/questions" xmlns:odc="http://opendope.org/conditions" xmlns:odx="http://opendope.org/xpaths" xmlns:cppr="http://schemas.microsoft.com/office/2006/coverPageProps" xmlns:pvml="urn:schemas-microsoft-com:office:powerpoint" xmlns:w10="urn:schemas-microsoft-com:office:word" xmlns:v="urn:schemas-microsoft-com:vml" xmlns:o="urn:schemas-microsoft-com:office:office" xmlns:xvml="urn:schemas-microsoft-com:office:excel" xmlns:dsp="http://schemas.microsoft.com/office/drawing/2008/diagram" xmlns:xdr="http://schemas.openxmlformats.org/drawingml/2006/spreadsheetDrawing" xmlns:pic="http://schemas.openxmlformats.org/drawingml/2006/picture" xmlns:dgm="http://schemas.openxmlformats.org/drawingml/2006/diagram" xmlns:c14="http://schemas.microsoft.com/office/drawing/2007/8/2/chart" xmlns:cdr="http://schemas.openxmlformats.org/drawingml/2006/chartDrawing" xmlns:wne="http://schemas.microsoft.com/office/word/2006/wordml" xmlns:sl="http://schemas.openxmlformats.org/schemaLibrary/2006/main" xmlns:mc="http://schemas.openxmlformats.org/markup-compatibility/2006" xmlns:wp14="http://schemas.microsoft.com/office/word/2010/wordprocessingDrawing" xmlns:wp="http://schemas.openxmlformats.org/drawingml/2006/wordprocessingDrawing" xmlns:m="http://schemas.openxmlformats.org/officeDocument/2006/math" xmlns:w14="http://schemas.microsoft.com/office/word/2010/wordml" xmlns:w15="http://schemas.microsoft.com/office/word/2012/wordml" xmlns:w="http://schemas.openxmlformats.org/wordprocessingml/2006/main">
             <c:ext xmlns:c16="http://schemas.microsoft.com/office/drawing/2014/chart" uri="{C3380CC4-5D6E-409C-BE32-E72D297353CC}">
               <c16:uniqueId val="{00000002-6147-E74A-AA7B-5531F0E4EE0C}"/>
             </c:ext>
@@ -897,52 +897,52 @@
                   <c:v>1.1363636363636365</c:v>
                 </c:pt>
                 <c:pt idx="2">
-                  <c:v>0</c:v>
+                  <c:v>0.0</c:v>
                 </c:pt>
                 <c:pt idx="3">
-                  <c:v>0</c:v>
+                  <c:v>0.0</c:v>
                 </c:pt>
                 <c:pt idx="4">
-                  <c:v>0</c:v>
+                  <c:v>0.0</c:v>
                 </c:pt>
                 <c:pt idx="5">
-                  <c:v>0</c:v>
+                  <c:v>0.0</c:v>
                 </c:pt>
                 <c:pt idx="6">
                   <c:v>12.5</c:v>
                 </c:pt>
                 <c:pt idx="7">
-                  <c:v>0</c:v>
+                  <c:v>0.0</c:v>
                 </c:pt>
                 <c:pt idx="8">
-                  <c:v>0</c:v>
+                  <c:v>0.0</c:v>
                 </c:pt>
                 <c:pt idx="9">
-                  <c:v>0</c:v>
+                  <c:v>0.0</c:v>
                 </c:pt>
                 <c:pt idx="10">
-                  <c:v>0</c:v>
+                  <c:v>0.0</c:v>
                 </c:pt>
                 <c:pt idx="11">
-                  <c:v>0</c:v>
+                  <c:v>0.0</c:v>
                 </c:pt>
                 <c:pt idx="12">
-                  <c:v>0</c:v>
+                  <c:v>0.0</c:v>
                 </c:pt>
                 <c:pt idx="13">
-                  <c:v>0.91743119266055051</c:v>
+                  <c:v>0.9174311926605505</c:v>
                 </c:pt>
                 <c:pt idx="14">
                   <c:v>3.225806451612903</c:v>
                 </c:pt>
                 <c:pt idx="15">
-                  <c:v>0</c:v>
+                  <c:v>0.0</c:v>
                 </c:pt>
                 <c:pt idx="16">
-                  <c:v>0.90090090090090091</c:v>
+                  <c:v>0.9009009009009009</c:v>
                 </c:pt>
                 <c:pt idx="17">
-                  <c:v>0</c:v>
+                  <c:v>0.0</c:v>
                 </c:pt>
               </c:numCache>
             </c:numRef>
@@ -1055,10 +1055,10 @@
                   <c:v>35.57692307692308</c:v>
                 </c:pt>
                 <c:pt idx="3">
-                  <c:v>50</c:v>
+                  <c:v>50.0</c:v>
                 </c:pt>
                 <c:pt idx="4">
-                  <c:v>59.090909090909093</c:v>
+                  <c:v>59.09090909090909</c:v>
                 </c:pt>
                 <c:pt idx="5">
                   <c:v>18.181818181818183</c:v>
@@ -1079,10 +1079,10 @@
                   <c:v>48.275862068965516</c:v>
                 </c:pt>
                 <c:pt idx="11">
-                  <c:v>50</c:v>
+                  <c:v>50.0</c:v>
                 </c:pt>
                 <c:pt idx="12">
-                  <c:v>52.631578947368418</c:v>
+                  <c:v>52.63157894736842</c:v>
                 </c:pt>
                 <c:pt idx="13">
                   <c:v>34.862385321100916</c:v>
@@ -1091,10 +1091,10 @@
                   <c:v>25.806451612903224</c:v>
                 </c:pt>
                 <c:pt idx="15">
-                  <c:v>88.888888888888886</c:v>
+                  <c:v>88.88888888888889</c:v>
                 </c:pt>
                 <c:pt idx="16">
-                  <c:v>51.801801801801801</c:v>
+                  <c:v>51.8018018018018</c:v>
                 </c:pt>
                 <c:pt idx="17">
                   <c:v>59.25925925925926</c:v>
@@ -1204,55 +1204,55 @@
                   <c:v>3.8461538461538463</c:v>
                 </c:pt>
                 <c:pt idx="1">
-                  <c:v>2.2727272727272729</c:v>
+                  <c:v>2.272727272727273</c:v>
                 </c:pt>
                 <c:pt idx="2">
-                  <c:v>0</c:v>
+                  <c:v>0.0</c:v>
                 </c:pt>
                 <c:pt idx="3">
-                  <c:v>0</c:v>
+                  <c:v>0.0</c:v>
                 </c:pt>
                 <c:pt idx="4">
-                  <c:v>0</c:v>
+                  <c:v>0.0</c:v>
                 </c:pt>
                 <c:pt idx="5">
-                  <c:v>0</c:v>
+                  <c:v>0.0</c:v>
                 </c:pt>
                 <c:pt idx="6">
-                  <c:v>0</c:v>
+                  <c:v>0.0</c:v>
                 </c:pt>
                 <c:pt idx="7">
-                  <c:v>0</c:v>
+                  <c:v>0.0</c:v>
                 </c:pt>
                 <c:pt idx="8">
-                  <c:v>0</c:v>
+                  <c:v>0.0</c:v>
                 </c:pt>
                 <c:pt idx="9">
                   <c:v>6.25</c:v>
                 </c:pt>
                 <c:pt idx="10">
-                  <c:v>0</c:v>
+                  <c:v>0.0</c:v>
                 </c:pt>
                 <c:pt idx="11">
-                  <c:v>0</c:v>
+                  <c:v>0.0</c:v>
                 </c:pt>
                 <c:pt idx="12">
-                  <c:v>0</c:v>
+                  <c:v>0.0</c:v>
                 </c:pt>
                 <c:pt idx="13">
-                  <c:v>8.2568807339449535</c:v>
+                  <c:v>8.256880733944953</c:v>
                 </c:pt>
                 <c:pt idx="14">
-                  <c:v>6.4516129032258061</c:v>
+                  <c:v>6.451612903225806</c:v>
                 </c:pt>
                 <c:pt idx="15">
-                  <c:v>0</c:v>
+                  <c:v>0.0</c:v>
                 </c:pt>
                 <c:pt idx="16">
                   <c:v>2.7027027027027026</c:v>
                 </c:pt>
                 <c:pt idx="17">
-                  <c:v>0</c:v>
+                  <c:v>0.0</c:v>
                 </c:pt>
               </c:numCache>
             </c:numRef>
@@ -1361,22 +1361,22 @@
                   <c:v>3.8461538461538463</c:v>
                 </c:pt>
                 <c:pt idx="1">
-                  <c:v>5.6818181818181817</c:v>
+                  <c:v>5.681818181818182</c:v>
                 </c:pt>
                 <c:pt idx="2">
-                  <c:v>25</c:v>
+                  <c:v>25.0</c:v>
                 </c:pt>
                 <c:pt idx="3">
-                  <c:v>50</c:v>
+                  <c:v>50.0</c:v>
                 </c:pt>
                 <c:pt idx="4">
                   <c:v>22.727272727272727</c:v>
                 </c:pt>
                 <c:pt idx="5">
-                  <c:v>0</c:v>
+                  <c:v>0.0</c:v>
                 </c:pt>
                 <c:pt idx="6">
-                  <c:v>0</c:v>
+                  <c:v>0.0</c:v>
                 </c:pt>
                 <c:pt idx="7">
                   <c:v>1.6129032258064515</c:v>
@@ -1388,28 +1388,28 @@
                   <c:v>10.9375</c:v>
                 </c:pt>
                 <c:pt idx="10">
-                  <c:v>0</c:v>
+                  <c:v>0.0</c:v>
                 </c:pt>
                 <c:pt idx="11">
-                  <c:v>50</c:v>
+                  <c:v>50.0</c:v>
                 </c:pt>
                 <c:pt idx="12">
-                  <c:v>0</c:v>
+                  <c:v>0.0</c:v>
                 </c:pt>
                 <c:pt idx="13">
-                  <c:v>6.4220183486238529</c:v>
+                  <c:v>6.422018348623853</c:v>
                 </c:pt>
                 <c:pt idx="14">
                   <c:v>3.225806451612903</c:v>
                 </c:pt>
                 <c:pt idx="15">
-                  <c:v>0</c:v>
+                  <c:v>0.0</c:v>
                 </c:pt>
                 <c:pt idx="16">
-                  <c:v>4.5045045045045047</c:v>
+                  <c:v>4.504504504504505</c:v>
                 </c:pt>
                 <c:pt idx="17">
-                  <c:v>7.4074074074074074</c:v>
+                  <c:v>7.407407407407407</c:v>
                 </c:pt>
               </c:numCache>
             </c:numRef>
@@ -1546,14 +1546,14 @@
     </c:plotArea>
     <c:plotVisOnly val="1"/>
     <c:dispBlanksAs val="gap"/>
-    <c:showDLblsOverMax val="0"/>
-    <c:extLst xmlns:w="http://schemas.openxmlformats.org/wordprocessingml/2006/main" xmlns:w15="http://schemas.microsoft.com/office/word/2012/wordml" xmlns:w14="http://schemas.microsoft.com/office/word/2010/wordml" xmlns:m="http://schemas.openxmlformats.org/officeDocument/2006/math" xmlns:wp="http://schemas.openxmlformats.org/drawingml/2006/wordprocessingDrawing" xmlns:wp14="http://schemas.microsoft.com/office/word/2010/wordprocessingDrawing" xmlns:mc="http://schemas.openxmlformats.org/markup-compatibility/2006" xmlns:sl="http://schemas.openxmlformats.org/schemaLibrary/2006/main" xmlns:wne="http://schemas.microsoft.com/office/word/2006/wordml" xmlns:cdr="http://schemas.openxmlformats.org/drawingml/2006/chartDrawing" xmlns:c14="http://schemas.microsoft.com/office/drawing/2007/8/2/chart" xmlns:dgm="http://schemas.openxmlformats.org/drawingml/2006/diagram" xmlns:pic="http://schemas.openxmlformats.org/drawingml/2006/picture" xmlns:xdr="http://schemas.openxmlformats.org/drawingml/2006/spreadsheetDrawing" xmlns:dsp="http://schemas.microsoft.com/office/drawing/2008/diagram" xmlns:xvml="urn:schemas-microsoft-com:office:excel" xmlns:o="urn:schemas-microsoft-com:office:office" xmlns:v="urn:schemas-microsoft-com:vml" xmlns:w10="urn:schemas-microsoft-com:office:word" xmlns:pvml="urn:schemas-microsoft-com:office:powerpoint" xmlns:cppr="http://schemas.microsoft.com/office/2006/coverPageProps" xmlns:odx="http://opendope.org/xpaths" xmlns:odc="http://opendope.org/conditions" xmlns:odq="http://opendope.org/questions" xmlns:oda="http://opendope.org/answers" xmlns:odi="http://opendope.org/components" xmlns:odgm="http://opendope.org/SmartArt/DataHierarchy" xmlns:b="http://schemas.openxmlformats.org/officeDocument/2006/bibliography" xmlns:wps="http://schemas.microsoft.com/office/word/2010/wordprocessingShape" xmlns:w16se="http://schemas.microsoft.com/office/word/2015/wordml/symex" xmlns:w16cid="http://schemas.microsoft.com/office/word/2016/wordml/cid" xmlns:wetp="http://schemas.microsoft.com/office/webextensions/taskpanes/2010/11" xmlns:we="http://schemas.microsoft.com/office/webextensions/webextension/2010/11" xmlns:comp="http://schemas.openxmlformats.org/drawingml/2006/compatibility" xmlns:lc="http://schemas.openxmlformats.org/drawingml/2006/lockedCanvas">
+    <c:extLst xmlns:lc="http://schemas.openxmlformats.org/drawingml/2006/lockedCanvas" xmlns:comp="http://schemas.openxmlformats.org/drawingml/2006/compatibility" xmlns:we="http://schemas.microsoft.com/office/webextensions/webextension/2010/11" xmlns:wetp="http://schemas.microsoft.com/office/webextensions/taskpanes/2010/11" xmlns:w16cid="http://schemas.microsoft.com/office/word/2016/wordml/cid" xmlns:w16se="http://schemas.microsoft.com/office/word/2015/wordml/symex" xmlns:wps="http://schemas.microsoft.com/office/word/2010/wordprocessingShape" xmlns:b="http://schemas.openxmlformats.org/officeDocument/2006/bibliography" xmlns:odgm="http://opendope.org/SmartArt/DataHierarchy" xmlns:odi="http://opendope.org/components" xmlns:oda="http://opendope.org/answers" xmlns:odq="http://opendope.org/questions" xmlns:odc="http://opendope.org/conditions" xmlns:odx="http://opendope.org/xpaths" xmlns:cppr="http://schemas.microsoft.com/office/2006/coverPageProps" xmlns:pvml="urn:schemas-microsoft-com:office:powerpoint" xmlns:w10="urn:schemas-microsoft-com:office:word" xmlns:v="urn:schemas-microsoft-com:vml" xmlns:o="urn:schemas-microsoft-com:office:office" xmlns:xvml="urn:schemas-microsoft-com:office:excel" xmlns:dsp="http://schemas.microsoft.com/office/drawing/2008/diagram" xmlns:xdr="http://schemas.openxmlformats.org/drawingml/2006/spreadsheetDrawing" xmlns:pic="http://schemas.openxmlformats.org/drawingml/2006/picture" xmlns:dgm="http://schemas.openxmlformats.org/drawingml/2006/diagram" xmlns:c14="http://schemas.microsoft.com/office/drawing/2007/8/2/chart" xmlns:cdr="http://schemas.openxmlformats.org/drawingml/2006/chartDrawing" xmlns:wne="http://schemas.microsoft.com/office/word/2006/wordml" xmlns:sl="http://schemas.openxmlformats.org/schemaLibrary/2006/main" xmlns:mc="http://schemas.openxmlformats.org/markup-compatibility/2006" xmlns:wp14="http://schemas.microsoft.com/office/word/2010/wordprocessingDrawing" xmlns:wp="http://schemas.openxmlformats.org/drawingml/2006/wordprocessingDrawing" xmlns:m="http://schemas.openxmlformats.org/officeDocument/2006/math" xmlns:w14="http://schemas.microsoft.com/office/word/2010/wordml" xmlns:w15="http://schemas.microsoft.com/office/word/2012/wordml" xmlns:w="http://schemas.openxmlformats.org/wordprocessingml/2006/main">
       <c:ext xmlns:c16r3="http://schemas.microsoft.com/office/drawing/2017/03/chart" uri="{56B9EC1D-385E-4148-901F-78D8002777C0}">
         <c16r3:dataDisplayOptions16>
           <c16r3:dispNaAsBlank val="1"/>
         </c16r3:dataDisplayOptions16>
       </c:ext>
     </c:extLst>
+    <c:showDLblsOverMax val="0"/>
   </c:chart>
   <c:spPr>
     <a:noFill/>
@@ -1649,7 +1649,7 @@
                 </a:outerShdw>
               </a:effectLst>
             </c:spPr>
-            <c:extLst xmlns:lc="http://schemas.openxmlformats.org/drawingml/2006/lockedCanvas" xmlns:comp="http://schemas.openxmlformats.org/drawingml/2006/compatibility" xmlns:we="http://schemas.microsoft.com/office/webextensions/webextension/2010/11" xmlns:wetp="http://schemas.microsoft.com/office/webextensions/taskpanes/2010/11" xmlns:w16cid="http://schemas.microsoft.com/office/word/2016/wordml/cid" xmlns:w16se="http://schemas.microsoft.com/office/word/2015/wordml/symex" xmlns:wps="http://schemas.microsoft.com/office/word/2010/wordprocessingShape" xmlns:b="http://schemas.openxmlformats.org/officeDocument/2006/bibliography" xmlns:odgm="http://opendope.org/SmartArt/DataHierarchy" xmlns:odi="http://opendope.org/components" xmlns:oda="http://opendope.org/answers" xmlns:odq="http://opendope.org/questions" xmlns:odc="http://opendope.org/conditions" xmlns:odx="http://opendope.org/xpaths" xmlns:cppr="http://schemas.microsoft.com/office/2006/coverPageProps" xmlns:pvml="urn:schemas-microsoft-com:office:powerpoint" xmlns:w10="urn:schemas-microsoft-com:office:word" xmlns:v="urn:schemas-microsoft-com:vml" xmlns:o="urn:schemas-microsoft-com:office:office" xmlns:xvml="urn:schemas-microsoft-com:office:excel" xmlns:dsp="http://schemas.microsoft.com/office/drawing/2008/diagram" xmlns:xdr="http://schemas.openxmlformats.org/drawingml/2006/spreadsheetDrawing" xmlns:pic="http://schemas.openxmlformats.org/drawingml/2006/picture" xmlns:dgm="http://schemas.openxmlformats.org/drawingml/2006/diagram" xmlns:c14="http://schemas.microsoft.com/office/drawing/2007/8/2/chart" xmlns:cdr="http://schemas.openxmlformats.org/drawingml/2006/chartDrawing" xmlns:wne="http://schemas.microsoft.com/office/word/2006/wordml" xmlns:sl="http://schemas.openxmlformats.org/schemaLibrary/2006/main" xmlns:mc="http://schemas.openxmlformats.org/markup-compatibility/2006" xmlns:wp14="http://schemas.microsoft.com/office/word/2010/wordprocessingDrawing" xmlns:wp="http://schemas.openxmlformats.org/drawingml/2006/wordprocessingDrawing" xmlns:m="http://schemas.openxmlformats.org/officeDocument/2006/math" xmlns:w14="http://schemas.microsoft.com/office/word/2010/wordml" xmlns:w15="http://schemas.microsoft.com/office/word/2012/wordml" xmlns:w="http://schemas.openxmlformats.org/wordprocessingml/2006/main">
+            <c:extLst xmlns:w="http://schemas.openxmlformats.org/wordprocessingml/2006/main" xmlns:w15="http://schemas.microsoft.com/office/word/2012/wordml" xmlns:w14="http://schemas.microsoft.com/office/word/2010/wordml" xmlns:m="http://schemas.openxmlformats.org/officeDocument/2006/math" xmlns:wp="http://schemas.openxmlformats.org/drawingml/2006/wordprocessingDrawing" xmlns:wp14="http://schemas.microsoft.com/office/word/2010/wordprocessingDrawing" xmlns:mc="http://schemas.openxmlformats.org/markup-compatibility/2006" xmlns:sl="http://schemas.openxmlformats.org/schemaLibrary/2006/main" xmlns:wne="http://schemas.microsoft.com/office/word/2006/wordml" xmlns:cdr="http://schemas.openxmlformats.org/drawingml/2006/chartDrawing" xmlns:c14="http://schemas.microsoft.com/office/drawing/2007/8/2/chart" xmlns:dgm="http://schemas.openxmlformats.org/drawingml/2006/diagram" xmlns:pic="http://schemas.openxmlformats.org/drawingml/2006/picture" xmlns:xdr="http://schemas.openxmlformats.org/drawingml/2006/spreadsheetDrawing" xmlns:dsp="http://schemas.microsoft.com/office/drawing/2008/diagram" xmlns:xvml="urn:schemas-microsoft-com:office:excel" xmlns:o="urn:schemas-microsoft-com:office:office" xmlns:v="urn:schemas-microsoft-com:vml" xmlns:w10="urn:schemas-microsoft-com:office:word" xmlns:pvml="urn:schemas-microsoft-com:office:powerpoint" xmlns:cppr="http://schemas.microsoft.com/office/2006/coverPageProps" xmlns:odx="http://opendope.org/xpaths" xmlns:odc="http://opendope.org/conditions" xmlns:odq="http://opendope.org/questions" xmlns:oda="http://opendope.org/answers" xmlns:odi="http://opendope.org/components" xmlns:odgm="http://opendope.org/SmartArt/DataHierarchy" xmlns:b="http://schemas.openxmlformats.org/officeDocument/2006/bibliography" xmlns:wps="http://schemas.microsoft.com/office/word/2010/wordprocessingShape" xmlns:w16se="http://schemas.microsoft.com/office/word/2015/wordml/symex" xmlns:w16cid="http://schemas.microsoft.com/office/word/2016/wordml/cid" xmlns:wetp="http://schemas.microsoft.com/office/webextensions/taskpanes/2010/11" xmlns:we="http://schemas.microsoft.com/office/webextensions/webextension/2010/11" xmlns:comp="http://schemas.openxmlformats.org/drawingml/2006/compatibility" xmlns:lc="http://schemas.openxmlformats.org/drawingml/2006/lockedCanvas">
               <c:ext xmlns:c16="http://schemas.microsoft.com/office/drawing/2014/chart" uri="{C3380CC4-5D6E-409C-BE32-E72D297353CC}">
                 <c16:uniqueId val="{00000001-6147-E74A-AA7B-5531F0E4EE0C}"/>
               </c:ext>
@@ -1685,7 +1685,7 @@
                   <c:v>53.191489361702125</c:v>
                 </c:pt>
                 <c:pt idx="1">
-                  <c:v>34.865900383141764</c:v>
+                  <c:v>34.86590038314176</c:v>
                 </c:pt>
                 <c:pt idx="2">
                   <c:v>48.559670781893004</c:v>
@@ -1696,7 +1696,7 @@
               </c:numCache>
             </c:numRef>
           </c:val>
-          <c:extLst xmlns:lc="http://schemas.openxmlformats.org/drawingml/2006/lockedCanvas" xmlns:comp="http://schemas.openxmlformats.org/drawingml/2006/compatibility" xmlns:we="http://schemas.microsoft.com/office/webextensions/webextension/2010/11" xmlns:wetp="http://schemas.microsoft.com/office/webextensions/taskpanes/2010/11" xmlns:w16cid="http://schemas.microsoft.com/office/word/2016/wordml/cid" xmlns:w16se="http://schemas.microsoft.com/office/word/2015/wordml/symex" xmlns:wps="http://schemas.microsoft.com/office/word/2010/wordprocessingShape" xmlns:b="http://schemas.openxmlformats.org/officeDocument/2006/bibliography" xmlns:odgm="http://opendope.org/SmartArt/DataHierarchy" xmlns:odi="http://opendope.org/components" xmlns:oda="http://opendope.org/answers" xmlns:odq="http://opendope.org/questions" xmlns:odc="http://opendope.org/conditions" xmlns:odx="http://opendope.org/xpaths" xmlns:cppr="http://schemas.microsoft.com/office/2006/coverPageProps" xmlns:pvml="urn:schemas-microsoft-com:office:powerpoint" xmlns:w10="urn:schemas-microsoft-com:office:word" xmlns:v="urn:schemas-microsoft-com:vml" xmlns:o="urn:schemas-microsoft-com:office:office" xmlns:xvml="urn:schemas-microsoft-com:office:excel" xmlns:dsp="http://schemas.microsoft.com/office/drawing/2008/diagram" xmlns:xdr="http://schemas.openxmlformats.org/drawingml/2006/spreadsheetDrawing" xmlns:pic="http://schemas.openxmlformats.org/drawingml/2006/picture" xmlns:dgm="http://schemas.openxmlformats.org/drawingml/2006/diagram" xmlns:c14="http://schemas.microsoft.com/office/drawing/2007/8/2/chart" xmlns:cdr="http://schemas.openxmlformats.org/drawingml/2006/chartDrawing" xmlns:wne="http://schemas.microsoft.com/office/word/2006/wordml" xmlns:sl="http://schemas.openxmlformats.org/schemaLibrary/2006/main" xmlns:mc="http://schemas.openxmlformats.org/markup-compatibility/2006" xmlns:wp14="http://schemas.microsoft.com/office/word/2010/wordprocessingDrawing" xmlns:wp="http://schemas.openxmlformats.org/drawingml/2006/wordprocessingDrawing" xmlns:m="http://schemas.openxmlformats.org/officeDocument/2006/math" xmlns:w14="http://schemas.microsoft.com/office/word/2010/wordml" xmlns:w15="http://schemas.microsoft.com/office/word/2012/wordml" xmlns:w="http://schemas.openxmlformats.org/wordprocessingml/2006/main">
+          <c:extLst xmlns:w="http://schemas.openxmlformats.org/wordprocessingml/2006/main" xmlns:w15="http://schemas.microsoft.com/office/word/2012/wordml" xmlns:w14="http://schemas.microsoft.com/office/word/2010/wordml" xmlns:m="http://schemas.openxmlformats.org/officeDocument/2006/math" xmlns:wp="http://schemas.openxmlformats.org/drawingml/2006/wordprocessingDrawing" xmlns:wp14="http://schemas.microsoft.com/office/word/2010/wordprocessingDrawing" xmlns:mc="http://schemas.openxmlformats.org/markup-compatibility/2006" xmlns:sl="http://schemas.openxmlformats.org/schemaLibrary/2006/main" xmlns:wne="http://schemas.microsoft.com/office/word/2006/wordml" xmlns:cdr="http://schemas.openxmlformats.org/drawingml/2006/chartDrawing" xmlns:c14="http://schemas.microsoft.com/office/drawing/2007/8/2/chart" xmlns:dgm="http://schemas.openxmlformats.org/drawingml/2006/diagram" xmlns:pic="http://schemas.openxmlformats.org/drawingml/2006/picture" xmlns:xdr="http://schemas.openxmlformats.org/drawingml/2006/spreadsheetDrawing" xmlns:dsp="http://schemas.microsoft.com/office/drawing/2008/diagram" xmlns:xvml="urn:schemas-microsoft-com:office:excel" xmlns:o="urn:schemas-microsoft-com:office:office" xmlns:v="urn:schemas-microsoft-com:vml" xmlns:w10="urn:schemas-microsoft-com:office:word" xmlns:pvml="urn:schemas-microsoft-com:office:powerpoint" xmlns:cppr="http://schemas.microsoft.com/office/2006/coverPageProps" xmlns:odx="http://opendope.org/xpaths" xmlns:odc="http://opendope.org/conditions" xmlns:odq="http://opendope.org/questions" xmlns:oda="http://opendope.org/answers" xmlns:odi="http://opendope.org/components" xmlns:odgm="http://opendope.org/SmartArt/DataHierarchy" xmlns:b="http://schemas.openxmlformats.org/officeDocument/2006/bibliography" xmlns:wps="http://schemas.microsoft.com/office/word/2010/wordprocessingShape" xmlns:w16se="http://schemas.microsoft.com/office/word/2015/wordml/symex" xmlns:w16cid="http://schemas.microsoft.com/office/word/2016/wordml/cid" xmlns:wetp="http://schemas.microsoft.com/office/webextensions/taskpanes/2010/11" xmlns:we="http://schemas.microsoft.com/office/webextensions/webextension/2010/11" xmlns:comp="http://schemas.openxmlformats.org/drawingml/2006/compatibility" xmlns:lc="http://schemas.openxmlformats.org/drawingml/2006/lockedCanvas">
             <c:ext xmlns:c16="http://schemas.microsoft.com/office/drawing/2014/chart" uri="{C3380CC4-5D6E-409C-BE32-E72D297353CC}">
               <c16:uniqueId val="{00000002-6147-E74A-AA7B-5531F0E4EE0C}"/>
             </c:ext>
@@ -1756,13 +1756,13 @@
                   <c:v>2.6595744680851063</c:v>
                 </c:pt>
                 <c:pt idx="1">
-                  <c:v>0.76628352490421459</c:v>
+                  <c:v>0.7662835249042146</c:v>
                 </c:pt>
                 <c:pt idx="2">
-                  <c:v>0</c:v>
+                  <c:v>0.0</c:v>
                 </c:pt>
                 <c:pt idx="3">
-                  <c:v>0</c:v>
+                  <c:v>0.0</c:v>
                 </c:pt>
               </c:numCache>
             </c:numRef>
@@ -1824,13 +1824,13 @@
                 <c:formatCode>General</c:formatCode>
                 <c:ptCount val="4"/>
                 <c:pt idx="0">
-                  <c:v>17.553191489361701</c:v>
+                  <c:v>17.5531914893617</c:v>
                 </c:pt>
                 <c:pt idx="1">
-                  <c:v>58.620689655172413</c:v>
+                  <c:v>58.62068965517241</c:v>
                 </c:pt>
                 <c:pt idx="2">
-                  <c:v>44.032921810699591</c:v>
+                  <c:v>44.03292181069959</c:v>
                 </c:pt>
                 <c:pt idx="3">
                   <c:v>56.578947368421055</c:v>
@@ -1895,7 +1895,7 @@
                 <c:formatCode>General</c:formatCode>
                 <c:ptCount val="4"/>
                 <c:pt idx="0">
-                  <c:v>5.8510638297872344</c:v>
+                  <c:v>5.851063829787234</c:v>
                 </c:pt>
                 <c:pt idx="1">
                   <c:v>1.1494252873563218</c:v>
@@ -1904,7 +1904,7 @@
                   <c:v>1.2345679012345678</c:v>
                 </c:pt>
                 <c:pt idx="3">
-                  <c:v>7.8947368421052628</c:v>
+                  <c:v>7.894736842105263</c:v>
                 </c:pt>
               </c:numCache>
             </c:numRef>
@@ -1971,10 +1971,10 @@
                   <c:v>20.74468085106383</c:v>
                 </c:pt>
                 <c:pt idx="1">
-                  <c:v>4.5977011494252871</c:v>
+                  <c:v>4.597701149425287</c:v>
                 </c:pt>
                 <c:pt idx="2">
-                  <c:v>6.1728395061728394</c:v>
+                  <c:v>6.172839506172839</c:v>
                 </c:pt>
                 <c:pt idx="3">
                   <c:v>2.6315789473684212</c:v>
@@ -2114,14 +2114,14 @@
     </c:plotArea>
     <c:plotVisOnly val="1"/>
     <c:dispBlanksAs val="gap"/>
-    <c:showDLblsOverMax val="0"/>
-    <c:extLst xmlns:lc="http://schemas.openxmlformats.org/drawingml/2006/lockedCanvas" xmlns:comp="http://schemas.openxmlformats.org/drawingml/2006/compatibility" xmlns:we="http://schemas.microsoft.com/office/webextensions/webextension/2010/11" xmlns:wetp="http://schemas.microsoft.com/office/webextensions/taskpanes/2010/11" xmlns:w16cid="http://schemas.microsoft.com/office/word/2016/wordml/cid" xmlns:w16se="http://schemas.microsoft.com/office/word/2015/wordml/symex" xmlns:wps="http://schemas.microsoft.com/office/word/2010/wordprocessingShape" xmlns:b="http://schemas.openxmlformats.org/officeDocument/2006/bibliography" xmlns:odgm="http://opendope.org/SmartArt/DataHierarchy" xmlns:odi="http://opendope.org/components" xmlns:oda="http://opendope.org/answers" xmlns:odq="http://opendope.org/questions" xmlns:odc="http://opendope.org/conditions" xmlns:odx="http://opendope.org/xpaths" xmlns:cppr="http://schemas.microsoft.com/office/2006/coverPageProps" xmlns:pvml="urn:schemas-microsoft-com:office:powerpoint" xmlns:w10="urn:schemas-microsoft-com:office:word" xmlns:v="urn:schemas-microsoft-com:vml" xmlns:o="urn:schemas-microsoft-com:office:office" xmlns:xvml="urn:schemas-microsoft-com:office:excel" xmlns:dsp="http://schemas.microsoft.com/office/drawing/2008/diagram" xmlns:xdr="http://schemas.openxmlformats.org/drawingml/2006/spreadsheetDrawing" xmlns:pic="http://schemas.openxmlformats.org/drawingml/2006/picture" xmlns:dgm="http://schemas.openxmlformats.org/drawingml/2006/diagram" xmlns:c14="http://schemas.microsoft.com/office/drawing/2007/8/2/chart" xmlns:cdr="http://schemas.openxmlformats.org/drawingml/2006/chartDrawing" xmlns:wne="http://schemas.microsoft.com/office/word/2006/wordml" xmlns:sl="http://schemas.openxmlformats.org/schemaLibrary/2006/main" xmlns:mc="http://schemas.openxmlformats.org/markup-compatibility/2006" xmlns:wp14="http://schemas.microsoft.com/office/word/2010/wordprocessingDrawing" xmlns:wp="http://schemas.openxmlformats.org/drawingml/2006/wordprocessingDrawing" xmlns:m="http://schemas.openxmlformats.org/officeDocument/2006/math" xmlns:w14="http://schemas.microsoft.com/office/word/2010/wordml" xmlns:w15="http://schemas.microsoft.com/office/word/2012/wordml" xmlns:w="http://schemas.openxmlformats.org/wordprocessingml/2006/main">
+    <c:extLst xmlns:w="http://schemas.openxmlformats.org/wordprocessingml/2006/main" xmlns:w15="http://schemas.microsoft.com/office/word/2012/wordml" xmlns:w14="http://schemas.microsoft.com/office/word/2010/wordml" xmlns:m="http://schemas.openxmlformats.org/officeDocument/2006/math" xmlns:wp="http://schemas.openxmlformats.org/drawingml/2006/wordprocessingDrawing" xmlns:wp14="http://schemas.microsoft.com/office/word/2010/wordprocessingDrawing" xmlns:mc="http://schemas.openxmlformats.org/markup-compatibility/2006" xmlns:sl="http://schemas.openxmlformats.org/schemaLibrary/2006/main" xmlns:wne="http://schemas.microsoft.com/office/word/2006/wordml" xmlns:cdr="http://schemas.openxmlformats.org/drawingml/2006/chartDrawing" xmlns:c14="http://schemas.microsoft.com/office/drawing/2007/8/2/chart" xmlns:dgm="http://schemas.openxmlformats.org/drawingml/2006/diagram" xmlns:pic="http://schemas.openxmlformats.org/drawingml/2006/picture" xmlns:xdr="http://schemas.openxmlformats.org/drawingml/2006/spreadsheetDrawing" xmlns:dsp="http://schemas.microsoft.com/office/drawing/2008/diagram" xmlns:xvml="urn:schemas-microsoft-com:office:excel" xmlns:o="urn:schemas-microsoft-com:office:office" xmlns:v="urn:schemas-microsoft-com:vml" xmlns:w10="urn:schemas-microsoft-com:office:word" xmlns:pvml="urn:schemas-microsoft-com:office:powerpoint" xmlns:cppr="http://schemas.microsoft.com/office/2006/coverPageProps" xmlns:odx="http://opendope.org/xpaths" xmlns:odc="http://opendope.org/conditions" xmlns:odq="http://opendope.org/questions" xmlns:oda="http://opendope.org/answers" xmlns:odi="http://opendope.org/components" xmlns:odgm="http://opendope.org/SmartArt/DataHierarchy" xmlns:b="http://schemas.openxmlformats.org/officeDocument/2006/bibliography" xmlns:wps="http://schemas.microsoft.com/office/word/2010/wordprocessingShape" xmlns:w16se="http://schemas.microsoft.com/office/word/2015/wordml/symex" xmlns:w16cid="http://schemas.microsoft.com/office/word/2016/wordml/cid" xmlns:wetp="http://schemas.microsoft.com/office/webextensions/taskpanes/2010/11" xmlns:we="http://schemas.microsoft.com/office/webextensions/webextension/2010/11" xmlns:comp="http://schemas.openxmlformats.org/drawingml/2006/compatibility" xmlns:lc="http://schemas.openxmlformats.org/drawingml/2006/lockedCanvas">
       <c:ext xmlns:c16r3="http://schemas.microsoft.com/office/drawing/2017/03/chart" uri="{56B9EC1D-385E-4148-901F-78D8002777C0}">
         <c16r3:dataDisplayOptions16>
           <c16r3:dispNaAsBlank val="1"/>
         </c16r3:dataDisplayOptions16>
       </c:ext>
     </c:extLst>
+    <c:showDLblsOverMax val="0"/>
   </c:chart>
   <c:spPr>
     <a:noFill/>
@@ -2217,7 +2217,7 @@
                 </a:outerShdw>
               </a:effectLst>
             </c:spPr>
-            <c:extLst xmlns:w="http://schemas.openxmlformats.org/wordprocessingml/2006/main" xmlns:w15="http://schemas.microsoft.com/office/word/2012/wordml" xmlns:w14="http://schemas.microsoft.com/office/word/2010/wordml" xmlns:m="http://schemas.openxmlformats.org/officeDocument/2006/math" xmlns:wp="http://schemas.openxmlformats.org/drawingml/2006/wordprocessingDrawing" xmlns:wp14="http://schemas.microsoft.com/office/word/2010/wordprocessingDrawing" xmlns:mc="http://schemas.openxmlformats.org/markup-compatibility/2006" xmlns:sl="http://schemas.openxmlformats.org/schemaLibrary/2006/main" xmlns:wne="http://schemas.microsoft.com/office/word/2006/wordml" xmlns:cdr="http://schemas.openxmlformats.org/drawingml/2006/chartDrawing" xmlns:c14="http://schemas.microsoft.com/office/drawing/2007/8/2/chart" xmlns:dgm="http://schemas.openxmlformats.org/drawingml/2006/diagram" xmlns:pic="http://schemas.openxmlformats.org/drawingml/2006/picture" xmlns:xdr="http://schemas.openxmlformats.org/drawingml/2006/spreadsheetDrawing" xmlns:dsp="http://schemas.microsoft.com/office/drawing/2008/diagram" xmlns:xvml="urn:schemas-microsoft-com:office:excel" xmlns:o="urn:schemas-microsoft-com:office:office" xmlns:v="urn:schemas-microsoft-com:vml" xmlns:w10="urn:schemas-microsoft-com:office:word" xmlns:pvml="urn:schemas-microsoft-com:office:powerpoint" xmlns:cppr="http://schemas.microsoft.com/office/2006/coverPageProps" xmlns:odx="http://opendope.org/xpaths" xmlns:odc="http://opendope.org/conditions" xmlns:odq="http://opendope.org/questions" xmlns:oda="http://opendope.org/answers" xmlns:odi="http://opendope.org/components" xmlns:odgm="http://opendope.org/SmartArt/DataHierarchy" xmlns:b="http://schemas.openxmlformats.org/officeDocument/2006/bibliography" xmlns:wps="http://schemas.microsoft.com/office/word/2010/wordprocessingShape" xmlns:w16se="http://schemas.microsoft.com/office/word/2015/wordml/symex" xmlns:w16cid="http://schemas.microsoft.com/office/word/2016/wordml/cid" xmlns:wetp="http://schemas.microsoft.com/office/webextensions/taskpanes/2010/11" xmlns:we="http://schemas.microsoft.com/office/webextensions/webextension/2010/11" xmlns:comp="http://schemas.openxmlformats.org/drawingml/2006/compatibility" xmlns:lc="http://schemas.openxmlformats.org/drawingml/2006/lockedCanvas">
+            <c:extLst xmlns:lc="http://schemas.openxmlformats.org/drawingml/2006/lockedCanvas" xmlns:comp="http://schemas.openxmlformats.org/drawingml/2006/compatibility" xmlns:we="http://schemas.microsoft.com/office/webextensions/webextension/2010/11" xmlns:wetp="http://schemas.microsoft.com/office/webextensions/taskpanes/2010/11" xmlns:w16cid="http://schemas.microsoft.com/office/word/2016/wordml/cid" xmlns:w16se="http://schemas.microsoft.com/office/word/2015/wordml/symex" xmlns:wps="http://schemas.microsoft.com/office/word/2010/wordprocessingShape" xmlns:b="http://schemas.openxmlformats.org/officeDocument/2006/bibliography" xmlns:odgm="http://opendope.org/SmartArt/DataHierarchy" xmlns:odi="http://opendope.org/components" xmlns:oda="http://opendope.org/answers" xmlns:odq="http://opendope.org/questions" xmlns:odc="http://opendope.org/conditions" xmlns:odx="http://opendope.org/xpaths" xmlns:cppr="http://schemas.microsoft.com/office/2006/coverPageProps" xmlns:pvml="urn:schemas-microsoft-com:office:powerpoint" xmlns:w10="urn:schemas-microsoft-com:office:word" xmlns:v="urn:schemas-microsoft-com:vml" xmlns:o="urn:schemas-microsoft-com:office:office" xmlns:xvml="urn:schemas-microsoft-com:office:excel" xmlns:dsp="http://schemas.microsoft.com/office/drawing/2008/diagram" xmlns:xdr="http://schemas.openxmlformats.org/drawingml/2006/spreadsheetDrawing" xmlns:pic="http://schemas.openxmlformats.org/drawingml/2006/picture" xmlns:dgm="http://schemas.openxmlformats.org/drawingml/2006/diagram" xmlns:c14="http://schemas.microsoft.com/office/drawing/2007/8/2/chart" xmlns:cdr="http://schemas.openxmlformats.org/drawingml/2006/chartDrawing" xmlns:wne="http://schemas.microsoft.com/office/word/2006/wordml" xmlns:sl="http://schemas.openxmlformats.org/schemaLibrary/2006/main" xmlns:mc="http://schemas.openxmlformats.org/markup-compatibility/2006" xmlns:wp14="http://schemas.microsoft.com/office/word/2010/wordprocessingDrawing" xmlns:wp="http://schemas.openxmlformats.org/drawingml/2006/wordprocessingDrawing" xmlns:m="http://schemas.openxmlformats.org/officeDocument/2006/math" xmlns:w14="http://schemas.microsoft.com/office/word/2010/wordml" xmlns:w15="http://schemas.microsoft.com/office/word/2012/wordml" xmlns:w="http://schemas.openxmlformats.org/wordprocessingml/2006/main">
               <c:ext xmlns:c16="http://schemas.microsoft.com/office/drawing/2014/chart" uri="{C3380CC4-5D6E-409C-BE32-E72D297353CC}">
                 <c16:uniqueId val="{00000001-6147-E74A-AA7B-5531F0E4EE0C}"/>
               </c:ext>
@@ -2274,10 +2274,10 @@
                 <c:formatCode>General</c:formatCode>
                 <c:ptCount val="12"/>
                 <c:pt idx="0">
-                  <c:v>44.839857651245552</c:v>
+                  <c:v>44.83985765124555</c:v>
                 </c:pt>
                 <c:pt idx="1">
-                  <c:v>44.602609727164889</c:v>
+                  <c:v>44.60260972716489</c:v>
                 </c:pt>
                 <c:pt idx="2">
                   <c:v>45.195729537366546</c:v>
@@ -2298,13 +2298,13 @@
                   <c:v>46.500593119810205</c:v>
                 </c:pt>
                 <c:pt idx="8">
-                  <c:v>46.856465005931199</c:v>
+                  <c:v>46.8564650059312</c:v>
                 </c:pt>
                 <c:pt idx="9">
-                  <c:v>46.856465005931199</c:v>
+                  <c:v>46.8564650059312</c:v>
                 </c:pt>
                 <c:pt idx="10">
-                  <c:v>46.026097271648872</c:v>
+                  <c:v>46.02609727164887</c:v>
                 </c:pt>
                 <c:pt idx="11">
                   <c:v>46.144721233689204</c:v>
@@ -2312,7 +2312,7 @@
               </c:numCache>
             </c:numRef>
           </c:val>
-          <c:extLst xmlns:w="http://schemas.openxmlformats.org/wordprocessingml/2006/main" xmlns:w15="http://schemas.microsoft.com/office/word/2012/wordml" xmlns:w14="http://schemas.microsoft.com/office/word/2010/wordml" xmlns:m="http://schemas.openxmlformats.org/officeDocument/2006/math" xmlns:wp="http://schemas.openxmlformats.org/drawingml/2006/wordprocessingDrawing" xmlns:wp14="http://schemas.microsoft.com/office/word/2010/wordprocessingDrawing" xmlns:mc="http://schemas.openxmlformats.org/markup-compatibility/2006" xmlns:sl="http://schemas.openxmlformats.org/schemaLibrary/2006/main" xmlns:wne="http://schemas.microsoft.com/office/word/2006/wordml" xmlns:cdr="http://schemas.openxmlformats.org/drawingml/2006/chartDrawing" xmlns:c14="http://schemas.microsoft.com/office/drawing/2007/8/2/chart" xmlns:dgm="http://schemas.openxmlformats.org/drawingml/2006/diagram" xmlns:pic="http://schemas.openxmlformats.org/drawingml/2006/picture" xmlns:xdr="http://schemas.openxmlformats.org/drawingml/2006/spreadsheetDrawing" xmlns:dsp="http://schemas.microsoft.com/office/drawing/2008/diagram" xmlns:xvml="urn:schemas-microsoft-com:office:excel" xmlns:o="urn:schemas-microsoft-com:office:office" xmlns:v="urn:schemas-microsoft-com:vml" xmlns:w10="urn:schemas-microsoft-com:office:word" xmlns:pvml="urn:schemas-microsoft-com:office:powerpoint" xmlns:cppr="http://schemas.microsoft.com/office/2006/coverPageProps" xmlns:odx="http://opendope.org/xpaths" xmlns:odc="http://opendope.org/conditions" xmlns:odq="http://opendope.org/questions" xmlns:oda="http://opendope.org/answers" xmlns:odi="http://opendope.org/components" xmlns:odgm="http://opendope.org/SmartArt/DataHierarchy" xmlns:b="http://schemas.openxmlformats.org/officeDocument/2006/bibliography" xmlns:wps="http://schemas.microsoft.com/office/word/2010/wordprocessingShape" xmlns:w16se="http://schemas.microsoft.com/office/word/2015/wordml/symex" xmlns:w16cid="http://schemas.microsoft.com/office/word/2016/wordml/cid" xmlns:wetp="http://schemas.microsoft.com/office/webextensions/taskpanes/2010/11" xmlns:we="http://schemas.microsoft.com/office/webextensions/webextension/2010/11" xmlns:comp="http://schemas.openxmlformats.org/drawingml/2006/compatibility" xmlns:lc="http://schemas.openxmlformats.org/drawingml/2006/lockedCanvas">
+          <c:extLst xmlns:lc="http://schemas.openxmlformats.org/drawingml/2006/lockedCanvas" xmlns:comp="http://schemas.openxmlformats.org/drawingml/2006/compatibility" xmlns:we="http://schemas.microsoft.com/office/webextensions/webextension/2010/11" xmlns:wetp="http://schemas.microsoft.com/office/webextensions/taskpanes/2010/11" xmlns:w16cid="http://schemas.microsoft.com/office/word/2016/wordml/cid" xmlns:w16se="http://schemas.microsoft.com/office/word/2015/wordml/symex" xmlns:wps="http://schemas.microsoft.com/office/word/2010/wordprocessingShape" xmlns:b="http://schemas.openxmlformats.org/officeDocument/2006/bibliography" xmlns:odgm="http://opendope.org/SmartArt/DataHierarchy" xmlns:odi="http://opendope.org/components" xmlns:oda="http://opendope.org/answers" xmlns:odq="http://opendope.org/questions" xmlns:odc="http://opendope.org/conditions" xmlns:odx="http://opendope.org/xpaths" xmlns:cppr="http://schemas.microsoft.com/office/2006/coverPageProps" xmlns:pvml="urn:schemas-microsoft-com:office:powerpoint" xmlns:w10="urn:schemas-microsoft-com:office:word" xmlns:v="urn:schemas-microsoft-com:vml" xmlns:o="urn:schemas-microsoft-com:office:office" xmlns:xvml="urn:schemas-microsoft-com:office:excel" xmlns:dsp="http://schemas.microsoft.com/office/drawing/2008/diagram" xmlns:xdr="http://schemas.openxmlformats.org/drawingml/2006/spreadsheetDrawing" xmlns:pic="http://schemas.openxmlformats.org/drawingml/2006/picture" xmlns:dgm="http://schemas.openxmlformats.org/drawingml/2006/diagram" xmlns:c14="http://schemas.microsoft.com/office/drawing/2007/8/2/chart" xmlns:cdr="http://schemas.openxmlformats.org/drawingml/2006/chartDrawing" xmlns:wne="http://schemas.microsoft.com/office/word/2006/wordml" xmlns:sl="http://schemas.openxmlformats.org/schemaLibrary/2006/main" xmlns:mc="http://schemas.openxmlformats.org/markup-compatibility/2006" xmlns:wp14="http://schemas.microsoft.com/office/word/2010/wordprocessingDrawing" xmlns:wp="http://schemas.openxmlformats.org/drawingml/2006/wordprocessingDrawing" xmlns:m="http://schemas.openxmlformats.org/officeDocument/2006/math" xmlns:w14="http://schemas.microsoft.com/office/word/2010/wordml" xmlns:w15="http://schemas.microsoft.com/office/word/2012/wordml" xmlns:w="http://schemas.openxmlformats.org/wordprocessingml/2006/main">
             <c:ext xmlns:c16="http://schemas.microsoft.com/office/drawing/2014/chart" uri="{C3380CC4-5D6E-409C-BE32-E72D297353CC}">
               <c16:uniqueId val="{00000002-6147-E74A-AA7B-5531F0E4EE0C}"/>
             </c:ext>
@@ -2396,7 +2396,7 @@
                   <c:v>0.35587188612099646</c:v>
                 </c:pt>
                 <c:pt idx="1">
-                  <c:v>0.47449584816132861</c:v>
+                  <c:v>0.4744958481613286</c:v>
                 </c:pt>
                 <c:pt idx="2">
                   <c:v>0.11862396204033215</c:v>
@@ -2408,25 +2408,25 @@
                   <c:v>1.7793594306049823</c:v>
                 </c:pt>
                 <c:pt idx="5">
-                  <c:v>0.83036773428232502</c:v>
+                  <c:v>0.830367734282325</c:v>
                 </c:pt>
                 <c:pt idx="6">
-                  <c:v>0.71174377224199292</c:v>
+                  <c:v>0.7117437722419929</c:v>
                 </c:pt>
                 <c:pt idx="7">
                   <c:v>2.6097271648873073</c:v>
                 </c:pt>
                 <c:pt idx="8">
-                  <c:v>0.94899169632265723</c:v>
+                  <c:v>0.9489916963226572</c:v>
                 </c:pt>
                 <c:pt idx="9">
                   <c:v>1.0676156583629892</c:v>
                 </c:pt>
                 <c:pt idx="10">
-                  <c:v>0.23724792408066431</c:v>
+                  <c:v>0.2372479240806643</c:v>
                 </c:pt>
                 <c:pt idx="11">
-                  <c:v>0.94899169632265723</c:v>
+                  <c:v>0.9489916963226572</c:v>
                 </c:pt>
               </c:numCache>
             </c:numRef>
@@ -2521,10 +2521,10 @@
                   <c:v>36.29893238434164</c:v>
                 </c:pt>
                 <c:pt idx="3">
-                  <c:v>38.908659549228943</c:v>
+                  <c:v>38.90865954922894</c:v>
                 </c:pt>
                 <c:pt idx="4">
-                  <c:v>37.722419928825623</c:v>
+                  <c:v>37.72241992882562</c:v>
                 </c:pt>
                 <c:pt idx="5">
                   <c:v>41.755634638196916</c:v>
@@ -2533,19 +2533,19 @@
                   <c:v>41.755634638196916</c:v>
                 </c:pt>
                 <c:pt idx="7">
-                  <c:v>37.722419928825623</c:v>
+                  <c:v>37.72241992882562</c:v>
                 </c:pt>
                 <c:pt idx="8">
-                  <c:v>42.941874258600237</c:v>
+                  <c:v>42.94187425860024</c:v>
                 </c:pt>
                 <c:pt idx="9">
                   <c:v>42.823250296559905</c:v>
                 </c:pt>
                 <c:pt idx="10">
-                  <c:v>43.772241992882563</c:v>
+                  <c:v>43.77224199288256</c:v>
                 </c:pt>
                 <c:pt idx="11">
-                  <c:v>43.653618030842232</c:v>
+                  <c:v>43.65361803084223</c:v>
                 </c:pt>
               </c:numCache>
             </c:numRef>
@@ -2631,34 +2631,34 @@
                 <c:formatCode>General</c:formatCode>
                 <c:ptCount val="12"/>
                 <c:pt idx="0">
-                  <c:v>0.59311981020166071</c:v>
+                  <c:v>0.5931198102016607</c:v>
                 </c:pt>
                 <c:pt idx="1">
                   <c:v>0.35587188612099646</c:v>
                 </c:pt>
                 <c:pt idx="2">
-                  <c:v>2.9655990510083039</c:v>
+                  <c:v>2.965599051008304</c:v>
                 </c:pt>
                 <c:pt idx="3">
                   <c:v>1.66073546856465</c:v>
                 </c:pt>
                 <c:pt idx="4">
-                  <c:v>3.3214709371293001</c:v>
+                  <c:v>3.3214709371293</c:v>
                 </c:pt>
                 <c:pt idx="5">
                   <c:v>1.0676156583629892</c:v>
                 </c:pt>
                 <c:pt idx="6">
-                  <c:v>0.94899169632265723</c:v>
+                  <c:v>0.9489916963226572</c:v>
                 </c:pt>
                 <c:pt idx="7">
-                  <c:v>4.5077105575326213</c:v>
+                  <c:v>4.507710557532621</c:v>
                 </c:pt>
                 <c:pt idx="8">
-                  <c:v>0.83036773428232502</c:v>
+                  <c:v>0.830367734282325</c:v>
                 </c:pt>
                 <c:pt idx="9">
-                  <c:v>0.71174377224199292</c:v>
+                  <c:v>0.7117437722419929</c:v>
                 </c:pt>
                 <c:pt idx="10">
                   <c:v>1.66073546856465</c:v>
@@ -2767,25 +2767,25 @@
                   <c:v>10.794780545670225</c:v>
                 </c:pt>
                 <c:pt idx="5">
-                  <c:v>9.9644128113879002</c:v>
+                  <c:v>9.9644128113879</c:v>
                 </c:pt>
                 <c:pt idx="6">
                   <c:v>10.201660735468565</c:v>
                 </c:pt>
                 <c:pt idx="7">
-                  <c:v>8.6595492289442468</c:v>
+                  <c:v>8.659549228944247</c:v>
                 </c:pt>
                 <c:pt idx="8">
-                  <c:v>8.4223013048635824</c:v>
+                  <c:v>8.422301304863582</c:v>
                 </c:pt>
                 <c:pt idx="9">
-                  <c:v>8.5409252669039137</c:v>
+                  <c:v>8.540925266903914</c:v>
                 </c:pt>
                 <c:pt idx="10">
-                  <c:v>8.3036773428232511</c:v>
+                  <c:v>8.303677342823251</c:v>
                 </c:pt>
                 <c:pt idx="11">
-                  <c:v>7.8291814946619214</c:v>
+                  <c:v>7.829181494661921</c:v>
                 </c:pt>
               </c:numCache>
             </c:numRef>
@@ -2922,14 +2922,14 @@
     </c:plotArea>
     <c:plotVisOnly val="1"/>
     <c:dispBlanksAs val="gap"/>
-    <c:showDLblsOverMax val="0"/>
-    <c:extLst xmlns:w="http://schemas.openxmlformats.org/wordprocessingml/2006/main" xmlns:w15="http://schemas.microsoft.com/office/word/2012/wordml" xmlns:w14="http://schemas.microsoft.com/office/word/2010/wordml" xmlns:m="http://schemas.openxmlformats.org/officeDocument/2006/math" xmlns:wp="http://schemas.openxmlformats.org/drawingml/2006/wordprocessingDrawing" xmlns:wp14="http://schemas.microsoft.com/office/word/2010/wordprocessingDrawing" xmlns:mc="http://schemas.openxmlformats.org/markup-compatibility/2006" xmlns:sl="http://schemas.openxmlformats.org/schemaLibrary/2006/main" xmlns:wne="http://schemas.microsoft.com/office/word/2006/wordml" xmlns:cdr="http://schemas.openxmlformats.org/drawingml/2006/chartDrawing" xmlns:c14="http://schemas.microsoft.com/office/drawing/2007/8/2/chart" xmlns:dgm="http://schemas.openxmlformats.org/drawingml/2006/diagram" xmlns:pic="http://schemas.openxmlformats.org/drawingml/2006/picture" xmlns:xdr="http://schemas.openxmlformats.org/drawingml/2006/spreadsheetDrawing" xmlns:dsp="http://schemas.microsoft.com/office/drawing/2008/diagram" xmlns:xvml="urn:schemas-microsoft-com:office:excel" xmlns:o="urn:schemas-microsoft-com:office:office" xmlns:v="urn:schemas-microsoft-com:vml" xmlns:w10="urn:schemas-microsoft-com:office:word" xmlns:pvml="urn:schemas-microsoft-com:office:powerpoint" xmlns:cppr="http://schemas.microsoft.com/office/2006/coverPageProps" xmlns:odx="http://opendope.org/xpaths" xmlns:odc="http://opendope.org/conditions" xmlns:odq="http://opendope.org/questions" xmlns:oda="http://opendope.org/answers" xmlns:odi="http://opendope.org/components" xmlns:odgm="http://opendope.org/SmartArt/DataHierarchy" xmlns:b="http://schemas.openxmlformats.org/officeDocument/2006/bibliography" xmlns:wps="http://schemas.microsoft.com/office/word/2010/wordprocessingShape" xmlns:w16se="http://schemas.microsoft.com/office/word/2015/wordml/symex" xmlns:w16cid="http://schemas.microsoft.com/office/word/2016/wordml/cid" xmlns:wetp="http://schemas.microsoft.com/office/webextensions/taskpanes/2010/11" xmlns:we="http://schemas.microsoft.com/office/webextensions/webextension/2010/11" xmlns:comp="http://schemas.openxmlformats.org/drawingml/2006/compatibility" xmlns:lc="http://schemas.openxmlformats.org/drawingml/2006/lockedCanvas">
+    <c:extLst xmlns:lc="http://schemas.openxmlformats.org/drawingml/2006/lockedCanvas" xmlns:comp="http://schemas.openxmlformats.org/drawingml/2006/compatibility" xmlns:we="http://schemas.microsoft.com/office/webextensions/webextension/2010/11" xmlns:wetp="http://schemas.microsoft.com/office/webextensions/taskpanes/2010/11" xmlns:w16cid="http://schemas.microsoft.com/office/word/2016/wordml/cid" xmlns:w16se="http://schemas.microsoft.com/office/word/2015/wordml/symex" xmlns:wps="http://schemas.microsoft.com/office/word/2010/wordprocessingShape" xmlns:b="http://schemas.openxmlformats.org/officeDocument/2006/bibliography" xmlns:odgm="http://opendope.org/SmartArt/DataHierarchy" xmlns:odi="http://opendope.org/components" xmlns:oda="http://opendope.org/answers" xmlns:odq="http://opendope.org/questions" xmlns:odc="http://opendope.org/conditions" xmlns:odx="http://opendope.org/xpaths" xmlns:cppr="http://schemas.microsoft.com/office/2006/coverPageProps" xmlns:pvml="urn:schemas-microsoft-com:office:powerpoint" xmlns:w10="urn:schemas-microsoft-com:office:word" xmlns:v="urn:schemas-microsoft-com:vml" xmlns:o="urn:schemas-microsoft-com:office:office" xmlns:xvml="urn:schemas-microsoft-com:office:excel" xmlns:dsp="http://schemas.microsoft.com/office/drawing/2008/diagram" xmlns:xdr="http://schemas.openxmlformats.org/drawingml/2006/spreadsheetDrawing" xmlns:pic="http://schemas.openxmlformats.org/drawingml/2006/picture" xmlns:dgm="http://schemas.openxmlformats.org/drawingml/2006/diagram" xmlns:c14="http://schemas.microsoft.com/office/drawing/2007/8/2/chart" xmlns:cdr="http://schemas.openxmlformats.org/drawingml/2006/chartDrawing" xmlns:wne="http://schemas.microsoft.com/office/word/2006/wordml" xmlns:sl="http://schemas.openxmlformats.org/schemaLibrary/2006/main" xmlns:mc="http://schemas.openxmlformats.org/markup-compatibility/2006" xmlns:wp14="http://schemas.microsoft.com/office/word/2010/wordprocessingDrawing" xmlns:wp="http://schemas.openxmlformats.org/drawingml/2006/wordprocessingDrawing" xmlns:m="http://schemas.openxmlformats.org/officeDocument/2006/math" xmlns:w14="http://schemas.microsoft.com/office/word/2010/wordml" xmlns:w15="http://schemas.microsoft.com/office/word/2012/wordml" xmlns:w="http://schemas.openxmlformats.org/wordprocessingml/2006/main">
       <c:ext xmlns:c16r3="http://schemas.microsoft.com/office/drawing/2017/03/chart" uri="{56B9EC1D-385E-4148-901F-78D8002777C0}">
         <c16r3:dataDisplayOptions16>
           <c16r3:dispNaAsBlank val="1"/>
         </c16r3:dataDisplayOptions16>
       </c:ext>
     </c:extLst>
+    <c:showDLblsOverMax val="0"/>
   </c:chart>
   <c:spPr>
     <a:noFill/>
@@ -3025,7 +3025,7 @@
                 </a:outerShdw>
               </a:effectLst>
             </c:spPr>
-            <c:extLst xmlns:w="http://schemas.openxmlformats.org/wordprocessingml/2006/main" xmlns:w15="http://schemas.microsoft.com/office/word/2012/wordml" xmlns:w14="http://schemas.microsoft.com/office/word/2010/wordml" xmlns:m="http://schemas.openxmlformats.org/officeDocument/2006/math" xmlns:wp="http://schemas.openxmlformats.org/drawingml/2006/wordprocessingDrawing" xmlns:wp14="http://schemas.microsoft.com/office/word/2010/wordprocessingDrawing" xmlns:mc="http://schemas.openxmlformats.org/markup-compatibility/2006" xmlns:sl="http://schemas.openxmlformats.org/schemaLibrary/2006/main" xmlns:wne="http://schemas.microsoft.com/office/word/2006/wordml" xmlns:cdr="http://schemas.openxmlformats.org/drawingml/2006/chartDrawing" xmlns:c14="http://schemas.microsoft.com/office/drawing/2007/8/2/chart" xmlns:dgm="http://schemas.openxmlformats.org/drawingml/2006/diagram" xmlns:pic="http://schemas.openxmlformats.org/drawingml/2006/picture" xmlns:xdr="http://schemas.openxmlformats.org/drawingml/2006/spreadsheetDrawing" xmlns:dsp="http://schemas.microsoft.com/office/drawing/2008/diagram" xmlns:xvml="urn:schemas-microsoft-com:office:excel" xmlns:o="urn:schemas-microsoft-com:office:office" xmlns:v="urn:schemas-microsoft-com:vml" xmlns:w10="urn:schemas-microsoft-com:office:word" xmlns:pvml="urn:schemas-microsoft-com:office:powerpoint" xmlns:cppr="http://schemas.microsoft.com/office/2006/coverPageProps" xmlns:odx="http://opendope.org/xpaths" xmlns:odc="http://opendope.org/conditions" xmlns:odq="http://opendope.org/questions" xmlns:oda="http://opendope.org/answers" xmlns:odi="http://opendope.org/components" xmlns:odgm="http://opendope.org/SmartArt/DataHierarchy" xmlns:b="http://schemas.openxmlformats.org/officeDocument/2006/bibliography" xmlns:wps="http://schemas.microsoft.com/office/word/2010/wordprocessingShape" xmlns:w16se="http://schemas.microsoft.com/office/word/2015/wordml/symex" xmlns:w16cid="http://schemas.microsoft.com/office/word/2016/wordml/cid" xmlns:wetp="http://schemas.microsoft.com/office/webextensions/taskpanes/2010/11" xmlns:we="http://schemas.microsoft.com/office/webextensions/webextension/2010/11" xmlns:comp="http://schemas.openxmlformats.org/drawingml/2006/compatibility" xmlns:lc="http://schemas.openxmlformats.org/drawingml/2006/lockedCanvas">
+            <c:extLst xmlns:lc="http://schemas.openxmlformats.org/drawingml/2006/lockedCanvas" xmlns:comp="http://schemas.openxmlformats.org/drawingml/2006/compatibility" xmlns:we="http://schemas.microsoft.com/office/webextensions/webextension/2010/11" xmlns:wetp="http://schemas.microsoft.com/office/webextensions/taskpanes/2010/11" xmlns:w16cid="http://schemas.microsoft.com/office/word/2016/wordml/cid" xmlns:w16se="http://schemas.microsoft.com/office/word/2015/wordml/symex" xmlns:wps="http://schemas.microsoft.com/office/word/2010/wordprocessingShape" xmlns:b="http://schemas.openxmlformats.org/officeDocument/2006/bibliography" xmlns:odgm="http://opendope.org/SmartArt/DataHierarchy" xmlns:odi="http://opendope.org/components" xmlns:oda="http://opendope.org/answers" xmlns:odq="http://opendope.org/questions" xmlns:odc="http://opendope.org/conditions" xmlns:odx="http://opendope.org/xpaths" xmlns:cppr="http://schemas.microsoft.com/office/2006/coverPageProps" xmlns:pvml="urn:schemas-microsoft-com:office:powerpoint" xmlns:w10="urn:schemas-microsoft-com:office:word" xmlns:v="urn:schemas-microsoft-com:vml" xmlns:o="urn:schemas-microsoft-com:office:office" xmlns:xvml="urn:schemas-microsoft-com:office:excel" xmlns:dsp="http://schemas.microsoft.com/office/drawing/2008/diagram" xmlns:xdr="http://schemas.openxmlformats.org/drawingml/2006/spreadsheetDrawing" xmlns:pic="http://schemas.openxmlformats.org/drawingml/2006/picture" xmlns:dgm="http://schemas.openxmlformats.org/drawingml/2006/diagram" xmlns:c14="http://schemas.microsoft.com/office/drawing/2007/8/2/chart" xmlns:cdr="http://schemas.openxmlformats.org/drawingml/2006/chartDrawing" xmlns:wne="http://schemas.microsoft.com/office/word/2006/wordml" xmlns:sl="http://schemas.openxmlformats.org/schemaLibrary/2006/main" xmlns:mc="http://schemas.openxmlformats.org/markup-compatibility/2006" xmlns:wp14="http://schemas.microsoft.com/office/word/2010/wordprocessingDrawing" xmlns:wp="http://schemas.openxmlformats.org/drawingml/2006/wordprocessingDrawing" xmlns:m="http://schemas.openxmlformats.org/officeDocument/2006/math" xmlns:w14="http://schemas.microsoft.com/office/word/2010/wordml" xmlns:w15="http://schemas.microsoft.com/office/word/2012/wordml" xmlns:w="http://schemas.openxmlformats.org/wordprocessingml/2006/main">
               <c:ext xmlns:c16="http://schemas.microsoft.com/office/drawing/2014/chart" uri="{C3380CC4-5D6E-409C-BE32-E72D297353CC}">
                 <c16:uniqueId val="{00000001-6147-E74A-AA7B-5531F0E4EE0C}"/>
               </c:ext>
@@ -3100,16 +3100,16 @@
                   <c:v>35.526315789473685</c:v>
                 </c:pt>
                 <c:pt idx="6">
-                  <c:v>36.842105263157897</c:v>
+                  <c:v>36.8421052631579</c:v>
                 </c:pt>
                 <c:pt idx="7">
-                  <c:v>38.157894736842103</c:v>
+                  <c:v>38.1578947368421</c:v>
                 </c:pt>
                 <c:pt idx="8">
-                  <c:v>38.157894736842103</c:v>
+                  <c:v>38.1578947368421</c:v>
                 </c:pt>
                 <c:pt idx="9">
-                  <c:v>38.157894736842103</c:v>
+                  <c:v>38.1578947368421</c:v>
                 </c:pt>
                 <c:pt idx="10">
                   <c:v>32.89473684210526</c:v>
@@ -3120,7 +3120,7 @@
               </c:numCache>
             </c:numRef>
           </c:val>
-          <c:extLst xmlns:w="http://schemas.openxmlformats.org/wordprocessingml/2006/main" xmlns:w15="http://schemas.microsoft.com/office/word/2012/wordml" xmlns:w14="http://schemas.microsoft.com/office/word/2010/wordml" xmlns:m="http://schemas.openxmlformats.org/officeDocument/2006/math" xmlns:wp="http://schemas.openxmlformats.org/drawingml/2006/wordprocessingDrawing" xmlns:wp14="http://schemas.microsoft.com/office/word/2010/wordprocessingDrawing" xmlns:mc="http://schemas.openxmlformats.org/markup-compatibility/2006" xmlns:sl="http://schemas.openxmlformats.org/schemaLibrary/2006/main" xmlns:wne="http://schemas.microsoft.com/office/word/2006/wordml" xmlns:cdr="http://schemas.openxmlformats.org/drawingml/2006/chartDrawing" xmlns:c14="http://schemas.microsoft.com/office/drawing/2007/8/2/chart" xmlns:dgm="http://schemas.openxmlformats.org/drawingml/2006/diagram" xmlns:pic="http://schemas.openxmlformats.org/drawingml/2006/picture" xmlns:xdr="http://schemas.openxmlformats.org/drawingml/2006/spreadsheetDrawing" xmlns:dsp="http://schemas.microsoft.com/office/drawing/2008/diagram" xmlns:xvml="urn:schemas-microsoft-com:office:excel" xmlns:o="urn:schemas-microsoft-com:office:office" xmlns:v="urn:schemas-microsoft-com:vml" xmlns:w10="urn:schemas-microsoft-com:office:word" xmlns:pvml="urn:schemas-microsoft-com:office:powerpoint" xmlns:cppr="http://schemas.microsoft.com/office/2006/coverPageProps" xmlns:odx="http://opendope.org/xpaths" xmlns:odc="http://opendope.org/conditions" xmlns:odq="http://opendope.org/questions" xmlns:oda="http://opendope.org/answers" xmlns:odi="http://opendope.org/components" xmlns:odgm="http://opendope.org/SmartArt/DataHierarchy" xmlns:b="http://schemas.openxmlformats.org/officeDocument/2006/bibliography" xmlns:wps="http://schemas.microsoft.com/office/word/2010/wordprocessingShape" xmlns:w16se="http://schemas.microsoft.com/office/word/2015/wordml/symex" xmlns:w16cid="http://schemas.microsoft.com/office/word/2016/wordml/cid" xmlns:wetp="http://schemas.microsoft.com/office/webextensions/taskpanes/2010/11" xmlns:we="http://schemas.microsoft.com/office/webextensions/webextension/2010/11" xmlns:comp="http://schemas.openxmlformats.org/drawingml/2006/compatibility" xmlns:lc="http://schemas.openxmlformats.org/drawingml/2006/lockedCanvas">
+          <c:extLst xmlns:lc="http://schemas.openxmlformats.org/drawingml/2006/lockedCanvas" xmlns:comp="http://schemas.openxmlformats.org/drawingml/2006/compatibility" xmlns:we="http://schemas.microsoft.com/office/webextensions/webextension/2010/11" xmlns:wetp="http://schemas.microsoft.com/office/webextensions/taskpanes/2010/11" xmlns:w16cid="http://schemas.microsoft.com/office/word/2016/wordml/cid" xmlns:w16se="http://schemas.microsoft.com/office/word/2015/wordml/symex" xmlns:wps="http://schemas.microsoft.com/office/word/2010/wordprocessingShape" xmlns:b="http://schemas.openxmlformats.org/officeDocument/2006/bibliography" xmlns:odgm="http://opendope.org/SmartArt/DataHierarchy" xmlns:odi="http://opendope.org/components" xmlns:oda="http://opendope.org/answers" xmlns:odq="http://opendope.org/questions" xmlns:odc="http://opendope.org/conditions" xmlns:odx="http://opendope.org/xpaths" xmlns:cppr="http://schemas.microsoft.com/office/2006/coverPageProps" xmlns:pvml="urn:schemas-microsoft-com:office:powerpoint" xmlns:w10="urn:schemas-microsoft-com:office:word" xmlns:v="urn:schemas-microsoft-com:vml" xmlns:o="urn:schemas-microsoft-com:office:office" xmlns:xvml="urn:schemas-microsoft-com:office:excel" xmlns:dsp="http://schemas.microsoft.com/office/drawing/2008/diagram" xmlns:xdr="http://schemas.openxmlformats.org/drawingml/2006/spreadsheetDrawing" xmlns:pic="http://schemas.openxmlformats.org/drawingml/2006/picture" xmlns:dgm="http://schemas.openxmlformats.org/drawingml/2006/diagram" xmlns:c14="http://schemas.microsoft.com/office/drawing/2007/8/2/chart" xmlns:cdr="http://schemas.openxmlformats.org/drawingml/2006/chartDrawing" xmlns:wne="http://schemas.microsoft.com/office/word/2006/wordml" xmlns:sl="http://schemas.openxmlformats.org/schemaLibrary/2006/main" xmlns:mc="http://schemas.openxmlformats.org/markup-compatibility/2006" xmlns:wp14="http://schemas.microsoft.com/office/word/2010/wordprocessingDrawing" xmlns:wp="http://schemas.openxmlformats.org/drawingml/2006/wordprocessingDrawing" xmlns:m="http://schemas.openxmlformats.org/officeDocument/2006/math" xmlns:w14="http://schemas.microsoft.com/office/word/2010/wordml" xmlns:w15="http://schemas.microsoft.com/office/word/2012/wordml" xmlns:w="http://schemas.openxmlformats.org/wordprocessingml/2006/main">
             <c:ext xmlns:c16="http://schemas.microsoft.com/office/drawing/2014/chart" uri="{C3380CC4-5D6E-409C-BE32-E72D297353CC}">
               <c16:uniqueId val="{00000002-6147-E74A-AA7B-5531F0E4EE0C}"/>
             </c:ext>
@@ -3201,40 +3201,40 @@
                 <c:formatCode>General</c:formatCode>
                 <c:ptCount val="12"/>
                 <c:pt idx="0">
-                  <c:v>0</c:v>
+                  <c:v>0.0</c:v>
                 </c:pt>
                 <c:pt idx="1">
-                  <c:v>0</c:v>
+                  <c:v>0.0</c:v>
                 </c:pt>
                 <c:pt idx="2">
-                  <c:v>0</c:v>
+                  <c:v>0.0</c:v>
                 </c:pt>
                 <c:pt idx="3">
-                  <c:v>0</c:v>
+                  <c:v>0.0</c:v>
                 </c:pt>
                 <c:pt idx="4">
-                  <c:v>0</c:v>
+                  <c:v>0.0</c:v>
                 </c:pt>
                 <c:pt idx="5">
-                  <c:v>0</c:v>
+                  <c:v>0.0</c:v>
                 </c:pt>
                 <c:pt idx="6">
-                  <c:v>0</c:v>
+                  <c:v>0.0</c:v>
                 </c:pt>
                 <c:pt idx="7">
-                  <c:v>0</c:v>
+                  <c:v>0.0</c:v>
                 </c:pt>
                 <c:pt idx="8">
                   <c:v>1.3157894736842106</c:v>
                 </c:pt>
                 <c:pt idx="9">
-                  <c:v>0</c:v>
+                  <c:v>0.0</c:v>
                 </c:pt>
                 <c:pt idx="10">
-                  <c:v>0</c:v>
+                  <c:v>0.0</c:v>
                 </c:pt>
                 <c:pt idx="11">
-                  <c:v>0</c:v>
+                  <c:v>0.0</c:v>
                 </c:pt>
               </c:numCache>
             </c:numRef>
@@ -3320,31 +3320,31 @@
                 <c:formatCode>General</c:formatCode>
                 <c:ptCount val="12"/>
                 <c:pt idx="0">
-                  <c:v>63.157894736842103</c:v>
+                  <c:v>63.1578947368421</c:v>
                 </c:pt>
                 <c:pt idx="1">
-                  <c:v>63.157894736842103</c:v>
+                  <c:v>63.1578947368421</c:v>
                 </c:pt>
                 <c:pt idx="2">
-                  <c:v>63.157894736842103</c:v>
+                  <c:v>63.1578947368421</c:v>
                 </c:pt>
                 <c:pt idx="3">
-                  <c:v>63.157894736842103</c:v>
+                  <c:v>63.1578947368421</c:v>
                 </c:pt>
                 <c:pt idx="4">
-                  <c:v>63.157894736842103</c:v>
+                  <c:v>63.1578947368421</c:v>
                 </c:pt>
                 <c:pt idx="5">
-                  <c:v>63.157894736842103</c:v>
+                  <c:v>63.1578947368421</c:v>
                 </c:pt>
                 <c:pt idx="6">
-                  <c:v>61.842105263157897</c:v>
+                  <c:v>61.8421052631579</c:v>
                 </c:pt>
                 <c:pt idx="7">
                   <c:v>57.89473684210526</c:v>
                 </c:pt>
                 <c:pt idx="8">
-                  <c:v>59.210526315789473</c:v>
+                  <c:v>59.21052631578947</c:v>
                 </c:pt>
                 <c:pt idx="9">
                   <c:v>60.526315789473685</c:v>
@@ -3439,40 +3439,40 @@
                 <c:formatCode>General</c:formatCode>
                 <c:ptCount val="12"/>
                 <c:pt idx="0">
-                  <c:v>0</c:v>
+                  <c:v>0.0</c:v>
                 </c:pt>
                 <c:pt idx="1">
-                  <c:v>0</c:v>
+                  <c:v>0.0</c:v>
                 </c:pt>
                 <c:pt idx="2">
-                  <c:v>0</c:v>
+                  <c:v>0.0</c:v>
                 </c:pt>
                 <c:pt idx="3">
-                  <c:v>0</c:v>
+                  <c:v>0.0</c:v>
                 </c:pt>
                 <c:pt idx="4">
-                  <c:v>0</c:v>
+                  <c:v>0.0</c:v>
                 </c:pt>
                 <c:pt idx="5">
-                  <c:v>0</c:v>
+                  <c:v>0.0</c:v>
                 </c:pt>
                 <c:pt idx="6">
-                  <c:v>0</c:v>
+                  <c:v>0.0</c:v>
                 </c:pt>
                 <c:pt idx="7">
                   <c:v>2.6315789473684212</c:v>
                 </c:pt>
                 <c:pt idx="8">
-                  <c:v>0</c:v>
+                  <c:v>0.0</c:v>
                 </c:pt>
                 <c:pt idx="9">
-                  <c:v>0</c:v>
+                  <c:v>0.0</c:v>
                 </c:pt>
                 <c:pt idx="10">
-                  <c:v>7.8947368421052628</c:v>
+                  <c:v>7.894736842105263</c:v>
                 </c:pt>
                 <c:pt idx="11">
-                  <c:v>0</c:v>
+                  <c:v>0.0</c:v>
                 </c:pt>
               </c:numCache>
             </c:numRef>
@@ -3593,7 +3593,7 @@
                   <c:v>2.6315789473684212</c:v>
                 </c:pt>
                 <c:pt idx="11">
-                  <c:v>0</c:v>
+                  <c:v>0.0</c:v>
                 </c:pt>
               </c:numCache>
             </c:numRef>
@@ -3730,14 +3730,14 @@
     </c:plotArea>
     <c:plotVisOnly val="1"/>
     <c:dispBlanksAs val="gap"/>
-    <c:showDLblsOverMax val="0"/>
-    <c:extLst xmlns:w="http://schemas.openxmlformats.org/wordprocessingml/2006/main" xmlns:w15="http://schemas.microsoft.com/office/word/2012/wordml" xmlns:w14="http://schemas.microsoft.com/office/word/2010/wordml" xmlns:m="http://schemas.openxmlformats.org/officeDocument/2006/math" xmlns:wp="http://schemas.openxmlformats.org/drawingml/2006/wordprocessingDrawing" xmlns:wp14="http://schemas.microsoft.com/office/word/2010/wordprocessingDrawing" xmlns:mc="http://schemas.openxmlformats.org/markup-compatibility/2006" xmlns:sl="http://schemas.openxmlformats.org/schemaLibrary/2006/main" xmlns:wne="http://schemas.microsoft.com/office/word/2006/wordml" xmlns:cdr="http://schemas.openxmlformats.org/drawingml/2006/chartDrawing" xmlns:c14="http://schemas.microsoft.com/office/drawing/2007/8/2/chart" xmlns:dgm="http://schemas.openxmlformats.org/drawingml/2006/diagram" xmlns:pic="http://schemas.openxmlformats.org/drawingml/2006/picture" xmlns:xdr="http://schemas.openxmlformats.org/drawingml/2006/spreadsheetDrawing" xmlns:dsp="http://schemas.microsoft.com/office/drawing/2008/diagram" xmlns:xvml="urn:schemas-microsoft-com:office:excel" xmlns:o="urn:schemas-microsoft-com:office:office" xmlns:v="urn:schemas-microsoft-com:vml" xmlns:w10="urn:schemas-microsoft-com:office:word" xmlns:pvml="urn:schemas-microsoft-com:office:powerpoint" xmlns:cppr="http://schemas.microsoft.com/office/2006/coverPageProps" xmlns:odx="http://opendope.org/xpaths" xmlns:odc="http://opendope.org/conditions" xmlns:odq="http://opendope.org/questions" xmlns:oda="http://opendope.org/answers" xmlns:odi="http://opendope.org/components" xmlns:odgm="http://opendope.org/SmartArt/DataHierarchy" xmlns:b="http://schemas.openxmlformats.org/officeDocument/2006/bibliography" xmlns:wps="http://schemas.microsoft.com/office/word/2010/wordprocessingShape" xmlns:w16se="http://schemas.microsoft.com/office/word/2015/wordml/symex" xmlns:w16cid="http://schemas.microsoft.com/office/word/2016/wordml/cid" xmlns:wetp="http://schemas.microsoft.com/office/webextensions/taskpanes/2010/11" xmlns:we="http://schemas.microsoft.com/office/webextensions/webextension/2010/11" xmlns:comp="http://schemas.openxmlformats.org/drawingml/2006/compatibility" xmlns:lc="http://schemas.openxmlformats.org/drawingml/2006/lockedCanvas">
+    <c:extLst xmlns:lc="http://schemas.openxmlformats.org/drawingml/2006/lockedCanvas" xmlns:comp="http://schemas.openxmlformats.org/drawingml/2006/compatibility" xmlns:we="http://schemas.microsoft.com/office/webextensions/webextension/2010/11" xmlns:wetp="http://schemas.microsoft.com/office/webextensions/taskpanes/2010/11" xmlns:w16cid="http://schemas.microsoft.com/office/word/2016/wordml/cid" xmlns:w16se="http://schemas.microsoft.com/office/word/2015/wordml/symex" xmlns:wps="http://schemas.microsoft.com/office/word/2010/wordprocessingShape" xmlns:b="http://schemas.openxmlformats.org/officeDocument/2006/bibliography" xmlns:odgm="http://opendope.org/SmartArt/DataHierarchy" xmlns:odi="http://opendope.org/components" xmlns:oda="http://opendope.org/answers" xmlns:odq="http://opendope.org/questions" xmlns:odc="http://opendope.org/conditions" xmlns:odx="http://opendope.org/xpaths" xmlns:cppr="http://schemas.microsoft.com/office/2006/coverPageProps" xmlns:pvml="urn:schemas-microsoft-com:office:powerpoint" xmlns:w10="urn:schemas-microsoft-com:office:word" xmlns:v="urn:schemas-microsoft-com:vml" xmlns:o="urn:schemas-microsoft-com:office:office" xmlns:xvml="urn:schemas-microsoft-com:office:excel" xmlns:dsp="http://schemas.microsoft.com/office/drawing/2008/diagram" xmlns:xdr="http://schemas.openxmlformats.org/drawingml/2006/spreadsheetDrawing" xmlns:pic="http://schemas.openxmlformats.org/drawingml/2006/picture" xmlns:dgm="http://schemas.openxmlformats.org/drawingml/2006/diagram" xmlns:c14="http://schemas.microsoft.com/office/drawing/2007/8/2/chart" xmlns:cdr="http://schemas.openxmlformats.org/drawingml/2006/chartDrawing" xmlns:wne="http://schemas.microsoft.com/office/word/2006/wordml" xmlns:sl="http://schemas.openxmlformats.org/schemaLibrary/2006/main" xmlns:mc="http://schemas.openxmlformats.org/markup-compatibility/2006" xmlns:wp14="http://schemas.microsoft.com/office/word/2010/wordprocessingDrawing" xmlns:wp="http://schemas.openxmlformats.org/drawingml/2006/wordprocessingDrawing" xmlns:m="http://schemas.openxmlformats.org/officeDocument/2006/math" xmlns:w14="http://schemas.microsoft.com/office/word/2010/wordml" xmlns:w15="http://schemas.microsoft.com/office/word/2012/wordml" xmlns:w="http://schemas.openxmlformats.org/wordprocessingml/2006/main">
       <c:ext xmlns:c16r3="http://schemas.microsoft.com/office/drawing/2017/03/chart" uri="{56B9EC1D-385E-4148-901F-78D8002777C0}">
         <c16r3:dataDisplayOptions16>
           <c16r3:dispNaAsBlank val="1"/>
         </c16r3:dataDisplayOptions16>
       </c:ext>
     </c:extLst>
+    <c:showDLblsOverMax val="0"/>
   </c:chart>
   <c:spPr>
     <a:noFill/>
@@ -3833,7 +3833,7 @@
                 </a:outerShdw>
               </a:effectLst>
             </c:spPr>
-            <c:extLst xmlns:lc="http://schemas.openxmlformats.org/drawingml/2006/lockedCanvas" xmlns:comp="http://schemas.openxmlformats.org/drawingml/2006/compatibility" xmlns:we="http://schemas.microsoft.com/office/webextensions/webextension/2010/11" xmlns:wetp="http://schemas.microsoft.com/office/webextensions/taskpanes/2010/11" xmlns:w16cid="http://schemas.microsoft.com/office/word/2016/wordml/cid" xmlns:w16se="http://schemas.microsoft.com/office/word/2015/wordml/symex" xmlns:wps="http://schemas.microsoft.com/office/word/2010/wordprocessingShape" xmlns:b="http://schemas.openxmlformats.org/officeDocument/2006/bibliography" xmlns:odgm="http://opendope.org/SmartArt/DataHierarchy" xmlns:odi="http://opendope.org/components" xmlns:oda="http://opendope.org/answers" xmlns:odq="http://opendope.org/questions" xmlns:odc="http://opendope.org/conditions" xmlns:odx="http://opendope.org/xpaths" xmlns:cppr="http://schemas.microsoft.com/office/2006/coverPageProps" xmlns:pvml="urn:schemas-microsoft-com:office:powerpoint" xmlns:w10="urn:schemas-microsoft-com:office:word" xmlns:v="urn:schemas-microsoft-com:vml" xmlns:o="urn:schemas-microsoft-com:office:office" xmlns:xvml="urn:schemas-microsoft-com:office:excel" xmlns:dsp="http://schemas.microsoft.com/office/drawing/2008/diagram" xmlns:xdr="http://schemas.openxmlformats.org/drawingml/2006/spreadsheetDrawing" xmlns:pic="http://schemas.openxmlformats.org/drawingml/2006/picture" xmlns:dgm="http://schemas.openxmlformats.org/drawingml/2006/diagram" xmlns:c14="http://schemas.microsoft.com/office/drawing/2007/8/2/chart" xmlns:cdr="http://schemas.openxmlformats.org/drawingml/2006/chartDrawing" xmlns:wne="http://schemas.microsoft.com/office/word/2006/wordml" xmlns:sl="http://schemas.openxmlformats.org/schemaLibrary/2006/main" xmlns:mc="http://schemas.openxmlformats.org/markup-compatibility/2006" xmlns:wp14="http://schemas.microsoft.com/office/word/2010/wordprocessingDrawing" xmlns:wp="http://schemas.openxmlformats.org/drawingml/2006/wordprocessingDrawing" xmlns:m="http://schemas.openxmlformats.org/officeDocument/2006/math" xmlns:w14="http://schemas.microsoft.com/office/word/2010/wordml" xmlns:w15="http://schemas.microsoft.com/office/word/2012/wordml" xmlns:w="http://schemas.openxmlformats.org/wordprocessingml/2006/main">
+            <c:extLst xmlns:w="http://schemas.openxmlformats.org/wordprocessingml/2006/main" xmlns:w15="http://schemas.microsoft.com/office/word/2012/wordml" xmlns:w14="http://schemas.microsoft.com/office/word/2010/wordml" xmlns:m="http://schemas.openxmlformats.org/officeDocument/2006/math" xmlns:wp="http://schemas.openxmlformats.org/drawingml/2006/wordprocessingDrawing" xmlns:wp14="http://schemas.microsoft.com/office/word/2010/wordprocessingDrawing" xmlns:mc="http://schemas.openxmlformats.org/markup-compatibility/2006" xmlns:sl="http://schemas.openxmlformats.org/schemaLibrary/2006/main" xmlns:wne="http://schemas.microsoft.com/office/word/2006/wordml" xmlns:cdr="http://schemas.openxmlformats.org/drawingml/2006/chartDrawing" xmlns:c14="http://schemas.microsoft.com/office/drawing/2007/8/2/chart" xmlns:dgm="http://schemas.openxmlformats.org/drawingml/2006/diagram" xmlns:pic="http://schemas.openxmlformats.org/drawingml/2006/picture" xmlns:xdr="http://schemas.openxmlformats.org/drawingml/2006/spreadsheetDrawing" xmlns:dsp="http://schemas.microsoft.com/office/drawing/2008/diagram" xmlns:xvml="urn:schemas-microsoft-com:office:excel" xmlns:o="urn:schemas-microsoft-com:office:office" xmlns:v="urn:schemas-microsoft-com:vml" xmlns:w10="urn:schemas-microsoft-com:office:word" xmlns:pvml="urn:schemas-microsoft-com:office:powerpoint" xmlns:cppr="http://schemas.microsoft.com/office/2006/coverPageProps" xmlns:odx="http://opendope.org/xpaths" xmlns:odc="http://opendope.org/conditions" xmlns:odq="http://opendope.org/questions" xmlns:oda="http://opendope.org/answers" xmlns:odi="http://opendope.org/components" xmlns:odgm="http://opendope.org/SmartArt/DataHierarchy" xmlns:b="http://schemas.openxmlformats.org/officeDocument/2006/bibliography" xmlns:wps="http://schemas.microsoft.com/office/word/2010/wordprocessingShape" xmlns:w16se="http://schemas.microsoft.com/office/word/2015/wordml/symex" xmlns:w16cid="http://schemas.microsoft.com/office/word/2016/wordml/cid" xmlns:wetp="http://schemas.microsoft.com/office/webextensions/taskpanes/2010/11" xmlns:we="http://schemas.microsoft.com/office/webextensions/webextension/2010/11" xmlns:comp="http://schemas.openxmlformats.org/drawingml/2006/compatibility" xmlns:lc="http://schemas.openxmlformats.org/drawingml/2006/lockedCanvas">
               <c:ext xmlns:c16="http://schemas.microsoft.com/office/drawing/2014/chart" uri="{C3380CC4-5D6E-409C-BE32-E72D297353CC}">
                 <c16:uniqueId val="{00000001-6147-E74A-AA7B-5531F0E4EE0C}"/>
               </c:ext>
@@ -3893,7 +3893,7 @@
                   <c:v>49.794238683127574</c:v>
                 </c:pt>
                 <c:pt idx="1">
-                  <c:v>48.971193415637863</c:v>
+                  <c:v>48.97119341563786</c:v>
                 </c:pt>
                 <c:pt idx="2">
                   <c:v>49.382716049382715</c:v>
@@ -3917,10 +3917,10 @@
                   <c:v>49.382716049382715</c:v>
                 </c:pt>
                 <c:pt idx="9">
-                  <c:v>48.971193415637863</c:v>
+                  <c:v>48.97119341563786</c:v>
                 </c:pt>
                 <c:pt idx="10">
-                  <c:v>48.971193415637863</c:v>
+                  <c:v>48.97119341563786</c:v>
                 </c:pt>
                 <c:pt idx="11">
                   <c:v>48.559670781893004</c:v>
@@ -3928,7 +3928,7 @@
               </c:numCache>
             </c:numRef>
           </c:val>
-          <c:extLst xmlns:lc="http://schemas.openxmlformats.org/drawingml/2006/lockedCanvas" xmlns:comp="http://schemas.openxmlformats.org/drawingml/2006/compatibility" xmlns:we="http://schemas.microsoft.com/office/webextensions/webextension/2010/11" xmlns:wetp="http://schemas.microsoft.com/office/webextensions/taskpanes/2010/11" xmlns:w16cid="http://schemas.microsoft.com/office/word/2016/wordml/cid" xmlns:w16se="http://schemas.microsoft.com/office/word/2015/wordml/symex" xmlns:wps="http://schemas.microsoft.com/office/word/2010/wordprocessingShape" xmlns:b="http://schemas.openxmlformats.org/officeDocument/2006/bibliography" xmlns:odgm="http://opendope.org/SmartArt/DataHierarchy" xmlns:odi="http://opendope.org/components" xmlns:oda="http://opendope.org/answers" xmlns:odq="http://opendope.org/questions" xmlns:odc="http://opendope.org/conditions" xmlns:odx="http://opendope.org/xpaths" xmlns:cppr="http://schemas.microsoft.com/office/2006/coverPageProps" xmlns:pvml="urn:schemas-microsoft-com:office:powerpoint" xmlns:w10="urn:schemas-microsoft-com:office:word" xmlns:v="urn:schemas-microsoft-com:vml" xmlns:o="urn:schemas-microsoft-com:office:office" xmlns:xvml="urn:schemas-microsoft-com:office:excel" xmlns:dsp="http://schemas.microsoft.com/office/drawing/2008/diagram" xmlns:xdr="http://schemas.openxmlformats.org/drawingml/2006/spreadsheetDrawing" xmlns:pic="http://schemas.openxmlformats.org/drawingml/2006/picture" xmlns:dgm="http://schemas.openxmlformats.org/drawingml/2006/diagram" xmlns:c14="http://schemas.microsoft.com/office/drawing/2007/8/2/chart" xmlns:cdr="http://schemas.openxmlformats.org/drawingml/2006/chartDrawing" xmlns:wne="http://schemas.microsoft.com/office/word/2006/wordml" xmlns:sl="http://schemas.openxmlformats.org/schemaLibrary/2006/main" xmlns:mc="http://schemas.openxmlformats.org/markup-compatibility/2006" xmlns:wp14="http://schemas.microsoft.com/office/word/2010/wordprocessingDrawing" xmlns:wp="http://schemas.openxmlformats.org/drawingml/2006/wordprocessingDrawing" xmlns:m="http://schemas.openxmlformats.org/officeDocument/2006/math" xmlns:w14="http://schemas.microsoft.com/office/word/2010/wordml" xmlns:w15="http://schemas.microsoft.com/office/word/2012/wordml" xmlns:w="http://schemas.openxmlformats.org/wordprocessingml/2006/main">
+          <c:extLst xmlns:w="http://schemas.openxmlformats.org/wordprocessingml/2006/main" xmlns:w15="http://schemas.microsoft.com/office/word/2012/wordml" xmlns:w14="http://schemas.microsoft.com/office/word/2010/wordml" xmlns:m="http://schemas.openxmlformats.org/officeDocument/2006/math" xmlns:wp="http://schemas.openxmlformats.org/drawingml/2006/wordprocessingDrawing" xmlns:wp14="http://schemas.microsoft.com/office/word/2010/wordprocessingDrawing" xmlns:mc="http://schemas.openxmlformats.org/markup-compatibility/2006" xmlns:sl="http://schemas.openxmlformats.org/schemaLibrary/2006/main" xmlns:wne="http://schemas.microsoft.com/office/word/2006/wordml" xmlns:cdr="http://schemas.openxmlformats.org/drawingml/2006/chartDrawing" xmlns:c14="http://schemas.microsoft.com/office/drawing/2007/8/2/chart" xmlns:dgm="http://schemas.openxmlformats.org/drawingml/2006/diagram" xmlns:pic="http://schemas.openxmlformats.org/drawingml/2006/picture" xmlns:xdr="http://schemas.openxmlformats.org/drawingml/2006/spreadsheetDrawing" xmlns:dsp="http://schemas.microsoft.com/office/drawing/2008/diagram" xmlns:xvml="urn:schemas-microsoft-com:office:excel" xmlns:o="urn:schemas-microsoft-com:office:office" xmlns:v="urn:schemas-microsoft-com:vml" xmlns:w10="urn:schemas-microsoft-com:office:word" xmlns:pvml="urn:schemas-microsoft-com:office:powerpoint" xmlns:cppr="http://schemas.microsoft.com/office/2006/coverPageProps" xmlns:odx="http://opendope.org/xpaths" xmlns:odc="http://opendope.org/conditions" xmlns:odq="http://opendope.org/questions" xmlns:oda="http://opendope.org/answers" xmlns:odi="http://opendope.org/components" xmlns:odgm="http://opendope.org/SmartArt/DataHierarchy" xmlns:b="http://schemas.openxmlformats.org/officeDocument/2006/bibliography" xmlns:wps="http://schemas.microsoft.com/office/word/2010/wordprocessingShape" xmlns:w16se="http://schemas.microsoft.com/office/word/2015/wordml/symex" xmlns:w16cid="http://schemas.microsoft.com/office/word/2016/wordml/cid" xmlns:wetp="http://schemas.microsoft.com/office/webextensions/taskpanes/2010/11" xmlns:we="http://schemas.microsoft.com/office/webextensions/webextension/2010/11" xmlns:comp="http://schemas.openxmlformats.org/drawingml/2006/compatibility" xmlns:lc="http://schemas.openxmlformats.org/drawingml/2006/lockedCanvas">
             <c:ext xmlns:c16="http://schemas.microsoft.com/office/drawing/2014/chart" uri="{C3380CC4-5D6E-409C-BE32-E72D297353CC}">
               <c16:uniqueId val="{00000002-6147-E74A-AA7B-5531F0E4EE0C}"/>
             </c:ext>
@@ -4009,40 +4009,40 @@
                 <c:formatCode>General</c:formatCode>
                 <c:ptCount val="12"/>
                 <c:pt idx="0">
-                  <c:v>0</c:v>
+                  <c:v>0.0</c:v>
                 </c:pt>
                 <c:pt idx="1">
-                  <c:v>0</c:v>
+                  <c:v>0.0</c:v>
                 </c:pt>
                 <c:pt idx="2">
-                  <c:v>0</c:v>
+                  <c:v>0.0</c:v>
                 </c:pt>
                 <c:pt idx="3">
-                  <c:v>0</c:v>
+                  <c:v>0.0</c:v>
                 </c:pt>
                 <c:pt idx="4">
-                  <c:v>0</c:v>
+                  <c:v>0.0</c:v>
                 </c:pt>
                 <c:pt idx="5">
-                  <c:v>0</c:v>
+                  <c:v>0.0</c:v>
                 </c:pt>
                 <c:pt idx="6">
-                  <c:v>0</c:v>
+                  <c:v>0.0</c:v>
                 </c:pt>
                 <c:pt idx="7">
                   <c:v>1.2345679012345678</c:v>
                 </c:pt>
                 <c:pt idx="8">
-                  <c:v>0</c:v>
+                  <c:v>0.0</c:v>
                 </c:pt>
                 <c:pt idx="9">
-                  <c:v>0</c:v>
+                  <c:v>0.0</c:v>
                 </c:pt>
                 <c:pt idx="10">
-                  <c:v>0.41152263374485598</c:v>
+                  <c:v>0.411522633744856</c:v>
                 </c:pt>
                 <c:pt idx="11">
-                  <c:v>0</c:v>
+                  <c:v>0.0</c:v>
                 </c:pt>
               </c:numCache>
             </c:numRef>
@@ -4137,31 +4137,31 @@
                   <c:v>40.74074074074074</c:v>
                 </c:pt>
                 <c:pt idx="3">
-                  <c:v>40.329218106995881</c:v>
+                  <c:v>40.32921810699588</c:v>
                 </c:pt>
                 <c:pt idx="4">
-                  <c:v>40.329218106995881</c:v>
+                  <c:v>40.32921810699588</c:v>
                 </c:pt>
                 <c:pt idx="5">
                   <c:v>41.97530864197531</c:v>
                 </c:pt>
                 <c:pt idx="6">
-                  <c:v>42.386831275720162</c:v>
+                  <c:v>42.38683127572016</c:v>
                 </c:pt>
                 <c:pt idx="7">
                   <c:v>39.91769547325103</c:v>
                 </c:pt>
                 <c:pt idx="8">
-                  <c:v>42.386831275720162</c:v>
+                  <c:v>42.38683127572016</c:v>
                 </c:pt>
                 <c:pt idx="9">
-                  <c:v>43.209876543209873</c:v>
+                  <c:v>43.20987654320987</c:v>
                 </c:pt>
                 <c:pt idx="10">
-                  <c:v>44.444444444444443</c:v>
+                  <c:v>44.44444444444444</c:v>
                 </c:pt>
                 <c:pt idx="11">
-                  <c:v>44.855967078189302</c:v>
+                  <c:v>44.8559670781893</c:v>
                 </c:pt>
               </c:numCache>
             </c:numRef>
@@ -4247,40 +4247,40 @@
                 <c:formatCode>General</c:formatCode>
                 <c:ptCount val="12"/>
                 <c:pt idx="0">
-                  <c:v>0.41152263374485598</c:v>
+                  <c:v>0.411522633744856</c:v>
                 </c:pt>
                 <c:pt idx="1">
                   <c:v>1.2345679012345678</c:v>
                 </c:pt>
                 <c:pt idx="2">
-                  <c:v>0</c:v>
+                  <c:v>0.0</c:v>
                 </c:pt>
                 <c:pt idx="3">
-                  <c:v>0</c:v>
+                  <c:v>0.0</c:v>
                 </c:pt>
                 <c:pt idx="4">
-                  <c:v>0.41152263374485598</c:v>
+                  <c:v>0.411522633744856</c:v>
                 </c:pt>
                 <c:pt idx="5">
-                  <c:v>0.41152263374485598</c:v>
+                  <c:v>0.411522633744856</c:v>
                 </c:pt>
                 <c:pt idx="6">
-                  <c:v>0.41152263374485598</c:v>
+                  <c:v>0.411522633744856</c:v>
                 </c:pt>
                 <c:pt idx="7">
-                  <c:v>1.6460905349794239</c:v>
+                  <c:v>1.646090534979424</c:v>
                 </c:pt>
                 <c:pt idx="8">
-                  <c:v>0.82304526748971196</c:v>
+                  <c:v>0.823045267489712</c:v>
                 </c:pt>
                 <c:pt idx="9">
-                  <c:v>0.41152263374485598</c:v>
+                  <c:v>0.411522633744856</c:v>
                 </c:pt>
                 <c:pt idx="10">
-                  <c:v>0</c:v>
+                  <c:v>0.0</c:v>
                 </c:pt>
                 <c:pt idx="11">
-                  <c:v>0.41152263374485598</c:v>
+                  <c:v>0.411522633744856</c:v>
                 </c:pt>
               </c:numCache>
             </c:numRef>
@@ -4368,40 +4368,40 @@
                 <c:formatCode>General</c:formatCode>
                 <c:ptCount val="12"/>
                 <c:pt idx="0">
-                  <c:v>9.8765432098765427</c:v>
+                  <c:v>9.876543209876543</c:v>
                 </c:pt>
                 <c:pt idx="1">
-                  <c:v>9.8765432098765427</c:v>
+                  <c:v>9.876543209876543</c:v>
                 </c:pt>
                 <c:pt idx="2">
-                  <c:v>9.8765432098765427</c:v>
+                  <c:v>9.876543209876543</c:v>
                 </c:pt>
                 <c:pt idx="3">
-                  <c:v>9.8765432098765427</c:v>
+                  <c:v>9.876543209876543</c:v>
                 </c:pt>
                 <c:pt idx="4">
-                  <c:v>9.4650205761316872</c:v>
+                  <c:v>9.465020576131687</c:v>
                 </c:pt>
                 <c:pt idx="5">
-                  <c:v>7.4074074074074074</c:v>
+                  <c:v>7.407407407407407</c:v>
                 </c:pt>
                 <c:pt idx="6">
-                  <c:v>7.4074074074074074</c:v>
+                  <c:v>7.407407407407407</c:v>
                 </c:pt>
                 <c:pt idx="7">
-                  <c:v>7.4074074074074074</c:v>
+                  <c:v>7.407407407407407</c:v>
                 </c:pt>
                 <c:pt idx="8">
-                  <c:v>7.4074074074074074</c:v>
+                  <c:v>7.407407407407407</c:v>
                 </c:pt>
                 <c:pt idx="9">
-                  <c:v>7.4074074074074074</c:v>
+                  <c:v>7.407407407407407</c:v>
                 </c:pt>
                 <c:pt idx="10">
-                  <c:v>6.1728395061728394</c:v>
+                  <c:v>6.172839506172839</c:v>
                 </c:pt>
                 <c:pt idx="11">
-                  <c:v>6.1728395061728394</c:v>
+                  <c:v>6.172839506172839</c:v>
                 </c:pt>
               </c:numCache>
             </c:numRef>
@@ -4538,14 +4538,14 @@
     </c:plotArea>
     <c:plotVisOnly val="1"/>
     <c:dispBlanksAs val="gap"/>
-    <c:showDLblsOverMax val="0"/>
-    <c:extLst xmlns:lc="http://schemas.openxmlformats.org/drawingml/2006/lockedCanvas" xmlns:comp="http://schemas.openxmlformats.org/drawingml/2006/compatibility" xmlns:we="http://schemas.microsoft.com/office/webextensions/webextension/2010/11" xmlns:wetp="http://schemas.microsoft.com/office/webextensions/taskpanes/2010/11" xmlns:w16cid="http://schemas.microsoft.com/office/word/2016/wordml/cid" xmlns:w16se="http://schemas.microsoft.com/office/word/2015/wordml/symex" xmlns:wps="http://schemas.microsoft.com/office/word/2010/wordprocessingShape" xmlns:b="http://schemas.openxmlformats.org/officeDocument/2006/bibliography" xmlns:odgm="http://opendope.org/SmartArt/DataHierarchy" xmlns:odi="http://opendope.org/components" xmlns:oda="http://opendope.org/answers" xmlns:odq="http://opendope.org/questions" xmlns:odc="http://opendope.org/conditions" xmlns:odx="http://opendope.org/xpaths" xmlns:cppr="http://schemas.microsoft.com/office/2006/coverPageProps" xmlns:pvml="urn:schemas-microsoft-com:office:powerpoint" xmlns:w10="urn:schemas-microsoft-com:office:word" xmlns:v="urn:schemas-microsoft-com:vml" xmlns:o="urn:schemas-microsoft-com:office:office" xmlns:xvml="urn:schemas-microsoft-com:office:excel" xmlns:dsp="http://schemas.microsoft.com/office/drawing/2008/diagram" xmlns:xdr="http://schemas.openxmlformats.org/drawingml/2006/spreadsheetDrawing" xmlns:pic="http://schemas.openxmlformats.org/drawingml/2006/picture" xmlns:dgm="http://schemas.openxmlformats.org/drawingml/2006/diagram" xmlns:c14="http://schemas.microsoft.com/office/drawing/2007/8/2/chart" xmlns:cdr="http://schemas.openxmlformats.org/drawingml/2006/chartDrawing" xmlns:wne="http://schemas.microsoft.com/office/word/2006/wordml" xmlns:sl="http://schemas.openxmlformats.org/schemaLibrary/2006/main" xmlns:mc="http://schemas.openxmlformats.org/markup-compatibility/2006" xmlns:wp14="http://schemas.microsoft.com/office/word/2010/wordprocessingDrawing" xmlns:wp="http://schemas.openxmlformats.org/drawingml/2006/wordprocessingDrawing" xmlns:m="http://schemas.openxmlformats.org/officeDocument/2006/math" xmlns:w14="http://schemas.microsoft.com/office/word/2010/wordml" xmlns:w15="http://schemas.microsoft.com/office/word/2012/wordml" xmlns:w="http://schemas.openxmlformats.org/wordprocessingml/2006/main">
+    <c:extLst xmlns:w="http://schemas.openxmlformats.org/wordprocessingml/2006/main" xmlns:w15="http://schemas.microsoft.com/office/word/2012/wordml" xmlns:w14="http://schemas.microsoft.com/office/word/2010/wordml" xmlns:m="http://schemas.openxmlformats.org/officeDocument/2006/math" xmlns:wp="http://schemas.openxmlformats.org/drawingml/2006/wordprocessingDrawing" xmlns:wp14="http://schemas.microsoft.com/office/word/2010/wordprocessingDrawing" xmlns:mc="http://schemas.openxmlformats.org/markup-compatibility/2006" xmlns:sl="http://schemas.openxmlformats.org/schemaLibrary/2006/main" xmlns:wne="http://schemas.microsoft.com/office/word/2006/wordml" xmlns:cdr="http://schemas.openxmlformats.org/drawingml/2006/chartDrawing" xmlns:c14="http://schemas.microsoft.com/office/drawing/2007/8/2/chart" xmlns:dgm="http://schemas.openxmlformats.org/drawingml/2006/diagram" xmlns:pic="http://schemas.openxmlformats.org/drawingml/2006/picture" xmlns:xdr="http://schemas.openxmlformats.org/drawingml/2006/spreadsheetDrawing" xmlns:dsp="http://schemas.microsoft.com/office/drawing/2008/diagram" xmlns:xvml="urn:schemas-microsoft-com:office:excel" xmlns:o="urn:schemas-microsoft-com:office:office" xmlns:v="urn:schemas-microsoft-com:vml" xmlns:w10="urn:schemas-microsoft-com:office:word" xmlns:pvml="urn:schemas-microsoft-com:office:powerpoint" xmlns:cppr="http://schemas.microsoft.com/office/2006/coverPageProps" xmlns:odx="http://opendope.org/xpaths" xmlns:odc="http://opendope.org/conditions" xmlns:odq="http://opendope.org/questions" xmlns:oda="http://opendope.org/answers" xmlns:odi="http://opendope.org/components" xmlns:odgm="http://opendope.org/SmartArt/DataHierarchy" xmlns:b="http://schemas.openxmlformats.org/officeDocument/2006/bibliography" xmlns:wps="http://schemas.microsoft.com/office/word/2010/wordprocessingShape" xmlns:w16se="http://schemas.microsoft.com/office/word/2015/wordml/symex" xmlns:w16cid="http://schemas.microsoft.com/office/word/2016/wordml/cid" xmlns:wetp="http://schemas.microsoft.com/office/webextensions/taskpanes/2010/11" xmlns:we="http://schemas.microsoft.com/office/webextensions/webextension/2010/11" xmlns:comp="http://schemas.openxmlformats.org/drawingml/2006/compatibility" xmlns:lc="http://schemas.openxmlformats.org/drawingml/2006/lockedCanvas">
       <c:ext xmlns:c16r3="http://schemas.microsoft.com/office/drawing/2017/03/chart" uri="{56B9EC1D-385E-4148-901F-78D8002777C0}">
         <c16r3:dataDisplayOptions16>
           <c16r3:dispNaAsBlank val="1"/>
         </c16r3:dataDisplayOptions16>
       </c:ext>
     </c:extLst>
+    <c:showDLblsOverMax val="0"/>
   </c:chart>
   <c:spPr>
     <a:noFill/>
@@ -4641,7 +4641,7 @@
                 </a:outerShdw>
               </a:effectLst>
             </c:spPr>
-            <c:extLst xmlns:lc="http://schemas.openxmlformats.org/drawingml/2006/lockedCanvas" xmlns:comp="http://schemas.openxmlformats.org/drawingml/2006/compatibility" xmlns:we="http://schemas.microsoft.com/office/webextensions/webextension/2010/11" xmlns:wetp="http://schemas.microsoft.com/office/webextensions/taskpanes/2010/11" xmlns:w16cid="http://schemas.microsoft.com/office/word/2016/wordml/cid" xmlns:w16se="http://schemas.microsoft.com/office/word/2015/wordml/symex" xmlns:wps="http://schemas.microsoft.com/office/word/2010/wordprocessingShape" xmlns:b="http://schemas.openxmlformats.org/officeDocument/2006/bibliography" xmlns:odgm="http://opendope.org/SmartArt/DataHierarchy" xmlns:odi="http://opendope.org/components" xmlns:oda="http://opendope.org/answers" xmlns:odq="http://opendope.org/questions" xmlns:odc="http://opendope.org/conditions" xmlns:odx="http://opendope.org/xpaths" xmlns:cppr="http://schemas.microsoft.com/office/2006/coverPageProps" xmlns:pvml="urn:schemas-microsoft-com:office:powerpoint" xmlns:w10="urn:schemas-microsoft-com:office:word" xmlns:v="urn:schemas-microsoft-com:vml" xmlns:o="urn:schemas-microsoft-com:office:office" xmlns:xvml="urn:schemas-microsoft-com:office:excel" xmlns:dsp="http://schemas.microsoft.com/office/drawing/2008/diagram" xmlns:xdr="http://schemas.openxmlformats.org/drawingml/2006/spreadsheetDrawing" xmlns:pic="http://schemas.openxmlformats.org/drawingml/2006/picture" xmlns:dgm="http://schemas.openxmlformats.org/drawingml/2006/diagram" xmlns:c14="http://schemas.microsoft.com/office/drawing/2007/8/2/chart" xmlns:cdr="http://schemas.openxmlformats.org/drawingml/2006/chartDrawing" xmlns:wne="http://schemas.microsoft.com/office/word/2006/wordml" xmlns:sl="http://schemas.openxmlformats.org/schemaLibrary/2006/main" xmlns:mc="http://schemas.openxmlformats.org/markup-compatibility/2006" xmlns:wp14="http://schemas.microsoft.com/office/word/2010/wordprocessingDrawing" xmlns:wp="http://schemas.openxmlformats.org/drawingml/2006/wordprocessingDrawing" xmlns:m="http://schemas.openxmlformats.org/officeDocument/2006/math" xmlns:w14="http://schemas.microsoft.com/office/word/2010/wordml" xmlns:w15="http://schemas.microsoft.com/office/word/2012/wordml" xmlns:w="http://schemas.openxmlformats.org/wordprocessingml/2006/main">
+            <c:extLst xmlns:w="http://schemas.openxmlformats.org/wordprocessingml/2006/main" xmlns:w15="http://schemas.microsoft.com/office/word/2012/wordml" xmlns:w14="http://schemas.microsoft.com/office/word/2010/wordml" xmlns:m="http://schemas.openxmlformats.org/officeDocument/2006/math" xmlns:wp="http://schemas.openxmlformats.org/drawingml/2006/wordprocessingDrawing" xmlns:wp14="http://schemas.microsoft.com/office/word/2010/wordprocessingDrawing" xmlns:mc="http://schemas.openxmlformats.org/markup-compatibility/2006" xmlns:sl="http://schemas.openxmlformats.org/schemaLibrary/2006/main" xmlns:wne="http://schemas.microsoft.com/office/word/2006/wordml" xmlns:cdr="http://schemas.openxmlformats.org/drawingml/2006/chartDrawing" xmlns:c14="http://schemas.microsoft.com/office/drawing/2007/8/2/chart" xmlns:dgm="http://schemas.openxmlformats.org/drawingml/2006/diagram" xmlns:pic="http://schemas.openxmlformats.org/drawingml/2006/picture" xmlns:xdr="http://schemas.openxmlformats.org/drawingml/2006/spreadsheetDrawing" xmlns:dsp="http://schemas.microsoft.com/office/drawing/2008/diagram" xmlns:xvml="urn:schemas-microsoft-com:office:excel" xmlns:o="urn:schemas-microsoft-com:office:office" xmlns:v="urn:schemas-microsoft-com:vml" xmlns:w10="urn:schemas-microsoft-com:office:word" xmlns:pvml="urn:schemas-microsoft-com:office:powerpoint" xmlns:cppr="http://schemas.microsoft.com/office/2006/coverPageProps" xmlns:odx="http://opendope.org/xpaths" xmlns:odc="http://opendope.org/conditions" xmlns:odq="http://opendope.org/questions" xmlns:oda="http://opendope.org/answers" xmlns:odi="http://opendope.org/components" xmlns:odgm="http://opendope.org/SmartArt/DataHierarchy" xmlns:b="http://schemas.openxmlformats.org/officeDocument/2006/bibliography" xmlns:wps="http://schemas.microsoft.com/office/word/2010/wordprocessingShape" xmlns:w16se="http://schemas.microsoft.com/office/word/2015/wordml/symex" xmlns:w16cid="http://schemas.microsoft.com/office/word/2016/wordml/cid" xmlns:wetp="http://schemas.microsoft.com/office/webextensions/taskpanes/2010/11" xmlns:we="http://schemas.microsoft.com/office/webextensions/webextension/2010/11" xmlns:comp="http://schemas.openxmlformats.org/drawingml/2006/compatibility" xmlns:lc="http://schemas.openxmlformats.org/drawingml/2006/lockedCanvas">
               <c:ext xmlns:c16="http://schemas.microsoft.com/office/drawing/2014/chart" uri="{C3380CC4-5D6E-409C-BE32-E72D297353CC}">
                 <c16:uniqueId val="{00000001-6147-E74A-AA7B-5531F0E4EE0C}"/>
               </c:ext>
@@ -4713,30 +4713,30 @@
                   <c:v>34.099616858237546</c:v>
                 </c:pt>
                 <c:pt idx="5">
-                  <c:v>33.716475095785441</c:v>
+                  <c:v>33.71647509578544</c:v>
                 </c:pt>
                 <c:pt idx="6">
-                  <c:v>33.716475095785441</c:v>
+                  <c:v>33.71647509578544</c:v>
                 </c:pt>
                 <c:pt idx="7">
                   <c:v>34.099616858237546</c:v>
                 </c:pt>
                 <c:pt idx="8">
-                  <c:v>34.482758620689658</c:v>
+                  <c:v>34.48275862068966</c:v>
                 </c:pt>
                 <c:pt idx="9">
-                  <c:v>34.865900383141764</c:v>
+                  <c:v>34.86590038314176</c:v>
                 </c:pt>
                 <c:pt idx="10">
-                  <c:v>34.865900383141764</c:v>
+                  <c:v>34.86590038314176</c:v>
                 </c:pt>
                 <c:pt idx="11">
-                  <c:v>34.865900383141764</c:v>
+                  <c:v>34.86590038314176</c:v>
                 </c:pt>
               </c:numCache>
             </c:numRef>
           </c:val>
-          <c:extLst xmlns:lc="http://schemas.openxmlformats.org/drawingml/2006/lockedCanvas" xmlns:comp="http://schemas.openxmlformats.org/drawingml/2006/compatibility" xmlns:we="http://schemas.microsoft.com/office/webextensions/webextension/2010/11" xmlns:wetp="http://schemas.microsoft.com/office/webextensions/taskpanes/2010/11" xmlns:w16cid="http://schemas.microsoft.com/office/word/2016/wordml/cid" xmlns:w16se="http://schemas.microsoft.com/office/word/2015/wordml/symex" xmlns:wps="http://schemas.microsoft.com/office/word/2010/wordprocessingShape" xmlns:b="http://schemas.openxmlformats.org/officeDocument/2006/bibliography" xmlns:odgm="http://opendope.org/SmartArt/DataHierarchy" xmlns:odi="http://opendope.org/components" xmlns:oda="http://opendope.org/answers" xmlns:odq="http://opendope.org/questions" xmlns:odc="http://opendope.org/conditions" xmlns:odx="http://opendope.org/xpaths" xmlns:cppr="http://schemas.microsoft.com/office/2006/coverPageProps" xmlns:pvml="urn:schemas-microsoft-com:office:powerpoint" xmlns:w10="urn:schemas-microsoft-com:office:word" xmlns:v="urn:schemas-microsoft-com:vml" xmlns:o="urn:schemas-microsoft-com:office:office" xmlns:xvml="urn:schemas-microsoft-com:office:excel" xmlns:dsp="http://schemas.microsoft.com/office/drawing/2008/diagram" xmlns:xdr="http://schemas.openxmlformats.org/drawingml/2006/spreadsheetDrawing" xmlns:pic="http://schemas.openxmlformats.org/drawingml/2006/picture" xmlns:dgm="http://schemas.openxmlformats.org/drawingml/2006/diagram" xmlns:c14="http://schemas.microsoft.com/office/drawing/2007/8/2/chart" xmlns:cdr="http://schemas.openxmlformats.org/drawingml/2006/chartDrawing" xmlns:wne="http://schemas.microsoft.com/office/word/2006/wordml" xmlns:sl="http://schemas.openxmlformats.org/schemaLibrary/2006/main" xmlns:mc="http://schemas.openxmlformats.org/markup-compatibility/2006" xmlns:wp14="http://schemas.microsoft.com/office/word/2010/wordprocessingDrawing" xmlns:wp="http://schemas.openxmlformats.org/drawingml/2006/wordprocessingDrawing" xmlns:m="http://schemas.openxmlformats.org/officeDocument/2006/math" xmlns:w14="http://schemas.microsoft.com/office/word/2010/wordml" xmlns:w15="http://schemas.microsoft.com/office/word/2012/wordml" xmlns:w="http://schemas.openxmlformats.org/wordprocessingml/2006/main">
+          <c:extLst xmlns:w="http://schemas.openxmlformats.org/wordprocessingml/2006/main" xmlns:w15="http://schemas.microsoft.com/office/word/2012/wordml" xmlns:w14="http://schemas.microsoft.com/office/word/2010/wordml" xmlns:m="http://schemas.openxmlformats.org/officeDocument/2006/math" xmlns:wp="http://schemas.openxmlformats.org/drawingml/2006/wordprocessingDrawing" xmlns:wp14="http://schemas.microsoft.com/office/word/2010/wordprocessingDrawing" xmlns:mc="http://schemas.openxmlformats.org/markup-compatibility/2006" xmlns:sl="http://schemas.openxmlformats.org/schemaLibrary/2006/main" xmlns:wne="http://schemas.microsoft.com/office/word/2006/wordml" xmlns:cdr="http://schemas.openxmlformats.org/drawingml/2006/chartDrawing" xmlns:c14="http://schemas.microsoft.com/office/drawing/2007/8/2/chart" xmlns:dgm="http://schemas.openxmlformats.org/drawingml/2006/diagram" xmlns:pic="http://schemas.openxmlformats.org/drawingml/2006/picture" xmlns:xdr="http://schemas.openxmlformats.org/drawingml/2006/spreadsheetDrawing" xmlns:dsp="http://schemas.microsoft.com/office/drawing/2008/diagram" xmlns:xvml="urn:schemas-microsoft-com:office:excel" xmlns:o="urn:schemas-microsoft-com:office:office" xmlns:v="urn:schemas-microsoft-com:vml" xmlns:w10="urn:schemas-microsoft-com:office:word" xmlns:pvml="urn:schemas-microsoft-com:office:powerpoint" xmlns:cppr="http://schemas.microsoft.com/office/2006/coverPageProps" xmlns:odx="http://opendope.org/xpaths" xmlns:odc="http://opendope.org/conditions" xmlns:odq="http://opendope.org/questions" xmlns:oda="http://opendope.org/answers" xmlns:odi="http://opendope.org/components" xmlns:odgm="http://opendope.org/SmartArt/DataHierarchy" xmlns:b="http://schemas.openxmlformats.org/officeDocument/2006/bibliography" xmlns:wps="http://schemas.microsoft.com/office/word/2010/wordprocessingShape" xmlns:w16se="http://schemas.microsoft.com/office/word/2015/wordml/symex" xmlns:w16cid="http://schemas.microsoft.com/office/word/2016/wordml/cid" xmlns:wetp="http://schemas.microsoft.com/office/webextensions/taskpanes/2010/11" xmlns:we="http://schemas.microsoft.com/office/webextensions/webextension/2010/11" xmlns:comp="http://schemas.openxmlformats.org/drawingml/2006/compatibility" xmlns:lc="http://schemas.openxmlformats.org/drawingml/2006/lockedCanvas">
             <c:ext xmlns:c16="http://schemas.microsoft.com/office/drawing/2014/chart" uri="{C3380CC4-5D6E-409C-BE32-E72D297353CC}">
               <c16:uniqueId val="{00000002-6147-E74A-AA7B-5531F0E4EE0C}"/>
             </c:ext>
@@ -4817,19 +4817,19 @@
                 <c:formatCode>General</c:formatCode>
                 <c:ptCount val="12"/>
                 <c:pt idx="0">
-                  <c:v>0.76628352490421459</c:v>
+                  <c:v>0.7662835249042146</c:v>
                 </c:pt>
                 <c:pt idx="1">
                   <c:v>1.5325670498084292</c:v>
                 </c:pt>
                 <c:pt idx="2">
-                  <c:v>0.38314176245210729</c:v>
+                  <c:v>0.3831417624521073</c:v>
                 </c:pt>
                 <c:pt idx="3">
                   <c:v>2.2988505747126435</c:v>
                 </c:pt>
                 <c:pt idx="4">
-                  <c:v>4.5977011494252871</c:v>
+                  <c:v>4.597701149425287</c:v>
                 </c:pt>
                 <c:pt idx="5">
                   <c:v>1.1494252873563218</c:v>
@@ -4841,16 +4841,16 @@
                   <c:v>2.2988505747126435</c:v>
                 </c:pt>
                 <c:pt idx="8">
-                  <c:v>0.38314176245210729</c:v>
+                  <c:v>0.3831417624521073</c:v>
                 </c:pt>
                 <c:pt idx="9">
                   <c:v>1.5325670498084292</c:v>
                 </c:pt>
                 <c:pt idx="10">
-                  <c:v>0.38314176245210729</c:v>
+                  <c:v>0.3831417624521073</c:v>
                 </c:pt>
                 <c:pt idx="11">
-                  <c:v>0.38314176245210729</c:v>
+                  <c:v>0.3831417624521073</c:v>
                 </c:pt>
               </c:numCache>
             </c:numRef>
@@ -4936,16 +4936,16 @@
                 <c:formatCode>General</c:formatCode>
                 <c:ptCount val="12"/>
                 <c:pt idx="0">
-                  <c:v>54.022988505747129</c:v>
+                  <c:v>54.02298850574713</c:v>
                 </c:pt>
                 <c:pt idx="1">
                   <c:v>54.406130268199234</c:v>
                 </c:pt>
                 <c:pt idx="2">
-                  <c:v>54.022988505747129</c:v>
+                  <c:v>54.02298850574713</c:v>
                 </c:pt>
                 <c:pt idx="3">
-                  <c:v>52.107279693486589</c:v>
+                  <c:v>52.10727969348659</c:v>
                 </c:pt>
                 <c:pt idx="4">
                   <c:v>45.21072796934866</c:v>
@@ -4954,19 +4954,19 @@
                   <c:v>56.70498084291188</c:v>
                 </c:pt>
                 <c:pt idx="6">
-                  <c:v>56.321839080459768</c:v>
+                  <c:v>56.32183908045977</c:v>
                 </c:pt>
                 <c:pt idx="7">
                   <c:v>52.490421455938694</c:v>
                 </c:pt>
                 <c:pt idx="8">
-                  <c:v>59.003831417624518</c:v>
+                  <c:v>59.00383141762452</c:v>
                 </c:pt>
                 <c:pt idx="9">
                   <c:v>57.47126436781609</c:v>
                 </c:pt>
                 <c:pt idx="10">
-                  <c:v>58.620689655172413</c:v>
+                  <c:v>58.62068965517241</c:v>
                 </c:pt>
                 <c:pt idx="11">
                   <c:v>59.38697318007663</c:v>
@@ -5058,7 +5058,7 @@
                   <c:v>1.1494252873563218</c:v>
                 </c:pt>
                 <c:pt idx="1">
-                  <c:v>0</c:v>
+                  <c:v>0.0</c:v>
                 </c:pt>
                 <c:pt idx="2">
                   <c:v>1.5325670498084292</c:v>
@@ -5067,7 +5067,7 @@
                   <c:v>1.5325670498084292</c:v>
                 </c:pt>
                 <c:pt idx="4">
-                  <c:v>8.0459770114942533</c:v>
+                  <c:v>8.045977011494253</c:v>
                 </c:pt>
                 <c:pt idx="5">
                   <c:v>1.1494252873563218</c:v>
@@ -5076,19 +5076,19 @@
                   <c:v>1.5325670498084292</c:v>
                 </c:pt>
                 <c:pt idx="7">
-                  <c:v>4.5977011494252871</c:v>
+                  <c:v>4.597701149425287</c:v>
                 </c:pt>
                 <c:pt idx="8">
-                  <c:v>0.38314176245210729</c:v>
+                  <c:v>0.3831417624521073</c:v>
                 </c:pt>
                 <c:pt idx="9">
-                  <c:v>0.76628352490421459</c:v>
+                  <c:v>0.7662835249042146</c:v>
                 </c:pt>
                 <c:pt idx="10">
                   <c:v>1.5325670498084292</c:v>
                 </c:pt>
                 <c:pt idx="11">
-                  <c:v>0.76628352490421459</c:v>
+                  <c:v>0.7662835249042146</c:v>
                 </c:pt>
               </c:numCache>
             </c:numRef>
@@ -5188,7 +5188,7 @@
                   <c:v>10.727969348659004</c:v>
                 </c:pt>
                 <c:pt idx="4">
-                  <c:v>8.0459770114942533</c:v>
+                  <c:v>8.045977011494253</c:v>
                 </c:pt>
                 <c:pt idx="5">
                   <c:v>7.2796934865900385</c:v>
@@ -5197,19 +5197,19 @@
                   <c:v>7.2796934865900385</c:v>
                 </c:pt>
                 <c:pt idx="7">
-                  <c:v>6.5134099616858236</c:v>
+                  <c:v>6.513409961685824</c:v>
                 </c:pt>
                 <c:pt idx="8">
-                  <c:v>5.7471264367816088</c:v>
+                  <c:v>5.747126436781609</c:v>
                 </c:pt>
                 <c:pt idx="9">
-                  <c:v>5.3639846743295019</c:v>
+                  <c:v>5.363984674329502</c:v>
                 </c:pt>
                 <c:pt idx="10">
-                  <c:v>4.5977011494252871</c:v>
+                  <c:v>4.597701149425287</c:v>
                 </c:pt>
                 <c:pt idx="11">
-                  <c:v>4.5977011494252871</c:v>
+                  <c:v>4.597701149425287</c:v>
                 </c:pt>
               </c:numCache>
             </c:numRef>
@@ -5346,14 +5346,14 @@
     </c:plotArea>
     <c:plotVisOnly val="1"/>
     <c:dispBlanksAs val="gap"/>
-    <c:showDLblsOverMax val="0"/>
-    <c:extLst xmlns:lc="http://schemas.openxmlformats.org/drawingml/2006/lockedCanvas" xmlns:comp="http://schemas.openxmlformats.org/drawingml/2006/compatibility" xmlns:we="http://schemas.microsoft.com/office/webextensions/webextension/2010/11" xmlns:wetp="http://schemas.microsoft.com/office/webextensions/taskpanes/2010/11" xmlns:w16cid="http://schemas.microsoft.com/office/word/2016/wordml/cid" xmlns:w16se="http://schemas.microsoft.com/office/word/2015/wordml/symex" xmlns:wps="http://schemas.microsoft.com/office/word/2010/wordprocessingShape" xmlns:b="http://schemas.openxmlformats.org/officeDocument/2006/bibliography" xmlns:odgm="http://opendope.org/SmartArt/DataHierarchy" xmlns:odi="http://opendope.org/components" xmlns:oda="http://opendope.org/answers" xmlns:odq="http://opendope.org/questions" xmlns:odc="http://opendope.org/conditions" xmlns:odx="http://opendope.org/xpaths" xmlns:cppr="http://schemas.microsoft.com/office/2006/coverPageProps" xmlns:pvml="urn:schemas-microsoft-com:office:powerpoint" xmlns:w10="urn:schemas-microsoft-com:office:word" xmlns:v="urn:schemas-microsoft-com:vml" xmlns:o="urn:schemas-microsoft-com:office:office" xmlns:xvml="urn:schemas-microsoft-com:office:excel" xmlns:dsp="http://schemas.microsoft.com/office/drawing/2008/diagram" xmlns:xdr="http://schemas.openxmlformats.org/drawingml/2006/spreadsheetDrawing" xmlns:pic="http://schemas.openxmlformats.org/drawingml/2006/picture" xmlns:dgm="http://schemas.openxmlformats.org/drawingml/2006/diagram" xmlns:c14="http://schemas.microsoft.com/office/drawing/2007/8/2/chart" xmlns:cdr="http://schemas.openxmlformats.org/drawingml/2006/chartDrawing" xmlns:wne="http://schemas.microsoft.com/office/word/2006/wordml" xmlns:sl="http://schemas.openxmlformats.org/schemaLibrary/2006/main" xmlns:mc="http://schemas.openxmlformats.org/markup-compatibility/2006" xmlns:wp14="http://schemas.microsoft.com/office/word/2010/wordprocessingDrawing" xmlns:wp="http://schemas.openxmlformats.org/drawingml/2006/wordprocessingDrawing" xmlns:m="http://schemas.openxmlformats.org/officeDocument/2006/math" xmlns:w14="http://schemas.microsoft.com/office/word/2010/wordml" xmlns:w15="http://schemas.microsoft.com/office/word/2012/wordml" xmlns:w="http://schemas.openxmlformats.org/wordprocessingml/2006/main">
+    <c:extLst xmlns:w="http://schemas.openxmlformats.org/wordprocessingml/2006/main" xmlns:w15="http://schemas.microsoft.com/office/word/2012/wordml" xmlns:w14="http://schemas.microsoft.com/office/word/2010/wordml" xmlns:m="http://schemas.openxmlformats.org/officeDocument/2006/math" xmlns:wp="http://schemas.openxmlformats.org/drawingml/2006/wordprocessingDrawing" xmlns:wp14="http://schemas.microsoft.com/office/word/2010/wordprocessingDrawing" xmlns:mc="http://schemas.openxmlformats.org/markup-compatibility/2006" xmlns:sl="http://schemas.openxmlformats.org/schemaLibrary/2006/main" xmlns:wne="http://schemas.microsoft.com/office/word/2006/wordml" xmlns:cdr="http://schemas.openxmlformats.org/drawingml/2006/chartDrawing" xmlns:c14="http://schemas.microsoft.com/office/drawing/2007/8/2/chart" xmlns:dgm="http://schemas.openxmlformats.org/drawingml/2006/diagram" xmlns:pic="http://schemas.openxmlformats.org/drawingml/2006/picture" xmlns:xdr="http://schemas.openxmlformats.org/drawingml/2006/spreadsheetDrawing" xmlns:dsp="http://schemas.microsoft.com/office/drawing/2008/diagram" xmlns:xvml="urn:schemas-microsoft-com:office:excel" xmlns:o="urn:schemas-microsoft-com:office:office" xmlns:v="urn:schemas-microsoft-com:vml" xmlns:w10="urn:schemas-microsoft-com:office:word" xmlns:pvml="urn:schemas-microsoft-com:office:powerpoint" xmlns:cppr="http://schemas.microsoft.com/office/2006/coverPageProps" xmlns:odx="http://opendope.org/xpaths" xmlns:odc="http://opendope.org/conditions" xmlns:odq="http://opendope.org/questions" xmlns:oda="http://opendope.org/answers" xmlns:odi="http://opendope.org/components" xmlns:odgm="http://opendope.org/SmartArt/DataHierarchy" xmlns:b="http://schemas.openxmlformats.org/officeDocument/2006/bibliography" xmlns:wps="http://schemas.microsoft.com/office/word/2010/wordprocessingShape" xmlns:w16se="http://schemas.microsoft.com/office/word/2015/wordml/symex" xmlns:w16cid="http://schemas.microsoft.com/office/word/2016/wordml/cid" xmlns:wetp="http://schemas.microsoft.com/office/webextensions/taskpanes/2010/11" xmlns:we="http://schemas.microsoft.com/office/webextensions/webextension/2010/11" xmlns:comp="http://schemas.openxmlformats.org/drawingml/2006/compatibility" xmlns:lc="http://schemas.openxmlformats.org/drawingml/2006/lockedCanvas">
       <c:ext xmlns:c16r3="http://schemas.microsoft.com/office/drawing/2017/03/chart" uri="{56B9EC1D-385E-4148-901F-78D8002777C0}">
         <c16r3:dataDisplayOptions16>
           <c16r3:dispNaAsBlank val="1"/>
         </c16r3:dataDisplayOptions16>
       </c:ext>
     </c:extLst>
+    <c:showDLblsOverMax val="0"/>
   </c:chart>
   <c:spPr>
     <a:noFill/>
@@ -5449,7 +5449,7 @@
                 </a:outerShdw>
               </a:effectLst>
             </c:spPr>
-            <c:extLst xmlns:lc="http://schemas.openxmlformats.org/drawingml/2006/lockedCanvas" xmlns:comp="http://schemas.openxmlformats.org/drawingml/2006/compatibility" xmlns:we="http://schemas.microsoft.com/office/webextensions/webextension/2010/11" xmlns:wetp="http://schemas.microsoft.com/office/webextensions/taskpanes/2010/11" xmlns:w16cid="http://schemas.microsoft.com/office/word/2016/wordml/cid" xmlns:w16se="http://schemas.microsoft.com/office/word/2015/wordml/symex" xmlns:wps="http://schemas.microsoft.com/office/word/2010/wordprocessingShape" xmlns:b="http://schemas.openxmlformats.org/officeDocument/2006/bibliography" xmlns:odgm="http://opendope.org/SmartArt/DataHierarchy" xmlns:odi="http://opendope.org/components" xmlns:oda="http://opendope.org/answers" xmlns:odq="http://opendope.org/questions" xmlns:odc="http://opendope.org/conditions" xmlns:odx="http://opendope.org/xpaths" xmlns:cppr="http://schemas.microsoft.com/office/2006/coverPageProps" xmlns:pvml="urn:schemas-microsoft-com:office:powerpoint" xmlns:w10="urn:schemas-microsoft-com:office:word" xmlns:v="urn:schemas-microsoft-com:vml" xmlns:o="urn:schemas-microsoft-com:office:office" xmlns:xvml="urn:schemas-microsoft-com:office:excel" xmlns:dsp="http://schemas.microsoft.com/office/drawing/2008/diagram" xmlns:xdr="http://schemas.openxmlformats.org/drawingml/2006/spreadsheetDrawing" xmlns:pic="http://schemas.openxmlformats.org/drawingml/2006/picture" xmlns:dgm="http://schemas.openxmlformats.org/drawingml/2006/diagram" xmlns:c14="http://schemas.microsoft.com/office/drawing/2007/8/2/chart" xmlns:cdr="http://schemas.openxmlformats.org/drawingml/2006/chartDrawing" xmlns:wne="http://schemas.microsoft.com/office/word/2006/wordml" xmlns:sl="http://schemas.openxmlformats.org/schemaLibrary/2006/main" xmlns:mc="http://schemas.openxmlformats.org/markup-compatibility/2006" xmlns:wp14="http://schemas.microsoft.com/office/word/2010/wordprocessingDrawing" xmlns:wp="http://schemas.openxmlformats.org/drawingml/2006/wordprocessingDrawing" xmlns:m="http://schemas.openxmlformats.org/officeDocument/2006/math" xmlns:w14="http://schemas.microsoft.com/office/word/2010/wordml" xmlns:w15="http://schemas.microsoft.com/office/word/2012/wordml" xmlns:w="http://schemas.openxmlformats.org/wordprocessingml/2006/main">
+            <c:extLst xmlns:w="http://schemas.openxmlformats.org/wordprocessingml/2006/main" xmlns:w15="http://schemas.microsoft.com/office/word/2012/wordml" xmlns:w14="http://schemas.microsoft.com/office/word/2010/wordml" xmlns:m="http://schemas.openxmlformats.org/officeDocument/2006/math" xmlns:wp="http://schemas.openxmlformats.org/drawingml/2006/wordprocessingDrawing" xmlns:wp14="http://schemas.microsoft.com/office/word/2010/wordprocessingDrawing" xmlns:mc="http://schemas.openxmlformats.org/markup-compatibility/2006" xmlns:sl="http://schemas.openxmlformats.org/schemaLibrary/2006/main" xmlns:wne="http://schemas.microsoft.com/office/word/2006/wordml" xmlns:cdr="http://schemas.openxmlformats.org/drawingml/2006/chartDrawing" xmlns:c14="http://schemas.microsoft.com/office/drawing/2007/8/2/chart" xmlns:dgm="http://schemas.openxmlformats.org/drawingml/2006/diagram" xmlns:pic="http://schemas.openxmlformats.org/drawingml/2006/picture" xmlns:xdr="http://schemas.openxmlformats.org/drawingml/2006/spreadsheetDrawing" xmlns:dsp="http://schemas.microsoft.com/office/drawing/2008/diagram" xmlns:xvml="urn:schemas-microsoft-com:office:excel" xmlns:o="urn:schemas-microsoft-com:office:office" xmlns:v="urn:schemas-microsoft-com:vml" xmlns:w10="urn:schemas-microsoft-com:office:word" xmlns:pvml="urn:schemas-microsoft-com:office:powerpoint" xmlns:cppr="http://schemas.microsoft.com/office/2006/coverPageProps" xmlns:odx="http://opendope.org/xpaths" xmlns:odc="http://opendope.org/conditions" xmlns:odq="http://opendope.org/questions" xmlns:oda="http://opendope.org/answers" xmlns:odi="http://opendope.org/components" xmlns:odgm="http://opendope.org/SmartArt/DataHierarchy" xmlns:b="http://schemas.openxmlformats.org/officeDocument/2006/bibliography" xmlns:wps="http://schemas.microsoft.com/office/word/2010/wordprocessingShape" xmlns:w16se="http://schemas.microsoft.com/office/word/2015/wordml/symex" xmlns:w16cid="http://schemas.microsoft.com/office/word/2016/wordml/cid" xmlns:wetp="http://schemas.microsoft.com/office/webextensions/taskpanes/2010/11" xmlns:we="http://schemas.microsoft.com/office/webextensions/webextension/2010/11" xmlns:comp="http://schemas.openxmlformats.org/drawingml/2006/compatibility" xmlns:lc="http://schemas.openxmlformats.org/drawingml/2006/lockedCanvas">
               <c:ext xmlns:c16="http://schemas.microsoft.com/office/drawing/2014/chart" uri="{C3380CC4-5D6E-409C-BE32-E72D297353CC}">
                 <c16:uniqueId val="{00000001-6147-E74A-AA7B-5531F0E4EE0C}"/>
               </c:ext>
@@ -5512,22 +5512,22 @@
                   <c:v>45.744680851063826</c:v>
                 </c:pt>
                 <c:pt idx="2">
-                  <c:v>47.872340425531917</c:v>
+                  <c:v>47.87234042553192</c:v>
                 </c:pt>
                 <c:pt idx="3">
                   <c:v>47.340425531914896</c:v>
                 </c:pt>
                 <c:pt idx="4">
-                  <c:v>51.595744680851062</c:v>
+                  <c:v>51.59574468085106</c:v>
                 </c:pt>
                 <c:pt idx="5">
-                  <c:v>51.595744680851062</c:v>
+                  <c:v>51.59574468085106</c:v>
                 </c:pt>
                 <c:pt idx="6">
-                  <c:v>51.595744680851062</c:v>
+                  <c:v>51.59574468085106</c:v>
                 </c:pt>
                 <c:pt idx="7">
-                  <c:v>51.063829787234042</c:v>
+                  <c:v>51.06382978723404</c:v>
                 </c:pt>
                 <c:pt idx="8">
                   <c:v>52.659574468085104</c:v>
@@ -5536,7 +5536,7 @@
                   <c:v>52.659574468085104</c:v>
                 </c:pt>
                 <c:pt idx="10">
-                  <c:v>52.127659574468083</c:v>
+                  <c:v>52.12765957446808</c:v>
                 </c:pt>
                 <c:pt idx="11">
                   <c:v>53.191489361702125</c:v>
@@ -5544,7 +5544,7 @@
               </c:numCache>
             </c:numRef>
           </c:val>
-          <c:extLst xmlns:lc="http://schemas.openxmlformats.org/drawingml/2006/lockedCanvas" xmlns:comp="http://schemas.openxmlformats.org/drawingml/2006/compatibility" xmlns:we="http://schemas.microsoft.com/office/webextensions/webextension/2010/11" xmlns:wetp="http://schemas.microsoft.com/office/webextensions/taskpanes/2010/11" xmlns:w16cid="http://schemas.microsoft.com/office/word/2016/wordml/cid" xmlns:w16se="http://schemas.microsoft.com/office/word/2015/wordml/symex" xmlns:wps="http://schemas.microsoft.com/office/word/2010/wordprocessingShape" xmlns:b="http://schemas.openxmlformats.org/officeDocument/2006/bibliography" xmlns:odgm="http://opendope.org/SmartArt/DataHierarchy" xmlns:odi="http://opendope.org/components" xmlns:oda="http://opendope.org/answers" xmlns:odq="http://opendope.org/questions" xmlns:odc="http://opendope.org/conditions" xmlns:odx="http://opendope.org/xpaths" xmlns:cppr="http://schemas.microsoft.com/office/2006/coverPageProps" xmlns:pvml="urn:schemas-microsoft-com:office:powerpoint" xmlns:w10="urn:schemas-microsoft-com:office:word" xmlns:v="urn:schemas-microsoft-com:vml" xmlns:o="urn:schemas-microsoft-com:office:office" xmlns:xvml="urn:schemas-microsoft-com:office:excel" xmlns:dsp="http://schemas.microsoft.com/office/drawing/2008/diagram" xmlns:xdr="http://schemas.openxmlformats.org/drawingml/2006/spreadsheetDrawing" xmlns:pic="http://schemas.openxmlformats.org/drawingml/2006/picture" xmlns:dgm="http://schemas.openxmlformats.org/drawingml/2006/diagram" xmlns:c14="http://schemas.microsoft.com/office/drawing/2007/8/2/chart" xmlns:cdr="http://schemas.openxmlformats.org/drawingml/2006/chartDrawing" xmlns:wne="http://schemas.microsoft.com/office/word/2006/wordml" xmlns:sl="http://schemas.openxmlformats.org/schemaLibrary/2006/main" xmlns:mc="http://schemas.openxmlformats.org/markup-compatibility/2006" xmlns:wp14="http://schemas.microsoft.com/office/word/2010/wordprocessingDrawing" xmlns:wp="http://schemas.openxmlformats.org/drawingml/2006/wordprocessingDrawing" xmlns:m="http://schemas.openxmlformats.org/officeDocument/2006/math" xmlns:w14="http://schemas.microsoft.com/office/word/2010/wordml" xmlns:w15="http://schemas.microsoft.com/office/word/2012/wordml" xmlns:w="http://schemas.openxmlformats.org/wordprocessingml/2006/main">
+          <c:extLst xmlns:w="http://schemas.openxmlformats.org/wordprocessingml/2006/main" xmlns:w15="http://schemas.microsoft.com/office/word/2012/wordml" xmlns:w14="http://schemas.microsoft.com/office/word/2010/wordml" xmlns:m="http://schemas.openxmlformats.org/officeDocument/2006/math" xmlns:wp="http://schemas.openxmlformats.org/drawingml/2006/wordprocessingDrawing" xmlns:wp14="http://schemas.microsoft.com/office/word/2010/wordprocessingDrawing" xmlns:mc="http://schemas.openxmlformats.org/markup-compatibility/2006" xmlns:sl="http://schemas.openxmlformats.org/schemaLibrary/2006/main" xmlns:wne="http://schemas.microsoft.com/office/word/2006/wordml" xmlns:cdr="http://schemas.openxmlformats.org/drawingml/2006/chartDrawing" xmlns:c14="http://schemas.microsoft.com/office/drawing/2007/8/2/chart" xmlns:dgm="http://schemas.openxmlformats.org/drawingml/2006/diagram" xmlns:pic="http://schemas.openxmlformats.org/drawingml/2006/picture" xmlns:xdr="http://schemas.openxmlformats.org/drawingml/2006/spreadsheetDrawing" xmlns:dsp="http://schemas.microsoft.com/office/drawing/2008/diagram" xmlns:xvml="urn:schemas-microsoft-com:office:excel" xmlns:o="urn:schemas-microsoft-com:office:office" xmlns:v="urn:schemas-microsoft-com:vml" xmlns:w10="urn:schemas-microsoft-com:office:word" xmlns:pvml="urn:schemas-microsoft-com:office:powerpoint" xmlns:cppr="http://schemas.microsoft.com/office/2006/coverPageProps" xmlns:odx="http://opendope.org/xpaths" xmlns:odc="http://opendope.org/conditions" xmlns:odq="http://opendope.org/questions" xmlns:oda="http://opendope.org/answers" xmlns:odi="http://opendope.org/components" xmlns:odgm="http://opendope.org/SmartArt/DataHierarchy" xmlns:b="http://schemas.openxmlformats.org/officeDocument/2006/bibliography" xmlns:wps="http://schemas.microsoft.com/office/word/2010/wordprocessingShape" xmlns:w16se="http://schemas.microsoft.com/office/word/2015/wordml/symex" xmlns:w16cid="http://schemas.microsoft.com/office/word/2016/wordml/cid" xmlns:wetp="http://schemas.microsoft.com/office/webextensions/taskpanes/2010/11" xmlns:we="http://schemas.microsoft.com/office/webextensions/webextension/2010/11" xmlns:comp="http://schemas.openxmlformats.org/drawingml/2006/compatibility" xmlns:lc="http://schemas.openxmlformats.org/drawingml/2006/lockedCanvas">
             <c:ext xmlns:c16="http://schemas.microsoft.com/office/drawing/2014/chart" uri="{C3380CC4-5D6E-409C-BE32-E72D297353CC}">
               <c16:uniqueId val="{00000002-6147-E74A-AA7B-5531F0E4EE0C}"/>
             </c:ext>
@@ -5625,13 +5625,13 @@
                 <c:formatCode>General</c:formatCode>
                 <c:ptCount val="12"/>
                 <c:pt idx="0">
-                  <c:v>0.53191489361702127</c:v>
+                  <c:v>0.5319148936170213</c:v>
                 </c:pt>
                 <c:pt idx="1">
-                  <c:v>0</c:v>
+                  <c:v>0.0</c:v>
                 </c:pt>
                 <c:pt idx="2">
-                  <c:v>0</c:v>
+                  <c:v>0.0</c:v>
                 </c:pt>
                 <c:pt idx="3">
                   <c:v>3.1914893617021276</c:v>
@@ -5640,13 +5640,13 @@
                   <c:v>1.5957446808510638</c:v>
                 </c:pt>
                 <c:pt idx="5">
-                  <c:v>2.1276595744680851</c:v>
+                  <c:v>2.127659574468085</c:v>
                 </c:pt>
                 <c:pt idx="6">
                   <c:v>1.5957446808510638</c:v>
                 </c:pt>
                 <c:pt idx="7">
-                  <c:v>6.9148936170212769</c:v>
+                  <c:v>6.914893617021277</c:v>
                 </c:pt>
                 <c:pt idx="8">
                   <c:v>3.1914893617021276</c:v>
@@ -5655,10 +5655,10 @@
                   <c:v>2.6595744680851063</c:v>
                 </c:pt>
                 <c:pt idx="10">
-                  <c:v>0</c:v>
+                  <c:v>0.0</c:v>
                 </c:pt>
                 <c:pt idx="11">
-                  <c:v>3.7234042553191489</c:v>
+                  <c:v>3.723404255319149</c:v>
                 </c:pt>
               </c:numCache>
             </c:numRef>
@@ -5744,13 +5744,13 @@
                 <c:formatCode>General</c:formatCode>
                 <c:ptCount val="12"/>
                 <c:pt idx="0">
-                  <c:v>6.3829787234042552</c:v>
+                  <c:v>6.382978723404255</c:v>
                 </c:pt>
                 <c:pt idx="1">
-                  <c:v>7.4468085106382977</c:v>
+                  <c:v>7.446808510638298</c:v>
                 </c:pt>
                 <c:pt idx="2">
-                  <c:v>0</c:v>
+                  <c:v>0.0</c:v>
                 </c:pt>
                 <c:pt idx="3">
                   <c:v>14.893617021276595</c:v>
@@ -5774,10 +5774,10 @@
                   <c:v>22.340425531914892</c:v>
                 </c:pt>
                 <c:pt idx="10">
-                  <c:v>25</c:v>
+                  <c:v>25.0</c:v>
                 </c:pt>
                 <c:pt idx="11">
-                  <c:v>17.553191489361701</c:v>
+                  <c:v>17.5531914893617</c:v>
                 </c:pt>
               </c:numCache>
             </c:numRef>
@@ -5863,16 +5863,16 @@
                 <c:formatCode>General</c:formatCode>
                 <c:ptCount val="12"/>
                 <c:pt idx="0">
-                  <c:v>0.53191489361702127</c:v>
+                  <c:v>0.5319148936170213</c:v>
                 </c:pt>
                 <c:pt idx="1">
-                  <c:v>0</c:v>
+                  <c:v>0.0</c:v>
                 </c:pt>
                 <c:pt idx="2">
                   <c:v>11.170212765957446</c:v>
                 </c:pt>
                 <c:pt idx="3">
-                  <c:v>5.3191489361702127</c:v>
+                  <c:v>5.319148936170213</c:v>
                 </c:pt>
                 <c:pt idx="4">
                   <c:v>3.1914893617021276</c:v>
@@ -5887,16 +5887,16 @@
                   <c:v>10.106382978723405</c:v>
                 </c:pt>
                 <c:pt idx="8">
-                  <c:v>2.1276595744680851</c:v>
+                  <c:v>2.127659574468085</c:v>
                 </c:pt>
                 <c:pt idx="9">
                   <c:v>1.5957446808510638</c:v>
                 </c:pt>
                 <c:pt idx="10">
-                  <c:v>2.1276595744680851</c:v>
+                  <c:v>2.127659574468085</c:v>
                 </c:pt>
                 <c:pt idx="11">
-                  <c:v>4.7872340425531918</c:v>
+                  <c:v>4.787234042553192</c:v>
                 </c:pt>
               </c:numCache>
             </c:numRef>
@@ -5990,19 +5990,19 @@
                   <c:v>46.808510638297875</c:v>
                 </c:pt>
                 <c:pt idx="2">
-                  <c:v>40.957446808510639</c:v>
+                  <c:v>40.95744680851064</c:v>
                 </c:pt>
                 <c:pt idx="3">
                   <c:v>29.25531914893617</c:v>
                 </c:pt>
                 <c:pt idx="4">
-                  <c:v>24.468085106382979</c:v>
+                  <c:v>24.46808510638298</c:v>
                 </c:pt>
                 <c:pt idx="5">
-                  <c:v>24.468085106382979</c:v>
+                  <c:v>24.46808510638298</c:v>
                 </c:pt>
                 <c:pt idx="6">
-                  <c:v>25.531914893617021</c:v>
+                  <c:v>25.53191489361702</c:v>
                 </c:pt>
                 <c:pt idx="7">
                   <c:v>19.680851063829788</c:v>
@@ -6154,14 +6154,14 @@
     </c:plotArea>
     <c:plotVisOnly val="1"/>
     <c:dispBlanksAs val="gap"/>
-    <c:showDLblsOverMax val="0"/>
-    <c:extLst xmlns:lc="http://schemas.openxmlformats.org/drawingml/2006/lockedCanvas" xmlns:comp="http://schemas.openxmlformats.org/drawingml/2006/compatibility" xmlns:we="http://schemas.microsoft.com/office/webextensions/webextension/2010/11" xmlns:wetp="http://schemas.microsoft.com/office/webextensions/taskpanes/2010/11" xmlns:w16cid="http://schemas.microsoft.com/office/word/2016/wordml/cid" xmlns:w16se="http://schemas.microsoft.com/office/word/2015/wordml/symex" xmlns:wps="http://schemas.microsoft.com/office/word/2010/wordprocessingShape" xmlns:b="http://schemas.openxmlformats.org/officeDocument/2006/bibliography" xmlns:odgm="http://opendope.org/SmartArt/DataHierarchy" xmlns:odi="http://opendope.org/components" xmlns:oda="http://opendope.org/answers" xmlns:odq="http://opendope.org/questions" xmlns:odc="http://opendope.org/conditions" xmlns:odx="http://opendope.org/xpaths" xmlns:cppr="http://schemas.microsoft.com/office/2006/coverPageProps" xmlns:pvml="urn:schemas-microsoft-com:office:powerpoint" xmlns:w10="urn:schemas-microsoft-com:office:word" xmlns:v="urn:schemas-microsoft-com:vml" xmlns:o="urn:schemas-microsoft-com:office:office" xmlns:xvml="urn:schemas-microsoft-com:office:excel" xmlns:dsp="http://schemas.microsoft.com/office/drawing/2008/diagram" xmlns:xdr="http://schemas.openxmlformats.org/drawingml/2006/spreadsheetDrawing" xmlns:pic="http://schemas.openxmlformats.org/drawingml/2006/picture" xmlns:dgm="http://schemas.openxmlformats.org/drawingml/2006/diagram" xmlns:c14="http://schemas.microsoft.com/office/drawing/2007/8/2/chart" xmlns:cdr="http://schemas.openxmlformats.org/drawingml/2006/chartDrawing" xmlns:wne="http://schemas.microsoft.com/office/word/2006/wordml" xmlns:sl="http://schemas.openxmlformats.org/schemaLibrary/2006/main" xmlns:mc="http://schemas.openxmlformats.org/markup-compatibility/2006" xmlns:wp14="http://schemas.microsoft.com/office/word/2010/wordprocessingDrawing" xmlns:wp="http://schemas.openxmlformats.org/drawingml/2006/wordprocessingDrawing" xmlns:m="http://schemas.openxmlformats.org/officeDocument/2006/math" xmlns:w14="http://schemas.microsoft.com/office/word/2010/wordml" xmlns:w15="http://schemas.microsoft.com/office/word/2012/wordml" xmlns:w="http://schemas.openxmlformats.org/wordprocessingml/2006/main">
+    <c:extLst xmlns:w="http://schemas.openxmlformats.org/wordprocessingml/2006/main" xmlns:w15="http://schemas.microsoft.com/office/word/2012/wordml" xmlns:w14="http://schemas.microsoft.com/office/word/2010/wordml" xmlns:m="http://schemas.openxmlformats.org/officeDocument/2006/math" xmlns:wp="http://schemas.openxmlformats.org/drawingml/2006/wordprocessingDrawing" xmlns:wp14="http://schemas.microsoft.com/office/word/2010/wordprocessingDrawing" xmlns:mc="http://schemas.openxmlformats.org/markup-compatibility/2006" xmlns:sl="http://schemas.openxmlformats.org/schemaLibrary/2006/main" xmlns:wne="http://schemas.microsoft.com/office/word/2006/wordml" xmlns:cdr="http://schemas.openxmlformats.org/drawingml/2006/chartDrawing" xmlns:c14="http://schemas.microsoft.com/office/drawing/2007/8/2/chart" xmlns:dgm="http://schemas.openxmlformats.org/drawingml/2006/diagram" xmlns:pic="http://schemas.openxmlformats.org/drawingml/2006/picture" xmlns:xdr="http://schemas.openxmlformats.org/drawingml/2006/spreadsheetDrawing" xmlns:dsp="http://schemas.microsoft.com/office/drawing/2008/diagram" xmlns:xvml="urn:schemas-microsoft-com:office:excel" xmlns:o="urn:schemas-microsoft-com:office:office" xmlns:v="urn:schemas-microsoft-com:vml" xmlns:w10="urn:schemas-microsoft-com:office:word" xmlns:pvml="urn:schemas-microsoft-com:office:powerpoint" xmlns:cppr="http://schemas.microsoft.com/office/2006/coverPageProps" xmlns:odx="http://opendope.org/xpaths" xmlns:odc="http://opendope.org/conditions" xmlns:odq="http://opendope.org/questions" xmlns:oda="http://opendope.org/answers" xmlns:odi="http://opendope.org/components" xmlns:odgm="http://opendope.org/SmartArt/DataHierarchy" xmlns:b="http://schemas.openxmlformats.org/officeDocument/2006/bibliography" xmlns:wps="http://schemas.microsoft.com/office/word/2010/wordprocessingShape" xmlns:w16se="http://schemas.microsoft.com/office/word/2015/wordml/symex" xmlns:w16cid="http://schemas.microsoft.com/office/word/2016/wordml/cid" xmlns:wetp="http://schemas.microsoft.com/office/webextensions/taskpanes/2010/11" xmlns:we="http://schemas.microsoft.com/office/webextensions/webextension/2010/11" xmlns:comp="http://schemas.openxmlformats.org/drawingml/2006/compatibility" xmlns:lc="http://schemas.openxmlformats.org/drawingml/2006/lockedCanvas">
       <c:ext xmlns:c16r3="http://schemas.microsoft.com/office/drawing/2017/03/chart" uri="{56B9EC1D-385E-4148-901F-78D8002777C0}">
         <c16r3:dataDisplayOptions16>
           <c16r3:dispNaAsBlank val="1"/>
         </c16r3:dataDisplayOptions16>
       </c:ext>
     </c:extLst>
+    <c:showDLblsOverMax val="0"/>
   </c:chart>
   <c:spPr>
     <a:noFill/>
@@ -10480,7 +10480,7 @@
           <a:p>
             <a:fld id="{C1255C68-584F-174D-BB81-51BF91708794}" type="datetimeFigureOut">
               <a:rPr lang="en-US" smtClean="0"/>
-              <a:t>3/12/26</a:t>
+              <a:t>8/8/25</a:t>
             </a:fld>
             <a:endParaRPr lang="en-US"/>
           </a:p>
@@ -10657,7 +10657,7 @@
           <a:p>
             <a:fld id="{A1EDAAC4-819D-C544-9EA1-C73624CFD70B}" type="datetimeFigureOut">
               <a:rPr lang="en-US" smtClean="0"/>
-              <a:t>3/12/26</a:t>
+              <a:t>8/8/25</a:t>
             </a:fld>
             <a:endParaRPr lang="en-US"/>
           </a:p>
@@ -20618,12 +20618,12 @@
             <p:nvPr userDrawn="1"/>
           </p:nvPicPr>
           <p:blipFill>
-            <a:blip>
+            <a:blip r:embed="rId2">
               <a:lum bright="100000"/>
               <a:alphaModFix amt="80000"/>
               <a:extLst>
                 <a:ext uri="{96DAC541-7B7A-43D3-8B79-37D633B846F1}">
-                  <asvg:svgBlip xmlns:asvg="http://schemas.microsoft.com/office/drawing/2016/SVG/main" r:embed="rId2"/>
+                  <asvg:svgBlip xmlns:asvg="http://schemas.microsoft.com/office/drawing/2016/SVG/main" r:embed="rId3"/>
                 </a:ext>
               </a:extLst>
             </a:blip>
@@ -20735,12 +20735,12 @@
             <p:nvPr userDrawn="1"/>
           </p:nvPicPr>
           <p:blipFill>
-            <a:blip>
+            <a:blip r:embed="rId4">
               <a:lum bright="100000"/>
               <a:alphaModFix amt="80000"/>
               <a:extLst>
                 <a:ext uri="{96DAC541-7B7A-43D3-8B79-37D633B846F1}">
-                  <asvg:svgBlip xmlns:asvg="http://schemas.microsoft.com/office/drawing/2016/SVG/main" r:embed="rId3"/>
+                  <asvg:svgBlip xmlns:asvg="http://schemas.microsoft.com/office/drawing/2016/SVG/main" r:embed="rId5"/>
                 </a:ext>
               </a:extLst>
             </a:blip>
@@ -20852,12 +20852,12 @@
             <p:nvPr userDrawn="1"/>
           </p:nvPicPr>
           <p:blipFill>
-            <a:blip>
+            <a:blip r:embed="rId6">
               <a:lum bright="100000"/>
               <a:alphaModFix amt="80000"/>
               <a:extLst>
                 <a:ext uri="{96DAC541-7B7A-43D3-8B79-37D633B846F1}">
-                  <asvg:svgBlip xmlns:asvg="http://schemas.microsoft.com/office/drawing/2016/SVG/main" r:embed="rId4"/>
+                  <asvg:svgBlip xmlns:asvg="http://schemas.microsoft.com/office/drawing/2016/SVG/main" r:embed="rId7"/>
                 </a:ext>
               </a:extLst>
             </a:blip>
@@ -20958,12 +20958,12 @@
             <p:nvPr userDrawn="1"/>
           </p:nvPicPr>
           <p:blipFill>
-            <a:blip>
+            <a:blip r:embed="rId8">
               <a:lum bright="100000"/>
               <a:alphaModFix amt="80000"/>
               <a:extLst>
                 <a:ext uri="{96DAC541-7B7A-43D3-8B79-37D633B846F1}">
-                  <asvg:svgBlip xmlns:asvg="http://schemas.microsoft.com/office/drawing/2016/SVG/main" r:embed="rId5"/>
+                  <asvg:svgBlip xmlns:asvg="http://schemas.microsoft.com/office/drawing/2016/SVG/main" r:embed="rId9"/>
                 </a:ext>
               </a:extLst>
             </a:blip>
@@ -21086,12 +21086,12 @@
             <p:nvPr userDrawn="1"/>
           </p:nvPicPr>
           <p:blipFill>
-            <a:blip>
+            <a:blip r:embed="rId10">
               <a:lum bright="100000"/>
               <a:alphaModFix amt="80000"/>
               <a:extLst>
                 <a:ext uri="{96DAC541-7B7A-43D3-8B79-37D633B846F1}">
-                  <asvg:svgBlip xmlns:asvg="http://schemas.microsoft.com/office/drawing/2016/SVG/main" r:embed="rId6"/>
+                  <asvg:svgBlip xmlns:asvg="http://schemas.microsoft.com/office/drawing/2016/SVG/main" r:embed="rId11"/>
                 </a:ext>
               </a:extLst>
             </a:blip>
@@ -21192,12 +21192,12 @@
             <p:nvPr userDrawn="1"/>
           </p:nvPicPr>
           <p:blipFill>
-            <a:blip>
+            <a:blip r:embed="rId12">
               <a:lum bright="100000"/>
               <a:alphaModFix amt="80000"/>
               <a:extLst>
                 <a:ext uri="{96DAC541-7B7A-43D3-8B79-37D633B846F1}">
-                  <asvg:svgBlip xmlns:asvg="http://schemas.microsoft.com/office/drawing/2016/SVG/main" r:embed="rId7"/>
+                  <asvg:svgBlip xmlns:asvg="http://schemas.microsoft.com/office/drawing/2016/SVG/main" r:embed="rId13"/>
                 </a:ext>
               </a:extLst>
             </a:blip>
@@ -32139,6 +32139,42 @@
       </p:graphicFrame>
       <p:sp>
         <p:nvSpPr>
+          <p:cNvPr id="7" name="TextBox 6">
+            <a:extLst>
+              <a:ext uri="{FF2B5EF4-FFF2-40B4-BE49-F238E27FC236}">
+                <a16:creationId xmlns:a16="http://schemas.microsoft.com/office/drawing/2014/main" id="{41183F90-63B2-0646-9068-7E4E2BCF14D9}"/>
+              </a:ext>
+            </a:extLst>
+          </p:cNvPr>
+          <p:cNvSpPr txBox="1"/>
+          <p:nvPr/>
+        </p:nvSpPr>
+        <p:spPr>
+          <a:xfrm>
+            <a:off x="8958648" y="-525758"/>
+            <a:ext cx="3635054" cy="369332"/>
+          </a:xfrm>
+          <a:prstGeom prst="rect">
+            <a:avLst/>
+          </a:prstGeom>
+          <a:noFill/>
+        </p:spPr>
+        <p:txBody>
+          <a:bodyPr wrap="none" lIns="90000" rtlCol="0" anchor="t">
+            <a:spAutoFit/>
+          </a:bodyPr>
+          <a:lstStyle/>
+          <a:p>
+            <a:r>
+              <a:rPr lang="en-US" b="1"/>
+              <a:t>OBJECTIVES_ARCHITECTURE_CHART</a:t>
+            </a:r>
+            <a:endParaRPr lang="en-US"/>
+          </a:p>
+        </p:txBody>
+      </p:sp>
+      <p:sp>
+        <p:nvSpPr>
           <p:cNvPr id="8" name="TextBox 7">
             <a:extLst>
               <a:ext uri="{FF2B5EF4-FFF2-40B4-BE49-F238E27FC236}">
@@ -32440,6 +32476,7 @@
               <a:rPr lang="en-US"/>
               <a:t>Progress towards objectives between February 2026 and March 2026</a:t>
             </a:r>
+            <a:endParaRPr lang="en-US"/>
           </a:p>
         </p:txBody>
       </p:sp>
@@ -32471,6 +32508,42 @@
           </a:graphicData>
         </a:graphic>
       </p:graphicFrame>
+      <p:sp>
+        <p:nvSpPr>
+          <p:cNvPr id="7" name="TextBox 6">
+            <a:extLst>
+              <a:ext uri="{FF2B5EF4-FFF2-40B4-BE49-F238E27FC236}">
+                <a16:creationId xmlns:a16="http://schemas.microsoft.com/office/drawing/2014/main" id="{1352F2E2-69B9-D866-7D75-24F10BB85A60}"/>
+              </a:ext>
+            </a:extLst>
+          </p:cNvPr>
+          <p:cNvSpPr txBox="1"/>
+          <p:nvPr/>
+        </p:nvSpPr>
+        <p:spPr>
+          <a:xfrm>
+            <a:off x="8958648" y="-525758"/>
+            <a:ext cx="2884016" cy="369332"/>
+          </a:xfrm>
+          <a:prstGeom prst="rect">
+            <a:avLst/>
+          </a:prstGeom>
+          <a:noFill/>
+        </p:spPr>
+        <p:txBody>
+          <a:bodyPr wrap="none" lIns="90000" rtlCol="0" anchor="t">
+            <a:spAutoFit/>
+          </a:bodyPr>
+          <a:lstStyle/>
+          <a:p>
+            <a:r>
+              <a:rPr lang="en-US" b="1"/>
+              <a:t>OBJECTIVES_STATUS_CHART</a:t>
+            </a:r>
+            <a:endParaRPr lang="en-US"/>
+          </a:p>
+        </p:txBody>
+      </p:sp>
       <p:sp>
         <p:nvSpPr>
           <p:cNvPr id="8" name="TextBox 7">
@@ -32750,6 +32823,7 @@
               <a:rPr lang="en-US"/>
               <a:t>Progress towards objectives per team between February 2026 and March 2026</a:t>
             </a:r>
+            <a:endParaRPr lang="en-US"/>
           </a:p>
         </p:txBody>
       </p:sp>
@@ -32781,6 +32855,42 @@
           </a:graphicData>
         </a:graphic>
       </p:graphicFrame>
+      <p:sp>
+        <p:nvSpPr>
+          <p:cNvPr id="7" name="TextBox 6">
+            <a:extLst>
+              <a:ext uri="{FF2B5EF4-FFF2-40B4-BE49-F238E27FC236}">
+                <a16:creationId xmlns:a16="http://schemas.microsoft.com/office/drawing/2014/main" id="{680F10C8-8291-84BB-615B-4FE46E9122C0}"/>
+              </a:ext>
+            </a:extLst>
+          </p:cNvPr>
+          <p:cNvSpPr txBox="1"/>
+          <p:nvPr/>
+        </p:nvSpPr>
+        <p:spPr>
+          <a:xfrm>
+            <a:off x="8958648" y="-525758"/>
+            <a:ext cx="2751287" cy="369332"/>
+          </a:xfrm>
+          <a:prstGeom prst="rect">
+            <a:avLst/>
+          </a:prstGeom>
+          <a:noFill/>
+        </p:spPr>
+        <p:txBody>
+          <a:bodyPr wrap="none" lIns="90000" rtlCol="0" anchor="t">
+            <a:spAutoFit/>
+          </a:bodyPr>
+          <a:lstStyle/>
+          <a:p>
+            <a:r>
+              <a:rPr lang="en-US" b="1"/>
+              <a:t>OBJECTIVES_TEAM_CHART</a:t>
+            </a:r>
+            <a:endParaRPr lang="en-US"/>
+          </a:p>
+        </p:txBody>
+      </p:sp>
       <p:sp>
         <p:nvSpPr>
           <p:cNvPr id="8" name="TextBox 7">
@@ -33060,6 +33170,7 @@
               <a:rPr lang="en-US"/>
               <a:t>Progress towards objectives per capability between February 2026 and March 2026</a:t>
             </a:r>
+            <a:endParaRPr lang="en-US"/>
           </a:p>
         </p:txBody>
       </p:sp>
@@ -33091,6 +33202,42 @@
           </a:graphicData>
         </a:graphic>
       </p:graphicFrame>
+      <p:sp>
+        <p:nvSpPr>
+          <p:cNvPr id="7" name="TextBox 6">
+            <a:extLst>
+              <a:ext uri="{FF2B5EF4-FFF2-40B4-BE49-F238E27FC236}">
+                <a16:creationId xmlns:a16="http://schemas.microsoft.com/office/drawing/2014/main" id="{E75AA9D8-EEB6-8709-C209-D32FF5C291E0}"/>
+              </a:ext>
+            </a:extLst>
+          </p:cNvPr>
+          <p:cNvSpPr txBox="1"/>
+          <p:nvPr/>
+        </p:nvSpPr>
+        <p:spPr>
+          <a:xfrm>
+            <a:off x="8958648" y="-525758"/>
+            <a:ext cx="3278675" cy="369332"/>
+          </a:xfrm>
+          <a:prstGeom prst="rect">
+            <a:avLst/>
+          </a:prstGeom>
+          <a:noFill/>
+        </p:spPr>
+        <p:txBody>
+          <a:bodyPr wrap="none" lIns="90000" rtlCol="0" anchor="t">
+            <a:spAutoFit/>
+          </a:bodyPr>
+          <a:lstStyle/>
+          <a:p>
+            <a:r>
+              <a:rPr lang="en-US" b="1"/>
+              <a:t>OBJECTIVES_CAPABILITY_CHART</a:t>
+            </a:r>
+            <a:endParaRPr lang="en-US"/>
+          </a:p>
+        </p:txBody>
+      </p:sp>
       <p:sp>
         <p:nvSpPr>
           <p:cNvPr id="8" name="TextBox 7">
@@ -33395,6 +33542,42 @@
           </a:graphicData>
         </a:graphic>
       </p:graphicFrame>
+      <p:sp>
+        <p:nvSpPr>
+          <p:cNvPr id="7" name="TextBox 6">
+            <a:extLst>
+              <a:ext uri="{FF2B5EF4-FFF2-40B4-BE49-F238E27FC236}">
+                <a16:creationId xmlns:a16="http://schemas.microsoft.com/office/drawing/2014/main" id="{025FA84B-5F3F-E103-125D-195720E3F1F8}"/>
+              </a:ext>
+            </a:extLst>
+          </p:cNvPr>
+          <p:cNvSpPr txBox="1"/>
+          <p:nvPr/>
+        </p:nvSpPr>
+        <p:spPr>
+          <a:xfrm>
+            <a:off x="8958648" y="-525758"/>
+            <a:ext cx="3051498" cy="369332"/>
+          </a:xfrm>
+          <a:prstGeom prst="rect">
+            <a:avLst/>
+          </a:prstGeom>
+          <a:noFill/>
+        </p:spPr>
+        <p:txBody>
+          <a:bodyPr wrap="none" lIns="90000" rtlCol="0" anchor="t">
+            <a:spAutoFit/>
+          </a:bodyPr>
+          <a:lstStyle/>
+          <a:p>
+            <a:r>
+              <a:rPr lang="en-US" b="1"/>
+              <a:t>OBJECTIVES_OVERALL_CHART</a:t>
+            </a:r>
+            <a:endParaRPr lang="en-US"/>
+          </a:p>
+        </p:txBody>
+      </p:sp>
       <p:sp>
         <p:nvSpPr>
           <p:cNvPr id="8" name="TextBox 7">
@@ -33916,6 +34099,42 @@
       </p:graphicFrame>
       <p:sp>
         <p:nvSpPr>
+          <p:cNvPr id="7" name="TextBox 6">
+            <a:extLst>
+              <a:ext uri="{FF2B5EF4-FFF2-40B4-BE49-F238E27FC236}">
+                <a16:creationId xmlns:a16="http://schemas.microsoft.com/office/drawing/2014/main" id="{659FCAA8-D0E0-3539-B820-DF6D6318129E}"/>
+              </a:ext>
+            </a:extLst>
+          </p:cNvPr>
+          <p:cNvSpPr txBox="1"/>
+          <p:nvPr/>
+        </p:nvSpPr>
+        <p:spPr>
+          <a:xfrm>
+            <a:off x="8958648" y="-525758"/>
+            <a:ext cx="3101768" cy="369332"/>
+          </a:xfrm>
+          <a:prstGeom prst="rect">
+            <a:avLst/>
+          </a:prstGeom>
+          <a:noFill/>
+        </p:spPr>
+        <p:txBody>
+          <a:bodyPr wrap="none" lIns="90000" rtlCol="0" anchor="t">
+            <a:spAutoFit/>
+          </a:bodyPr>
+          <a:lstStyle/>
+          <a:p>
+            <a:r>
+              <a:rPr lang="en-US" b="1"/>
+              <a:t>OBJECTIVES_SECURITY_CHART</a:t>
+            </a:r>
+            <a:endParaRPr lang="en-US"/>
+          </a:p>
+        </p:txBody>
+      </p:sp>
+      <p:sp>
+        <p:nvSpPr>
           <p:cNvPr id="8" name="TextBox 7">
             <a:extLst>
               <a:ext uri="{FF2B5EF4-FFF2-40B4-BE49-F238E27FC236}">
@@ -34220,6 +34439,42 @@
       </p:graphicFrame>
       <p:sp>
         <p:nvSpPr>
+          <p:cNvPr id="7" name="TextBox 6">
+            <a:extLst>
+              <a:ext uri="{FF2B5EF4-FFF2-40B4-BE49-F238E27FC236}">
+                <a16:creationId xmlns:a16="http://schemas.microsoft.com/office/drawing/2014/main" id="{AAE381E8-8BDC-C11E-0B4E-573D2927E3C8}"/>
+              </a:ext>
+            </a:extLst>
+          </p:cNvPr>
+          <p:cNvSpPr txBox="1"/>
+          <p:nvPr/>
+        </p:nvSpPr>
+        <p:spPr>
+          <a:xfrm>
+            <a:off x="8958648" y="-525758"/>
+            <a:ext cx="2597014" cy="369332"/>
+          </a:xfrm>
+          <a:prstGeom prst="rect">
+            <a:avLst/>
+          </a:prstGeom>
+          <a:noFill/>
+        </p:spPr>
+        <p:txBody>
+          <a:bodyPr wrap="none" lIns="90000" rtlCol="0" anchor="t">
+            <a:spAutoFit/>
+          </a:bodyPr>
+          <a:lstStyle/>
+          <a:p>
+            <a:r>
+              <a:rPr lang="en-US" b="1"/>
+              <a:t>OBJECTIVES_OSH_CHART</a:t>
+            </a:r>
+            <a:endParaRPr lang="en-US"/>
+          </a:p>
+        </p:txBody>
+      </p:sp>
+      <p:sp>
+        <p:nvSpPr>
           <p:cNvPr id="8" name="TextBox 7">
             <a:extLst>
               <a:ext uri="{FF2B5EF4-FFF2-40B4-BE49-F238E27FC236}">
@@ -34522,6 +34777,42 @@
           </a:graphicData>
         </a:graphic>
       </p:graphicFrame>
+      <p:sp>
+        <p:nvSpPr>
+          <p:cNvPr id="7" name="TextBox 6">
+            <a:extLst>
+              <a:ext uri="{FF2B5EF4-FFF2-40B4-BE49-F238E27FC236}">
+                <a16:creationId xmlns:a16="http://schemas.microsoft.com/office/drawing/2014/main" id="{FBB95D9E-971C-257B-3338-71CD7C91C015}"/>
+              </a:ext>
+            </a:extLst>
+          </p:cNvPr>
+          <p:cNvSpPr txBox="1"/>
+          <p:nvPr/>
+        </p:nvSpPr>
+        <p:spPr>
+          <a:xfrm>
+            <a:off x="8958648" y="-525758"/>
+            <a:ext cx="3912566" cy="369332"/>
+          </a:xfrm>
+          <a:prstGeom prst="rect">
+            <a:avLst/>
+          </a:prstGeom>
+          <a:noFill/>
+        </p:spPr>
+        <p:txBody>
+          <a:bodyPr wrap="none" lIns="90000" rtlCol="0" anchor="t">
+            <a:spAutoFit/>
+          </a:bodyPr>
+          <a:lstStyle/>
+          <a:p>
+            <a:r>
+              <a:rPr lang="en-US" b="1"/>
+              <a:t>OBJECTIVES_MAINTAINABILITY_CHART</a:t>
+            </a:r>
+            <a:endParaRPr lang="en-US"/>
+          </a:p>
+        </p:txBody>
+      </p:sp>
       <p:sp>
         <p:nvSpPr>
           <p:cNvPr id="8" name="TextBox 7">
@@ -35596,14 +35887,12 @@
 </file>
 
 <file path=customXml/item1.xml><?xml version="1.0" encoding="utf-8"?>
-<p:properties xmlns:p="http://schemas.microsoft.com/office/2006/metadata/properties" xmlns:xsi="http://www.w3.org/2001/XMLSchema-instance" xmlns:pc="http://schemas.microsoft.com/office/infopath/2007/PartnerControls">
-  <documentManagement>
-    <lcf76f155ced4ddcb4097134ff3c332f xmlns="fa937df2-abe2-4d38-b5f4-c228acba3827">
-      <Terms xmlns="http://schemas.microsoft.com/office/infopath/2007/PartnerControls"/>
-    </lcf76f155ced4ddcb4097134ff3c332f>
-    <TaxCatchAll xmlns="bc8ba18a-4a58-4ad2-bfc0-6516af8e7dc2" xsi:nil="true"/>
-  </documentManagement>
-</p:properties>
+<?mso-contentType ?>
+<FormTemplates xmlns="http://schemas.microsoft.com/sharepoint/v3/contenttype/forms">
+  <Display>DocumentLibraryForm</Display>
+  <Edit>DocumentLibraryForm</Edit>
+  <New>DocumentLibraryForm</New>
+</FormTemplates>
 </file>
 
 <file path=customXml/item2.xml><?xml version="1.0" encoding="utf-8"?>
@@ -35830,27 +36119,20 @@
 </file>
 
 <file path=customXml/item3.xml><?xml version="1.0" encoding="utf-8"?>
-<?mso-contentType ?>
-<FormTemplates xmlns="http://schemas.microsoft.com/sharepoint/v3/contenttype/forms">
-  <Display>DocumentLibraryForm</Display>
-  <Edit>DocumentLibraryForm</Edit>
-  <New>DocumentLibraryForm</New>
-</FormTemplates>
+<p:properties xmlns:p="http://schemas.microsoft.com/office/2006/metadata/properties" xmlns:xsi="http://www.w3.org/2001/XMLSchema-instance" xmlns:pc="http://schemas.microsoft.com/office/infopath/2007/PartnerControls">
+  <documentManagement>
+    <lcf76f155ced4ddcb4097134ff3c332f xmlns="fa937df2-abe2-4d38-b5f4-c228acba3827">
+      <Terms xmlns="http://schemas.microsoft.com/office/infopath/2007/PartnerControls"/>
+    </lcf76f155ced4ddcb4097134ff3c332f>
+    <TaxCatchAll xmlns="bc8ba18a-4a58-4ad2-bfc0-6516af8e7dc2" xsi:nil="true"/>
+  </documentManagement>
+</p:properties>
 </file>
 
 <file path=customXml/itemProps1.xml><?xml version="1.0" encoding="utf-8"?>
-<ds:datastoreItem xmlns:ds="http://schemas.openxmlformats.org/officeDocument/2006/customXml" ds:itemID="{4B629362-CF15-4610-8FAC-A8E699942233}">
+<ds:datastoreItem xmlns:ds="http://schemas.openxmlformats.org/officeDocument/2006/customXml" ds:itemID="{570928F0-D7CA-4732-B7F3-1F945720D0AA}">
   <ds:schemaRefs>
-    <ds:schemaRef ds:uri="http://schemas.microsoft.com/office/2006/documentManagement/types"/>
-    <ds:schemaRef ds:uri="http://purl.org/dc/elements/1.1/"/>
-    <ds:schemaRef ds:uri="bc8ba18a-4a58-4ad2-bfc0-6516af8e7dc2"/>
-    <ds:schemaRef ds:uri="http://purl.org/dc/terms/"/>
-    <ds:schemaRef ds:uri="http://www.w3.org/XML/1998/namespace"/>
-    <ds:schemaRef ds:uri="http://schemas.microsoft.com/office/2006/metadata/properties"/>
-    <ds:schemaRef ds:uri="http://schemas.microsoft.com/office/infopath/2007/PartnerControls"/>
-    <ds:schemaRef ds:uri="http://schemas.openxmlformats.org/package/2006/metadata/core-properties"/>
-    <ds:schemaRef ds:uri="fa937df2-abe2-4d38-b5f4-c228acba3827"/>
-    <ds:schemaRef ds:uri="http://purl.org/dc/dcmitype/"/>
+    <ds:schemaRef ds:uri="http://schemas.microsoft.com/sharepoint/v3/contenttype/forms"/>
   </ds:schemaRefs>
 </ds:datastoreItem>
 </file>
@@ -35875,9 +36157,18 @@
 </file>
 
 <file path=customXml/itemProps3.xml><?xml version="1.0" encoding="utf-8"?>
-<ds:datastoreItem xmlns:ds="http://schemas.openxmlformats.org/officeDocument/2006/customXml" ds:itemID="{570928F0-D7CA-4732-B7F3-1F945720D0AA}">
+<ds:datastoreItem xmlns:ds="http://schemas.openxmlformats.org/officeDocument/2006/customXml" ds:itemID="{4B629362-CF15-4610-8FAC-A8E699942233}">
   <ds:schemaRefs>
-    <ds:schemaRef ds:uri="http://schemas.microsoft.com/sharepoint/v3/contenttype/forms"/>
+    <ds:schemaRef ds:uri="http://schemas.microsoft.com/office/2006/documentManagement/types"/>
+    <ds:schemaRef ds:uri="http://purl.org/dc/elements/1.1/"/>
+    <ds:schemaRef ds:uri="bc8ba18a-4a58-4ad2-bfc0-6516af8e7dc2"/>
+    <ds:schemaRef ds:uri="http://purl.org/dc/terms/"/>
+    <ds:schemaRef ds:uri="http://www.w3.org/XML/1998/namespace"/>
+    <ds:schemaRef ds:uri="http://schemas.microsoft.com/office/2006/metadata/properties"/>
+    <ds:schemaRef ds:uri="http://schemas.microsoft.com/office/infopath/2007/PartnerControls"/>
+    <ds:schemaRef ds:uri="http://schemas.openxmlformats.org/package/2006/metadata/core-properties"/>
+    <ds:schemaRef ds:uri="fa937df2-abe2-4d38-b5f4-c228acba3827"/>
+    <ds:schemaRef ds:uri="http://purl.org/dc/dcmitype/"/>
   </ds:schemaRefs>
 </ds:datastoreItem>
 </file>
--- a/tests/report_generator/integration/reference_objectives.pptx
+++ b/tests/report_generator/integration/reference_objectives.pptx
@@ -213,7 +213,7 @@
                 </a:outerShdw>
               </a:effectLst>
             </c:spPr>
-            <c:extLst xmlns:w="http://schemas.openxmlformats.org/wordprocessingml/2006/main" xmlns:w15="http://schemas.microsoft.com/office/word/2012/wordml" xmlns:w14="http://schemas.microsoft.com/office/word/2010/wordml" xmlns:m="http://schemas.openxmlformats.org/officeDocument/2006/math" xmlns:wp="http://schemas.openxmlformats.org/drawingml/2006/wordprocessingDrawing" xmlns:wp14="http://schemas.microsoft.com/office/word/2010/wordprocessingDrawing" xmlns:mc="http://schemas.openxmlformats.org/markup-compatibility/2006" xmlns:sl="http://schemas.openxmlformats.org/schemaLibrary/2006/main" xmlns:wne="http://schemas.microsoft.com/office/word/2006/wordml" xmlns:cdr="http://schemas.openxmlformats.org/drawingml/2006/chartDrawing" xmlns:c14="http://schemas.microsoft.com/office/drawing/2007/8/2/chart" xmlns:dgm="http://schemas.openxmlformats.org/drawingml/2006/diagram" xmlns:pic="http://schemas.openxmlformats.org/drawingml/2006/picture" xmlns:xdr="http://schemas.openxmlformats.org/drawingml/2006/spreadsheetDrawing" xmlns:dsp="http://schemas.microsoft.com/office/drawing/2008/diagram" xmlns:xvml="urn:schemas-microsoft-com:office:excel" xmlns:o="urn:schemas-microsoft-com:office:office" xmlns:v="urn:schemas-microsoft-com:vml" xmlns:w10="urn:schemas-microsoft-com:office:word" xmlns:pvml="urn:schemas-microsoft-com:office:powerpoint" xmlns:cppr="http://schemas.microsoft.com/office/2006/coverPageProps" xmlns:odx="http://opendope.org/xpaths" xmlns:odc="http://opendope.org/conditions" xmlns:odq="http://opendope.org/questions" xmlns:oda="http://opendope.org/answers" xmlns:odi="http://opendope.org/components" xmlns:odgm="http://opendope.org/SmartArt/DataHierarchy" xmlns:b="http://schemas.openxmlformats.org/officeDocument/2006/bibliography" xmlns:wps="http://schemas.microsoft.com/office/word/2010/wordprocessingShape" xmlns:w16se="http://schemas.microsoft.com/office/word/2015/wordml/symex" xmlns:w16cid="http://schemas.microsoft.com/office/word/2016/wordml/cid" xmlns:wetp="http://schemas.microsoft.com/office/webextensions/taskpanes/2010/11" xmlns:we="http://schemas.microsoft.com/office/webextensions/webextension/2010/11" xmlns:comp="http://schemas.openxmlformats.org/drawingml/2006/compatibility" xmlns:lc="http://schemas.openxmlformats.org/drawingml/2006/lockedCanvas">
+            <c:extLst xmlns:lc="http://schemas.openxmlformats.org/drawingml/2006/lockedCanvas" xmlns:comp="http://schemas.openxmlformats.org/drawingml/2006/compatibility" xmlns:we="http://schemas.microsoft.com/office/webextensions/webextension/2010/11" xmlns:wetp="http://schemas.microsoft.com/office/webextensions/taskpanes/2010/11" xmlns:w16cid="http://schemas.microsoft.com/office/word/2016/wordml/cid" xmlns:w16se="http://schemas.microsoft.com/office/word/2015/wordml/symex" xmlns:wps="http://schemas.microsoft.com/office/word/2010/wordprocessingShape" xmlns:b="http://schemas.openxmlformats.org/officeDocument/2006/bibliography" xmlns:odgm="http://opendope.org/SmartArt/DataHierarchy" xmlns:odi="http://opendope.org/components" xmlns:oda="http://opendope.org/answers" xmlns:odq="http://opendope.org/questions" xmlns:odc="http://opendope.org/conditions" xmlns:odx="http://opendope.org/xpaths" xmlns:cppr="http://schemas.microsoft.com/office/2006/coverPageProps" xmlns:pvml="urn:schemas-microsoft-com:office:powerpoint" xmlns:w10="urn:schemas-microsoft-com:office:word" xmlns:v="urn:schemas-microsoft-com:vml" xmlns:o="urn:schemas-microsoft-com:office:office" xmlns:xvml="urn:schemas-microsoft-com:office:excel" xmlns:dsp="http://schemas.microsoft.com/office/drawing/2008/diagram" xmlns:xdr="http://schemas.openxmlformats.org/drawingml/2006/spreadsheetDrawing" xmlns:pic="http://schemas.openxmlformats.org/drawingml/2006/picture" xmlns:dgm="http://schemas.openxmlformats.org/drawingml/2006/diagram" xmlns:c14="http://schemas.microsoft.com/office/drawing/2007/8/2/chart" xmlns:cdr="http://schemas.openxmlformats.org/drawingml/2006/chartDrawing" xmlns:wne="http://schemas.microsoft.com/office/word/2006/wordml" xmlns:sl="http://schemas.openxmlformats.org/schemaLibrary/2006/main" xmlns:mc="http://schemas.openxmlformats.org/markup-compatibility/2006" xmlns:wp14="http://schemas.microsoft.com/office/word/2010/wordprocessingDrawing" xmlns:wp="http://schemas.openxmlformats.org/drawingml/2006/wordprocessingDrawing" xmlns:m="http://schemas.openxmlformats.org/officeDocument/2006/math" xmlns:w14="http://schemas.microsoft.com/office/word/2010/wordml" xmlns:w15="http://schemas.microsoft.com/office/word/2012/wordml" xmlns:w="http://schemas.openxmlformats.org/wordprocessingml/2006/main">
               <c:ext xmlns:c16="http://schemas.microsoft.com/office/drawing/2014/chart" uri="{C3380CC4-5D6E-409C-BE32-E72D297353CC}">
                 <c16:uniqueId val="{00000001-6147-E74A-AA7B-5531F0E4EE0C}"/>
               </c:ext>
@@ -242,7 +242,7 @@
               </c:numCache>
             </c:numRef>
           </c:val>
-          <c:extLst xmlns:w="http://schemas.openxmlformats.org/wordprocessingml/2006/main" xmlns:w15="http://schemas.microsoft.com/office/word/2012/wordml" xmlns:w14="http://schemas.microsoft.com/office/word/2010/wordml" xmlns:m="http://schemas.openxmlformats.org/officeDocument/2006/math" xmlns:wp="http://schemas.openxmlformats.org/drawingml/2006/wordprocessingDrawing" xmlns:wp14="http://schemas.microsoft.com/office/word/2010/wordprocessingDrawing" xmlns:mc="http://schemas.openxmlformats.org/markup-compatibility/2006" xmlns:sl="http://schemas.openxmlformats.org/schemaLibrary/2006/main" xmlns:wne="http://schemas.microsoft.com/office/word/2006/wordml" xmlns:cdr="http://schemas.openxmlformats.org/drawingml/2006/chartDrawing" xmlns:c14="http://schemas.microsoft.com/office/drawing/2007/8/2/chart" xmlns:dgm="http://schemas.openxmlformats.org/drawingml/2006/diagram" xmlns:pic="http://schemas.openxmlformats.org/drawingml/2006/picture" xmlns:xdr="http://schemas.openxmlformats.org/drawingml/2006/spreadsheetDrawing" xmlns:dsp="http://schemas.microsoft.com/office/drawing/2008/diagram" xmlns:xvml="urn:schemas-microsoft-com:office:excel" xmlns:o="urn:schemas-microsoft-com:office:office" xmlns:v="urn:schemas-microsoft-com:vml" xmlns:w10="urn:schemas-microsoft-com:office:word" xmlns:pvml="urn:schemas-microsoft-com:office:powerpoint" xmlns:cppr="http://schemas.microsoft.com/office/2006/coverPageProps" xmlns:odx="http://opendope.org/xpaths" xmlns:odc="http://opendope.org/conditions" xmlns:odq="http://opendope.org/questions" xmlns:oda="http://opendope.org/answers" xmlns:odi="http://opendope.org/components" xmlns:odgm="http://opendope.org/SmartArt/DataHierarchy" xmlns:b="http://schemas.openxmlformats.org/officeDocument/2006/bibliography" xmlns:wps="http://schemas.microsoft.com/office/word/2010/wordprocessingShape" xmlns:w16se="http://schemas.microsoft.com/office/word/2015/wordml/symex" xmlns:w16cid="http://schemas.microsoft.com/office/word/2016/wordml/cid" xmlns:wetp="http://schemas.microsoft.com/office/webextensions/taskpanes/2010/11" xmlns:we="http://schemas.microsoft.com/office/webextensions/webextension/2010/11" xmlns:comp="http://schemas.openxmlformats.org/drawingml/2006/compatibility" xmlns:lc="http://schemas.openxmlformats.org/drawingml/2006/lockedCanvas">
+          <c:extLst xmlns:lc="http://schemas.openxmlformats.org/drawingml/2006/lockedCanvas" xmlns:comp="http://schemas.openxmlformats.org/drawingml/2006/compatibility" xmlns:we="http://schemas.microsoft.com/office/webextensions/webextension/2010/11" xmlns:wetp="http://schemas.microsoft.com/office/webextensions/taskpanes/2010/11" xmlns:w16cid="http://schemas.microsoft.com/office/word/2016/wordml/cid" xmlns:w16se="http://schemas.microsoft.com/office/word/2015/wordml/symex" xmlns:wps="http://schemas.microsoft.com/office/word/2010/wordprocessingShape" xmlns:b="http://schemas.openxmlformats.org/officeDocument/2006/bibliography" xmlns:odgm="http://opendope.org/SmartArt/DataHierarchy" xmlns:odi="http://opendope.org/components" xmlns:oda="http://opendope.org/answers" xmlns:odq="http://opendope.org/questions" xmlns:odc="http://opendope.org/conditions" xmlns:odx="http://opendope.org/xpaths" xmlns:cppr="http://schemas.microsoft.com/office/2006/coverPageProps" xmlns:pvml="urn:schemas-microsoft-com:office:powerpoint" xmlns:w10="urn:schemas-microsoft-com:office:word" xmlns:v="urn:schemas-microsoft-com:vml" xmlns:o="urn:schemas-microsoft-com:office:office" xmlns:xvml="urn:schemas-microsoft-com:office:excel" xmlns:dsp="http://schemas.microsoft.com/office/drawing/2008/diagram" xmlns:xdr="http://schemas.openxmlformats.org/drawingml/2006/spreadsheetDrawing" xmlns:pic="http://schemas.openxmlformats.org/drawingml/2006/picture" xmlns:dgm="http://schemas.openxmlformats.org/drawingml/2006/diagram" xmlns:c14="http://schemas.microsoft.com/office/drawing/2007/8/2/chart" xmlns:cdr="http://schemas.openxmlformats.org/drawingml/2006/chartDrawing" xmlns:wne="http://schemas.microsoft.com/office/word/2006/wordml" xmlns:sl="http://schemas.openxmlformats.org/schemaLibrary/2006/main" xmlns:mc="http://schemas.openxmlformats.org/markup-compatibility/2006" xmlns:wp14="http://schemas.microsoft.com/office/word/2010/wordprocessingDrawing" xmlns:wp="http://schemas.openxmlformats.org/drawingml/2006/wordprocessingDrawing" xmlns:m="http://schemas.openxmlformats.org/officeDocument/2006/math" xmlns:w14="http://schemas.microsoft.com/office/word/2010/wordml" xmlns:w15="http://schemas.microsoft.com/office/word/2012/wordml" xmlns:w="http://schemas.openxmlformats.org/wordprocessingml/2006/main">
             <c:ext xmlns:c16="http://schemas.microsoft.com/office/drawing/2014/chart" uri="{C3380CC4-5D6E-409C-BE32-E72D297353CC}">
               <c16:uniqueId val="{00000002-6147-E74A-AA7B-5531F0E4EE0C}"/>
             </c:ext>
@@ -290,7 +290,7 @@
                 <c:formatCode>General</c:formatCode>
                 <c:ptCount val="1"/>
                 <c:pt idx="0">
-                  <c:v>0.830367734282325</c:v>
+                  <c:v>0.83036773428232502</c:v>
                 </c:pt>
               </c:numCache>
             </c:numRef>
@@ -343,7 +343,7 @@
                 <c:formatCode>General</c:formatCode>
                 <c:ptCount val="1"/>
                 <c:pt idx="0">
-                  <c:v>41.99288256227758</c:v>
+                  <c:v>41.992882562277579</c:v>
                 </c:pt>
               </c:numCache>
             </c:numRef>
@@ -451,7 +451,7 @@
                 <c:formatCode>General</c:formatCode>
                 <c:ptCount val="1"/>
                 <c:pt idx="0">
-                  <c:v>8.303677342823251</c:v>
+                  <c:v>8.3036773428232511</c:v>
                 </c:pt>
               </c:numCache>
             </c:numRef>
@@ -558,14 +558,14 @@
     </c:plotArea>
     <c:plotVisOnly val="1"/>
     <c:dispBlanksAs val="gap"/>
-    <c:extLst xmlns:w="http://schemas.openxmlformats.org/wordprocessingml/2006/main" xmlns:w15="http://schemas.microsoft.com/office/word/2012/wordml" xmlns:w14="http://schemas.microsoft.com/office/word/2010/wordml" xmlns:m="http://schemas.openxmlformats.org/officeDocument/2006/math" xmlns:wp="http://schemas.openxmlformats.org/drawingml/2006/wordprocessingDrawing" xmlns:wp14="http://schemas.microsoft.com/office/word/2010/wordprocessingDrawing" xmlns:mc="http://schemas.openxmlformats.org/markup-compatibility/2006" xmlns:sl="http://schemas.openxmlformats.org/schemaLibrary/2006/main" xmlns:wne="http://schemas.microsoft.com/office/word/2006/wordml" xmlns:cdr="http://schemas.openxmlformats.org/drawingml/2006/chartDrawing" xmlns:c14="http://schemas.microsoft.com/office/drawing/2007/8/2/chart" xmlns:dgm="http://schemas.openxmlformats.org/drawingml/2006/diagram" xmlns:pic="http://schemas.openxmlformats.org/drawingml/2006/picture" xmlns:xdr="http://schemas.openxmlformats.org/drawingml/2006/spreadsheetDrawing" xmlns:dsp="http://schemas.microsoft.com/office/drawing/2008/diagram" xmlns:xvml="urn:schemas-microsoft-com:office:excel" xmlns:o="urn:schemas-microsoft-com:office:office" xmlns:v="urn:schemas-microsoft-com:vml" xmlns:w10="urn:schemas-microsoft-com:office:word" xmlns:pvml="urn:schemas-microsoft-com:office:powerpoint" xmlns:cppr="http://schemas.microsoft.com/office/2006/coverPageProps" xmlns:odx="http://opendope.org/xpaths" xmlns:odc="http://opendope.org/conditions" xmlns:odq="http://opendope.org/questions" xmlns:oda="http://opendope.org/answers" xmlns:odi="http://opendope.org/components" xmlns:odgm="http://opendope.org/SmartArt/DataHierarchy" xmlns:b="http://schemas.openxmlformats.org/officeDocument/2006/bibliography" xmlns:wps="http://schemas.microsoft.com/office/word/2010/wordprocessingShape" xmlns:w16se="http://schemas.microsoft.com/office/word/2015/wordml/symex" xmlns:w16cid="http://schemas.microsoft.com/office/word/2016/wordml/cid" xmlns:wetp="http://schemas.microsoft.com/office/webextensions/taskpanes/2010/11" xmlns:we="http://schemas.microsoft.com/office/webextensions/webextension/2010/11" xmlns:comp="http://schemas.openxmlformats.org/drawingml/2006/compatibility" xmlns:lc="http://schemas.openxmlformats.org/drawingml/2006/lockedCanvas">
+    <c:showDLblsOverMax val="0"/>
+    <c:extLst xmlns:lc="http://schemas.openxmlformats.org/drawingml/2006/lockedCanvas" xmlns:comp="http://schemas.openxmlformats.org/drawingml/2006/compatibility" xmlns:we="http://schemas.microsoft.com/office/webextensions/webextension/2010/11" xmlns:wetp="http://schemas.microsoft.com/office/webextensions/taskpanes/2010/11" xmlns:w16cid="http://schemas.microsoft.com/office/word/2016/wordml/cid" xmlns:w16se="http://schemas.microsoft.com/office/word/2015/wordml/symex" xmlns:wps="http://schemas.microsoft.com/office/word/2010/wordprocessingShape" xmlns:b="http://schemas.openxmlformats.org/officeDocument/2006/bibliography" xmlns:odgm="http://opendope.org/SmartArt/DataHierarchy" xmlns:odi="http://opendope.org/components" xmlns:oda="http://opendope.org/answers" xmlns:odq="http://opendope.org/questions" xmlns:odc="http://opendope.org/conditions" xmlns:odx="http://opendope.org/xpaths" xmlns:cppr="http://schemas.microsoft.com/office/2006/coverPageProps" xmlns:pvml="urn:schemas-microsoft-com:office:powerpoint" xmlns:w10="urn:schemas-microsoft-com:office:word" xmlns:v="urn:schemas-microsoft-com:vml" xmlns:o="urn:schemas-microsoft-com:office:office" xmlns:xvml="urn:schemas-microsoft-com:office:excel" xmlns:dsp="http://schemas.microsoft.com/office/drawing/2008/diagram" xmlns:xdr="http://schemas.openxmlformats.org/drawingml/2006/spreadsheetDrawing" xmlns:pic="http://schemas.openxmlformats.org/drawingml/2006/picture" xmlns:dgm="http://schemas.openxmlformats.org/drawingml/2006/diagram" xmlns:c14="http://schemas.microsoft.com/office/drawing/2007/8/2/chart" xmlns:cdr="http://schemas.openxmlformats.org/drawingml/2006/chartDrawing" xmlns:wne="http://schemas.microsoft.com/office/word/2006/wordml" xmlns:sl="http://schemas.openxmlformats.org/schemaLibrary/2006/main" xmlns:mc="http://schemas.openxmlformats.org/markup-compatibility/2006" xmlns:wp14="http://schemas.microsoft.com/office/word/2010/wordprocessingDrawing" xmlns:wp="http://schemas.openxmlformats.org/drawingml/2006/wordprocessingDrawing" xmlns:m="http://schemas.openxmlformats.org/officeDocument/2006/math" xmlns:w14="http://schemas.microsoft.com/office/word/2010/wordml" xmlns:w15="http://schemas.microsoft.com/office/word/2012/wordml" xmlns:w="http://schemas.openxmlformats.org/wordprocessingml/2006/main">
       <c:ext xmlns:c16r3="http://schemas.microsoft.com/office/drawing/2017/03/chart" uri="{56B9EC1D-385E-4148-901F-78D8002777C0}">
         <c16r3:dataDisplayOptions16>
           <c16r3:dispNaAsBlank val="1"/>
         </c16r3:dataDisplayOptions16>
       </c:ext>
     </c:extLst>
-    <c:showDLblsOverMax val="0"/>
   </c:chart>
   <c:spPr>
     <a:noFill/>
@@ -661,7 +661,7 @@
                 </a:outerShdw>
               </a:effectLst>
             </c:spPr>
-            <c:extLst xmlns:lc="http://schemas.openxmlformats.org/drawingml/2006/lockedCanvas" xmlns:comp="http://schemas.openxmlformats.org/drawingml/2006/compatibility" xmlns:we="http://schemas.microsoft.com/office/webextensions/webextension/2010/11" xmlns:wetp="http://schemas.microsoft.com/office/webextensions/taskpanes/2010/11" xmlns:w16cid="http://schemas.microsoft.com/office/word/2016/wordml/cid" xmlns:w16se="http://schemas.microsoft.com/office/word/2015/wordml/symex" xmlns:wps="http://schemas.microsoft.com/office/word/2010/wordprocessingShape" xmlns:b="http://schemas.openxmlformats.org/officeDocument/2006/bibliography" xmlns:odgm="http://opendope.org/SmartArt/DataHierarchy" xmlns:odi="http://opendope.org/components" xmlns:oda="http://opendope.org/answers" xmlns:odq="http://opendope.org/questions" xmlns:odc="http://opendope.org/conditions" xmlns:odx="http://opendope.org/xpaths" xmlns:cppr="http://schemas.microsoft.com/office/2006/coverPageProps" xmlns:pvml="urn:schemas-microsoft-com:office:powerpoint" xmlns:w10="urn:schemas-microsoft-com:office:word" xmlns:v="urn:schemas-microsoft-com:vml" xmlns:o="urn:schemas-microsoft-com:office:office" xmlns:xvml="urn:schemas-microsoft-com:office:excel" xmlns:dsp="http://schemas.microsoft.com/office/drawing/2008/diagram" xmlns:xdr="http://schemas.openxmlformats.org/drawingml/2006/spreadsheetDrawing" xmlns:pic="http://schemas.openxmlformats.org/drawingml/2006/picture" xmlns:dgm="http://schemas.openxmlformats.org/drawingml/2006/diagram" xmlns:c14="http://schemas.microsoft.com/office/drawing/2007/8/2/chart" xmlns:cdr="http://schemas.openxmlformats.org/drawingml/2006/chartDrawing" xmlns:wne="http://schemas.microsoft.com/office/word/2006/wordml" xmlns:sl="http://schemas.openxmlformats.org/schemaLibrary/2006/main" xmlns:mc="http://schemas.openxmlformats.org/markup-compatibility/2006" xmlns:wp14="http://schemas.microsoft.com/office/word/2010/wordprocessingDrawing" xmlns:wp="http://schemas.openxmlformats.org/drawingml/2006/wordprocessingDrawing" xmlns:m="http://schemas.openxmlformats.org/officeDocument/2006/math" xmlns:w14="http://schemas.microsoft.com/office/word/2010/wordml" xmlns:w15="http://schemas.microsoft.com/office/word/2012/wordml" xmlns:w="http://schemas.openxmlformats.org/wordprocessingml/2006/main">
+            <c:extLst xmlns:w="http://schemas.openxmlformats.org/wordprocessingml/2006/main" xmlns:w15="http://schemas.microsoft.com/office/word/2012/wordml" xmlns:w14="http://schemas.microsoft.com/office/word/2010/wordml" xmlns:m="http://schemas.openxmlformats.org/officeDocument/2006/math" xmlns:wp="http://schemas.openxmlformats.org/drawingml/2006/wordprocessingDrawing" xmlns:wp14="http://schemas.microsoft.com/office/word/2010/wordprocessingDrawing" xmlns:mc="http://schemas.openxmlformats.org/markup-compatibility/2006" xmlns:sl="http://schemas.openxmlformats.org/schemaLibrary/2006/main" xmlns:wne="http://schemas.microsoft.com/office/word/2006/wordml" xmlns:cdr="http://schemas.openxmlformats.org/drawingml/2006/chartDrawing" xmlns:c14="http://schemas.microsoft.com/office/drawing/2007/8/2/chart" xmlns:dgm="http://schemas.openxmlformats.org/drawingml/2006/diagram" xmlns:pic="http://schemas.openxmlformats.org/drawingml/2006/picture" xmlns:xdr="http://schemas.openxmlformats.org/drawingml/2006/spreadsheetDrawing" xmlns:dsp="http://schemas.microsoft.com/office/drawing/2008/diagram" xmlns:xvml="urn:schemas-microsoft-com:office:excel" xmlns:o="urn:schemas-microsoft-com:office:office" xmlns:v="urn:schemas-microsoft-com:vml" xmlns:w10="urn:schemas-microsoft-com:office:word" xmlns:pvml="urn:schemas-microsoft-com:office:powerpoint" xmlns:cppr="http://schemas.microsoft.com/office/2006/coverPageProps" xmlns:odx="http://opendope.org/xpaths" xmlns:odc="http://opendope.org/conditions" xmlns:odq="http://opendope.org/questions" xmlns:oda="http://opendope.org/answers" xmlns:odi="http://opendope.org/components" xmlns:odgm="http://opendope.org/SmartArt/DataHierarchy" xmlns:b="http://schemas.openxmlformats.org/officeDocument/2006/bibliography" xmlns:wps="http://schemas.microsoft.com/office/word/2010/wordprocessingShape" xmlns:w16se="http://schemas.microsoft.com/office/word/2015/wordml/symex" xmlns:w16cid="http://schemas.microsoft.com/office/word/2016/wordml/cid" xmlns:wetp="http://schemas.microsoft.com/office/webextensions/taskpanes/2010/11" xmlns:we="http://schemas.microsoft.com/office/webextensions/webextension/2010/11" xmlns:comp="http://schemas.openxmlformats.org/drawingml/2006/compatibility" xmlns:lc="http://schemas.openxmlformats.org/drawingml/2006/lockedCanvas">
               <c:ext xmlns:c16="http://schemas.microsoft.com/office/drawing/2014/chart" uri="{C3380CC4-5D6E-409C-BE32-E72D297353CC}">
                 <c16:uniqueId val="{00000001-6147-E74A-AA7B-5531F0E4EE0C}"/>
               </c:ext>
@@ -739,28 +739,28 @@
                   <c:v>26.923076923076923</c:v>
                 </c:pt>
                 <c:pt idx="1">
-                  <c:v>47.72727272727273</c:v>
+                  <c:v>47.727272727272727</c:v>
                 </c:pt>
                 <c:pt idx="2">
                   <c:v>39.42307692307692</c:v>
                 </c:pt>
                 <c:pt idx="3">
-                  <c:v>0.0</c:v>
+                  <c:v>0</c:v>
                 </c:pt>
                 <c:pt idx="4">
                   <c:v>18.181818181818183</c:v>
                 </c:pt>
                 <c:pt idx="5">
-                  <c:v>81.81818181818181</c:v>
+                  <c:v>81.818181818181813</c:v>
                 </c:pt>
                 <c:pt idx="6">
-                  <c:v>50.0</c:v>
+                  <c:v>50</c:v>
                 </c:pt>
                 <c:pt idx="7">
-                  <c:v>75.80645161290323</c:v>
+                  <c:v>75.806451612903231</c:v>
                 </c:pt>
                 <c:pt idx="8">
-                  <c:v>54.83870967741935</c:v>
+                  <c:v>54.838709677419352</c:v>
                 </c:pt>
                 <c:pt idx="9">
                   <c:v>40.625</c:v>
@@ -769,19 +769,19 @@
                   <c:v>51.724137931034484</c:v>
                 </c:pt>
                 <c:pt idx="11">
-                  <c:v>0.0</c:v>
+                  <c:v>0</c:v>
                 </c:pt>
                 <c:pt idx="12">
-                  <c:v>47.36842105263158</c:v>
+                  <c:v>47.368421052631582</c:v>
                 </c:pt>
                 <c:pt idx="13">
-                  <c:v>49.54128440366973</c:v>
+                  <c:v>49.541284403669728</c:v>
                 </c:pt>
                 <c:pt idx="14">
                   <c:v>61.29032258064516</c:v>
                 </c:pt>
                 <c:pt idx="15">
-                  <c:v>11.11111111111111</c:v>
+                  <c:v>11.111111111111111</c:v>
                 </c:pt>
                 <c:pt idx="16">
                   <c:v>40.090090090090094</c:v>
@@ -792,7 +792,7 @@
               </c:numCache>
             </c:numRef>
           </c:val>
-          <c:extLst xmlns:lc="http://schemas.openxmlformats.org/drawingml/2006/lockedCanvas" xmlns:comp="http://schemas.openxmlformats.org/drawingml/2006/compatibility" xmlns:we="http://schemas.microsoft.com/office/webextensions/webextension/2010/11" xmlns:wetp="http://schemas.microsoft.com/office/webextensions/taskpanes/2010/11" xmlns:w16cid="http://schemas.microsoft.com/office/word/2016/wordml/cid" xmlns:w16se="http://schemas.microsoft.com/office/word/2015/wordml/symex" xmlns:wps="http://schemas.microsoft.com/office/word/2010/wordprocessingShape" xmlns:b="http://schemas.openxmlformats.org/officeDocument/2006/bibliography" xmlns:odgm="http://opendope.org/SmartArt/DataHierarchy" xmlns:odi="http://opendope.org/components" xmlns:oda="http://opendope.org/answers" xmlns:odq="http://opendope.org/questions" xmlns:odc="http://opendope.org/conditions" xmlns:odx="http://opendope.org/xpaths" xmlns:cppr="http://schemas.microsoft.com/office/2006/coverPageProps" xmlns:pvml="urn:schemas-microsoft-com:office:powerpoint" xmlns:w10="urn:schemas-microsoft-com:office:word" xmlns:v="urn:schemas-microsoft-com:vml" xmlns:o="urn:schemas-microsoft-com:office:office" xmlns:xvml="urn:schemas-microsoft-com:office:excel" xmlns:dsp="http://schemas.microsoft.com/office/drawing/2008/diagram" xmlns:xdr="http://schemas.openxmlformats.org/drawingml/2006/spreadsheetDrawing" xmlns:pic="http://schemas.openxmlformats.org/drawingml/2006/picture" xmlns:dgm="http://schemas.openxmlformats.org/drawingml/2006/diagram" xmlns:c14="http://schemas.microsoft.com/office/drawing/2007/8/2/chart" xmlns:cdr="http://schemas.openxmlformats.org/drawingml/2006/chartDrawing" xmlns:wne="http://schemas.microsoft.com/office/word/2006/wordml" xmlns:sl="http://schemas.openxmlformats.org/schemaLibrary/2006/main" xmlns:mc="http://schemas.openxmlformats.org/markup-compatibility/2006" xmlns:wp14="http://schemas.microsoft.com/office/word/2010/wordprocessingDrawing" xmlns:wp="http://schemas.openxmlformats.org/drawingml/2006/wordprocessingDrawing" xmlns:m="http://schemas.openxmlformats.org/officeDocument/2006/math" xmlns:w14="http://schemas.microsoft.com/office/word/2010/wordml" xmlns:w15="http://schemas.microsoft.com/office/word/2012/wordml" xmlns:w="http://schemas.openxmlformats.org/wordprocessingml/2006/main">
+          <c:extLst xmlns:w="http://schemas.openxmlformats.org/wordprocessingml/2006/main" xmlns:w15="http://schemas.microsoft.com/office/word/2012/wordml" xmlns:w14="http://schemas.microsoft.com/office/word/2010/wordml" xmlns:m="http://schemas.openxmlformats.org/officeDocument/2006/math" xmlns:wp="http://schemas.openxmlformats.org/drawingml/2006/wordprocessingDrawing" xmlns:wp14="http://schemas.microsoft.com/office/word/2010/wordprocessingDrawing" xmlns:mc="http://schemas.openxmlformats.org/markup-compatibility/2006" xmlns:sl="http://schemas.openxmlformats.org/schemaLibrary/2006/main" xmlns:wne="http://schemas.microsoft.com/office/word/2006/wordml" xmlns:cdr="http://schemas.openxmlformats.org/drawingml/2006/chartDrawing" xmlns:c14="http://schemas.microsoft.com/office/drawing/2007/8/2/chart" xmlns:dgm="http://schemas.openxmlformats.org/drawingml/2006/diagram" xmlns:pic="http://schemas.openxmlformats.org/drawingml/2006/picture" xmlns:xdr="http://schemas.openxmlformats.org/drawingml/2006/spreadsheetDrawing" xmlns:dsp="http://schemas.microsoft.com/office/drawing/2008/diagram" xmlns:xvml="urn:schemas-microsoft-com:office:excel" xmlns:o="urn:schemas-microsoft-com:office:office" xmlns:v="urn:schemas-microsoft-com:vml" xmlns:w10="urn:schemas-microsoft-com:office:word" xmlns:pvml="urn:schemas-microsoft-com:office:powerpoint" xmlns:cppr="http://schemas.microsoft.com/office/2006/coverPageProps" xmlns:odx="http://opendope.org/xpaths" xmlns:odc="http://opendope.org/conditions" xmlns:odq="http://opendope.org/questions" xmlns:oda="http://opendope.org/answers" xmlns:odi="http://opendope.org/components" xmlns:odgm="http://opendope.org/SmartArt/DataHierarchy" xmlns:b="http://schemas.openxmlformats.org/officeDocument/2006/bibliography" xmlns:wps="http://schemas.microsoft.com/office/word/2010/wordprocessingShape" xmlns:w16se="http://schemas.microsoft.com/office/word/2015/wordml/symex" xmlns:w16cid="http://schemas.microsoft.com/office/word/2016/wordml/cid" xmlns:wetp="http://schemas.microsoft.com/office/webextensions/taskpanes/2010/11" xmlns:we="http://schemas.microsoft.com/office/webextensions/webextension/2010/11" xmlns:comp="http://schemas.openxmlformats.org/drawingml/2006/compatibility" xmlns:lc="http://schemas.openxmlformats.org/drawingml/2006/lockedCanvas">
             <c:ext xmlns:c16="http://schemas.microsoft.com/office/drawing/2014/chart" uri="{C3380CC4-5D6E-409C-BE32-E72D297353CC}">
               <c16:uniqueId val="{00000002-6147-E74A-AA7B-5531F0E4EE0C}"/>
             </c:ext>
@@ -897,52 +897,52 @@
                   <c:v>1.1363636363636365</c:v>
                 </c:pt>
                 <c:pt idx="2">
-                  <c:v>0.0</c:v>
+                  <c:v>0</c:v>
                 </c:pt>
                 <c:pt idx="3">
-                  <c:v>0.0</c:v>
+                  <c:v>0</c:v>
                 </c:pt>
                 <c:pt idx="4">
-                  <c:v>0.0</c:v>
+                  <c:v>0</c:v>
                 </c:pt>
                 <c:pt idx="5">
-                  <c:v>0.0</c:v>
+                  <c:v>0</c:v>
                 </c:pt>
                 <c:pt idx="6">
                   <c:v>12.5</c:v>
                 </c:pt>
                 <c:pt idx="7">
-                  <c:v>0.0</c:v>
+                  <c:v>0</c:v>
                 </c:pt>
                 <c:pt idx="8">
-                  <c:v>0.0</c:v>
+                  <c:v>0</c:v>
                 </c:pt>
                 <c:pt idx="9">
-                  <c:v>0.0</c:v>
+                  <c:v>0</c:v>
                 </c:pt>
                 <c:pt idx="10">
-                  <c:v>0.0</c:v>
+                  <c:v>0</c:v>
                 </c:pt>
                 <c:pt idx="11">
-                  <c:v>0.0</c:v>
+                  <c:v>0</c:v>
                 </c:pt>
                 <c:pt idx="12">
-                  <c:v>0.0</c:v>
+                  <c:v>0</c:v>
                 </c:pt>
                 <c:pt idx="13">
-                  <c:v>0.9174311926605505</c:v>
+                  <c:v>0.91743119266055051</c:v>
                 </c:pt>
                 <c:pt idx="14">
                   <c:v>3.225806451612903</c:v>
                 </c:pt>
                 <c:pt idx="15">
-                  <c:v>0.0</c:v>
+                  <c:v>0</c:v>
                 </c:pt>
                 <c:pt idx="16">
-                  <c:v>0.9009009009009009</c:v>
+                  <c:v>0.90090090090090091</c:v>
                 </c:pt>
                 <c:pt idx="17">
-                  <c:v>0.0</c:v>
+                  <c:v>0</c:v>
                 </c:pt>
               </c:numCache>
             </c:numRef>
@@ -1055,10 +1055,10 @@
                   <c:v>35.57692307692308</c:v>
                 </c:pt>
                 <c:pt idx="3">
-                  <c:v>50.0</c:v>
+                  <c:v>50</c:v>
                 </c:pt>
                 <c:pt idx="4">
-                  <c:v>59.09090909090909</c:v>
+                  <c:v>59.090909090909093</c:v>
                 </c:pt>
                 <c:pt idx="5">
                   <c:v>18.181818181818183</c:v>
@@ -1079,10 +1079,10 @@
                   <c:v>48.275862068965516</c:v>
                 </c:pt>
                 <c:pt idx="11">
-                  <c:v>50.0</c:v>
+                  <c:v>50</c:v>
                 </c:pt>
                 <c:pt idx="12">
-                  <c:v>52.63157894736842</c:v>
+                  <c:v>52.631578947368418</c:v>
                 </c:pt>
                 <c:pt idx="13">
                   <c:v>34.862385321100916</c:v>
@@ -1091,10 +1091,10 @@
                   <c:v>25.806451612903224</c:v>
                 </c:pt>
                 <c:pt idx="15">
-                  <c:v>88.88888888888889</c:v>
+                  <c:v>88.888888888888886</c:v>
                 </c:pt>
                 <c:pt idx="16">
-                  <c:v>51.8018018018018</c:v>
+                  <c:v>51.801801801801801</c:v>
                 </c:pt>
                 <c:pt idx="17">
                   <c:v>59.25925925925926</c:v>
@@ -1204,55 +1204,55 @@
                   <c:v>3.8461538461538463</c:v>
                 </c:pt>
                 <c:pt idx="1">
-                  <c:v>2.272727272727273</c:v>
+                  <c:v>2.2727272727272729</c:v>
                 </c:pt>
                 <c:pt idx="2">
-                  <c:v>0.0</c:v>
+                  <c:v>0</c:v>
                 </c:pt>
                 <c:pt idx="3">
-                  <c:v>0.0</c:v>
+                  <c:v>0</c:v>
                 </c:pt>
                 <c:pt idx="4">
-                  <c:v>0.0</c:v>
+                  <c:v>0</c:v>
                 </c:pt>
                 <c:pt idx="5">
-                  <c:v>0.0</c:v>
+                  <c:v>0</c:v>
                 </c:pt>
                 <c:pt idx="6">
-                  <c:v>0.0</c:v>
+                  <c:v>0</c:v>
                 </c:pt>
                 <c:pt idx="7">
-                  <c:v>0.0</c:v>
+                  <c:v>0</c:v>
                 </c:pt>
                 <c:pt idx="8">
-                  <c:v>0.0</c:v>
+                  <c:v>0</c:v>
                 </c:pt>
                 <c:pt idx="9">
                   <c:v>6.25</c:v>
                 </c:pt>
                 <c:pt idx="10">
-                  <c:v>0.0</c:v>
+                  <c:v>0</c:v>
                 </c:pt>
                 <c:pt idx="11">
-                  <c:v>0.0</c:v>
+                  <c:v>0</c:v>
                 </c:pt>
                 <c:pt idx="12">
-                  <c:v>0.0</c:v>
+                  <c:v>0</c:v>
                 </c:pt>
                 <c:pt idx="13">
-                  <c:v>8.256880733944953</c:v>
+                  <c:v>8.2568807339449535</c:v>
                 </c:pt>
                 <c:pt idx="14">
-                  <c:v>6.451612903225806</c:v>
+                  <c:v>6.4516129032258061</c:v>
                 </c:pt>
                 <c:pt idx="15">
-                  <c:v>0.0</c:v>
+                  <c:v>0</c:v>
                 </c:pt>
                 <c:pt idx="16">
                   <c:v>2.7027027027027026</c:v>
                 </c:pt>
                 <c:pt idx="17">
-                  <c:v>0.0</c:v>
+                  <c:v>0</c:v>
                 </c:pt>
               </c:numCache>
             </c:numRef>
@@ -1361,22 +1361,22 @@
                   <c:v>3.8461538461538463</c:v>
                 </c:pt>
                 <c:pt idx="1">
-                  <c:v>5.681818181818182</c:v>
+                  <c:v>5.6818181818181817</c:v>
                 </c:pt>
                 <c:pt idx="2">
-                  <c:v>25.0</c:v>
+                  <c:v>25</c:v>
                 </c:pt>
                 <c:pt idx="3">
-                  <c:v>50.0</c:v>
+                  <c:v>50</c:v>
                 </c:pt>
                 <c:pt idx="4">
                   <c:v>22.727272727272727</c:v>
                 </c:pt>
                 <c:pt idx="5">
-                  <c:v>0.0</c:v>
+                  <c:v>0</c:v>
                 </c:pt>
                 <c:pt idx="6">
-                  <c:v>0.0</c:v>
+                  <c:v>0</c:v>
                 </c:pt>
                 <c:pt idx="7">
                   <c:v>1.6129032258064515</c:v>
@@ -1388,28 +1388,28 @@
                   <c:v>10.9375</c:v>
                 </c:pt>
                 <c:pt idx="10">
-                  <c:v>0.0</c:v>
+                  <c:v>0</c:v>
                 </c:pt>
                 <c:pt idx="11">
-                  <c:v>50.0</c:v>
+                  <c:v>50</c:v>
                 </c:pt>
                 <c:pt idx="12">
-                  <c:v>0.0</c:v>
+                  <c:v>0</c:v>
                 </c:pt>
                 <c:pt idx="13">
-                  <c:v>6.422018348623853</c:v>
+                  <c:v>6.4220183486238529</c:v>
                 </c:pt>
                 <c:pt idx="14">
                   <c:v>3.225806451612903</c:v>
                 </c:pt>
                 <c:pt idx="15">
-                  <c:v>0.0</c:v>
+                  <c:v>0</c:v>
                 </c:pt>
                 <c:pt idx="16">
-                  <c:v>4.504504504504505</c:v>
+                  <c:v>4.5045045045045047</c:v>
                 </c:pt>
                 <c:pt idx="17">
-                  <c:v>7.407407407407407</c:v>
+                  <c:v>7.4074074074074074</c:v>
                 </c:pt>
               </c:numCache>
             </c:numRef>
@@ -1546,14 +1546,14 @@
     </c:plotArea>
     <c:plotVisOnly val="1"/>
     <c:dispBlanksAs val="gap"/>
-    <c:extLst xmlns:lc="http://schemas.openxmlformats.org/drawingml/2006/lockedCanvas" xmlns:comp="http://schemas.openxmlformats.org/drawingml/2006/compatibility" xmlns:we="http://schemas.microsoft.com/office/webextensions/webextension/2010/11" xmlns:wetp="http://schemas.microsoft.com/office/webextensions/taskpanes/2010/11" xmlns:w16cid="http://schemas.microsoft.com/office/word/2016/wordml/cid" xmlns:w16se="http://schemas.microsoft.com/office/word/2015/wordml/symex" xmlns:wps="http://schemas.microsoft.com/office/word/2010/wordprocessingShape" xmlns:b="http://schemas.openxmlformats.org/officeDocument/2006/bibliography" xmlns:odgm="http://opendope.org/SmartArt/DataHierarchy" xmlns:odi="http://opendope.org/components" xmlns:oda="http://opendope.org/answers" xmlns:odq="http://opendope.org/questions" xmlns:odc="http://opendope.org/conditions" xmlns:odx="http://opendope.org/xpaths" xmlns:cppr="http://schemas.microsoft.com/office/2006/coverPageProps" xmlns:pvml="urn:schemas-microsoft-com:office:powerpoint" xmlns:w10="urn:schemas-microsoft-com:office:word" xmlns:v="urn:schemas-microsoft-com:vml" xmlns:o="urn:schemas-microsoft-com:office:office" xmlns:xvml="urn:schemas-microsoft-com:office:excel" xmlns:dsp="http://schemas.microsoft.com/office/drawing/2008/diagram" xmlns:xdr="http://schemas.openxmlformats.org/drawingml/2006/spreadsheetDrawing" xmlns:pic="http://schemas.openxmlformats.org/drawingml/2006/picture" xmlns:dgm="http://schemas.openxmlformats.org/drawingml/2006/diagram" xmlns:c14="http://schemas.microsoft.com/office/drawing/2007/8/2/chart" xmlns:cdr="http://schemas.openxmlformats.org/drawingml/2006/chartDrawing" xmlns:wne="http://schemas.microsoft.com/office/word/2006/wordml" xmlns:sl="http://schemas.openxmlformats.org/schemaLibrary/2006/main" xmlns:mc="http://schemas.openxmlformats.org/markup-compatibility/2006" xmlns:wp14="http://schemas.microsoft.com/office/word/2010/wordprocessingDrawing" xmlns:wp="http://schemas.openxmlformats.org/drawingml/2006/wordprocessingDrawing" xmlns:m="http://schemas.openxmlformats.org/officeDocument/2006/math" xmlns:w14="http://schemas.microsoft.com/office/word/2010/wordml" xmlns:w15="http://schemas.microsoft.com/office/word/2012/wordml" xmlns:w="http://schemas.openxmlformats.org/wordprocessingml/2006/main">
+    <c:showDLblsOverMax val="0"/>
+    <c:extLst xmlns:w="http://schemas.openxmlformats.org/wordprocessingml/2006/main" xmlns:w15="http://schemas.microsoft.com/office/word/2012/wordml" xmlns:w14="http://schemas.microsoft.com/office/word/2010/wordml" xmlns:m="http://schemas.openxmlformats.org/officeDocument/2006/math" xmlns:wp="http://schemas.openxmlformats.org/drawingml/2006/wordprocessingDrawing" xmlns:wp14="http://schemas.microsoft.com/office/word/2010/wordprocessingDrawing" xmlns:mc="http://schemas.openxmlformats.org/markup-compatibility/2006" xmlns:sl="http://schemas.openxmlformats.org/schemaLibrary/2006/main" xmlns:wne="http://schemas.microsoft.com/office/word/2006/wordml" xmlns:cdr="http://schemas.openxmlformats.org/drawingml/2006/chartDrawing" xmlns:c14="http://schemas.microsoft.com/office/drawing/2007/8/2/chart" xmlns:dgm="http://schemas.openxmlformats.org/drawingml/2006/diagram" xmlns:pic="http://schemas.openxmlformats.org/drawingml/2006/picture" xmlns:xdr="http://schemas.openxmlformats.org/drawingml/2006/spreadsheetDrawing" xmlns:dsp="http://schemas.microsoft.com/office/drawing/2008/diagram" xmlns:xvml="urn:schemas-microsoft-com:office:excel" xmlns:o="urn:schemas-microsoft-com:office:office" xmlns:v="urn:schemas-microsoft-com:vml" xmlns:w10="urn:schemas-microsoft-com:office:word" xmlns:pvml="urn:schemas-microsoft-com:office:powerpoint" xmlns:cppr="http://schemas.microsoft.com/office/2006/coverPageProps" xmlns:odx="http://opendope.org/xpaths" xmlns:odc="http://opendope.org/conditions" xmlns:odq="http://opendope.org/questions" xmlns:oda="http://opendope.org/answers" xmlns:odi="http://opendope.org/components" xmlns:odgm="http://opendope.org/SmartArt/DataHierarchy" xmlns:b="http://schemas.openxmlformats.org/officeDocument/2006/bibliography" xmlns:wps="http://schemas.microsoft.com/office/word/2010/wordprocessingShape" xmlns:w16se="http://schemas.microsoft.com/office/word/2015/wordml/symex" xmlns:w16cid="http://schemas.microsoft.com/office/word/2016/wordml/cid" xmlns:wetp="http://schemas.microsoft.com/office/webextensions/taskpanes/2010/11" xmlns:we="http://schemas.microsoft.com/office/webextensions/webextension/2010/11" xmlns:comp="http://schemas.openxmlformats.org/drawingml/2006/compatibility" xmlns:lc="http://schemas.openxmlformats.org/drawingml/2006/lockedCanvas">
       <c:ext xmlns:c16r3="http://schemas.microsoft.com/office/drawing/2017/03/chart" uri="{56B9EC1D-385E-4148-901F-78D8002777C0}">
         <c16r3:dataDisplayOptions16>
           <c16r3:dispNaAsBlank val="1"/>
         </c16r3:dataDisplayOptions16>
       </c:ext>
     </c:extLst>
-    <c:showDLblsOverMax val="0"/>
   </c:chart>
   <c:spPr>
     <a:noFill/>
@@ -1649,7 +1649,7 @@
                 </a:outerShdw>
               </a:effectLst>
             </c:spPr>
-            <c:extLst xmlns:w="http://schemas.openxmlformats.org/wordprocessingml/2006/main" xmlns:w15="http://schemas.microsoft.com/office/word/2012/wordml" xmlns:w14="http://schemas.microsoft.com/office/word/2010/wordml" xmlns:m="http://schemas.openxmlformats.org/officeDocument/2006/math" xmlns:wp="http://schemas.openxmlformats.org/drawingml/2006/wordprocessingDrawing" xmlns:wp14="http://schemas.microsoft.com/office/word/2010/wordprocessingDrawing" xmlns:mc="http://schemas.openxmlformats.org/markup-compatibility/2006" xmlns:sl="http://schemas.openxmlformats.org/schemaLibrary/2006/main" xmlns:wne="http://schemas.microsoft.com/office/word/2006/wordml" xmlns:cdr="http://schemas.openxmlformats.org/drawingml/2006/chartDrawing" xmlns:c14="http://schemas.microsoft.com/office/drawing/2007/8/2/chart" xmlns:dgm="http://schemas.openxmlformats.org/drawingml/2006/diagram" xmlns:pic="http://schemas.openxmlformats.org/drawingml/2006/picture" xmlns:xdr="http://schemas.openxmlformats.org/drawingml/2006/spreadsheetDrawing" xmlns:dsp="http://schemas.microsoft.com/office/drawing/2008/diagram" xmlns:xvml="urn:schemas-microsoft-com:office:excel" xmlns:o="urn:schemas-microsoft-com:office:office" xmlns:v="urn:schemas-microsoft-com:vml" xmlns:w10="urn:schemas-microsoft-com:office:word" xmlns:pvml="urn:schemas-microsoft-com:office:powerpoint" xmlns:cppr="http://schemas.microsoft.com/office/2006/coverPageProps" xmlns:odx="http://opendope.org/xpaths" xmlns:odc="http://opendope.org/conditions" xmlns:odq="http://opendope.org/questions" xmlns:oda="http://opendope.org/answers" xmlns:odi="http://opendope.org/components" xmlns:odgm="http://opendope.org/SmartArt/DataHierarchy" xmlns:b="http://schemas.openxmlformats.org/officeDocument/2006/bibliography" xmlns:wps="http://schemas.microsoft.com/office/word/2010/wordprocessingShape" xmlns:w16se="http://schemas.microsoft.com/office/word/2015/wordml/symex" xmlns:w16cid="http://schemas.microsoft.com/office/word/2016/wordml/cid" xmlns:wetp="http://schemas.microsoft.com/office/webextensions/taskpanes/2010/11" xmlns:we="http://schemas.microsoft.com/office/webextensions/webextension/2010/11" xmlns:comp="http://schemas.openxmlformats.org/drawingml/2006/compatibility" xmlns:lc="http://schemas.openxmlformats.org/drawingml/2006/lockedCanvas">
+            <c:extLst xmlns:lc="http://schemas.openxmlformats.org/drawingml/2006/lockedCanvas" xmlns:comp="http://schemas.openxmlformats.org/drawingml/2006/compatibility" xmlns:we="http://schemas.microsoft.com/office/webextensions/webextension/2010/11" xmlns:wetp="http://schemas.microsoft.com/office/webextensions/taskpanes/2010/11" xmlns:w16cid="http://schemas.microsoft.com/office/word/2016/wordml/cid" xmlns:w16se="http://schemas.microsoft.com/office/word/2015/wordml/symex" xmlns:wps="http://schemas.microsoft.com/office/word/2010/wordprocessingShape" xmlns:b="http://schemas.openxmlformats.org/officeDocument/2006/bibliography" xmlns:odgm="http://opendope.org/SmartArt/DataHierarchy" xmlns:odi="http://opendope.org/components" xmlns:oda="http://opendope.org/answers" xmlns:odq="http://opendope.org/questions" xmlns:odc="http://opendope.org/conditions" xmlns:odx="http://opendope.org/xpaths" xmlns:cppr="http://schemas.microsoft.com/office/2006/coverPageProps" xmlns:pvml="urn:schemas-microsoft-com:office:powerpoint" xmlns:w10="urn:schemas-microsoft-com:office:word" xmlns:v="urn:schemas-microsoft-com:vml" xmlns:o="urn:schemas-microsoft-com:office:office" xmlns:xvml="urn:schemas-microsoft-com:office:excel" xmlns:dsp="http://schemas.microsoft.com/office/drawing/2008/diagram" xmlns:xdr="http://schemas.openxmlformats.org/drawingml/2006/spreadsheetDrawing" xmlns:pic="http://schemas.openxmlformats.org/drawingml/2006/picture" xmlns:dgm="http://schemas.openxmlformats.org/drawingml/2006/diagram" xmlns:c14="http://schemas.microsoft.com/office/drawing/2007/8/2/chart" xmlns:cdr="http://schemas.openxmlformats.org/drawingml/2006/chartDrawing" xmlns:wne="http://schemas.microsoft.com/office/word/2006/wordml" xmlns:sl="http://schemas.openxmlformats.org/schemaLibrary/2006/main" xmlns:mc="http://schemas.openxmlformats.org/markup-compatibility/2006" xmlns:wp14="http://schemas.microsoft.com/office/word/2010/wordprocessingDrawing" xmlns:wp="http://schemas.openxmlformats.org/drawingml/2006/wordprocessingDrawing" xmlns:m="http://schemas.openxmlformats.org/officeDocument/2006/math" xmlns:w14="http://schemas.microsoft.com/office/word/2010/wordml" xmlns:w15="http://schemas.microsoft.com/office/word/2012/wordml" xmlns:w="http://schemas.openxmlformats.org/wordprocessingml/2006/main">
               <c:ext xmlns:c16="http://schemas.microsoft.com/office/drawing/2014/chart" uri="{C3380CC4-5D6E-409C-BE32-E72D297353CC}">
                 <c16:uniqueId val="{00000001-6147-E74A-AA7B-5531F0E4EE0C}"/>
               </c:ext>
@@ -1685,7 +1685,7 @@
                   <c:v>53.191489361702125</c:v>
                 </c:pt>
                 <c:pt idx="1">
-                  <c:v>34.86590038314176</c:v>
+                  <c:v>34.865900383141764</c:v>
                 </c:pt>
                 <c:pt idx="2">
                   <c:v>48.559670781893004</c:v>
@@ -1696,7 +1696,7 @@
               </c:numCache>
             </c:numRef>
           </c:val>
-          <c:extLst xmlns:w="http://schemas.openxmlformats.org/wordprocessingml/2006/main" xmlns:w15="http://schemas.microsoft.com/office/word/2012/wordml" xmlns:w14="http://schemas.microsoft.com/office/word/2010/wordml" xmlns:m="http://schemas.openxmlformats.org/officeDocument/2006/math" xmlns:wp="http://schemas.openxmlformats.org/drawingml/2006/wordprocessingDrawing" xmlns:wp14="http://schemas.microsoft.com/office/word/2010/wordprocessingDrawing" xmlns:mc="http://schemas.openxmlformats.org/markup-compatibility/2006" xmlns:sl="http://schemas.openxmlformats.org/schemaLibrary/2006/main" xmlns:wne="http://schemas.microsoft.com/office/word/2006/wordml" xmlns:cdr="http://schemas.openxmlformats.org/drawingml/2006/chartDrawing" xmlns:c14="http://schemas.microsoft.com/office/drawing/2007/8/2/chart" xmlns:dgm="http://schemas.openxmlformats.org/drawingml/2006/diagram" xmlns:pic="http://schemas.openxmlformats.org/drawingml/2006/picture" xmlns:xdr="http://schemas.openxmlformats.org/drawingml/2006/spreadsheetDrawing" xmlns:dsp="http://schemas.microsoft.com/office/drawing/2008/diagram" xmlns:xvml="urn:schemas-microsoft-com:office:excel" xmlns:o="urn:schemas-microsoft-com:office:office" xmlns:v="urn:schemas-microsoft-com:vml" xmlns:w10="urn:schemas-microsoft-com:office:word" xmlns:pvml="urn:schemas-microsoft-com:office:powerpoint" xmlns:cppr="http://schemas.microsoft.com/office/2006/coverPageProps" xmlns:odx="http://opendope.org/xpaths" xmlns:odc="http://opendope.org/conditions" xmlns:odq="http://opendope.org/questions" xmlns:oda="http://opendope.org/answers" xmlns:odi="http://opendope.org/components" xmlns:odgm="http://opendope.org/SmartArt/DataHierarchy" xmlns:b="http://schemas.openxmlformats.org/officeDocument/2006/bibliography" xmlns:wps="http://schemas.microsoft.com/office/word/2010/wordprocessingShape" xmlns:w16se="http://schemas.microsoft.com/office/word/2015/wordml/symex" xmlns:w16cid="http://schemas.microsoft.com/office/word/2016/wordml/cid" xmlns:wetp="http://schemas.microsoft.com/office/webextensions/taskpanes/2010/11" xmlns:we="http://schemas.microsoft.com/office/webextensions/webextension/2010/11" xmlns:comp="http://schemas.openxmlformats.org/drawingml/2006/compatibility" xmlns:lc="http://schemas.openxmlformats.org/drawingml/2006/lockedCanvas">
+          <c:extLst xmlns:lc="http://schemas.openxmlformats.org/drawingml/2006/lockedCanvas" xmlns:comp="http://schemas.openxmlformats.org/drawingml/2006/compatibility" xmlns:we="http://schemas.microsoft.com/office/webextensions/webextension/2010/11" xmlns:wetp="http://schemas.microsoft.com/office/webextensions/taskpanes/2010/11" xmlns:w16cid="http://schemas.microsoft.com/office/word/2016/wordml/cid" xmlns:w16se="http://schemas.microsoft.com/office/word/2015/wordml/symex" xmlns:wps="http://schemas.microsoft.com/office/word/2010/wordprocessingShape" xmlns:b="http://schemas.openxmlformats.org/officeDocument/2006/bibliography" xmlns:odgm="http://opendope.org/SmartArt/DataHierarchy" xmlns:odi="http://opendope.org/components" xmlns:oda="http://opendope.org/answers" xmlns:odq="http://opendope.org/questions" xmlns:odc="http://opendope.org/conditions" xmlns:odx="http://opendope.org/xpaths" xmlns:cppr="http://schemas.microsoft.com/office/2006/coverPageProps" xmlns:pvml="urn:schemas-microsoft-com:office:powerpoint" xmlns:w10="urn:schemas-microsoft-com:office:word" xmlns:v="urn:schemas-microsoft-com:vml" xmlns:o="urn:schemas-microsoft-com:office:office" xmlns:xvml="urn:schemas-microsoft-com:office:excel" xmlns:dsp="http://schemas.microsoft.com/office/drawing/2008/diagram" xmlns:xdr="http://schemas.openxmlformats.org/drawingml/2006/spreadsheetDrawing" xmlns:pic="http://schemas.openxmlformats.org/drawingml/2006/picture" xmlns:dgm="http://schemas.openxmlformats.org/drawingml/2006/diagram" xmlns:c14="http://schemas.microsoft.com/office/drawing/2007/8/2/chart" xmlns:cdr="http://schemas.openxmlformats.org/drawingml/2006/chartDrawing" xmlns:wne="http://schemas.microsoft.com/office/word/2006/wordml" xmlns:sl="http://schemas.openxmlformats.org/schemaLibrary/2006/main" xmlns:mc="http://schemas.openxmlformats.org/markup-compatibility/2006" xmlns:wp14="http://schemas.microsoft.com/office/word/2010/wordprocessingDrawing" xmlns:wp="http://schemas.openxmlformats.org/drawingml/2006/wordprocessingDrawing" xmlns:m="http://schemas.openxmlformats.org/officeDocument/2006/math" xmlns:w14="http://schemas.microsoft.com/office/word/2010/wordml" xmlns:w15="http://schemas.microsoft.com/office/word/2012/wordml" xmlns:w="http://schemas.openxmlformats.org/wordprocessingml/2006/main">
             <c:ext xmlns:c16="http://schemas.microsoft.com/office/drawing/2014/chart" uri="{C3380CC4-5D6E-409C-BE32-E72D297353CC}">
               <c16:uniqueId val="{00000002-6147-E74A-AA7B-5531F0E4EE0C}"/>
             </c:ext>
@@ -1756,13 +1756,13 @@
                   <c:v>2.6595744680851063</c:v>
                 </c:pt>
                 <c:pt idx="1">
-                  <c:v>0.7662835249042146</c:v>
+                  <c:v>0.76628352490421459</c:v>
                 </c:pt>
                 <c:pt idx="2">
-                  <c:v>0.0</c:v>
+                  <c:v>0</c:v>
                 </c:pt>
                 <c:pt idx="3">
-                  <c:v>0.0</c:v>
+                  <c:v>0</c:v>
                 </c:pt>
               </c:numCache>
             </c:numRef>
@@ -1824,13 +1824,13 @@
                 <c:formatCode>General</c:formatCode>
                 <c:ptCount val="4"/>
                 <c:pt idx="0">
-                  <c:v>17.5531914893617</c:v>
+                  <c:v>17.553191489361701</c:v>
                 </c:pt>
                 <c:pt idx="1">
-                  <c:v>58.62068965517241</c:v>
+                  <c:v>58.620689655172413</c:v>
                 </c:pt>
                 <c:pt idx="2">
-                  <c:v>44.03292181069959</c:v>
+                  <c:v>44.032921810699591</c:v>
                 </c:pt>
                 <c:pt idx="3">
                   <c:v>56.578947368421055</c:v>
@@ -1895,7 +1895,7 @@
                 <c:formatCode>General</c:formatCode>
                 <c:ptCount val="4"/>
                 <c:pt idx="0">
-                  <c:v>5.851063829787234</c:v>
+                  <c:v>5.8510638297872344</c:v>
                 </c:pt>
                 <c:pt idx="1">
                   <c:v>1.1494252873563218</c:v>
@@ -1904,7 +1904,7 @@
                   <c:v>1.2345679012345678</c:v>
                 </c:pt>
                 <c:pt idx="3">
-                  <c:v>7.894736842105263</c:v>
+                  <c:v>7.8947368421052628</c:v>
                 </c:pt>
               </c:numCache>
             </c:numRef>
@@ -1971,10 +1971,10 @@
                   <c:v>20.74468085106383</c:v>
                 </c:pt>
                 <c:pt idx="1">
-                  <c:v>4.597701149425287</c:v>
+                  <c:v>4.5977011494252871</c:v>
                 </c:pt>
                 <c:pt idx="2">
-                  <c:v>6.172839506172839</c:v>
+                  <c:v>6.1728395061728394</c:v>
                 </c:pt>
                 <c:pt idx="3">
                   <c:v>2.6315789473684212</c:v>
@@ -2114,14 +2114,14 @@
     </c:plotArea>
     <c:plotVisOnly val="1"/>
     <c:dispBlanksAs val="gap"/>
-    <c:extLst xmlns:w="http://schemas.openxmlformats.org/wordprocessingml/2006/main" xmlns:w15="http://schemas.microsoft.com/office/word/2012/wordml" xmlns:w14="http://schemas.microsoft.com/office/word/2010/wordml" xmlns:m="http://schemas.openxmlformats.org/officeDocument/2006/math" xmlns:wp="http://schemas.openxmlformats.org/drawingml/2006/wordprocessingDrawing" xmlns:wp14="http://schemas.microsoft.com/office/word/2010/wordprocessingDrawing" xmlns:mc="http://schemas.openxmlformats.org/markup-compatibility/2006" xmlns:sl="http://schemas.openxmlformats.org/schemaLibrary/2006/main" xmlns:wne="http://schemas.microsoft.com/office/word/2006/wordml" xmlns:cdr="http://schemas.openxmlformats.org/drawingml/2006/chartDrawing" xmlns:c14="http://schemas.microsoft.com/office/drawing/2007/8/2/chart" xmlns:dgm="http://schemas.openxmlformats.org/drawingml/2006/diagram" xmlns:pic="http://schemas.openxmlformats.org/drawingml/2006/picture" xmlns:xdr="http://schemas.openxmlformats.org/drawingml/2006/spreadsheetDrawing" xmlns:dsp="http://schemas.microsoft.com/office/drawing/2008/diagram" xmlns:xvml="urn:schemas-microsoft-com:office:excel" xmlns:o="urn:schemas-microsoft-com:office:office" xmlns:v="urn:schemas-microsoft-com:vml" xmlns:w10="urn:schemas-microsoft-com:office:word" xmlns:pvml="urn:schemas-microsoft-com:office:powerpoint" xmlns:cppr="http://schemas.microsoft.com/office/2006/coverPageProps" xmlns:odx="http://opendope.org/xpaths" xmlns:odc="http://opendope.org/conditions" xmlns:odq="http://opendope.org/questions" xmlns:oda="http://opendope.org/answers" xmlns:odi="http://opendope.org/components" xmlns:odgm="http://opendope.org/SmartArt/DataHierarchy" xmlns:b="http://schemas.openxmlformats.org/officeDocument/2006/bibliography" xmlns:wps="http://schemas.microsoft.com/office/word/2010/wordprocessingShape" xmlns:w16se="http://schemas.microsoft.com/office/word/2015/wordml/symex" xmlns:w16cid="http://schemas.microsoft.com/office/word/2016/wordml/cid" xmlns:wetp="http://schemas.microsoft.com/office/webextensions/taskpanes/2010/11" xmlns:we="http://schemas.microsoft.com/office/webextensions/webextension/2010/11" xmlns:comp="http://schemas.openxmlformats.org/drawingml/2006/compatibility" xmlns:lc="http://schemas.openxmlformats.org/drawingml/2006/lockedCanvas">
+    <c:showDLblsOverMax val="0"/>
+    <c:extLst xmlns:lc="http://schemas.openxmlformats.org/drawingml/2006/lockedCanvas" xmlns:comp="http://schemas.openxmlformats.org/drawingml/2006/compatibility" xmlns:we="http://schemas.microsoft.com/office/webextensions/webextension/2010/11" xmlns:wetp="http://schemas.microsoft.com/office/webextensions/taskpanes/2010/11" xmlns:w16cid="http://schemas.microsoft.com/office/word/2016/wordml/cid" xmlns:w16se="http://schemas.microsoft.com/office/word/2015/wordml/symex" xmlns:wps="http://schemas.microsoft.com/office/word/2010/wordprocessingShape" xmlns:b="http://schemas.openxmlformats.org/officeDocument/2006/bibliography" xmlns:odgm="http://opendope.org/SmartArt/DataHierarchy" xmlns:odi="http://opendope.org/components" xmlns:oda="http://opendope.org/answers" xmlns:odq="http://opendope.org/questions" xmlns:odc="http://opendope.org/conditions" xmlns:odx="http://opendope.org/xpaths" xmlns:cppr="http://schemas.microsoft.com/office/2006/coverPageProps" xmlns:pvml="urn:schemas-microsoft-com:office:powerpoint" xmlns:w10="urn:schemas-microsoft-com:office:word" xmlns:v="urn:schemas-microsoft-com:vml" xmlns:o="urn:schemas-microsoft-com:office:office" xmlns:xvml="urn:schemas-microsoft-com:office:excel" xmlns:dsp="http://schemas.microsoft.com/office/drawing/2008/diagram" xmlns:xdr="http://schemas.openxmlformats.org/drawingml/2006/spreadsheetDrawing" xmlns:pic="http://schemas.openxmlformats.org/drawingml/2006/picture" xmlns:dgm="http://schemas.openxmlformats.org/drawingml/2006/diagram" xmlns:c14="http://schemas.microsoft.com/office/drawing/2007/8/2/chart" xmlns:cdr="http://schemas.openxmlformats.org/drawingml/2006/chartDrawing" xmlns:wne="http://schemas.microsoft.com/office/word/2006/wordml" xmlns:sl="http://schemas.openxmlformats.org/schemaLibrary/2006/main" xmlns:mc="http://schemas.openxmlformats.org/markup-compatibility/2006" xmlns:wp14="http://schemas.microsoft.com/office/word/2010/wordprocessingDrawing" xmlns:wp="http://schemas.openxmlformats.org/drawingml/2006/wordprocessingDrawing" xmlns:m="http://schemas.openxmlformats.org/officeDocument/2006/math" xmlns:w14="http://schemas.microsoft.com/office/word/2010/wordml" xmlns:w15="http://schemas.microsoft.com/office/word/2012/wordml" xmlns:w="http://schemas.openxmlformats.org/wordprocessingml/2006/main">
       <c:ext xmlns:c16r3="http://schemas.microsoft.com/office/drawing/2017/03/chart" uri="{56B9EC1D-385E-4148-901F-78D8002777C0}">
         <c16r3:dataDisplayOptions16>
           <c16r3:dispNaAsBlank val="1"/>
         </c16r3:dataDisplayOptions16>
       </c:ext>
     </c:extLst>
-    <c:showDLblsOverMax val="0"/>
   </c:chart>
   <c:spPr>
     <a:noFill/>
@@ -2217,7 +2217,7 @@
                 </a:outerShdw>
               </a:effectLst>
             </c:spPr>
-            <c:extLst xmlns:lc="http://schemas.openxmlformats.org/drawingml/2006/lockedCanvas" xmlns:comp="http://schemas.openxmlformats.org/drawingml/2006/compatibility" xmlns:we="http://schemas.microsoft.com/office/webextensions/webextension/2010/11" xmlns:wetp="http://schemas.microsoft.com/office/webextensions/taskpanes/2010/11" xmlns:w16cid="http://schemas.microsoft.com/office/word/2016/wordml/cid" xmlns:w16se="http://schemas.microsoft.com/office/word/2015/wordml/symex" xmlns:wps="http://schemas.microsoft.com/office/word/2010/wordprocessingShape" xmlns:b="http://schemas.openxmlformats.org/officeDocument/2006/bibliography" xmlns:odgm="http://opendope.org/SmartArt/DataHierarchy" xmlns:odi="http://opendope.org/components" xmlns:oda="http://opendope.org/answers" xmlns:odq="http://opendope.org/questions" xmlns:odc="http://opendope.org/conditions" xmlns:odx="http://opendope.org/xpaths" xmlns:cppr="http://schemas.microsoft.com/office/2006/coverPageProps" xmlns:pvml="urn:schemas-microsoft-com:office:powerpoint" xmlns:w10="urn:schemas-microsoft-com:office:word" xmlns:v="urn:schemas-microsoft-com:vml" xmlns:o="urn:schemas-microsoft-com:office:office" xmlns:xvml="urn:schemas-microsoft-com:office:excel" xmlns:dsp="http://schemas.microsoft.com/office/drawing/2008/diagram" xmlns:xdr="http://schemas.openxmlformats.org/drawingml/2006/spreadsheetDrawing" xmlns:pic="http://schemas.openxmlformats.org/drawingml/2006/picture" xmlns:dgm="http://schemas.openxmlformats.org/drawingml/2006/diagram" xmlns:c14="http://schemas.microsoft.com/office/drawing/2007/8/2/chart" xmlns:cdr="http://schemas.openxmlformats.org/drawingml/2006/chartDrawing" xmlns:wne="http://schemas.microsoft.com/office/word/2006/wordml" xmlns:sl="http://schemas.openxmlformats.org/schemaLibrary/2006/main" xmlns:mc="http://schemas.openxmlformats.org/markup-compatibility/2006" xmlns:wp14="http://schemas.microsoft.com/office/word/2010/wordprocessingDrawing" xmlns:wp="http://schemas.openxmlformats.org/drawingml/2006/wordprocessingDrawing" xmlns:m="http://schemas.openxmlformats.org/officeDocument/2006/math" xmlns:w14="http://schemas.microsoft.com/office/word/2010/wordml" xmlns:w15="http://schemas.microsoft.com/office/word/2012/wordml" xmlns:w="http://schemas.openxmlformats.org/wordprocessingml/2006/main">
+            <c:extLst xmlns:w="http://schemas.openxmlformats.org/wordprocessingml/2006/main" xmlns:w15="http://schemas.microsoft.com/office/word/2012/wordml" xmlns:w14="http://schemas.microsoft.com/office/word/2010/wordml" xmlns:m="http://schemas.openxmlformats.org/officeDocument/2006/math" xmlns:wp="http://schemas.openxmlformats.org/drawingml/2006/wordprocessingDrawing" xmlns:wp14="http://schemas.microsoft.com/office/word/2010/wordprocessingDrawing" xmlns:mc="http://schemas.openxmlformats.org/markup-compatibility/2006" xmlns:sl="http://schemas.openxmlformats.org/schemaLibrary/2006/main" xmlns:wne="http://schemas.microsoft.com/office/word/2006/wordml" xmlns:cdr="http://schemas.openxmlformats.org/drawingml/2006/chartDrawing" xmlns:c14="http://schemas.microsoft.com/office/drawing/2007/8/2/chart" xmlns:dgm="http://schemas.openxmlformats.org/drawingml/2006/diagram" xmlns:pic="http://schemas.openxmlformats.org/drawingml/2006/picture" xmlns:xdr="http://schemas.openxmlformats.org/drawingml/2006/spreadsheetDrawing" xmlns:dsp="http://schemas.microsoft.com/office/drawing/2008/diagram" xmlns:xvml="urn:schemas-microsoft-com:office:excel" xmlns:o="urn:schemas-microsoft-com:office:office" xmlns:v="urn:schemas-microsoft-com:vml" xmlns:w10="urn:schemas-microsoft-com:office:word" xmlns:pvml="urn:schemas-microsoft-com:office:powerpoint" xmlns:cppr="http://schemas.microsoft.com/office/2006/coverPageProps" xmlns:odx="http://opendope.org/xpaths" xmlns:odc="http://opendope.org/conditions" xmlns:odq="http://opendope.org/questions" xmlns:oda="http://opendope.org/answers" xmlns:odi="http://opendope.org/components" xmlns:odgm="http://opendope.org/SmartArt/DataHierarchy" xmlns:b="http://schemas.openxmlformats.org/officeDocument/2006/bibliography" xmlns:wps="http://schemas.microsoft.com/office/word/2010/wordprocessingShape" xmlns:w16se="http://schemas.microsoft.com/office/word/2015/wordml/symex" xmlns:w16cid="http://schemas.microsoft.com/office/word/2016/wordml/cid" xmlns:wetp="http://schemas.microsoft.com/office/webextensions/taskpanes/2010/11" xmlns:we="http://schemas.microsoft.com/office/webextensions/webextension/2010/11" xmlns:comp="http://schemas.openxmlformats.org/drawingml/2006/compatibility" xmlns:lc="http://schemas.openxmlformats.org/drawingml/2006/lockedCanvas">
               <c:ext xmlns:c16="http://schemas.microsoft.com/office/drawing/2014/chart" uri="{C3380CC4-5D6E-409C-BE32-E72D297353CC}">
                 <c16:uniqueId val="{00000001-6147-E74A-AA7B-5531F0E4EE0C}"/>
               </c:ext>
@@ -2274,10 +2274,10 @@
                 <c:formatCode>General</c:formatCode>
                 <c:ptCount val="12"/>
                 <c:pt idx="0">
-                  <c:v>44.83985765124555</c:v>
+                  <c:v>44.839857651245552</c:v>
                 </c:pt>
                 <c:pt idx="1">
-                  <c:v>44.60260972716489</c:v>
+                  <c:v>44.602609727164889</c:v>
                 </c:pt>
                 <c:pt idx="2">
                   <c:v>45.195729537366546</c:v>
@@ -2298,13 +2298,13 @@
                   <c:v>46.500593119810205</c:v>
                 </c:pt>
                 <c:pt idx="8">
-                  <c:v>46.8564650059312</c:v>
+                  <c:v>46.856465005931199</c:v>
                 </c:pt>
                 <c:pt idx="9">
-                  <c:v>46.8564650059312</c:v>
+                  <c:v>46.856465005931199</c:v>
                 </c:pt>
                 <c:pt idx="10">
-                  <c:v>46.02609727164887</c:v>
+                  <c:v>46.026097271648872</c:v>
                 </c:pt>
                 <c:pt idx="11">
                   <c:v>46.144721233689204</c:v>
@@ -2312,7 +2312,7 @@
               </c:numCache>
             </c:numRef>
           </c:val>
-          <c:extLst xmlns:lc="http://schemas.openxmlformats.org/drawingml/2006/lockedCanvas" xmlns:comp="http://schemas.openxmlformats.org/drawingml/2006/compatibility" xmlns:we="http://schemas.microsoft.com/office/webextensions/webextension/2010/11" xmlns:wetp="http://schemas.microsoft.com/office/webextensions/taskpanes/2010/11" xmlns:w16cid="http://schemas.microsoft.com/office/word/2016/wordml/cid" xmlns:w16se="http://schemas.microsoft.com/office/word/2015/wordml/symex" xmlns:wps="http://schemas.microsoft.com/office/word/2010/wordprocessingShape" xmlns:b="http://schemas.openxmlformats.org/officeDocument/2006/bibliography" xmlns:odgm="http://opendope.org/SmartArt/DataHierarchy" xmlns:odi="http://opendope.org/components" xmlns:oda="http://opendope.org/answers" xmlns:odq="http://opendope.org/questions" xmlns:odc="http://opendope.org/conditions" xmlns:odx="http://opendope.org/xpaths" xmlns:cppr="http://schemas.microsoft.com/office/2006/coverPageProps" xmlns:pvml="urn:schemas-microsoft-com:office:powerpoint" xmlns:w10="urn:schemas-microsoft-com:office:word" xmlns:v="urn:schemas-microsoft-com:vml" xmlns:o="urn:schemas-microsoft-com:office:office" xmlns:xvml="urn:schemas-microsoft-com:office:excel" xmlns:dsp="http://schemas.microsoft.com/office/drawing/2008/diagram" xmlns:xdr="http://schemas.openxmlformats.org/drawingml/2006/spreadsheetDrawing" xmlns:pic="http://schemas.openxmlformats.org/drawingml/2006/picture" xmlns:dgm="http://schemas.openxmlformats.org/drawingml/2006/diagram" xmlns:c14="http://schemas.microsoft.com/office/drawing/2007/8/2/chart" xmlns:cdr="http://schemas.openxmlformats.org/drawingml/2006/chartDrawing" xmlns:wne="http://schemas.microsoft.com/office/word/2006/wordml" xmlns:sl="http://schemas.openxmlformats.org/schemaLibrary/2006/main" xmlns:mc="http://schemas.openxmlformats.org/markup-compatibility/2006" xmlns:wp14="http://schemas.microsoft.com/office/word/2010/wordprocessingDrawing" xmlns:wp="http://schemas.openxmlformats.org/drawingml/2006/wordprocessingDrawing" xmlns:m="http://schemas.openxmlformats.org/officeDocument/2006/math" xmlns:w14="http://schemas.microsoft.com/office/word/2010/wordml" xmlns:w15="http://schemas.microsoft.com/office/word/2012/wordml" xmlns:w="http://schemas.openxmlformats.org/wordprocessingml/2006/main">
+          <c:extLst xmlns:w="http://schemas.openxmlformats.org/wordprocessingml/2006/main" xmlns:w15="http://schemas.microsoft.com/office/word/2012/wordml" xmlns:w14="http://schemas.microsoft.com/office/word/2010/wordml" xmlns:m="http://schemas.openxmlformats.org/officeDocument/2006/math" xmlns:wp="http://schemas.openxmlformats.org/drawingml/2006/wordprocessingDrawing" xmlns:wp14="http://schemas.microsoft.com/office/word/2010/wordprocessingDrawing" xmlns:mc="http://schemas.openxmlformats.org/markup-compatibility/2006" xmlns:sl="http://schemas.openxmlformats.org/schemaLibrary/2006/main" xmlns:wne="http://schemas.microsoft.com/office/word/2006/wordml" xmlns:cdr="http://schemas.openxmlformats.org/drawingml/2006/chartDrawing" xmlns:c14="http://schemas.microsoft.com/office/drawing/2007/8/2/chart" xmlns:dgm="http://schemas.openxmlformats.org/drawingml/2006/diagram" xmlns:pic="http://schemas.openxmlformats.org/drawingml/2006/picture" xmlns:xdr="http://schemas.openxmlformats.org/drawingml/2006/spreadsheetDrawing" xmlns:dsp="http://schemas.microsoft.com/office/drawing/2008/diagram" xmlns:xvml="urn:schemas-microsoft-com:office:excel" xmlns:o="urn:schemas-microsoft-com:office:office" xmlns:v="urn:schemas-microsoft-com:vml" xmlns:w10="urn:schemas-microsoft-com:office:word" xmlns:pvml="urn:schemas-microsoft-com:office:powerpoint" xmlns:cppr="http://schemas.microsoft.com/office/2006/coverPageProps" xmlns:odx="http://opendope.org/xpaths" xmlns:odc="http://opendope.org/conditions" xmlns:odq="http://opendope.org/questions" xmlns:oda="http://opendope.org/answers" xmlns:odi="http://opendope.org/components" xmlns:odgm="http://opendope.org/SmartArt/DataHierarchy" xmlns:b="http://schemas.openxmlformats.org/officeDocument/2006/bibliography" xmlns:wps="http://schemas.microsoft.com/office/word/2010/wordprocessingShape" xmlns:w16se="http://schemas.microsoft.com/office/word/2015/wordml/symex" xmlns:w16cid="http://schemas.microsoft.com/office/word/2016/wordml/cid" xmlns:wetp="http://schemas.microsoft.com/office/webextensions/taskpanes/2010/11" xmlns:we="http://schemas.microsoft.com/office/webextensions/webextension/2010/11" xmlns:comp="http://schemas.openxmlformats.org/drawingml/2006/compatibility" xmlns:lc="http://schemas.openxmlformats.org/drawingml/2006/lockedCanvas">
             <c:ext xmlns:c16="http://schemas.microsoft.com/office/drawing/2014/chart" uri="{C3380CC4-5D6E-409C-BE32-E72D297353CC}">
               <c16:uniqueId val="{00000002-6147-E74A-AA7B-5531F0E4EE0C}"/>
             </c:ext>
@@ -2396,7 +2396,7 @@
                   <c:v>0.35587188612099646</c:v>
                 </c:pt>
                 <c:pt idx="1">
-                  <c:v>0.4744958481613286</c:v>
+                  <c:v>0.47449584816132861</c:v>
                 </c:pt>
                 <c:pt idx="2">
                   <c:v>0.11862396204033215</c:v>
@@ -2408,25 +2408,25 @@
                   <c:v>1.7793594306049823</c:v>
                 </c:pt>
                 <c:pt idx="5">
-                  <c:v>0.830367734282325</c:v>
+                  <c:v>0.83036773428232502</c:v>
                 </c:pt>
                 <c:pt idx="6">
-                  <c:v>0.7117437722419929</c:v>
+                  <c:v>0.71174377224199292</c:v>
                 </c:pt>
                 <c:pt idx="7">
                   <c:v>2.6097271648873073</c:v>
                 </c:pt>
                 <c:pt idx="8">
-                  <c:v>0.9489916963226572</c:v>
+                  <c:v>0.94899169632265723</c:v>
                 </c:pt>
                 <c:pt idx="9">
                   <c:v>1.0676156583629892</c:v>
                 </c:pt>
                 <c:pt idx="10">
-                  <c:v>0.2372479240806643</c:v>
+                  <c:v>0.23724792408066431</c:v>
                 </c:pt>
                 <c:pt idx="11">
-                  <c:v>0.9489916963226572</c:v>
+                  <c:v>0.94899169632265723</c:v>
                 </c:pt>
               </c:numCache>
             </c:numRef>
@@ -2521,10 +2521,10 @@
                   <c:v>36.29893238434164</c:v>
                 </c:pt>
                 <c:pt idx="3">
-                  <c:v>38.90865954922894</c:v>
+                  <c:v>38.908659549228943</c:v>
                 </c:pt>
                 <c:pt idx="4">
-                  <c:v>37.72241992882562</c:v>
+                  <c:v>37.722419928825623</c:v>
                 </c:pt>
                 <c:pt idx="5">
                   <c:v>41.755634638196916</c:v>
@@ -2533,19 +2533,19 @@
                   <c:v>41.755634638196916</c:v>
                 </c:pt>
                 <c:pt idx="7">
-                  <c:v>37.72241992882562</c:v>
+                  <c:v>37.722419928825623</c:v>
                 </c:pt>
                 <c:pt idx="8">
-                  <c:v>42.94187425860024</c:v>
+                  <c:v>42.941874258600237</c:v>
                 </c:pt>
                 <c:pt idx="9">
                   <c:v>42.823250296559905</c:v>
                 </c:pt>
                 <c:pt idx="10">
-                  <c:v>43.77224199288256</c:v>
+                  <c:v>43.772241992882563</c:v>
                 </c:pt>
                 <c:pt idx="11">
-                  <c:v>43.65361803084223</c:v>
+                  <c:v>43.653618030842232</c:v>
                 </c:pt>
               </c:numCache>
             </c:numRef>
@@ -2631,34 +2631,34 @@
                 <c:formatCode>General</c:formatCode>
                 <c:ptCount val="12"/>
                 <c:pt idx="0">
-                  <c:v>0.5931198102016607</c:v>
+                  <c:v>0.59311981020166071</c:v>
                 </c:pt>
                 <c:pt idx="1">
                   <c:v>0.35587188612099646</c:v>
                 </c:pt>
                 <c:pt idx="2">
-                  <c:v>2.965599051008304</c:v>
+                  <c:v>2.9655990510083039</c:v>
                 </c:pt>
                 <c:pt idx="3">
                   <c:v>1.66073546856465</c:v>
                 </c:pt>
                 <c:pt idx="4">
-                  <c:v>3.3214709371293</c:v>
+                  <c:v>3.3214709371293001</c:v>
                 </c:pt>
                 <c:pt idx="5">
                   <c:v>1.0676156583629892</c:v>
                 </c:pt>
                 <c:pt idx="6">
-                  <c:v>0.9489916963226572</c:v>
+                  <c:v>0.94899169632265723</c:v>
                 </c:pt>
                 <c:pt idx="7">
-                  <c:v>4.507710557532621</c:v>
+                  <c:v>4.5077105575326213</c:v>
                 </c:pt>
                 <c:pt idx="8">
-                  <c:v>0.830367734282325</c:v>
+                  <c:v>0.83036773428232502</c:v>
                 </c:pt>
                 <c:pt idx="9">
-                  <c:v>0.7117437722419929</c:v>
+                  <c:v>0.71174377224199292</c:v>
                 </c:pt>
                 <c:pt idx="10">
                   <c:v>1.66073546856465</c:v>
@@ -2767,25 +2767,25 @@
                   <c:v>10.794780545670225</c:v>
                 </c:pt>
                 <c:pt idx="5">
-                  <c:v>9.9644128113879</c:v>
+                  <c:v>9.9644128113879002</c:v>
                 </c:pt>
                 <c:pt idx="6">
                   <c:v>10.201660735468565</c:v>
                 </c:pt>
                 <c:pt idx="7">
-                  <c:v>8.659549228944247</c:v>
+                  <c:v>8.6595492289442468</c:v>
                 </c:pt>
                 <c:pt idx="8">
-                  <c:v>8.422301304863582</c:v>
+                  <c:v>8.4223013048635824</c:v>
                 </c:pt>
                 <c:pt idx="9">
-                  <c:v>8.540925266903914</c:v>
+                  <c:v>8.5409252669039137</c:v>
                 </c:pt>
                 <c:pt idx="10">
-                  <c:v>8.303677342823251</c:v>
+                  <c:v>8.3036773428232511</c:v>
                 </c:pt>
                 <c:pt idx="11">
-                  <c:v>7.829181494661921</c:v>
+                  <c:v>7.8291814946619214</c:v>
                 </c:pt>
               </c:numCache>
             </c:numRef>
@@ -2922,14 +2922,14 @@
     </c:plotArea>
     <c:plotVisOnly val="1"/>
     <c:dispBlanksAs val="gap"/>
-    <c:extLst xmlns:lc="http://schemas.openxmlformats.org/drawingml/2006/lockedCanvas" xmlns:comp="http://schemas.openxmlformats.org/drawingml/2006/compatibility" xmlns:we="http://schemas.microsoft.com/office/webextensions/webextension/2010/11" xmlns:wetp="http://schemas.microsoft.com/office/webextensions/taskpanes/2010/11" xmlns:w16cid="http://schemas.microsoft.com/office/word/2016/wordml/cid" xmlns:w16se="http://schemas.microsoft.com/office/word/2015/wordml/symex" xmlns:wps="http://schemas.microsoft.com/office/word/2010/wordprocessingShape" xmlns:b="http://schemas.openxmlformats.org/officeDocument/2006/bibliography" xmlns:odgm="http://opendope.org/SmartArt/DataHierarchy" xmlns:odi="http://opendope.org/components" xmlns:oda="http://opendope.org/answers" xmlns:odq="http://opendope.org/questions" xmlns:odc="http://opendope.org/conditions" xmlns:odx="http://opendope.org/xpaths" xmlns:cppr="http://schemas.microsoft.com/office/2006/coverPageProps" xmlns:pvml="urn:schemas-microsoft-com:office:powerpoint" xmlns:w10="urn:schemas-microsoft-com:office:word" xmlns:v="urn:schemas-microsoft-com:vml" xmlns:o="urn:schemas-microsoft-com:office:office" xmlns:xvml="urn:schemas-microsoft-com:office:excel" xmlns:dsp="http://schemas.microsoft.com/office/drawing/2008/diagram" xmlns:xdr="http://schemas.openxmlformats.org/drawingml/2006/spreadsheetDrawing" xmlns:pic="http://schemas.openxmlformats.org/drawingml/2006/picture" xmlns:dgm="http://schemas.openxmlformats.org/drawingml/2006/diagram" xmlns:c14="http://schemas.microsoft.com/office/drawing/2007/8/2/chart" xmlns:cdr="http://schemas.openxmlformats.org/drawingml/2006/chartDrawing" xmlns:wne="http://schemas.microsoft.com/office/word/2006/wordml" xmlns:sl="http://schemas.openxmlformats.org/schemaLibrary/2006/main" xmlns:mc="http://schemas.openxmlformats.org/markup-compatibility/2006" xmlns:wp14="http://schemas.microsoft.com/office/word/2010/wordprocessingDrawing" xmlns:wp="http://schemas.openxmlformats.org/drawingml/2006/wordprocessingDrawing" xmlns:m="http://schemas.openxmlformats.org/officeDocument/2006/math" xmlns:w14="http://schemas.microsoft.com/office/word/2010/wordml" xmlns:w15="http://schemas.microsoft.com/office/word/2012/wordml" xmlns:w="http://schemas.openxmlformats.org/wordprocessingml/2006/main">
+    <c:showDLblsOverMax val="0"/>
+    <c:extLst xmlns:w="http://schemas.openxmlformats.org/wordprocessingml/2006/main" xmlns:w15="http://schemas.microsoft.com/office/word/2012/wordml" xmlns:w14="http://schemas.microsoft.com/office/word/2010/wordml" xmlns:m="http://schemas.openxmlformats.org/officeDocument/2006/math" xmlns:wp="http://schemas.openxmlformats.org/drawingml/2006/wordprocessingDrawing" xmlns:wp14="http://schemas.microsoft.com/office/word/2010/wordprocessingDrawing" xmlns:mc="http://schemas.openxmlformats.org/markup-compatibility/2006" xmlns:sl="http://schemas.openxmlformats.org/schemaLibrary/2006/main" xmlns:wne="http://schemas.microsoft.com/office/word/2006/wordml" xmlns:cdr="http://schemas.openxmlformats.org/drawingml/2006/chartDrawing" xmlns:c14="http://schemas.microsoft.com/office/drawing/2007/8/2/chart" xmlns:dgm="http://schemas.openxmlformats.org/drawingml/2006/diagram" xmlns:pic="http://schemas.openxmlformats.org/drawingml/2006/picture" xmlns:xdr="http://schemas.openxmlformats.org/drawingml/2006/spreadsheetDrawing" xmlns:dsp="http://schemas.microsoft.com/office/drawing/2008/diagram" xmlns:xvml="urn:schemas-microsoft-com:office:excel" xmlns:o="urn:schemas-microsoft-com:office:office" xmlns:v="urn:schemas-microsoft-com:vml" xmlns:w10="urn:schemas-microsoft-com:office:word" xmlns:pvml="urn:schemas-microsoft-com:office:powerpoint" xmlns:cppr="http://schemas.microsoft.com/office/2006/coverPageProps" xmlns:odx="http://opendope.org/xpaths" xmlns:odc="http://opendope.org/conditions" xmlns:odq="http://opendope.org/questions" xmlns:oda="http://opendope.org/answers" xmlns:odi="http://opendope.org/components" xmlns:odgm="http://opendope.org/SmartArt/DataHierarchy" xmlns:b="http://schemas.openxmlformats.org/officeDocument/2006/bibliography" xmlns:wps="http://schemas.microsoft.com/office/word/2010/wordprocessingShape" xmlns:w16se="http://schemas.microsoft.com/office/word/2015/wordml/symex" xmlns:w16cid="http://schemas.microsoft.com/office/word/2016/wordml/cid" xmlns:wetp="http://schemas.microsoft.com/office/webextensions/taskpanes/2010/11" xmlns:we="http://schemas.microsoft.com/office/webextensions/webextension/2010/11" xmlns:comp="http://schemas.openxmlformats.org/drawingml/2006/compatibility" xmlns:lc="http://schemas.openxmlformats.org/drawingml/2006/lockedCanvas">
       <c:ext xmlns:c16r3="http://schemas.microsoft.com/office/drawing/2017/03/chart" uri="{56B9EC1D-385E-4148-901F-78D8002777C0}">
         <c16r3:dataDisplayOptions16>
           <c16r3:dispNaAsBlank val="1"/>
         </c16r3:dataDisplayOptions16>
       </c:ext>
     </c:extLst>
-    <c:showDLblsOverMax val="0"/>
   </c:chart>
   <c:spPr>
     <a:noFill/>
@@ -3025,7 +3025,7 @@
                 </a:outerShdw>
               </a:effectLst>
             </c:spPr>
-            <c:extLst xmlns:lc="http://schemas.openxmlformats.org/drawingml/2006/lockedCanvas" xmlns:comp="http://schemas.openxmlformats.org/drawingml/2006/compatibility" xmlns:we="http://schemas.microsoft.com/office/webextensions/webextension/2010/11" xmlns:wetp="http://schemas.microsoft.com/office/webextensions/taskpanes/2010/11" xmlns:w16cid="http://schemas.microsoft.com/office/word/2016/wordml/cid" xmlns:w16se="http://schemas.microsoft.com/office/word/2015/wordml/symex" xmlns:wps="http://schemas.microsoft.com/office/word/2010/wordprocessingShape" xmlns:b="http://schemas.openxmlformats.org/officeDocument/2006/bibliography" xmlns:odgm="http://opendope.org/SmartArt/DataHierarchy" xmlns:odi="http://opendope.org/components" xmlns:oda="http://opendope.org/answers" xmlns:odq="http://opendope.org/questions" xmlns:odc="http://opendope.org/conditions" xmlns:odx="http://opendope.org/xpaths" xmlns:cppr="http://schemas.microsoft.com/office/2006/coverPageProps" xmlns:pvml="urn:schemas-microsoft-com:office:powerpoint" xmlns:w10="urn:schemas-microsoft-com:office:word" xmlns:v="urn:schemas-microsoft-com:vml" xmlns:o="urn:schemas-microsoft-com:office:office" xmlns:xvml="urn:schemas-microsoft-com:office:excel" xmlns:dsp="http://schemas.microsoft.com/office/drawing/2008/diagram" xmlns:xdr="http://schemas.openxmlformats.org/drawingml/2006/spreadsheetDrawing" xmlns:pic="http://schemas.openxmlformats.org/drawingml/2006/picture" xmlns:dgm="http://schemas.openxmlformats.org/drawingml/2006/diagram" xmlns:c14="http://schemas.microsoft.com/office/drawing/2007/8/2/chart" xmlns:cdr="http://schemas.openxmlformats.org/drawingml/2006/chartDrawing" xmlns:wne="http://schemas.microsoft.com/office/word/2006/wordml" xmlns:sl="http://schemas.openxmlformats.org/schemaLibrary/2006/main" xmlns:mc="http://schemas.openxmlformats.org/markup-compatibility/2006" xmlns:wp14="http://schemas.microsoft.com/office/word/2010/wordprocessingDrawing" xmlns:wp="http://schemas.openxmlformats.org/drawingml/2006/wordprocessingDrawing" xmlns:m="http://schemas.openxmlformats.org/officeDocument/2006/math" xmlns:w14="http://schemas.microsoft.com/office/word/2010/wordml" xmlns:w15="http://schemas.microsoft.com/office/word/2012/wordml" xmlns:w="http://schemas.openxmlformats.org/wordprocessingml/2006/main">
+            <c:extLst xmlns:w="http://schemas.openxmlformats.org/wordprocessingml/2006/main" xmlns:w15="http://schemas.microsoft.com/office/word/2012/wordml" xmlns:w14="http://schemas.microsoft.com/office/word/2010/wordml" xmlns:m="http://schemas.openxmlformats.org/officeDocument/2006/math" xmlns:wp="http://schemas.openxmlformats.org/drawingml/2006/wordprocessingDrawing" xmlns:wp14="http://schemas.microsoft.com/office/word/2010/wordprocessingDrawing" xmlns:mc="http://schemas.openxmlformats.org/markup-compatibility/2006" xmlns:sl="http://schemas.openxmlformats.org/schemaLibrary/2006/main" xmlns:wne="http://schemas.microsoft.com/office/word/2006/wordml" xmlns:cdr="http://schemas.openxmlformats.org/drawingml/2006/chartDrawing" xmlns:c14="http://schemas.microsoft.com/office/drawing/2007/8/2/chart" xmlns:dgm="http://schemas.openxmlformats.org/drawingml/2006/diagram" xmlns:pic="http://schemas.openxmlformats.org/drawingml/2006/picture" xmlns:xdr="http://schemas.openxmlformats.org/drawingml/2006/spreadsheetDrawing" xmlns:dsp="http://schemas.microsoft.com/office/drawing/2008/diagram" xmlns:xvml="urn:schemas-microsoft-com:office:excel" xmlns:o="urn:schemas-microsoft-com:office:office" xmlns:v="urn:schemas-microsoft-com:vml" xmlns:w10="urn:schemas-microsoft-com:office:word" xmlns:pvml="urn:schemas-microsoft-com:office:powerpoint" xmlns:cppr="http://schemas.microsoft.com/office/2006/coverPageProps" xmlns:odx="http://opendope.org/xpaths" xmlns:odc="http://opendope.org/conditions" xmlns:odq="http://opendope.org/questions" xmlns:oda="http://opendope.org/answers" xmlns:odi="http://opendope.org/components" xmlns:odgm="http://opendope.org/SmartArt/DataHierarchy" xmlns:b="http://schemas.openxmlformats.org/officeDocument/2006/bibliography" xmlns:wps="http://schemas.microsoft.com/office/word/2010/wordprocessingShape" xmlns:w16se="http://schemas.microsoft.com/office/word/2015/wordml/symex" xmlns:w16cid="http://schemas.microsoft.com/office/word/2016/wordml/cid" xmlns:wetp="http://schemas.microsoft.com/office/webextensions/taskpanes/2010/11" xmlns:we="http://schemas.microsoft.com/office/webextensions/webextension/2010/11" xmlns:comp="http://schemas.openxmlformats.org/drawingml/2006/compatibility" xmlns:lc="http://schemas.openxmlformats.org/drawingml/2006/lockedCanvas">
               <c:ext xmlns:c16="http://schemas.microsoft.com/office/drawing/2014/chart" uri="{C3380CC4-5D6E-409C-BE32-E72D297353CC}">
                 <c16:uniqueId val="{00000001-6147-E74A-AA7B-5531F0E4EE0C}"/>
               </c:ext>
@@ -3100,16 +3100,16 @@
                   <c:v>35.526315789473685</c:v>
                 </c:pt>
                 <c:pt idx="6">
-                  <c:v>36.8421052631579</c:v>
+                  <c:v>36.842105263157897</c:v>
                 </c:pt>
                 <c:pt idx="7">
-                  <c:v>38.1578947368421</c:v>
+                  <c:v>38.157894736842103</c:v>
                 </c:pt>
                 <c:pt idx="8">
-                  <c:v>38.1578947368421</c:v>
+                  <c:v>38.157894736842103</c:v>
                 </c:pt>
                 <c:pt idx="9">
-                  <c:v>38.1578947368421</c:v>
+                  <c:v>38.157894736842103</c:v>
                 </c:pt>
                 <c:pt idx="10">
                   <c:v>32.89473684210526</c:v>
@@ -3120,7 +3120,7 @@
               </c:numCache>
             </c:numRef>
           </c:val>
-          <c:extLst xmlns:lc="http://schemas.openxmlformats.org/drawingml/2006/lockedCanvas" xmlns:comp="http://schemas.openxmlformats.org/drawingml/2006/compatibility" xmlns:we="http://schemas.microsoft.com/office/webextensions/webextension/2010/11" xmlns:wetp="http://schemas.microsoft.com/office/webextensions/taskpanes/2010/11" xmlns:w16cid="http://schemas.microsoft.com/office/word/2016/wordml/cid" xmlns:w16se="http://schemas.microsoft.com/office/word/2015/wordml/symex" xmlns:wps="http://schemas.microsoft.com/office/word/2010/wordprocessingShape" xmlns:b="http://schemas.openxmlformats.org/officeDocument/2006/bibliography" xmlns:odgm="http://opendope.org/SmartArt/DataHierarchy" xmlns:odi="http://opendope.org/components" xmlns:oda="http://opendope.org/answers" xmlns:odq="http://opendope.org/questions" xmlns:odc="http://opendope.org/conditions" xmlns:odx="http://opendope.org/xpaths" xmlns:cppr="http://schemas.microsoft.com/office/2006/coverPageProps" xmlns:pvml="urn:schemas-microsoft-com:office:powerpoint" xmlns:w10="urn:schemas-microsoft-com:office:word" xmlns:v="urn:schemas-microsoft-com:vml" xmlns:o="urn:schemas-microsoft-com:office:office" xmlns:xvml="urn:schemas-microsoft-com:office:excel" xmlns:dsp="http://schemas.microsoft.com/office/drawing/2008/diagram" xmlns:xdr="http://schemas.openxmlformats.org/drawingml/2006/spreadsheetDrawing" xmlns:pic="http://schemas.openxmlformats.org/drawingml/2006/picture" xmlns:dgm="http://schemas.openxmlformats.org/drawingml/2006/diagram" xmlns:c14="http://schemas.microsoft.com/office/drawing/2007/8/2/chart" xmlns:cdr="http://schemas.openxmlformats.org/drawingml/2006/chartDrawing" xmlns:wne="http://schemas.microsoft.com/office/word/2006/wordml" xmlns:sl="http://schemas.openxmlformats.org/schemaLibrary/2006/main" xmlns:mc="http://schemas.openxmlformats.org/markup-compatibility/2006" xmlns:wp14="http://schemas.microsoft.com/office/word/2010/wordprocessingDrawing" xmlns:wp="http://schemas.openxmlformats.org/drawingml/2006/wordprocessingDrawing" xmlns:m="http://schemas.openxmlformats.org/officeDocument/2006/math" xmlns:w14="http://schemas.microsoft.com/office/word/2010/wordml" xmlns:w15="http://schemas.microsoft.com/office/word/2012/wordml" xmlns:w="http://schemas.openxmlformats.org/wordprocessingml/2006/main">
+          <c:extLst xmlns:w="http://schemas.openxmlformats.org/wordprocessingml/2006/main" xmlns:w15="http://schemas.microsoft.com/office/word/2012/wordml" xmlns:w14="http://schemas.microsoft.com/office/word/2010/wordml" xmlns:m="http://schemas.openxmlformats.org/officeDocument/2006/math" xmlns:wp="http://schemas.openxmlformats.org/drawingml/2006/wordprocessingDrawing" xmlns:wp14="http://schemas.microsoft.com/office/word/2010/wordprocessingDrawing" xmlns:mc="http://schemas.openxmlformats.org/markup-compatibility/2006" xmlns:sl="http://schemas.openxmlformats.org/schemaLibrary/2006/main" xmlns:wne="http://schemas.microsoft.com/office/word/2006/wordml" xmlns:cdr="http://schemas.openxmlformats.org/drawingml/2006/chartDrawing" xmlns:c14="http://schemas.microsoft.com/office/drawing/2007/8/2/chart" xmlns:dgm="http://schemas.openxmlformats.org/drawingml/2006/diagram" xmlns:pic="http://schemas.openxmlformats.org/drawingml/2006/picture" xmlns:xdr="http://schemas.openxmlformats.org/drawingml/2006/spreadsheetDrawing" xmlns:dsp="http://schemas.microsoft.com/office/drawing/2008/diagram" xmlns:xvml="urn:schemas-microsoft-com:office:excel" xmlns:o="urn:schemas-microsoft-com:office:office" xmlns:v="urn:schemas-microsoft-com:vml" xmlns:w10="urn:schemas-microsoft-com:office:word" xmlns:pvml="urn:schemas-microsoft-com:office:powerpoint" xmlns:cppr="http://schemas.microsoft.com/office/2006/coverPageProps" xmlns:odx="http://opendope.org/xpaths" xmlns:odc="http://opendope.org/conditions" xmlns:odq="http://opendope.org/questions" xmlns:oda="http://opendope.org/answers" xmlns:odi="http://opendope.org/components" xmlns:odgm="http://opendope.org/SmartArt/DataHierarchy" xmlns:b="http://schemas.openxmlformats.org/officeDocument/2006/bibliography" xmlns:wps="http://schemas.microsoft.com/office/word/2010/wordprocessingShape" xmlns:w16se="http://schemas.microsoft.com/office/word/2015/wordml/symex" xmlns:w16cid="http://schemas.microsoft.com/office/word/2016/wordml/cid" xmlns:wetp="http://schemas.microsoft.com/office/webextensions/taskpanes/2010/11" xmlns:we="http://schemas.microsoft.com/office/webextensions/webextension/2010/11" xmlns:comp="http://schemas.openxmlformats.org/drawingml/2006/compatibility" xmlns:lc="http://schemas.openxmlformats.org/drawingml/2006/lockedCanvas">
             <c:ext xmlns:c16="http://schemas.microsoft.com/office/drawing/2014/chart" uri="{C3380CC4-5D6E-409C-BE32-E72D297353CC}">
               <c16:uniqueId val="{00000002-6147-E74A-AA7B-5531F0E4EE0C}"/>
             </c:ext>
@@ -3201,40 +3201,40 @@
                 <c:formatCode>General</c:formatCode>
                 <c:ptCount val="12"/>
                 <c:pt idx="0">
-                  <c:v>0.0</c:v>
+                  <c:v>0</c:v>
                 </c:pt>
                 <c:pt idx="1">
-                  <c:v>0.0</c:v>
+                  <c:v>0</c:v>
                 </c:pt>
                 <c:pt idx="2">
-                  <c:v>0.0</c:v>
+                  <c:v>0</c:v>
                 </c:pt>
                 <c:pt idx="3">
-                  <c:v>0.0</c:v>
+                  <c:v>0</c:v>
                 </c:pt>
                 <c:pt idx="4">
-                  <c:v>0.0</c:v>
+                  <c:v>0</c:v>
                 </c:pt>
                 <c:pt idx="5">
-                  <c:v>0.0</c:v>
+                  <c:v>0</c:v>
                 </c:pt>
                 <c:pt idx="6">
-                  <c:v>0.0</c:v>
+                  <c:v>0</c:v>
                 </c:pt>
                 <c:pt idx="7">
-                  <c:v>0.0</c:v>
+                  <c:v>0</c:v>
                 </c:pt>
                 <c:pt idx="8">
                   <c:v>1.3157894736842106</c:v>
                 </c:pt>
                 <c:pt idx="9">
-                  <c:v>0.0</c:v>
+                  <c:v>0</c:v>
                 </c:pt>
                 <c:pt idx="10">
-                  <c:v>0.0</c:v>
+                  <c:v>0</c:v>
                 </c:pt>
                 <c:pt idx="11">
-                  <c:v>0.0</c:v>
+                  <c:v>0</c:v>
                 </c:pt>
               </c:numCache>
             </c:numRef>
@@ -3320,31 +3320,31 @@
                 <c:formatCode>General</c:formatCode>
                 <c:ptCount val="12"/>
                 <c:pt idx="0">
-                  <c:v>63.1578947368421</c:v>
+                  <c:v>63.157894736842103</c:v>
                 </c:pt>
                 <c:pt idx="1">
-                  <c:v>63.1578947368421</c:v>
+                  <c:v>63.157894736842103</c:v>
                 </c:pt>
                 <c:pt idx="2">
-                  <c:v>63.1578947368421</c:v>
+                  <c:v>63.157894736842103</c:v>
                 </c:pt>
                 <c:pt idx="3">
-                  <c:v>63.1578947368421</c:v>
+                  <c:v>63.157894736842103</c:v>
                 </c:pt>
                 <c:pt idx="4">
-                  <c:v>63.1578947368421</c:v>
+                  <c:v>63.157894736842103</c:v>
                 </c:pt>
                 <c:pt idx="5">
-                  <c:v>63.1578947368421</c:v>
+                  <c:v>63.157894736842103</c:v>
                 </c:pt>
                 <c:pt idx="6">
-                  <c:v>61.8421052631579</c:v>
+                  <c:v>61.842105263157897</c:v>
                 </c:pt>
                 <c:pt idx="7">
                   <c:v>57.89473684210526</c:v>
                 </c:pt>
                 <c:pt idx="8">
-                  <c:v>59.21052631578947</c:v>
+                  <c:v>59.210526315789473</c:v>
                 </c:pt>
                 <c:pt idx="9">
                   <c:v>60.526315789473685</c:v>
@@ -3439,40 +3439,40 @@
                 <c:formatCode>General</c:formatCode>
                 <c:ptCount val="12"/>
                 <c:pt idx="0">
-                  <c:v>0.0</c:v>
+                  <c:v>0</c:v>
                 </c:pt>
                 <c:pt idx="1">
-                  <c:v>0.0</c:v>
+                  <c:v>0</c:v>
                 </c:pt>
                 <c:pt idx="2">
-                  <c:v>0.0</c:v>
+                  <c:v>0</c:v>
                 </c:pt>
                 <c:pt idx="3">
-                  <c:v>0.0</c:v>
+                  <c:v>0</c:v>
                 </c:pt>
                 <c:pt idx="4">
-                  <c:v>0.0</c:v>
+                  <c:v>0</c:v>
                 </c:pt>
                 <c:pt idx="5">
-                  <c:v>0.0</c:v>
+                  <c:v>0</c:v>
                 </c:pt>
                 <c:pt idx="6">
-                  <c:v>0.0</c:v>
+                  <c:v>0</c:v>
                 </c:pt>
                 <c:pt idx="7">
                   <c:v>2.6315789473684212</c:v>
                 </c:pt>
                 <c:pt idx="8">
-                  <c:v>0.0</c:v>
+                  <c:v>0</c:v>
                 </c:pt>
                 <c:pt idx="9">
-                  <c:v>0.0</c:v>
+                  <c:v>0</c:v>
                 </c:pt>
                 <c:pt idx="10">
-                  <c:v>7.894736842105263</c:v>
+                  <c:v>7.8947368421052628</c:v>
                 </c:pt>
                 <c:pt idx="11">
-                  <c:v>0.0</c:v>
+                  <c:v>0</c:v>
                 </c:pt>
               </c:numCache>
             </c:numRef>
@@ -3593,7 +3593,7 @@
                   <c:v>2.6315789473684212</c:v>
                 </c:pt>
                 <c:pt idx="11">
-                  <c:v>0.0</c:v>
+                  <c:v>0</c:v>
                 </c:pt>
               </c:numCache>
             </c:numRef>
@@ -3730,14 +3730,14 @@
     </c:plotArea>
     <c:plotVisOnly val="1"/>
     <c:dispBlanksAs val="gap"/>
-    <c:extLst xmlns:lc="http://schemas.openxmlformats.org/drawingml/2006/lockedCanvas" xmlns:comp="http://schemas.openxmlformats.org/drawingml/2006/compatibility" xmlns:we="http://schemas.microsoft.com/office/webextensions/webextension/2010/11" xmlns:wetp="http://schemas.microsoft.com/office/webextensions/taskpanes/2010/11" xmlns:w16cid="http://schemas.microsoft.com/office/word/2016/wordml/cid" xmlns:w16se="http://schemas.microsoft.com/office/word/2015/wordml/symex" xmlns:wps="http://schemas.microsoft.com/office/word/2010/wordprocessingShape" xmlns:b="http://schemas.openxmlformats.org/officeDocument/2006/bibliography" xmlns:odgm="http://opendope.org/SmartArt/DataHierarchy" xmlns:odi="http://opendope.org/components" xmlns:oda="http://opendope.org/answers" xmlns:odq="http://opendope.org/questions" xmlns:odc="http://opendope.org/conditions" xmlns:odx="http://opendope.org/xpaths" xmlns:cppr="http://schemas.microsoft.com/office/2006/coverPageProps" xmlns:pvml="urn:schemas-microsoft-com:office:powerpoint" xmlns:w10="urn:schemas-microsoft-com:office:word" xmlns:v="urn:schemas-microsoft-com:vml" xmlns:o="urn:schemas-microsoft-com:office:office" xmlns:xvml="urn:schemas-microsoft-com:office:excel" xmlns:dsp="http://schemas.microsoft.com/office/drawing/2008/diagram" xmlns:xdr="http://schemas.openxmlformats.org/drawingml/2006/spreadsheetDrawing" xmlns:pic="http://schemas.openxmlformats.org/drawingml/2006/picture" xmlns:dgm="http://schemas.openxmlformats.org/drawingml/2006/diagram" xmlns:c14="http://schemas.microsoft.com/office/drawing/2007/8/2/chart" xmlns:cdr="http://schemas.openxmlformats.org/drawingml/2006/chartDrawing" xmlns:wne="http://schemas.microsoft.com/office/word/2006/wordml" xmlns:sl="http://schemas.openxmlformats.org/schemaLibrary/2006/main" xmlns:mc="http://schemas.openxmlformats.org/markup-compatibility/2006" xmlns:wp14="http://schemas.microsoft.com/office/word/2010/wordprocessingDrawing" xmlns:wp="http://schemas.openxmlformats.org/drawingml/2006/wordprocessingDrawing" xmlns:m="http://schemas.openxmlformats.org/officeDocument/2006/math" xmlns:w14="http://schemas.microsoft.com/office/word/2010/wordml" xmlns:w15="http://schemas.microsoft.com/office/word/2012/wordml" xmlns:w="http://schemas.openxmlformats.org/wordprocessingml/2006/main">
+    <c:showDLblsOverMax val="0"/>
+    <c:extLst xmlns:w="http://schemas.openxmlformats.org/wordprocessingml/2006/main" xmlns:w15="http://schemas.microsoft.com/office/word/2012/wordml" xmlns:w14="http://schemas.microsoft.com/office/word/2010/wordml" xmlns:m="http://schemas.openxmlformats.org/officeDocument/2006/math" xmlns:wp="http://schemas.openxmlformats.org/drawingml/2006/wordprocessingDrawing" xmlns:wp14="http://schemas.microsoft.com/office/word/2010/wordprocessingDrawing" xmlns:mc="http://schemas.openxmlformats.org/markup-compatibility/2006" xmlns:sl="http://schemas.openxmlformats.org/schemaLibrary/2006/main" xmlns:wne="http://schemas.microsoft.com/office/word/2006/wordml" xmlns:cdr="http://schemas.openxmlformats.org/drawingml/2006/chartDrawing" xmlns:c14="http://schemas.microsoft.com/office/drawing/2007/8/2/chart" xmlns:dgm="http://schemas.openxmlformats.org/drawingml/2006/diagram" xmlns:pic="http://schemas.openxmlformats.org/drawingml/2006/picture" xmlns:xdr="http://schemas.openxmlformats.org/drawingml/2006/spreadsheetDrawing" xmlns:dsp="http://schemas.microsoft.com/office/drawing/2008/diagram" xmlns:xvml="urn:schemas-microsoft-com:office:excel" xmlns:o="urn:schemas-microsoft-com:office:office" xmlns:v="urn:schemas-microsoft-com:vml" xmlns:w10="urn:schemas-microsoft-com:office:word" xmlns:pvml="urn:schemas-microsoft-com:office:powerpoint" xmlns:cppr="http://schemas.microsoft.com/office/2006/coverPageProps" xmlns:odx="http://opendope.org/xpaths" xmlns:odc="http://opendope.org/conditions" xmlns:odq="http://opendope.org/questions" xmlns:oda="http://opendope.org/answers" xmlns:odi="http://opendope.org/components" xmlns:odgm="http://opendope.org/SmartArt/DataHierarchy" xmlns:b="http://schemas.openxmlformats.org/officeDocument/2006/bibliography" xmlns:wps="http://schemas.microsoft.com/office/word/2010/wordprocessingShape" xmlns:w16se="http://schemas.microsoft.com/office/word/2015/wordml/symex" xmlns:w16cid="http://schemas.microsoft.com/office/word/2016/wordml/cid" xmlns:wetp="http://schemas.microsoft.com/office/webextensions/taskpanes/2010/11" xmlns:we="http://schemas.microsoft.com/office/webextensions/webextension/2010/11" xmlns:comp="http://schemas.openxmlformats.org/drawingml/2006/compatibility" xmlns:lc="http://schemas.openxmlformats.org/drawingml/2006/lockedCanvas">
       <c:ext xmlns:c16r3="http://schemas.microsoft.com/office/drawing/2017/03/chart" uri="{56B9EC1D-385E-4148-901F-78D8002777C0}">
         <c16r3:dataDisplayOptions16>
           <c16r3:dispNaAsBlank val="1"/>
         </c16r3:dataDisplayOptions16>
       </c:ext>
     </c:extLst>
-    <c:showDLblsOverMax val="0"/>
   </c:chart>
   <c:spPr>
     <a:noFill/>
@@ -3833,7 +3833,7 @@
                 </a:outerShdw>
               </a:effectLst>
             </c:spPr>
-            <c:extLst xmlns:w="http://schemas.openxmlformats.org/wordprocessingml/2006/main" xmlns:w15="http://schemas.microsoft.com/office/word/2012/wordml" xmlns:w14="http://schemas.microsoft.com/office/word/2010/wordml" xmlns:m="http://schemas.openxmlformats.org/officeDocument/2006/math" xmlns:wp="http://schemas.openxmlformats.org/drawingml/2006/wordprocessingDrawing" xmlns:wp14="http://schemas.microsoft.com/office/word/2010/wordprocessingDrawing" xmlns:mc="http://schemas.openxmlformats.org/markup-compatibility/2006" xmlns:sl="http://schemas.openxmlformats.org/schemaLibrary/2006/main" xmlns:wne="http://schemas.microsoft.com/office/word/2006/wordml" xmlns:cdr="http://schemas.openxmlformats.org/drawingml/2006/chartDrawing" xmlns:c14="http://schemas.microsoft.com/office/drawing/2007/8/2/chart" xmlns:dgm="http://schemas.openxmlformats.org/drawingml/2006/diagram" xmlns:pic="http://schemas.openxmlformats.org/drawingml/2006/picture" xmlns:xdr="http://schemas.openxmlformats.org/drawingml/2006/spreadsheetDrawing" xmlns:dsp="http://schemas.microsoft.com/office/drawing/2008/diagram" xmlns:xvml="urn:schemas-microsoft-com:office:excel" xmlns:o="urn:schemas-microsoft-com:office:office" xmlns:v="urn:schemas-microsoft-com:vml" xmlns:w10="urn:schemas-microsoft-com:office:word" xmlns:pvml="urn:schemas-microsoft-com:office:powerpoint" xmlns:cppr="http://schemas.microsoft.com/office/2006/coverPageProps" xmlns:odx="http://opendope.org/xpaths" xmlns:odc="http://opendope.org/conditions" xmlns:odq="http://opendope.org/questions" xmlns:oda="http://opendope.org/answers" xmlns:odi="http://opendope.org/components" xmlns:odgm="http://opendope.org/SmartArt/DataHierarchy" xmlns:b="http://schemas.openxmlformats.org/officeDocument/2006/bibliography" xmlns:wps="http://schemas.microsoft.com/office/word/2010/wordprocessingShape" xmlns:w16se="http://schemas.microsoft.com/office/word/2015/wordml/symex" xmlns:w16cid="http://schemas.microsoft.com/office/word/2016/wordml/cid" xmlns:wetp="http://schemas.microsoft.com/office/webextensions/taskpanes/2010/11" xmlns:we="http://schemas.microsoft.com/office/webextensions/webextension/2010/11" xmlns:comp="http://schemas.openxmlformats.org/drawingml/2006/compatibility" xmlns:lc="http://schemas.openxmlformats.org/drawingml/2006/lockedCanvas">
+            <c:extLst xmlns:lc="http://schemas.openxmlformats.org/drawingml/2006/lockedCanvas" xmlns:comp="http://schemas.openxmlformats.org/drawingml/2006/compatibility" xmlns:we="http://schemas.microsoft.com/office/webextensions/webextension/2010/11" xmlns:wetp="http://schemas.microsoft.com/office/webextensions/taskpanes/2010/11" xmlns:w16cid="http://schemas.microsoft.com/office/word/2016/wordml/cid" xmlns:w16se="http://schemas.microsoft.com/office/word/2015/wordml/symex" xmlns:wps="http://schemas.microsoft.com/office/word/2010/wordprocessingShape" xmlns:b="http://schemas.openxmlformats.org/officeDocument/2006/bibliography" xmlns:odgm="http://opendope.org/SmartArt/DataHierarchy" xmlns:odi="http://opendope.org/components" xmlns:oda="http://opendope.org/answers" xmlns:odq="http://opendope.org/questions" xmlns:odc="http://opendope.org/conditions" xmlns:odx="http://opendope.org/xpaths" xmlns:cppr="http://schemas.microsoft.com/office/2006/coverPageProps" xmlns:pvml="urn:schemas-microsoft-com:office:powerpoint" xmlns:w10="urn:schemas-microsoft-com:office:word" xmlns:v="urn:schemas-microsoft-com:vml" xmlns:o="urn:schemas-microsoft-com:office:office" xmlns:xvml="urn:schemas-microsoft-com:office:excel" xmlns:dsp="http://schemas.microsoft.com/office/drawing/2008/diagram" xmlns:xdr="http://schemas.openxmlformats.org/drawingml/2006/spreadsheetDrawing" xmlns:pic="http://schemas.openxmlformats.org/drawingml/2006/picture" xmlns:dgm="http://schemas.openxmlformats.org/drawingml/2006/diagram" xmlns:c14="http://schemas.microsoft.com/office/drawing/2007/8/2/chart" xmlns:cdr="http://schemas.openxmlformats.org/drawingml/2006/chartDrawing" xmlns:wne="http://schemas.microsoft.com/office/word/2006/wordml" xmlns:sl="http://schemas.openxmlformats.org/schemaLibrary/2006/main" xmlns:mc="http://schemas.openxmlformats.org/markup-compatibility/2006" xmlns:wp14="http://schemas.microsoft.com/office/word/2010/wordprocessingDrawing" xmlns:wp="http://schemas.openxmlformats.org/drawingml/2006/wordprocessingDrawing" xmlns:m="http://schemas.openxmlformats.org/officeDocument/2006/math" xmlns:w14="http://schemas.microsoft.com/office/word/2010/wordml" xmlns:w15="http://schemas.microsoft.com/office/word/2012/wordml" xmlns:w="http://schemas.openxmlformats.org/wordprocessingml/2006/main">
               <c:ext xmlns:c16="http://schemas.microsoft.com/office/drawing/2014/chart" uri="{C3380CC4-5D6E-409C-BE32-E72D297353CC}">
                 <c16:uniqueId val="{00000001-6147-E74A-AA7B-5531F0E4EE0C}"/>
               </c:ext>
@@ -3893,7 +3893,7 @@
                   <c:v>49.794238683127574</c:v>
                 </c:pt>
                 <c:pt idx="1">
-                  <c:v>48.97119341563786</c:v>
+                  <c:v>48.971193415637863</c:v>
                 </c:pt>
                 <c:pt idx="2">
                   <c:v>49.382716049382715</c:v>
@@ -3917,10 +3917,10 @@
                   <c:v>49.382716049382715</c:v>
                 </c:pt>
                 <c:pt idx="9">
-                  <c:v>48.97119341563786</c:v>
+                  <c:v>48.971193415637863</c:v>
                 </c:pt>
                 <c:pt idx="10">
-                  <c:v>48.97119341563786</c:v>
+                  <c:v>48.971193415637863</c:v>
                 </c:pt>
                 <c:pt idx="11">
                   <c:v>48.559670781893004</c:v>
@@ -3928,7 +3928,7 @@
               </c:numCache>
             </c:numRef>
           </c:val>
-          <c:extLst xmlns:w="http://schemas.openxmlformats.org/wordprocessingml/2006/main" xmlns:w15="http://schemas.microsoft.com/office/word/2012/wordml" xmlns:w14="http://schemas.microsoft.com/office/word/2010/wordml" xmlns:m="http://schemas.openxmlformats.org/officeDocument/2006/math" xmlns:wp="http://schemas.openxmlformats.org/drawingml/2006/wordprocessingDrawing" xmlns:wp14="http://schemas.microsoft.com/office/word/2010/wordprocessingDrawing" xmlns:mc="http://schemas.openxmlformats.org/markup-compatibility/2006" xmlns:sl="http://schemas.openxmlformats.org/schemaLibrary/2006/main" xmlns:wne="http://schemas.microsoft.com/office/word/2006/wordml" xmlns:cdr="http://schemas.openxmlformats.org/drawingml/2006/chartDrawing" xmlns:c14="http://schemas.microsoft.com/office/drawing/2007/8/2/chart" xmlns:dgm="http://schemas.openxmlformats.org/drawingml/2006/diagram" xmlns:pic="http://schemas.openxmlformats.org/drawingml/2006/picture" xmlns:xdr="http://schemas.openxmlformats.org/drawingml/2006/spreadsheetDrawing" xmlns:dsp="http://schemas.microsoft.com/office/drawing/2008/diagram" xmlns:xvml="urn:schemas-microsoft-com:office:excel" xmlns:o="urn:schemas-microsoft-com:office:office" xmlns:v="urn:schemas-microsoft-com:vml" xmlns:w10="urn:schemas-microsoft-com:office:word" xmlns:pvml="urn:schemas-microsoft-com:office:powerpoint" xmlns:cppr="http://schemas.microsoft.com/office/2006/coverPageProps" xmlns:odx="http://opendope.org/xpaths" xmlns:odc="http://opendope.org/conditions" xmlns:odq="http://opendope.org/questions" xmlns:oda="http://opendope.org/answers" xmlns:odi="http://opendope.org/components" xmlns:odgm="http://opendope.org/SmartArt/DataHierarchy" xmlns:b="http://schemas.openxmlformats.org/officeDocument/2006/bibliography" xmlns:wps="http://schemas.microsoft.com/office/word/2010/wordprocessingShape" xmlns:w16se="http://schemas.microsoft.com/office/word/2015/wordml/symex" xmlns:w16cid="http://schemas.microsoft.com/office/word/2016/wordml/cid" xmlns:wetp="http://schemas.microsoft.com/office/webextensions/taskpanes/2010/11" xmlns:we="http://schemas.microsoft.com/office/webextensions/webextension/2010/11" xmlns:comp="http://schemas.openxmlformats.org/drawingml/2006/compatibility" xmlns:lc="http://schemas.openxmlformats.org/drawingml/2006/lockedCanvas">
+          <c:extLst xmlns:lc="http://schemas.openxmlformats.org/drawingml/2006/lockedCanvas" xmlns:comp="http://schemas.openxmlformats.org/drawingml/2006/compatibility" xmlns:we="http://schemas.microsoft.com/office/webextensions/webextension/2010/11" xmlns:wetp="http://schemas.microsoft.com/office/webextensions/taskpanes/2010/11" xmlns:w16cid="http://schemas.microsoft.com/office/word/2016/wordml/cid" xmlns:w16se="http://schemas.microsoft.com/office/word/2015/wordml/symex" xmlns:wps="http://schemas.microsoft.com/office/word/2010/wordprocessingShape" xmlns:b="http://schemas.openxmlformats.org/officeDocument/2006/bibliography" xmlns:odgm="http://opendope.org/SmartArt/DataHierarchy" xmlns:odi="http://opendope.org/components" xmlns:oda="http://opendope.org/answers" xmlns:odq="http://opendope.org/questions" xmlns:odc="http://opendope.org/conditions" xmlns:odx="http://opendope.org/xpaths" xmlns:cppr="http://schemas.microsoft.com/office/2006/coverPageProps" xmlns:pvml="urn:schemas-microsoft-com:office:powerpoint" xmlns:w10="urn:schemas-microsoft-com:office:word" xmlns:v="urn:schemas-microsoft-com:vml" xmlns:o="urn:schemas-microsoft-com:office:office" xmlns:xvml="urn:schemas-microsoft-com:office:excel" xmlns:dsp="http://schemas.microsoft.com/office/drawing/2008/diagram" xmlns:xdr="http://schemas.openxmlformats.org/drawingml/2006/spreadsheetDrawing" xmlns:pic="http://schemas.openxmlformats.org/drawingml/2006/picture" xmlns:dgm="http://schemas.openxmlformats.org/drawingml/2006/diagram" xmlns:c14="http://schemas.microsoft.com/office/drawing/2007/8/2/chart" xmlns:cdr="http://schemas.openxmlformats.org/drawingml/2006/chartDrawing" xmlns:wne="http://schemas.microsoft.com/office/word/2006/wordml" xmlns:sl="http://schemas.openxmlformats.org/schemaLibrary/2006/main" xmlns:mc="http://schemas.openxmlformats.org/markup-compatibility/2006" xmlns:wp14="http://schemas.microsoft.com/office/word/2010/wordprocessingDrawing" xmlns:wp="http://schemas.openxmlformats.org/drawingml/2006/wordprocessingDrawing" xmlns:m="http://schemas.openxmlformats.org/officeDocument/2006/math" xmlns:w14="http://schemas.microsoft.com/office/word/2010/wordml" xmlns:w15="http://schemas.microsoft.com/office/word/2012/wordml" xmlns:w="http://schemas.openxmlformats.org/wordprocessingml/2006/main">
             <c:ext xmlns:c16="http://schemas.microsoft.com/office/drawing/2014/chart" uri="{C3380CC4-5D6E-409C-BE32-E72D297353CC}">
               <c16:uniqueId val="{00000002-6147-E74A-AA7B-5531F0E4EE0C}"/>
             </c:ext>
@@ -4009,40 +4009,40 @@
                 <c:formatCode>General</c:formatCode>
                 <c:ptCount val="12"/>
                 <c:pt idx="0">
-                  <c:v>0.0</c:v>
+                  <c:v>0</c:v>
                 </c:pt>
                 <c:pt idx="1">
-                  <c:v>0.0</c:v>
+                  <c:v>0</c:v>
                 </c:pt>
                 <c:pt idx="2">
-                  <c:v>0.0</c:v>
+                  <c:v>0</c:v>
                 </c:pt>
                 <c:pt idx="3">
-                  <c:v>0.0</c:v>
+                  <c:v>0</c:v>
                 </c:pt>
                 <c:pt idx="4">
-                  <c:v>0.0</c:v>
+                  <c:v>0</c:v>
                 </c:pt>
                 <c:pt idx="5">
-                  <c:v>0.0</c:v>
+                  <c:v>0</c:v>
                 </c:pt>
                 <c:pt idx="6">
-                  <c:v>0.0</c:v>
+                  <c:v>0</c:v>
                 </c:pt>
                 <c:pt idx="7">
                   <c:v>1.2345679012345678</c:v>
                 </c:pt>
                 <c:pt idx="8">
-                  <c:v>0.0</c:v>
+                  <c:v>0</c:v>
                 </c:pt>
                 <c:pt idx="9">
-                  <c:v>0.0</c:v>
+                  <c:v>0</c:v>
                 </c:pt>
                 <c:pt idx="10">
-                  <c:v>0.411522633744856</c:v>
+                  <c:v>0.41152263374485598</c:v>
                 </c:pt>
                 <c:pt idx="11">
-                  <c:v>0.0</c:v>
+                  <c:v>0</c:v>
                 </c:pt>
               </c:numCache>
             </c:numRef>
@@ -4137,31 +4137,31 @@
                   <c:v>40.74074074074074</c:v>
                 </c:pt>
                 <c:pt idx="3">
-                  <c:v>40.32921810699588</c:v>
+                  <c:v>40.329218106995881</c:v>
                 </c:pt>
                 <c:pt idx="4">
-                  <c:v>40.32921810699588</c:v>
+                  <c:v>40.329218106995881</c:v>
                 </c:pt>
                 <c:pt idx="5">
                   <c:v>41.97530864197531</c:v>
                 </c:pt>
                 <c:pt idx="6">
-                  <c:v>42.38683127572016</c:v>
+                  <c:v>42.386831275720162</c:v>
                 </c:pt>
                 <c:pt idx="7">
                   <c:v>39.91769547325103</c:v>
                 </c:pt>
                 <c:pt idx="8">
-                  <c:v>42.38683127572016</c:v>
+                  <c:v>42.386831275720162</c:v>
                 </c:pt>
                 <c:pt idx="9">
-                  <c:v>43.20987654320987</c:v>
+                  <c:v>43.209876543209873</c:v>
                 </c:pt>
                 <c:pt idx="10">
-                  <c:v>44.44444444444444</c:v>
+                  <c:v>44.444444444444443</c:v>
                 </c:pt>
                 <c:pt idx="11">
-                  <c:v>44.8559670781893</c:v>
+                  <c:v>44.855967078189302</c:v>
                 </c:pt>
               </c:numCache>
             </c:numRef>
@@ -4247,40 +4247,40 @@
                 <c:formatCode>General</c:formatCode>
                 <c:ptCount val="12"/>
                 <c:pt idx="0">
-                  <c:v>0.411522633744856</c:v>
+                  <c:v>0.41152263374485598</c:v>
                 </c:pt>
                 <c:pt idx="1">
                   <c:v>1.2345679012345678</c:v>
                 </c:pt>
                 <c:pt idx="2">
-                  <c:v>0.0</c:v>
+                  <c:v>0</c:v>
                 </c:pt>
                 <c:pt idx="3">
-                  <c:v>0.0</c:v>
+                  <c:v>0</c:v>
                 </c:pt>
                 <c:pt idx="4">
-                  <c:v>0.411522633744856</c:v>
+                  <c:v>0.41152263374485598</c:v>
                 </c:pt>
                 <c:pt idx="5">
-                  <c:v>0.411522633744856</c:v>
+                  <c:v>0.41152263374485598</c:v>
                 </c:pt>
                 <c:pt idx="6">
-                  <c:v>0.411522633744856</c:v>
+                  <c:v>0.41152263374485598</c:v>
                 </c:pt>
                 <c:pt idx="7">
-                  <c:v>1.646090534979424</c:v>
+                  <c:v>1.6460905349794239</c:v>
                 </c:pt>
                 <c:pt idx="8">
-                  <c:v>0.823045267489712</c:v>
+                  <c:v>0.82304526748971196</c:v>
                 </c:pt>
                 <c:pt idx="9">
-                  <c:v>0.411522633744856</c:v>
+                  <c:v>0.41152263374485598</c:v>
                 </c:pt>
                 <c:pt idx="10">
-                  <c:v>0.0</c:v>
+                  <c:v>0</c:v>
                 </c:pt>
                 <c:pt idx="11">
-                  <c:v>0.411522633744856</c:v>
+                  <c:v>0.41152263374485598</c:v>
                 </c:pt>
               </c:numCache>
             </c:numRef>
@@ -4368,40 +4368,40 @@
                 <c:formatCode>General</c:formatCode>
                 <c:ptCount val="12"/>
                 <c:pt idx="0">
-                  <c:v>9.876543209876543</c:v>
+                  <c:v>9.8765432098765427</c:v>
                 </c:pt>
                 <c:pt idx="1">
-                  <c:v>9.876543209876543</c:v>
+                  <c:v>9.8765432098765427</c:v>
                 </c:pt>
                 <c:pt idx="2">
-                  <c:v>9.876543209876543</c:v>
+                  <c:v>9.8765432098765427</c:v>
                 </c:pt>
                 <c:pt idx="3">
-                  <c:v>9.876543209876543</c:v>
+                  <c:v>9.8765432098765427</c:v>
                 </c:pt>
                 <c:pt idx="4">
-                  <c:v>9.465020576131687</c:v>
+                  <c:v>9.4650205761316872</c:v>
                 </c:pt>
                 <c:pt idx="5">
-                  <c:v>7.407407407407407</c:v>
+                  <c:v>7.4074074074074074</c:v>
                 </c:pt>
                 <c:pt idx="6">
-                  <c:v>7.407407407407407</c:v>
+                  <c:v>7.4074074074074074</c:v>
                 </c:pt>
                 <c:pt idx="7">
-                  <c:v>7.407407407407407</c:v>
+                  <c:v>7.4074074074074074</c:v>
                 </c:pt>
                 <c:pt idx="8">
-                  <c:v>7.407407407407407</c:v>
+                  <c:v>7.4074074074074074</c:v>
                 </c:pt>
                 <c:pt idx="9">
-                  <c:v>7.407407407407407</c:v>
+                  <c:v>7.4074074074074074</c:v>
                 </c:pt>
                 <c:pt idx="10">
-                  <c:v>6.172839506172839</c:v>
+                  <c:v>6.1728395061728394</c:v>
                 </c:pt>
                 <c:pt idx="11">
-                  <c:v>6.172839506172839</c:v>
+                  <c:v>6.1728395061728394</c:v>
                 </c:pt>
               </c:numCache>
             </c:numRef>
@@ -4538,14 +4538,14 @@
     </c:plotArea>
     <c:plotVisOnly val="1"/>
     <c:dispBlanksAs val="gap"/>
-    <c:extLst xmlns:w="http://schemas.openxmlformats.org/wordprocessingml/2006/main" xmlns:w15="http://schemas.microsoft.com/office/word/2012/wordml" xmlns:w14="http://schemas.microsoft.com/office/word/2010/wordml" xmlns:m="http://schemas.openxmlformats.org/officeDocument/2006/math" xmlns:wp="http://schemas.openxmlformats.org/drawingml/2006/wordprocessingDrawing" xmlns:wp14="http://schemas.microsoft.com/office/word/2010/wordprocessingDrawing" xmlns:mc="http://schemas.openxmlformats.org/markup-compatibility/2006" xmlns:sl="http://schemas.openxmlformats.org/schemaLibrary/2006/main" xmlns:wne="http://schemas.microsoft.com/office/word/2006/wordml" xmlns:cdr="http://schemas.openxmlformats.org/drawingml/2006/chartDrawing" xmlns:c14="http://schemas.microsoft.com/office/drawing/2007/8/2/chart" xmlns:dgm="http://schemas.openxmlformats.org/drawingml/2006/diagram" xmlns:pic="http://schemas.openxmlformats.org/drawingml/2006/picture" xmlns:xdr="http://schemas.openxmlformats.org/drawingml/2006/spreadsheetDrawing" xmlns:dsp="http://schemas.microsoft.com/office/drawing/2008/diagram" xmlns:xvml="urn:schemas-microsoft-com:office:excel" xmlns:o="urn:schemas-microsoft-com:office:office" xmlns:v="urn:schemas-microsoft-com:vml" xmlns:w10="urn:schemas-microsoft-com:office:word" xmlns:pvml="urn:schemas-microsoft-com:office:powerpoint" xmlns:cppr="http://schemas.microsoft.com/office/2006/coverPageProps" xmlns:odx="http://opendope.org/xpaths" xmlns:odc="http://opendope.org/conditions" xmlns:odq="http://opendope.org/questions" xmlns:oda="http://opendope.org/answers" xmlns:odi="http://opendope.org/components" xmlns:odgm="http://opendope.org/SmartArt/DataHierarchy" xmlns:b="http://schemas.openxmlformats.org/officeDocument/2006/bibliography" xmlns:wps="http://schemas.microsoft.com/office/word/2010/wordprocessingShape" xmlns:w16se="http://schemas.microsoft.com/office/word/2015/wordml/symex" xmlns:w16cid="http://schemas.microsoft.com/office/word/2016/wordml/cid" xmlns:wetp="http://schemas.microsoft.com/office/webextensions/taskpanes/2010/11" xmlns:we="http://schemas.microsoft.com/office/webextensions/webextension/2010/11" xmlns:comp="http://schemas.openxmlformats.org/drawingml/2006/compatibility" xmlns:lc="http://schemas.openxmlformats.org/drawingml/2006/lockedCanvas">
+    <c:showDLblsOverMax val="0"/>
+    <c:extLst xmlns:lc="http://schemas.openxmlformats.org/drawingml/2006/lockedCanvas" xmlns:comp="http://schemas.openxmlformats.org/drawingml/2006/compatibility" xmlns:we="http://schemas.microsoft.com/office/webextensions/webextension/2010/11" xmlns:wetp="http://schemas.microsoft.com/office/webextensions/taskpanes/2010/11" xmlns:w16cid="http://schemas.microsoft.com/office/word/2016/wordml/cid" xmlns:w16se="http://schemas.microsoft.com/office/word/2015/wordml/symex" xmlns:wps="http://schemas.microsoft.com/office/word/2010/wordprocessingShape" xmlns:b="http://schemas.openxmlformats.org/officeDocument/2006/bibliography" xmlns:odgm="http://opendope.org/SmartArt/DataHierarchy" xmlns:odi="http://opendope.org/components" xmlns:oda="http://opendope.org/answers" xmlns:odq="http://opendope.org/questions" xmlns:odc="http://opendope.org/conditions" xmlns:odx="http://opendope.org/xpaths" xmlns:cppr="http://schemas.microsoft.com/office/2006/coverPageProps" xmlns:pvml="urn:schemas-microsoft-com:office:powerpoint" xmlns:w10="urn:schemas-microsoft-com:office:word" xmlns:v="urn:schemas-microsoft-com:vml" xmlns:o="urn:schemas-microsoft-com:office:office" xmlns:xvml="urn:schemas-microsoft-com:office:excel" xmlns:dsp="http://schemas.microsoft.com/office/drawing/2008/diagram" xmlns:xdr="http://schemas.openxmlformats.org/drawingml/2006/spreadsheetDrawing" xmlns:pic="http://schemas.openxmlformats.org/drawingml/2006/picture" xmlns:dgm="http://schemas.openxmlformats.org/drawingml/2006/diagram" xmlns:c14="http://schemas.microsoft.com/office/drawing/2007/8/2/chart" xmlns:cdr="http://schemas.openxmlformats.org/drawingml/2006/chartDrawing" xmlns:wne="http://schemas.microsoft.com/office/word/2006/wordml" xmlns:sl="http://schemas.openxmlformats.org/schemaLibrary/2006/main" xmlns:mc="http://schemas.openxmlformats.org/markup-compatibility/2006" xmlns:wp14="http://schemas.microsoft.com/office/word/2010/wordprocessingDrawing" xmlns:wp="http://schemas.openxmlformats.org/drawingml/2006/wordprocessingDrawing" xmlns:m="http://schemas.openxmlformats.org/officeDocument/2006/math" xmlns:w14="http://schemas.microsoft.com/office/word/2010/wordml" xmlns:w15="http://schemas.microsoft.com/office/word/2012/wordml" xmlns:w="http://schemas.openxmlformats.org/wordprocessingml/2006/main">
       <c:ext xmlns:c16r3="http://schemas.microsoft.com/office/drawing/2017/03/chart" uri="{56B9EC1D-385E-4148-901F-78D8002777C0}">
         <c16r3:dataDisplayOptions16>
           <c16r3:dispNaAsBlank val="1"/>
         </c16r3:dataDisplayOptions16>
       </c:ext>
     </c:extLst>
-    <c:showDLblsOverMax val="0"/>
   </c:chart>
   <c:spPr>
     <a:noFill/>
@@ -4641,7 +4641,7 @@
                 </a:outerShdw>
               </a:effectLst>
             </c:spPr>
-            <c:extLst xmlns:w="http://schemas.openxmlformats.org/wordprocessingml/2006/main" xmlns:w15="http://schemas.microsoft.com/office/word/2012/wordml" xmlns:w14="http://schemas.microsoft.com/office/word/2010/wordml" xmlns:m="http://schemas.openxmlformats.org/officeDocument/2006/math" xmlns:wp="http://schemas.openxmlformats.org/drawingml/2006/wordprocessingDrawing" xmlns:wp14="http://schemas.microsoft.com/office/word/2010/wordprocessingDrawing" xmlns:mc="http://schemas.openxmlformats.org/markup-compatibility/2006" xmlns:sl="http://schemas.openxmlformats.org/schemaLibrary/2006/main" xmlns:wne="http://schemas.microsoft.com/office/word/2006/wordml" xmlns:cdr="http://schemas.openxmlformats.org/drawingml/2006/chartDrawing" xmlns:c14="http://schemas.microsoft.com/office/drawing/2007/8/2/chart" xmlns:dgm="http://schemas.openxmlformats.org/drawingml/2006/diagram" xmlns:pic="http://schemas.openxmlformats.org/drawingml/2006/picture" xmlns:xdr="http://schemas.openxmlformats.org/drawingml/2006/spreadsheetDrawing" xmlns:dsp="http://schemas.microsoft.com/office/drawing/2008/diagram" xmlns:xvml="urn:schemas-microsoft-com:office:excel" xmlns:o="urn:schemas-microsoft-com:office:office" xmlns:v="urn:schemas-microsoft-com:vml" xmlns:w10="urn:schemas-microsoft-com:office:word" xmlns:pvml="urn:schemas-microsoft-com:office:powerpoint" xmlns:cppr="http://schemas.microsoft.com/office/2006/coverPageProps" xmlns:odx="http://opendope.org/xpaths" xmlns:odc="http://opendope.org/conditions" xmlns:odq="http://opendope.org/questions" xmlns:oda="http://opendope.org/answers" xmlns:odi="http://opendope.org/components" xmlns:odgm="http://opendope.org/SmartArt/DataHierarchy" xmlns:b="http://schemas.openxmlformats.org/officeDocument/2006/bibliography" xmlns:wps="http://schemas.microsoft.com/office/word/2010/wordprocessingShape" xmlns:w16se="http://schemas.microsoft.com/office/word/2015/wordml/symex" xmlns:w16cid="http://schemas.microsoft.com/office/word/2016/wordml/cid" xmlns:wetp="http://schemas.microsoft.com/office/webextensions/taskpanes/2010/11" xmlns:we="http://schemas.microsoft.com/office/webextensions/webextension/2010/11" xmlns:comp="http://schemas.openxmlformats.org/drawingml/2006/compatibility" xmlns:lc="http://schemas.openxmlformats.org/drawingml/2006/lockedCanvas">
+            <c:extLst xmlns:lc="http://schemas.openxmlformats.org/drawingml/2006/lockedCanvas" xmlns:comp="http://schemas.openxmlformats.org/drawingml/2006/compatibility" xmlns:we="http://schemas.microsoft.com/office/webextensions/webextension/2010/11" xmlns:wetp="http://schemas.microsoft.com/office/webextensions/taskpanes/2010/11" xmlns:w16cid="http://schemas.microsoft.com/office/word/2016/wordml/cid" xmlns:w16se="http://schemas.microsoft.com/office/word/2015/wordml/symex" xmlns:wps="http://schemas.microsoft.com/office/word/2010/wordprocessingShape" xmlns:b="http://schemas.openxmlformats.org/officeDocument/2006/bibliography" xmlns:odgm="http://opendope.org/SmartArt/DataHierarchy" xmlns:odi="http://opendope.org/components" xmlns:oda="http://opendope.org/answers" xmlns:odq="http://opendope.org/questions" xmlns:odc="http://opendope.org/conditions" xmlns:odx="http://opendope.org/xpaths" xmlns:cppr="http://schemas.microsoft.com/office/2006/coverPageProps" xmlns:pvml="urn:schemas-microsoft-com:office:powerpoint" xmlns:w10="urn:schemas-microsoft-com:office:word" xmlns:v="urn:schemas-microsoft-com:vml" xmlns:o="urn:schemas-microsoft-com:office:office" xmlns:xvml="urn:schemas-microsoft-com:office:excel" xmlns:dsp="http://schemas.microsoft.com/office/drawing/2008/diagram" xmlns:xdr="http://schemas.openxmlformats.org/drawingml/2006/spreadsheetDrawing" xmlns:pic="http://schemas.openxmlformats.org/drawingml/2006/picture" xmlns:dgm="http://schemas.openxmlformats.org/drawingml/2006/diagram" xmlns:c14="http://schemas.microsoft.com/office/drawing/2007/8/2/chart" xmlns:cdr="http://schemas.openxmlformats.org/drawingml/2006/chartDrawing" xmlns:wne="http://schemas.microsoft.com/office/word/2006/wordml" xmlns:sl="http://schemas.openxmlformats.org/schemaLibrary/2006/main" xmlns:mc="http://schemas.openxmlformats.org/markup-compatibility/2006" xmlns:wp14="http://schemas.microsoft.com/office/word/2010/wordprocessingDrawing" xmlns:wp="http://schemas.openxmlformats.org/drawingml/2006/wordprocessingDrawing" xmlns:m="http://schemas.openxmlformats.org/officeDocument/2006/math" xmlns:w14="http://schemas.microsoft.com/office/word/2010/wordml" xmlns:w15="http://schemas.microsoft.com/office/word/2012/wordml" xmlns:w="http://schemas.openxmlformats.org/wordprocessingml/2006/main">
               <c:ext xmlns:c16="http://schemas.microsoft.com/office/drawing/2014/chart" uri="{C3380CC4-5D6E-409C-BE32-E72D297353CC}">
                 <c16:uniqueId val="{00000001-6147-E74A-AA7B-5531F0E4EE0C}"/>
               </c:ext>
@@ -4713,30 +4713,30 @@
                   <c:v>34.099616858237546</c:v>
                 </c:pt>
                 <c:pt idx="5">
-                  <c:v>33.71647509578544</c:v>
+                  <c:v>33.716475095785441</c:v>
                 </c:pt>
                 <c:pt idx="6">
-                  <c:v>33.71647509578544</c:v>
+                  <c:v>33.716475095785441</c:v>
                 </c:pt>
                 <c:pt idx="7">
                   <c:v>34.099616858237546</c:v>
                 </c:pt>
                 <c:pt idx="8">
-                  <c:v>34.48275862068966</c:v>
+                  <c:v>34.482758620689658</c:v>
                 </c:pt>
                 <c:pt idx="9">
-                  <c:v>34.86590038314176</c:v>
+                  <c:v>34.865900383141764</c:v>
                 </c:pt>
                 <c:pt idx="10">
-                  <c:v>34.86590038314176</c:v>
+                  <c:v>34.865900383141764</c:v>
                 </c:pt>
                 <c:pt idx="11">
-                  <c:v>34.86590038314176</c:v>
+                  <c:v>34.865900383141764</c:v>
                 </c:pt>
               </c:numCache>
             </c:numRef>
           </c:val>
-          <c:extLst xmlns:w="http://schemas.openxmlformats.org/wordprocessingml/2006/main" xmlns:w15="http://schemas.microsoft.com/office/word/2012/wordml" xmlns:w14="http://schemas.microsoft.com/office/word/2010/wordml" xmlns:m="http://schemas.openxmlformats.org/officeDocument/2006/math" xmlns:wp="http://schemas.openxmlformats.org/drawingml/2006/wordprocessingDrawing" xmlns:wp14="http://schemas.microsoft.com/office/word/2010/wordprocessingDrawing" xmlns:mc="http://schemas.openxmlformats.org/markup-compatibility/2006" xmlns:sl="http://schemas.openxmlformats.org/schemaLibrary/2006/main" xmlns:wne="http://schemas.microsoft.com/office/word/2006/wordml" xmlns:cdr="http://schemas.openxmlformats.org/drawingml/2006/chartDrawing" xmlns:c14="http://schemas.microsoft.com/office/drawing/2007/8/2/chart" xmlns:dgm="http://schemas.openxmlformats.org/drawingml/2006/diagram" xmlns:pic="http://schemas.openxmlformats.org/drawingml/2006/picture" xmlns:xdr="http://schemas.openxmlformats.org/drawingml/2006/spreadsheetDrawing" xmlns:dsp="http://schemas.microsoft.com/office/drawing/2008/diagram" xmlns:xvml="urn:schemas-microsoft-com:office:excel" xmlns:o="urn:schemas-microsoft-com:office:office" xmlns:v="urn:schemas-microsoft-com:vml" xmlns:w10="urn:schemas-microsoft-com:office:word" xmlns:pvml="urn:schemas-microsoft-com:office:powerpoint" xmlns:cppr="http://schemas.microsoft.com/office/2006/coverPageProps" xmlns:odx="http://opendope.org/xpaths" xmlns:odc="http://opendope.org/conditions" xmlns:odq="http://opendope.org/questions" xmlns:oda="http://opendope.org/answers" xmlns:odi="http://opendope.org/components" xmlns:odgm="http://opendope.org/SmartArt/DataHierarchy" xmlns:b="http://schemas.openxmlformats.org/officeDocument/2006/bibliography" xmlns:wps="http://schemas.microsoft.com/office/word/2010/wordprocessingShape" xmlns:w16se="http://schemas.microsoft.com/office/word/2015/wordml/symex" xmlns:w16cid="http://schemas.microsoft.com/office/word/2016/wordml/cid" xmlns:wetp="http://schemas.microsoft.com/office/webextensions/taskpanes/2010/11" xmlns:we="http://schemas.microsoft.com/office/webextensions/webextension/2010/11" xmlns:comp="http://schemas.openxmlformats.org/drawingml/2006/compatibility" xmlns:lc="http://schemas.openxmlformats.org/drawingml/2006/lockedCanvas">
+          <c:extLst xmlns:lc="http://schemas.openxmlformats.org/drawingml/2006/lockedCanvas" xmlns:comp="http://schemas.openxmlformats.org/drawingml/2006/compatibility" xmlns:we="http://schemas.microsoft.com/office/webextensions/webextension/2010/11" xmlns:wetp="http://schemas.microsoft.com/office/webextensions/taskpanes/2010/11" xmlns:w16cid="http://schemas.microsoft.com/office/word/2016/wordml/cid" xmlns:w16se="http://schemas.microsoft.com/office/word/2015/wordml/symex" xmlns:wps="http://schemas.microsoft.com/office/word/2010/wordprocessingShape" xmlns:b="http://schemas.openxmlformats.org/officeDocument/2006/bibliography" xmlns:odgm="http://opendope.org/SmartArt/DataHierarchy" xmlns:odi="http://opendope.org/components" xmlns:oda="http://opendope.org/answers" xmlns:odq="http://opendope.org/questions" xmlns:odc="http://opendope.org/conditions" xmlns:odx="http://opendope.org/xpaths" xmlns:cppr="http://schemas.microsoft.com/office/2006/coverPageProps" xmlns:pvml="urn:schemas-microsoft-com:office:powerpoint" xmlns:w10="urn:schemas-microsoft-com:office:word" xmlns:v="urn:schemas-microsoft-com:vml" xmlns:o="urn:schemas-microsoft-com:office:office" xmlns:xvml="urn:schemas-microsoft-com:office:excel" xmlns:dsp="http://schemas.microsoft.com/office/drawing/2008/diagram" xmlns:xdr="http://schemas.openxmlformats.org/drawingml/2006/spreadsheetDrawing" xmlns:pic="http://schemas.openxmlformats.org/drawingml/2006/picture" xmlns:dgm="http://schemas.openxmlformats.org/drawingml/2006/diagram" xmlns:c14="http://schemas.microsoft.com/office/drawing/2007/8/2/chart" xmlns:cdr="http://schemas.openxmlformats.org/drawingml/2006/chartDrawing" xmlns:wne="http://schemas.microsoft.com/office/word/2006/wordml" xmlns:sl="http://schemas.openxmlformats.org/schemaLibrary/2006/main" xmlns:mc="http://schemas.openxmlformats.org/markup-compatibility/2006" xmlns:wp14="http://schemas.microsoft.com/office/word/2010/wordprocessingDrawing" xmlns:wp="http://schemas.openxmlformats.org/drawingml/2006/wordprocessingDrawing" xmlns:m="http://schemas.openxmlformats.org/officeDocument/2006/math" xmlns:w14="http://schemas.microsoft.com/office/word/2010/wordml" xmlns:w15="http://schemas.microsoft.com/office/word/2012/wordml" xmlns:w="http://schemas.openxmlformats.org/wordprocessingml/2006/main">
             <c:ext xmlns:c16="http://schemas.microsoft.com/office/drawing/2014/chart" uri="{C3380CC4-5D6E-409C-BE32-E72D297353CC}">
               <c16:uniqueId val="{00000002-6147-E74A-AA7B-5531F0E4EE0C}"/>
             </c:ext>
@@ -4817,19 +4817,19 @@
                 <c:formatCode>General</c:formatCode>
                 <c:ptCount val="12"/>
                 <c:pt idx="0">
-                  <c:v>0.7662835249042146</c:v>
+                  <c:v>0.76628352490421459</c:v>
                 </c:pt>
                 <c:pt idx="1">
                   <c:v>1.5325670498084292</c:v>
                 </c:pt>
                 <c:pt idx="2">
-                  <c:v>0.3831417624521073</c:v>
+                  <c:v>0.38314176245210729</c:v>
                 </c:pt>
                 <c:pt idx="3">
                   <c:v>2.2988505747126435</c:v>
                 </c:pt>
                 <c:pt idx="4">
-                  <c:v>4.597701149425287</c:v>
+                  <c:v>4.5977011494252871</c:v>
                 </c:pt>
                 <c:pt idx="5">
                   <c:v>1.1494252873563218</c:v>
@@ -4841,16 +4841,16 @@
                   <c:v>2.2988505747126435</c:v>
                 </c:pt>
                 <c:pt idx="8">
-                  <c:v>0.3831417624521073</c:v>
+                  <c:v>0.38314176245210729</c:v>
                 </c:pt>
                 <c:pt idx="9">
                   <c:v>1.5325670498084292</c:v>
                 </c:pt>
                 <c:pt idx="10">
-                  <c:v>0.3831417624521073</c:v>
+                  <c:v>0.38314176245210729</c:v>
                 </c:pt>
                 <c:pt idx="11">
-                  <c:v>0.3831417624521073</c:v>
+                  <c:v>0.38314176245210729</c:v>
                 </c:pt>
               </c:numCache>
             </c:numRef>
@@ -4936,16 +4936,16 @@
                 <c:formatCode>General</c:formatCode>
                 <c:ptCount val="12"/>
                 <c:pt idx="0">
-                  <c:v>54.02298850574713</c:v>
+                  <c:v>54.022988505747129</c:v>
                 </c:pt>
                 <c:pt idx="1">
                   <c:v>54.406130268199234</c:v>
                 </c:pt>
                 <c:pt idx="2">
-                  <c:v>54.02298850574713</c:v>
+                  <c:v>54.022988505747129</c:v>
                 </c:pt>
                 <c:pt idx="3">
-                  <c:v>52.10727969348659</c:v>
+                  <c:v>52.107279693486589</c:v>
                 </c:pt>
                 <c:pt idx="4">
                   <c:v>45.21072796934866</c:v>
@@ -4954,19 +4954,19 @@
                   <c:v>56.70498084291188</c:v>
                 </c:pt>
                 <c:pt idx="6">
-                  <c:v>56.32183908045977</c:v>
+                  <c:v>56.321839080459768</c:v>
                 </c:pt>
                 <c:pt idx="7">
                   <c:v>52.490421455938694</c:v>
                 </c:pt>
                 <c:pt idx="8">
-                  <c:v>59.00383141762452</c:v>
+                  <c:v>59.003831417624518</c:v>
                 </c:pt>
                 <c:pt idx="9">
                   <c:v>57.47126436781609</c:v>
                 </c:pt>
                 <c:pt idx="10">
-                  <c:v>58.62068965517241</c:v>
+                  <c:v>58.620689655172413</c:v>
                 </c:pt>
                 <c:pt idx="11">
                   <c:v>59.38697318007663</c:v>
@@ -5058,7 +5058,7 @@
                   <c:v>1.1494252873563218</c:v>
                 </c:pt>
                 <c:pt idx="1">
-                  <c:v>0.0</c:v>
+                  <c:v>0</c:v>
                 </c:pt>
                 <c:pt idx="2">
                   <c:v>1.5325670498084292</c:v>
@@ -5067,7 +5067,7 @@
                   <c:v>1.5325670498084292</c:v>
                 </c:pt>
                 <c:pt idx="4">
-                  <c:v>8.045977011494253</c:v>
+                  <c:v>8.0459770114942533</c:v>
                 </c:pt>
                 <c:pt idx="5">
                   <c:v>1.1494252873563218</c:v>
@@ -5076,19 +5076,19 @@
                   <c:v>1.5325670498084292</c:v>
                 </c:pt>
                 <c:pt idx="7">
-                  <c:v>4.597701149425287</c:v>
+                  <c:v>4.5977011494252871</c:v>
                 </c:pt>
                 <c:pt idx="8">
-                  <c:v>0.3831417624521073</c:v>
+                  <c:v>0.38314176245210729</c:v>
                 </c:pt>
                 <c:pt idx="9">
-                  <c:v>0.7662835249042146</c:v>
+                  <c:v>0.76628352490421459</c:v>
                 </c:pt>
                 <c:pt idx="10">
                   <c:v>1.5325670498084292</c:v>
                 </c:pt>
                 <c:pt idx="11">
-                  <c:v>0.7662835249042146</c:v>
+                  <c:v>0.76628352490421459</c:v>
                 </c:pt>
               </c:numCache>
             </c:numRef>
@@ -5188,7 +5188,7 @@
                   <c:v>10.727969348659004</c:v>
                 </c:pt>
                 <c:pt idx="4">
-                  <c:v>8.045977011494253</c:v>
+                  <c:v>8.0459770114942533</c:v>
                 </c:pt>
                 <c:pt idx="5">
                   <c:v>7.2796934865900385</c:v>
@@ -5197,19 +5197,19 @@
                   <c:v>7.2796934865900385</c:v>
                 </c:pt>
                 <c:pt idx="7">
-                  <c:v>6.513409961685824</c:v>
+                  <c:v>6.5134099616858236</c:v>
                 </c:pt>
                 <c:pt idx="8">
-                  <c:v>5.747126436781609</c:v>
+                  <c:v>5.7471264367816088</c:v>
                 </c:pt>
                 <c:pt idx="9">
-                  <c:v>5.363984674329502</c:v>
+                  <c:v>5.3639846743295019</c:v>
                 </c:pt>
                 <c:pt idx="10">
-                  <c:v>4.597701149425287</c:v>
+                  <c:v>4.5977011494252871</c:v>
                 </c:pt>
                 <c:pt idx="11">
-                  <c:v>4.597701149425287</c:v>
+                  <c:v>4.5977011494252871</c:v>
                 </c:pt>
               </c:numCache>
             </c:numRef>
@@ -5346,14 +5346,14 @@
     </c:plotArea>
     <c:plotVisOnly val="1"/>
     <c:dispBlanksAs val="gap"/>
-    <c:extLst xmlns:w="http://schemas.openxmlformats.org/wordprocessingml/2006/main" xmlns:w15="http://schemas.microsoft.com/office/word/2012/wordml" xmlns:w14="http://schemas.microsoft.com/office/word/2010/wordml" xmlns:m="http://schemas.openxmlformats.org/officeDocument/2006/math" xmlns:wp="http://schemas.openxmlformats.org/drawingml/2006/wordprocessingDrawing" xmlns:wp14="http://schemas.microsoft.com/office/word/2010/wordprocessingDrawing" xmlns:mc="http://schemas.openxmlformats.org/markup-compatibility/2006" xmlns:sl="http://schemas.openxmlformats.org/schemaLibrary/2006/main" xmlns:wne="http://schemas.microsoft.com/office/word/2006/wordml" xmlns:cdr="http://schemas.openxmlformats.org/drawingml/2006/chartDrawing" xmlns:c14="http://schemas.microsoft.com/office/drawing/2007/8/2/chart" xmlns:dgm="http://schemas.openxmlformats.org/drawingml/2006/diagram" xmlns:pic="http://schemas.openxmlformats.org/drawingml/2006/picture" xmlns:xdr="http://schemas.openxmlformats.org/drawingml/2006/spreadsheetDrawing" xmlns:dsp="http://schemas.microsoft.com/office/drawing/2008/diagram" xmlns:xvml="urn:schemas-microsoft-com:office:excel" xmlns:o="urn:schemas-microsoft-com:office:office" xmlns:v="urn:schemas-microsoft-com:vml" xmlns:w10="urn:schemas-microsoft-com:office:word" xmlns:pvml="urn:schemas-microsoft-com:office:powerpoint" xmlns:cppr="http://schemas.microsoft.com/office/2006/coverPageProps" xmlns:odx="http://opendope.org/xpaths" xmlns:odc="http://opendope.org/conditions" xmlns:odq="http://opendope.org/questions" xmlns:oda="http://opendope.org/answers" xmlns:odi="http://opendope.org/components" xmlns:odgm="http://opendope.org/SmartArt/DataHierarchy" xmlns:b="http://schemas.openxmlformats.org/officeDocument/2006/bibliography" xmlns:wps="http://schemas.microsoft.com/office/word/2010/wordprocessingShape" xmlns:w16se="http://schemas.microsoft.com/office/word/2015/wordml/symex" xmlns:w16cid="http://schemas.microsoft.com/office/word/2016/wordml/cid" xmlns:wetp="http://schemas.microsoft.com/office/webextensions/taskpanes/2010/11" xmlns:we="http://schemas.microsoft.com/office/webextensions/webextension/2010/11" xmlns:comp="http://schemas.openxmlformats.org/drawingml/2006/compatibility" xmlns:lc="http://schemas.openxmlformats.org/drawingml/2006/lockedCanvas">
+    <c:showDLblsOverMax val="0"/>
+    <c:extLst xmlns:lc="http://schemas.openxmlformats.org/drawingml/2006/lockedCanvas" xmlns:comp="http://schemas.openxmlformats.org/drawingml/2006/compatibility" xmlns:we="http://schemas.microsoft.com/office/webextensions/webextension/2010/11" xmlns:wetp="http://schemas.microsoft.com/office/webextensions/taskpanes/2010/11" xmlns:w16cid="http://schemas.microsoft.com/office/word/2016/wordml/cid" xmlns:w16se="http://schemas.microsoft.com/office/word/2015/wordml/symex" xmlns:wps="http://schemas.microsoft.com/office/word/2010/wordprocessingShape" xmlns:b="http://schemas.openxmlformats.org/officeDocument/2006/bibliography" xmlns:odgm="http://opendope.org/SmartArt/DataHierarchy" xmlns:odi="http://opendope.org/components" xmlns:oda="http://opendope.org/answers" xmlns:odq="http://opendope.org/questions" xmlns:odc="http://opendope.org/conditions" xmlns:odx="http://opendope.org/xpaths" xmlns:cppr="http://schemas.microsoft.com/office/2006/coverPageProps" xmlns:pvml="urn:schemas-microsoft-com:office:powerpoint" xmlns:w10="urn:schemas-microsoft-com:office:word" xmlns:v="urn:schemas-microsoft-com:vml" xmlns:o="urn:schemas-microsoft-com:office:office" xmlns:xvml="urn:schemas-microsoft-com:office:excel" xmlns:dsp="http://schemas.microsoft.com/office/drawing/2008/diagram" xmlns:xdr="http://schemas.openxmlformats.org/drawingml/2006/spreadsheetDrawing" xmlns:pic="http://schemas.openxmlformats.org/drawingml/2006/picture" xmlns:dgm="http://schemas.openxmlformats.org/drawingml/2006/diagram" xmlns:c14="http://schemas.microsoft.com/office/drawing/2007/8/2/chart" xmlns:cdr="http://schemas.openxmlformats.org/drawingml/2006/chartDrawing" xmlns:wne="http://schemas.microsoft.com/office/word/2006/wordml" xmlns:sl="http://schemas.openxmlformats.org/schemaLibrary/2006/main" xmlns:mc="http://schemas.openxmlformats.org/markup-compatibility/2006" xmlns:wp14="http://schemas.microsoft.com/office/word/2010/wordprocessingDrawing" xmlns:wp="http://schemas.openxmlformats.org/drawingml/2006/wordprocessingDrawing" xmlns:m="http://schemas.openxmlformats.org/officeDocument/2006/math" xmlns:w14="http://schemas.microsoft.com/office/word/2010/wordml" xmlns:w15="http://schemas.microsoft.com/office/word/2012/wordml" xmlns:w="http://schemas.openxmlformats.org/wordprocessingml/2006/main">
       <c:ext xmlns:c16r3="http://schemas.microsoft.com/office/drawing/2017/03/chart" uri="{56B9EC1D-385E-4148-901F-78D8002777C0}">
         <c16r3:dataDisplayOptions16>
           <c16r3:dispNaAsBlank val="1"/>
         </c16r3:dataDisplayOptions16>
       </c:ext>
     </c:extLst>
-    <c:showDLblsOverMax val="0"/>
   </c:chart>
   <c:spPr>
     <a:noFill/>
@@ -5449,7 +5449,7 @@
                 </a:outerShdw>
               </a:effectLst>
             </c:spPr>
-            <c:extLst xmlns:w="http://schemas.openxmlformats.org/wordprocessingml/2006/main" xmlns:w15="http://schemas.microsoft.com/office/word/2012/wordml" xmlns:w14="http://schemas.microsoft.com/office/word/2010/wordml" xmlns:m="http://schemas.openxmlformats.org/officeDocument/2006/math" xmlns:wp="http://schemas.openxmlformats.org/drawingml/2006/wordprocessingDrawing" xmlns:wp14="http://schemas.microsoft.com/office/word/2010/wordprocessingDrawing" xmlns:mc="http://schemas.openxmlformats.org/markup-compatibility/2006" xmlns:sl="http://schemas.openxmlformats.org/schemaLibrary/2006/main" xmlns:wne="http://schemas.microsoft.com/office/word/2006/wordml" xmlns:cdr="http://schemas.openxmlformats.org/drawingml/2006/chartDrawing" xmlns:c14="http://schemas.microsoft.com/office/drawing/2007/8/2/chart" xmlns:dgm="http://schemas.openxmlformats.org/drawingml/2006/diagram" xmlns:pic="http://schemas.openxmlformats.org/drawingml/2006/picture" xmlns:xdr="http://schemas.openxmlformats.org/drawingml/2006/spreadsheetDrawing" xmlns:dsp="http://schemas.microsoft.com/office/drawing/2008/diagram" xmlns:xvml="urn:schemas-microsoft-com:office:excel" xmlns:o="urn:schemas-microsoft-com:office:office" xmlns:v="urn:schemas-microsoft-com:vml" xmlns:w10="urn:schemas-microsoft-com:office:word" xmlns:pvml="urn:schemas-microsoft-com:office:powerpoint" xmlns:cppr="http://schemas.microsoft.com/office/2006/coverPageProps" xmlns:odx="http://opendope.org/xpaths" xmlns:odc="http://opendope.org/conditions" xmlns:odq="http://opendope.org/questions" xmlns:oda="http://opendope.org/answers" xmlns:odi="http://opendope.org/components" xmlns:odgm="http://opendope.org/SmartArt/DataHierarchy" xmlns:b="http://schemas.openxmlformats.org/officeDocument/2006/bibliography" xmlns:wps="http://schemas.microsoft.com/office/word/2010/wordprocessingShape" xmlns:w16se="http://schemas.microsoft.com/office/word/2015/wordml/symex" xmlns:w16cid="http://schemas.microsoft.com/office/word/2016/wordml/cid" xmlns:wetp="http://schemas.microsoft.com/office/webextensions/taskpanes/2010/11" xmlns:we="http://schemas.microsoft.com/office/webextensions/webextension/2010/11" xmlns:comp="http://schemas.openxmlformats.org/drawingml/2006/compatibility" xmlns:lc="http://schemas.openxmlformats.org/drawingml/2006/lockedCanvas">
+            <c:extLst xmlns:lc="http://schemas.openxmlformats.org/drawingml/2006/lockedCanvas" xmlns:comp="http://schemas.openxmlformats.org/drawingml/2006/compatibility" xmlns:we="http://schemas.microsoft.com/office/webextensions/webextension/2010/11" xmlns:wetp="http://schemas.microsoft.com/office/webextensions/taskpanes/2010/11" xmlns:w16cid="http://schemas.microsoft.com/office/word/2016/wordml/cid" xmlns:w16se="http://schemas.microsoft.com/office/word/2015/wordml/symex" xmlns:wps="http://schemas.microsoft.com/office/word/2010/wordprocessingShape" xmlns:b="http://schemas.openxmlformats.org/officeDocument/2006/bibliography" xmlns:odgm="http://opendope.org/SmartArt/DataHierarchy" xmlns:odi="http://opendope.org/components" xmlns:oda="http://opendope.org/answers" xmlns:odq="http://opendope.org/questions" xmlns:odc="http://opendope.org/conditions" xmlns:odx="http://opendope.org/xpaths" xmlns:cppr="http://schemas.microsoft.com/office/2006/coverPageProps" xmlns:pvml="urn:schemas-microsoft-com:office:powerpoint" xmlns:w10="urn:schemas-microsoft-com:office:word" xmlns:v="urn:schemas-microsoft-com:vml" xmlns:o="urn:schemas-microsoft-com:office:office" xmlns:xvml="urn:schemas-microsoft-com:office:excel" xmlns:dsp="http://schemas.microsoft.com/office/drawing/2008/diagram" xmlns:xdr="http://schemas.openxmlformats.org/drawingml/2006/spreadsheetDrawing" xmlns:pic="http://schemas.openxmlformats.org/drawingml/2006/picture" xmlns:dgm="http://schemas.openxmlformats.org/drawingml/2006/diagram" xmlns:c14="http://schemas.microsoft.com/office/drawing/2007/8/2/chart" xmlns:cdr="http://schemas.openxmlformats.org/drawingml/2006/chartDrawing" xmlns:wne="http://schemas.microsoft.com/office/word/2006/wordml" xmlns:sl="http://schemas.openxmlformats.org/schemaLibrary/2006/main" xmlns:mc="http://schemas.openxmlformats.org/markup-compatibility/2006" xmlns:wp14="http://schemas.microsoft.com/office/word/2010/wordprocessingDrawing" xmlns:wp="http://schemas.openxmlformats.org/drawingml/2006/wordprocessingDrawing" xmlns:m="http://schemas.openxmlformats.org/officeDocument/2006/math" xmlns:w14="http://schemas.microsoft.com/office/word/2010/wordml" xmlns:w15="http://schemas.microsoft.com/office/word/2012/wordml" xmlns:w="http://schemas.openxmlformats.org/wordprocessingml/2006/main">
               <c:ext xmlns:c16="http://schemas.microsoft.com/office/drawing/2014/chart" uri="{C3380CC4-5D6E-409C-BE32-E72D297353CC}">
                 <c16:uniqueId val="{00000001-6147-E74A-AA7B-5531F0E4EE0C}"/>
               </c:ext>
@@ -5512,22 +5512,22 @@
                   <c:v>45.744680851063826</c:v>
                 </c:pt>
                 <c:pt idx="2">
-                  <c:v>47.87234042553192</c:v>
+                  <c:v>47.872340425531917</c:v>
                 </c:pt>
                 <c:pt idx="3">
                   <c:v>47.340425531914896</c:v>
                 </c:pt>
                 <c:pt idx="4">
-                  <c:v>51.59574468085106</c:v>
+                  <c:v>51.595744680851062</c:v>
                 </c:pt>
                 <c:pt idx="5">
-                  <c:v>51.59574468085106</c:v>
+                  <c:v>51.595744680851062</c:v>
                 </c:pt>
                 <c:pt idx="6">
-                  <c:v>51.59574468085106</c:v>
+                  <c:v>51.595744680851062</c:v>
                 </c:pt>
                 <c:pt idx="7">
-                  <c:v>51.06382978723404</c:v>
+                  <c:v>51.063829787234042</c:v>
                 </c:pt>
                 <c:pt idx="8">
                   <c:v>52.659574468085104</c:v>
@@ -5536,7 +5536,7 @@
                   <c:v>52.659574468085104</c:v>
                 </c:pt>
                 <c:pt idx="10">
-                  <c:v>52.12765957446808</c:v>
+                  <c:v>52.127659574468083</c:v>
                 </c:pt>
                 <c:pt idx="11">
                   <c:v>53.191489361702125</c:v>
@@ -5544,7 +5544,7 @@
               </c:numCache>
             </c:numRef>
           </c:val>
-          <c:extLst xmlns:w="http://schemas.openxmlformats.org/wordprocessingml/2006/main" xmlns:w15="http://schemas.microsoft.com/office/word/2012/wordml" xmlns:w14="http://schemas.microsoft.com/office/word/2010/wordml" xmlns:m="http://schemas.openxmlformats.org/officeDocument/2006/math" xmlns:wp="http://schemas.openxmlformats.org/drawingml/2006/wordprocessingDrawing" xmlns:wp14="http://schemas.microsoft.com/office/word/2010/wordprocessingDrawing" xmlns:mc="http://schemas.openxmlformats.org/markup-compatibility/2006" xmlns:sl="http://schemas.openxmlformats.org/schemaLibrary/2006/main" xmlns:wne="http://schemas.microsoft.com/office/word/2006/wordml" xmlns:cdr="http://schemas.openxmlformats.org/drawingml/2006/chartDrawing" xmlns:c14="http://schemas.microsoft.com/office/drawing/2007/8/2/chart" xmlns:dgm="http://schemas.openxmlformats.org/drawingml/2006/diagram" xmlns:pic="http://schemas.openxmlformats.org/drawingml/2006/picture" xmlns:xdr="http://schemas.openxmlformats.org/drawingml/2006/spreadsheetDrawing" xmlns:dsp="http://schemas.microsoft.com/office/drawing/2008/diagram" xmlns:xvml="urn:schemas-microsoft-com:office:excel" xmlns:o="urn:schemas-microsoft-com:office:office" xmlns:v="urn:schemas-microsoft-com:vml" xmlns:w10="urn:schemas-microsoft-com:office:word" xmlns:pvml="urn:schemas-microsoft-com:office:powerpoint" xmlns:cppr="http://schemas.microsoft.com/office/2006/coverPageProps" xmlns:odx="http://opendope.org/xpaths" xmlns:odc="http://opendope.org/conditions" xmlns:odq="http://opendope.org/questions" xmlns:oda="http://opendope.org/answers" xmlns:odi="http://opendope.org/components" xmlns:odgm="http://opendope.org/SmartArt/DataHierarchy" xmlns:b="http://schemas.openxmlformats.org/officeDocument/2006/bibliography" xmlns:wps="http://schemas.microsoft.com/office/word/2010/wordprocessingShape" xmlns:w16se="http://schemas.microsoft.com/office/word/2015/wordml/symex" xmlns:w16cid="http://schemas.microsoft.com/office/word/2016/wordml/cid" xmlns:wetp="http://schemas.microsoft.com/office/webextensions/taskpanes/2010/11" xmlns:we="http://schemas.microsoft.com/office/webextensions/webextension/2010/11" xmlns:comp="http://schemas.openxmlformats.org/drawingml/2006/compatibility" xmlns:lc="http://schemas.openxmlformats.org/drawingml/2006/lockedCanvas">
+          <c:extLst xmlns:lc="http://schemas.openxmlformats.org/drawingml/2006/lockedCanvas" xmlns:comp="http://schemas.openxmlformats.org/drawingml/2006/compatibility" xmlns:we="http://schemas.microsoft.com/office/webextensions/webextension/2010/11" xmlns:wetp="http://schemas.microsoft.com/office/webextensions/taskpanes/2010/11" xmlns:w16cid="http://schemas.microsoft.com/office/word/2016/wordml/cid" xmlns:w16se="http://schemas.microsoft.com/office/word/2015/wordml/symex" xmlns:wps="http://schemas.microsoft.com/office/word/2010/wordprocessingShape" xmlns:b="http://schemas.openxmlformats.org/officeDocument/2006/bibliography" xmlns:odgm="http://opendope.org/SmartArt/DataHierarchy" xmlns:odi="http://opendope.org/components" xmlns:oda="http://opendope.org/answers" xmlns:odq="http://opendope.org/questions" xmlns:odc="http://opendope.org/conditions" xmlns:odx="http://opendope.org/xpaths" xmlns:cppr="http://schemas.microsoft.com/office/2006/coverPageProps" xmlns:pvml="urn:schemas-microsoft-com:office:powerpoint" xmlns:w10="urn:schemas-microsoft-com:office:word" xmlns:v="urn:schemas-microsoft-com:vml" xmlns:o="urn:schemas-microsoft-com:office:office" xmlns:xvml="urn:schemas-microsoft-com:office:excel" xmlns:dsp="http://schemas.microsoft.com/office/drawing/2008/diagram" xmlns:xdr="http://schemas.openxmlformats.org/drawingml/2006/spreadsheetDrawing" xmlns:pic="http://schemas.openxmlformats.org/drawingml/2006/picture" xmlns:dgm="http://schemas.openxmlformats.org/drawingml/2006/diagram" xmlns:c14="http://schemas.microsoft.com/office/drawing/2007/8/2/chart" xmlns:cdr="http://schemas.openxmlformats.org/drawingml/2006/chartDrawing" xmlns:wne="http://schemas.microsoft.com/office/word/2006/wordml" xmlns:sl="http://schemas.openxmlformats.org/schemaLibrary/2006/main" xmlns:mc="http://schemas.openxmlformats.org/markup-compatibility/2006" xmlns:wp14="http://schemas.microsoft.com/office/word/2010/wordprocessingDrawing" xmlns:wp="http://schemas.openxmlformats.org/drawingml/2006/wordprocessingDrawing" xmlns:m="http://schemas.openxmlformats.org/officeDocument/2006/math" xmlns:w14="http://schemas.microsoft.com/office/word/2010/wordml" xmlns:w15="http://schemas.microsoft.com/office/word/2012/wordml" xmlns:w="http://schemas.openxmlformats.org/wordprocessingml/2006/main">
             <c:ext xmlns:c16="http://schemas.microsoft.com/office/drawing/2014/chart" uri="{C3380CC4-5D6E-409C-BE32-E72D297353CC}">
               <c16:uniqueId val="{00000002-6147-E74A-AA7B-5531F0E4EE0C}"/>
             </c:ext>
@@ -5625,13 +5625,13 @@
                 <c:formatCode>General</c:formatCode>
                 <c:ptCount val="12"/>
                 <c:pt idx="0">
-                  <c:v>0.5319148936170213</c:v>
+                  <c:v>0.53191489361702127</c:v>
                 </c:pt>
                 <c:pt idx="1">
-                  <c:v>0.0</c:v>
+                  <c:v>0</c:v>
                 </c:pt>
                 <c:pt idx="2">
-                  <c:v>0.0</c:v>
+                  <c:v>0</c:v>
                 </c:pt>
                 <c:pt idx="3">
                   <c:v>3.1914893617021276</c:v>
@@ -5640,13 +5640,13 @@
                   <c:v>1.5957446808510638</c:v>
                 </c:pt>
                 <c:pt idx="5">
-                  <c:v>2.127659574468085</c:v>
+                  <c:v>2.1276595744680851</c:v>
                 </c:pt>
                 <c:pt idx="6">
                   <c:v>1.5957446808510638</c:v>
                 </c:pt>
                 <c:pt idx="7">
-                  <c:v>6.914893617021277</c:v>
+                  <c:v>6.9148936170212769</c:v>
                 </c:pt>
                 <c:pt idx="8">
                   <c:v>3.1914893617021276</c:v>
@@ -5655,10 +5655,10 @@
                   <c:v>2.6595744680851063</c:v>
                 </c:pt>
                 <c:pt idx="10">
-                  <c:v>0.0</c:v>
+                  <c:v>0</c:v>
                 </c:pt>
                 <c:pt idx="11">
-                  <c:v>3.723404255319149</c:v>
+                  <c:v>3.7234042553191489</c:v>
                 </c:pt>
               </c:numCache>
             </c:numRef>
@@ -5744,13 +5744,13 @@
                 <c:formatCode>General</c:formatCode>
                 <c:ptCount val="12"/>
                 <c:pt idx="0">
-                  <c:v>6.382978723404255</c:v>
+                  <c:v>6.3829787234042552</c:v>
                 </c:pt>
                 <c:pt idx="1">
-                  <c:v>7.446808510638298</c:v>
+                  <c:v>7.4468085106382977</c:v>
                 </c:pt>
                 <c:pt idx="2">
-                  <c:v>0.0</c:v>
+                  <c:v>0</c:v>
                 </c:pt>
                 <c:pt idx="3">
                   <c:v>14.893617021276595</c:v>
@@ -5774,10 +5774,10 @@
                   <c:v>22.340425531914892</c:v>
                 </c:pt>
                 <c:pt idx="10">
-                  <c:v>25.0</c:v>
+                  <c:v>25</c:v>
                 </c:pt>
                 <c:pt idx="11">
-                  <c:v>17.5531914893617</c:v>
+                  <c:v>17.553191489361701</c:v>
                 </c:pt>
               </c:numCache>
             </c:numRef>
@@ -5863,16 +5863,16 @@
                 <c:formatCode>General</c:formatCode>
                 <c:ptCount val="12"/>
                 <c:pt idx="0">
-                  <c:v>0.5319148936170213</c:v>
+                  <c:v>0.53191489361702127</c:v>
                 </c:pt>
                 <c:pt idx="1">
-                  <c:v>0.0</c:v>
+                  <c:v>0</c:v>
                 </c:pt>
                 <c:pt idx="2">
                   <c:v>11.170212765957446</c:v>
                 </c:pt>
                 <c:pt idx="3">
-                  <c:v>5.319148936170213</c:v>
+                  <c:v>5.3191489361702127</c:v>
                 </c:pt>
                 <c:pt idx="4">
                   <c:v>3.1914893617021276</c:v>
@@ -5887,16 +5887,16 @@
                   <c:v>10.106382978723405</c:v>
                 </c:pt>
                 <c:pt idx="8">
-                  <c:v>2.127659574468085</c:v>
+                  <c:v>2.1276595744680851</c:v>
                 </c:pt>
                 <c:pt idx="9">
                   <c:v>1.5957446808510638</c:v>
                 </c:pt>
                 <c:pt idx="10">
-                  <c:v>2.127659574468085</c:v>
+                  <c:v>2.1276595744680851</c:v>
                 </c:pt>
                 <c:pt idx="11">
-                  <c:v>4.787234042553192</c:v>
+                  <c:v>4.7872340425531918</c:v>
                 </c:pt>
               </c:numCache>
             </c:numRef>
@@ -5990,19 +5990,19 @@
                   <c:v>46.808510638297875</c:v>
                 </c:pt>
                 <c:pt idx="2">
-                  <c:v>40.95744680851064</c:v>
+                  <c:v>40.957446808510639</c:v>
                 </c:pt>
                 <c:pt idx="3">
                   <c:v>29.25531914893617</c:v>
                 </c:pt>
                 <c:pt idx="4">
-                  <c:v>24.46808510638298</c:v>
+                  <c:v>24.468085106382979</c:v>
                 </c:pt>
                 <c:pt idx="5">
-                  <c:v>24.46808510638298</c:v>
+                  <c:v>24.468085106382979</c:v>
                 </c:pt>
                 <c:pt idx="6">
-                  <c:v>25.53191489361702</c:v>
+                  <c:v>25.531914893617021</c:v>
                 </c:pt>
                 <c:pt idx="7">
                   <c:v>19.680851063829788</c:v>
@@ -6154,14 +6154,14 @@
     </c:plotArea>
     <c:plotVisOnly val="1"/>
     <c:dispBlanksAs val="gap"/>
-    <c:extLst xmlns:w="http://schemas.openxmlformats.org/wordprocessingml/2006/main" xmlns:w15="http://schemas.microsoft.com/office/word/2012/wordml" xmlns:w14="http://schemas.microsoft.com/office/word/2010/wordml" xmlns:m="http://schemas.openxmlformats.org/officeDocument/2006/math" xmlns:wp="http://schemas.openxmlformats.org/drawingml/2006/wordprocessingDrawing" xmlns:wp14="http://schemas.microsoft.com/office/word/2010/wordprocessingDrawing" xmlns:mc="http://schemas.openxmlformats.org/markup-compatibility/2006" xmlns:sl="http://schemas.openxmlformats.org/schemaLibrary/2006/main" xmlns:wne="http://schemas.microsoft.com/office/word/2006/wordml" xmlns:cdr="http://schemas.openxmlformats.org/drawingml/2006/chartDrawing" xmlns:c14="http://schemas.microsoft.com/office/drawing/2007/8/2/chart" xmlns:dgm="http://schemas.openxmlformats.org/drawingml/2006/diagram" xmlns:pic="http://schemas.openxmlformats.org/drawingml/2006/picture" xmlns:xdr="http://schemas.openxmlformats.org/drawingml/2006/spreadsheetDrawing" xmlns:dsp="http://schemas.microsoft.com/office/drawing/2008/diagram" xmlns:xvml="urn:schemas-microsoft-com:office:excel" xmlns:o="urn:schemas-microsoft-com:office:office" xmlns:v="urn:schemas-microsoft-com:vml" xmlns:w10="urn:schemas-microsoft-com:office:word" xmlns:pvml="urn:schemas-microsoft-com:office:powerpoint" xmlns:cppr="http://schemas.microsoft.com/office/2006/coverPageProps" xmlns:odx="http://opendope.org/xpaths" xmlns:odc="http://opendope.org/conditions" xmlns:odq="http://opendope.org/questions" xmlns:oda="http://opendope.org/answers" xmlns:odi="http://opendope.org/components" xmlns:odgm="http://opendope.org/SmartArt/DataHierarchy" xmlns:b="http://schemas.openxmlformats.org/officeDocument/2006/bibliography" xmlns:wps="http://schemas.microsoft.com/office/word/2010/wordprocessingShape" xmlns:w16se="http://schemas.microsoft.com/office/word/2015/wordml/symex" xmlns:w16cid="http://schemas.microsoft.com/office/word/2016/wordml/cid" xmlns:wetp="http://schemas.microsoft.com/office/webextensions/taskpanes/2010/11" xmlns:we="http://schemas.microsoft.com/office/webextensions/webextension/2010/11" xmlns:comp="http://schemas.openxmlformats.org/drawingml/2006/compatibility" xmlns:lc="http://schemas.openxmlformats.org/drawingml/2006/lockedCanvas">
+    <c:showDLblsOverMax val="0"/>
+    <c:extLst xmlns:lc="http://schemas.openxmlformats.org/drawingml/2006/lockedCanvas" xmlns:comp="http://schemas.openxmlformats.org/drawingml/2006/compatibility" xmlns:we="http://schemas.microsoft.com/office/webextensions/webextension/2010/11" xmlns:wetp="http://schemas.microsoft.com/office/webextensions/taskpanes/2010/11" xmlns:w16cid="http://schemas.microsoft.com/office/word/2016/wordml/cid" xmlns:w16se="http://schemas.microsoft.com/office/word/2015/wordml/symex" xmlns:wps="http://schemas.microsoft.com/office/word/2010/wordprocessingShape" xmlns:b="http://schemas.openxmlformats.org/officeDocument/2006/bibliography" xmlns:odgm="http://opendope.org/SmartArt/DataHierarchy" xmlns:odi="http://opendope.org/components" xmlns:oda="http://opendope.org/answers" xmlns:odq="http://opendope.org/questions" xmlns:odc="http://opendope.org/conditions" xmlns:odx="http://opendope.org/xpaths" xmlns:cppr="http://schemas.microsoft.com/office/2006/coverPageProps" xmlns:pvml="urn:schemas-microsoft-com:office:powerpoint" xmlns:w10="urn:schemas-microsoft-com:office:word" xmlns:v="urn:schemas-microsoft-com:vml" xmlns:o="urn:schemas-microsoft-com:office:office" xmlns:xvml="urn:schemas-microsoft-com:office:excel" xmlns:dsp="http://schemas.microsoft.com/office/drawing/2008/diagram" xmlns:xdr="http://schemas.openxmlformats.org/drawingml/2006/spreadsheetDrawing" xmlns:pic="http://schemas.openxmlformats.org/drawingml/2006/picture" xmlns:dgm="http://schemas.openxmlformats.org/drawingml/2006/diagram" xmlns:c14="http://schemas.microsoft.com/office/drawing/2007/8/2/chart" xmlns:cdr="http://schemas.openxmlformats.org/drawingml/2006/chartDrawing" xmlns:wne="http://schemas.microsoft.com/office/word/2006/wordml" xmlns:sl="http://schemas.openxmlformats.org/schemaLibrary/2006/main" xmlns:mc="http://schemas.openxmlformats.org/markup-compatibility/2006" xmlns:wp14="http://schemas.microsoft.com/office/word/2010/wordprocessingDrawing" xmlns:wp="http://schemas.openxmlformats.org/drawingml/2006/wordprocessingDrawing" xmlns:m="http://schemas.openxmlformats.org/officeDocument/2006/math" xmlns:w14="http://schemas.microsoft.com/office/word/2010/wordml" xmlns:w15="http://schemas.microsoft.com/office/word/2012/wordml" xmlns:w="http://schemas.openxmlformats.org/wordprocessingml/2006/main">
       <c:ext xmlns:c16r3="http://schemas.microsoft.com/office/drawing/2017/03/chart" uri="{56B9EC1D-385E-4148-901F-78D8002777C0}">
         <c16r3:dataDisplayOptions16>
           <c16r3:dispNaAsBlank val="1"/>
         </c16r3:dataDisplayOptions16>
       </c:ext>
     </c:extLst>
-    <c:showDLblsOverMax val="0"/>
   </c:chart>
   <c:spPr>
     <a:noFill/>
@@ -10480,7 +10480,7 @@
           <a:p>
             <a:fld id="{C1255C68-584F-174D-BB81-51BF91708794}" type="datetimeFigureOut">
               <a:rPr lang="en-US" smtClean="0"/>
-              <a:t>8/8/25</a:t>
+              <a:t>3/13/26</a:t>
             </a:fld>
             <a:endParaRPr lang="en-US"/>
           </a:p>
@@ -10657,7 +10657,7 @@
           <a:p>
             <a:fld id="{A1EDAAC4-819D-C544-9EA1-C73624CFD70B}" type="datetimeFigureOut">
               <a:rPr lang="en-US" smtClean="0"/>
-              <a:t>8/8/25</a:t>
+              <a:t>3/13/26</a:t>
             </a:fld>
             <a:endParaRPr lang="en-US"/>
           </a:p>
@@ -20618,12 +20618,12 @@
             <p:nvPr userDrawn="1"/>
           </p:nvPicPr>
           <p:blipFill>
-            <a:blip r:embed="rId2">
+            <a:blip>
               <a:lum bright="100000"/>
               <a:alphaModFix amt="80000"/>
               <a:extLst>
                 <a:ext uri="{96DAC541-7B7A-43D3-8B79-37D633B846F1}">
-                  <asvg:svgBlip xmlns:asvg="http://schemas.microsoft.com/office/drawing/2016/SVG/main" r:embed="rId3"/>
+                  <asvg:svgBlip xmlns:asvg="http://schemas.microsoft.com/office/drawing/2016/SVG/main" r:embed="rId2"/>
                 </a:ext>
               </a:extLst>
             </a:blip>
@@ -20735,12 +20735,12 @@
             <p:nvPr userDrawn="1"/>
           </p:nvPicPr>
           <p:blipFill>
-            <a:blip r:embed="rId4">
+            <a:blip>
               <a:lum bright="100000"/>
               <a:alphaModFix amt="80000"/>
               <a:extLst>
                 <a:ext uri="{96DAC541-7B7A-43D3-8B79-37D633B846F1}">
-                  <asvg:svgBlip xmlns:asvg="http://schemas.microsoft.com/office/drawing/2016/SVG/main" r:embed="rId5"/>
+                  <asvg:svgBlip xmlns:asvg="http://schemas.microsoft.com/office/drawing/2016/SVG/main" r:embed="rId3"/>
                 </a:ext>
               </a:extLst>
             </a:blip>
@@ -20852,12 +20852,12 @@
             <p:nvPr userDrawn="1"/>
           </p:nvPicPr>
           <p:blipFill>
-            <a:blip r:embed="rId6">
+            <a:blip>
               <a:lum bright="100000"/>
               <a:alphaModFix amt="80000"/>
               <a:extLst>
                 <a:ext uri="{96DAC541-7B7A-43D3-8B79-37D633B846F1}">
-                  <asvg:svgBlip xmlns:asvg="http://schemas.microsoft.com/office/drawing/2016/SVG/main" r:embed="rId7"/>
+                  <asvg:svgBlip xmlns:asvg="http://schemas.microsoft.com/office/drawing/2016/SVG/main" r:embed="rId4"/>
                 </a:ext>
               </a:extLst>
             </a:blip>
@@ -20958,12 +20958,12 @@
             <p:nvPr userDrawn="1"/>
           </p:nvPicPr>
           <p:blipFill>
-            <a:blip r:embed="rId8">
+            <a:blip>
               <a:lum bright="100000"/>
               <a:alphaModFix amt="80000"/>
               <a:extLst>
                 <a:ext uri="{96DAC541-7B7A-43D3-8B79-37D633B846F1}">
-                  <asvg:svgBlip xmlns:asvg="http://schemas.microsoft.com/office/drawing/2016/SVG/main" r:embed="rId9"/>
+                  <asvg:svgBlip xmlns:asvg="http://schemas.microsoft.com/office/drawing/2016/SVG/main" r:embed="rId5"/>
                 </a:ext>
               </a:extLst>
             </a:blip>
@@ -21086,12 +21086,12 @@
             <p:nvPr userDrawn="1"/>
           </p:nvPicPr>
           <p:blipFill>
-            <a:blip r:embed="rId10">
+            <a:blip>
               <a:lum bright="100000"/>
               <a:alphaModFix amt="80000"/>
               <a:extLst>
                 <a:ext uri="{96DAC541-7B7A-43D3-8B79-37D633B846F1}">
-                  <asvg:svgBlip xmlns:asvg="http://schemas.microsoft.com/office/drawing/2016/SVG/main" r:embed="rId11"/>
+                  <asvg:svgBlip xmlns:asvg="http://schemas.microsoft.com/office/drawing/2016/SVG/main" r:embed="rId6"/>
                 </a:ext>
               </a:extLst>
             </a:blip>
@@ -21192,12 +21192,12 @@
             <p:nvPr userDrawn="1"/>
           </p:nvPicPr>
           <p:blipFill>
-            <a:blip r:embed="rId12">
+            <a:blip>
               <a:lum bright="100000"/>
               <a:alphaModFix amt="80000"/>
               <a:extLst>
                 <a:ext uri="{96DAC541-7B7A-43D3-8B79-37D633B846F1}">
-                  <asvg:svgBlip xmlns:asvg="http://schemas.microsoft.com/office/drawing/2016/SVG/main" r:embed="rId13"/>
+                  <asvg:svgBlip xmlns:asvg="http://schemas.microsoft.com/office/drawing/2016/SVG/main" r:embed="rId7"/>
                 </a:ext>
               </a:extLst>
             </a:blip>
@@ -32139,42 +32139,6 @@
       </p:graphicFrame>
       <p:sp>
         <p:nvSpPr>
-          <p:cNvPr id="7" name="TextBox 6">
-            <a:extLst>
-              <a:ext uri="{FF2B5EF4-FFF2-40B4-BE49-F238E27FC236}">
-                <a16:creationId xmlns:a16="http://schemas.microsoft.com/office/drawing/2014/main" id="{41183F90-63B2-0646-9068-7E4E2BCF14D9}"/>
-              </a:ext>
-            </a:extLst>
-          </p:cNvPr>
-          <p:cNvSpPr txBox="1"/>
-          <p:nvPr/>
-        </p:nvSpPr>
-        <p:spPr>
-          <a:xfrm>
-            <a:off x="8958648" y="-525758"/>
-            <a:ext cx="3635054" cy="369332"/>
-          </a:xfrm>
-          <a:prstGeom prst="rect">
-            <a:avLst/>
-          </a:prstGeom>
-          <a:noFill/>
-        </p:spPr>
-        <p:txBody>
-          <a:bodyPr wrap="none" lIns="90000" rtlCol="0" anchor="t">
-            <a:spAutoFit/>
-          </a:bodyPr>
-          <a:lstStyle/>
-          <a:p>
-            <a:r>
-              <a:rPr lang="en-US" b="1"/>
-              <a:t>OBJECTIVES_ARCHITECTURE_CHART</a:t>
-            </a:r>
-            <a:endParaRPr lang="en-US"/>
-          </a:p>
-        </p:txBody>
-      </p:sp>
-      <p:sp>
-        <p:nvSpPr>
           <p:cNvPr id="8" name="TextBox 7">
             <a:extLst>
               <a:ext uri="{FF2B5EF4-FFF2-40B4-BE49-F238E27FC236}">
@@ -32476,7 +32440,6 @@
               <a:rPr lang="en-US"/>
               <a:t>Progress towards objectives between February 2026 and March 2026</a:t>
             </a:r>
-            <a:endParaRPr lang="en-US"/>
           </a:p>
         </p:txBody>
       </p:sp>
@@ -32508,42 +32471,6 @@
           </a:graphicData>
         </a:graphic>
       </p:graphicFrame>
-      <p:sp>
-        <p:nvSpPr>
-          <p:cNvPr id="7" name="TextBox 6">
-            <a:extLst>
-              <a:ext uri="{FF2B5EF4-FFF2-40B4-BE49-F238E27FC236}">
-                <a16:creationId xmlns:a16="http://schemas.microsoft.com/office/drawing/2014/main" id="{1352F2E2-69B9-D866-7D75-24F10BB85A60}"/>
-              </a:ext>
-            </a:extLst>
-          </p:cNvPr>
-          <p:cNvSpPr txBox="1"/>
-          <p:nvPr/>
-        </p:nvSpPr>
-        <p:spPr>
-          <a:xfrm>
-            <a:off x="8958648" y="-525758"/>
-            <a:ext cx="2884016" cy="369332"/>
-          </a:xfrm>
-          <a:prstGeom prst="rect">
-            <a:avLst/>
-          </a:prstGeom>
-          <a:noFill/>
-        </p:spPr>
-        <p:txBody>
-          <a:bodyPr wrap="none" lIns="90000" rtlCol="0" anchor="t">
-            <a:spAutoFit/>
-          </a:bodyPr>
-          <a:lstStyle/>
-          <a:p>
-            <a:r>
-              <a:rPr lang="en-US" b="1"/>
-              <a:t>OBJECTIVES_STATUS_CHART</a:t>
-            </a:r>
-            <a:endParaRPr lang="en-US"/>
-          </a:p>
-        </p:txBody>
-      </p:sp>
       <p:sp>
         <p:nvSpPr>
           <p:cNvPr id="8" name="TextBox 7">
@@ -32823,7 +32750,6 @@
               <a:rPr lang="en-US"/>
               <a:t>Progress towards objectives per team between February 2026 and March 2026</a:t>
             </a:r>
-            <a:endParaRPr lang="en-US"/>
           </a:p>
         </p:txBody>
       </p:sp>
@@ -32855,42 +32781,6 @@
           </a:graphicData>
         </a:graphic>
       </p:graphicFrame>
-      <p:sp>
-        <p:nvSpPr>
-          <p:cNvPr id="7" name="TextBox 6">
-            <a:extLst>
-              <a:ext uri="{FF2B5EF4-FFF2-40B4-BE49-F238E27FC236}">
-                <a16:creationId xmlns:a16="http://schemas.microsoft.com/office/drawing/2014/main" id="{680F10C8-8291-84BB-615B-4FE46E9122C0}"/>
-              </a:ext>
-            </a:extLst>
-          </p:cNvPr>
-          <p:cNvSpPr txBox="1"/>
-          <p:nvPr/>
-        </p:nvSpPr>
-        <p:spPr>
-          <a:xfrm>
-            <a:off x="8958648" y="-525758"/>
-            <a:ext cx="2751287" cy="369332"/>
-          </a:xfrm>
-          <a:prstGeom prst="rect">
-            <a:avLst/>
-          </a:prstGeom>
-          <a:noFill/>
-        </p:spPr>
-        <p:txBody>
-          <a:bodyPr wrap="none" lIns="90000" rtlCol="0" anchor="t">
-            <a:spAutoFit/>
-          </a:bodyPr>
-          <a:lstStyle/>
-          <a:p>
-            <a:r>
-              <a:rPr lang="en-US" b="1"/>
-              <a:t>OBJECTIVES_TEAM_CHART</a:t>
-            </a:r>
-            <a:endParaRPr lang="en-US"/>
-          </a:p>
-        </p:txBody>
-      </p:sp>
       <p:sp>
         <p:nvSpPr>
           <p:cNvPr id="8" name="TextBox 7">
@@ -33170,7 +33060,6 @@
               <a:rPr lang="en-US"/>
               <a:t>Progress towards objectives per capability between February 2026 and March 2026</a:t>
             </a:r>
-            <a:endParaRPr lang="en-US"/>
           </a:p>
         </p:txBody>
       </p:sp>
@@ -33202,42 +33091,6 @@
           </a:graphicData>
         </a:graphic>
       </p:graphicFrame>
-      <p:sp>
-        <p:nvSpPr>
-          <p:cNvPr id="7" name="TextBox 6">
-            <a:extLst>
-              <a:ext uri="{FF2B5EF4-FFF2-40B4-BE49-F238E27FC236}">
-                <a16:creationId xmlns:a16="http://schemas.microsoft.com/office/drawing/2014/main" id="{E75AA9D8-EEB6-8709-C209-D32FF5C291E0}"/>
-              </a:ext>
-            </a:extLst>
-          </p:cNvPr>
-          <p:cNvSpPr txBox="1"/>
-          <p:nvPr/>
-        </p:nvSpPr>
-        <p:spPr>
-          <a:xfrm>
-            <a:off x="8958648" y="-525758"/>
-            <a:ext cx="3278675" cy="369332"/>
-          </a:xfrm>
-          <a:prstGeom prst="rect">
-            <a:avLst/>
-          </a:prstGeom>
-          <a:noFill/>
-        </p:spPr>
-        <p:txBody>
-          <a:bodyPr wrap="none" lIns="90000" rtlCol="0" anchor="t">
-            <a:spAutoFit/>
-          </a:bodyPr>
-          <a:lstStyle/>
-          <a:p>
-            <a:r>
-              <a:rPr lang="en-US" b="1"/>
-              <a:t>OBJECTIVES_CAPABILITY_CHART</a:t>
-            </a:r>
-            <a:endParaRPr lang="en-US"/>
-          </a:p>
-        </p:txBody>
-      </p:sp>
       <p:sp>
         <p:nvSpPr>
           <p:cNvPr id="8" name="TextBox 7">
@@ -33542,42 +33395,6 @@
           </a:graphicData>
         </a:graphic>
       </p:graphicFrame>
-      <p:sp>
-        <p:nvSpPr>
-          <p:cNvPr id="7" name="TextBox 6">
-            <a:extLst>
-              <a:ext uri="{FF2B5EF4-FFF2-40B4-BE49-F238E27FC236}">
-                <a16:creationId xmlns:a16="http://schemas.microsoft.com/office/drawing/2014/main" id="{025FA84B-5F3F-E103-125D-195720E3F1F8}"/>
-              </a:ext>
-            </a:extLst>
-          </p:cNvPr>
-          <p:cNvSpPr txBox="1"/>
-          <p:nvPr/>
-        </p:nvSpPr>
-        <p:spPr>
-          <a:xfrm>
-            <a:off x="8958648" y="-525758"/>
-            <a:ext cx="3051498" cy="369332"/>
-          </a:xfrm>
-          <a:prstGeom prst="rect">
-            <a:avLst/>
-          </a:prstGeom>
-          <a:noFill/>
-        </p:spPr>
-        <p:txBody>
-          <a:bodyPr wrap="none" lIns="90000" rtlCol="0" anchor="t">
-            <a:spAutoFit/>
-          </a:bodyPr>
-          <a:lstStyle/>
-          <a:p>
-            <a:r>
-              <a:rPr lang="en-US" b="1"/>
-              <a:t>OBJECTIVES_OVERALL_CHART</a:t>
-            </a:r>
-            <a:endParaRPr lang="en-US"/>
-          </a:p>
-        </p:txBody>
-      </p:sp>
       <p:sp>
         <p:nvSpPr>
           <p:cNvPr id="8" name="TextBox 7">
@@ -34099,42 +33916,6 @@
       </p:graphicFrame>
       <p:sp>
         <p:nvSpPr>
-          <p:cNvPr id="7" name="TextBox 6">
-            <a:extLst>
-              <a:ext uri="{FF2B5EF4-FFF2-40B4-BE49-F238E27FC236}">
-                <a16:creationId xmlns:a16="http://schemas.microsoft.com/office/drawing/2014/main" id="{659FCAA8-D0E0-3539-B820-DF6D6318129E}"/>
-              </a:ext>
-            </a:extLst>
-          </p:cNvPr>
-          <p:cNvSpPr txBox="1"/>
-          <p:nvPr/>
-        </p:nvSpPr>
-        <p:spPr>
-          <a:xfrm>
-            <a:off x="8958648" y="-525758"/>
-            <a:ext cx="3101768" cy="369332"/>
-          </a:xfrm>
-          <a:prstGeom prst="rect">
-            <a:avLst/>
-          </a:prstGeom>
-          <a:noFill/>
-        </p:spPr>
-        <p:txBody>
-          <a:bodyPr wrap="none" lIns="90000" rtlCol="0" anchor="t">
-            <a:spAutoFit/>
-          </a:bodyPr>
-          <a:lstStyle/>
-          <a:p>
-            <a:r>
-              <a:rPr lang="en-US" b="1"/>
-              <a:t>OBJECTIVES_SECURITY_CHART</a:t>
-            </a:r>
-            <a:endParaRPr lang="en-US"/>
-          </a:p>
-        </p:txBody>
-      </p:sp>
-      <p:sp>
-        <p:nvSpPr>
           <p:cNvPr id="8" name="TextBox 7">
             <a:extLst>
               <a:ext uri="{FF2B5EF4-FFF2-40B4-BE49-F238E27FC236}">
@@ -34439,42 +34220,6 @@
       </p:graphicFrame>
       <p:sp>
         <p:nvSpPr>
-          <p:cNvPr id="7" name="TextBox 6">
-            <a:extLst>
-              <a:ext uri="{FF2B5EF4-FFF2-40B4-BE49-F238E27FC236}">
-                <a16:creationId xmlns:a16="http://schemas.microsoft.com/office/drawing/2014/main" id="{AAE381E8-8BDC-C11E-0B4E-573D2927E3C8}"/>
-              </a:ext>
-            </a:extLst>
-          </p:cNvPr>
-          <p:cNvSpPr txBox="1"/>
-          <p:nvPr/>
-        </p:nvSpPr>
-        <p:spPr>
-          <a:xfrm>
-            <a:off x="8958648" y="-525758"/>
-            <a:ext cx="2597014" cy="369332"/>
-          </a:xfrm>
-          <a:prstGeom prst="rect">
-            <a:avLst/>
-          </a:prstGeom>
-          <a:noFill/>
-        </p:spPr>
-        <p:txBody>
-          <a:bodyPr wrap="none" lIns="90000" rtlCol="0" anchor="t">
-            <a:spAutoFit/>
-          </a:bodyPr>
-          <a:lstStyle/>
-          <a:p>
-            <a:r>
-              <a:rPr lang="en-US" b="1"/>
-              <a:t>OBJECTIVES_OSH_CHART</a:t>
-            </a:r>
-            <a:endParaRPr lang="en-US"/>
-          </a:p>
-        </p:txBody>
-      </p:sp>
-      <p:sp>
-        <p:nvSpPr>
           <p:cNvPr id="8" name="TextBox 7">
             <a:extLst>
               <a:ext uri="{FF2B5EF4-FFF2-40B4-BE49-F238E27FC236}">
@@ -34777,42 +34522,6 @@
           </a:graphicData>
         </a:graphic>
       </p:graphicFrame>
-      <p:sp>
-        <p:nvSpPr>
-          <p:cNvPr id="7" name="TextBox 6">
-            <a:extLst>
-              <a:ext uri="{FF2B5EF4-FFF2-40B4-BE49-F238E27FC236}">
-                <a16:creationId xmlns:a16="http://schemas.microsoft.com/office/drawing/2014/main" id="{FBB95D9E-971C-257B-3338-71CD7C91C015}"/>
-              </a:ext>
-            </a:extLst>
-          </p:cNvPr>
-          <p:cNvSpPr txBox="1"/>
-          <p:nvPr/>
-        </p:nvSpPr>
-        <p:spPr>
-          <a:xfrm>
-            <a:off x="8958648" y="-525758"/>
-            <a:ext cx="3912566" cy="369332"/>
-          </a:xfrm>
-          <a:prstGeom prst="rect">
-            <a:avLst/>
-          </a:prstGeom>
-          <a:noFill/>
-        </p:spPr>
-        <p:txBody>
-          <a:bodyPr wrap="none" lIns="90000" rtlCol="0" anchor="t">
-            <a:spAutoFit/>
-          </a:bodyPr>
-          <a:lstStyle/>
-          <a:p>
-            <a:r>
-              <a:rPr lang="en-US" b="1"/>
-              <a:t>OBJECTIVES_MAINTAINABILITY_CHART</a:t>
-            </a:r>
-            <a:endParaRPr lang="en-US"/>
-          </a:p>
-        </p:txBody>
-      </p:sp>
       <p:sp>
         <p:nvSpPr>
           <p:cNvPr id="8" name="TextBox 7">
@@ -35896,6 +35605,17 @@
 </file>
 
 <file path=customXml/item2.xml><?xml version="1.0" encoding="utf-8"?>
+<p:properties xmlns:p="http://schemas.microsoft.com/office/2006/metadata/properties" xmlns:xsi="http://www.w3.org/2001/XMLSchema-instance" xmlns:pc="http://schemas.microsoft.com/office/infopath/2007/PartnerControls">
+  <documentManagement>
+    <lcf76f155ced4ddcb4097134ff3c332f xmlns="fa937df2-abe2-4d38-b5f4-c228acba3827">
+      <Terms xmlns="http://schemas.microsoft.com/office/infopath/2007/PartnerControls"/>
+    </lcf76f155ced4ddcb4097134ff3c332f>
+    <TaxCatchAll xmlns="bc8ba18a-4a58-4ad2-bfc0-6516af8e7dc2" xsi:nil="true"/>
+  </documentManagement>
+</p:properties>
+</file>
+
+<file path=customXml/item3.xml><?xml version="1.0" encoding="utf-8"?>
 <ct:contentTypeSchema xmlns:ct="http://schemas.microsoft.com/office/2006/metadata/contentType" xmlns:ma="http://schemas.microsoft.com/office/2006/metadata/properties/metaAttributes" ct:_="" ma:_="" ma:contentTypeName="Document" ma:contentTypeID="0x010100398B4EB28540854BB4092730D7F67224" ma:contentTypeVersion="13" ma:contentTypeDescription="Create a new document." ma:contentTypeScope="" ma:versionID="07d6997c7358ecc3b6f0d78039f1ac55">
   <xsd:schema xmlns:xsd="http://www.w3.org/2001/XMLSchema" xmlns:xs="http://www.w3.org/2001/XMLSchema" xmlns:p="http://schemas.microsoft.com/office/2006/metadata/properties" xmlns:ns2="fa937df2-abe2-4d38-b5f4-c228acba3827" xmlns:ns3="bc8ba18a-4a58-4ad2-bfc0-6516af8e7dc2" targetNamespace="http://schemas.microsoft.com/office/2006/metadata/properties" ma:root="true" ma:fieldsID="a7d20d2c9a349b6838acf4b79389f2fd" ns2:_="" ns3:_="">
     <xsd:import namespace="fa937df2-abe2-4d38-b5f4-c228acba3827"/>
@@ -36118,17 +35838,6 @@
 </ct:contentTypeSchema>
 </file>
 
-<file path=customXml/item3.xml><?xml version="1.0" encoding="utf-8"?>
-<p:properties xmlns:p="http://schemas.microsoft.com/office/2006/metadata/properties" xmlns:xsi="http://www.w3.org/2001/XMLSchema-instance" xmlns:pc="http://schemas.microsoft.com/office/infopath/2007/PartnerControls">
-  <documentManagement>
-    <lcf76f155ced4ddcb4097134ff3c332f xmlns="fa937df2-abe2-4d38-b5f4-c228acba3827">
-      <Terms xmlns="http://schemas.microsoft.com/office/infopath/2007/PartnerControls"/>
-    </lcf76f155ced4ddcb4097134ff3c332f>
-    <TaxCatchAll xmlns="bc8ba18a-4a58-4ad2-bfc0-6516af8e7dc2" xsi:nil="true"/>
-  </documentManagement>
-</p:properties>
-</file>
-
 <file path=customXml/itemProps1.xml><?xml version="1.0" encoding="utf-8"?>
 <ds:datastoreItem xmlns:ds="http://schemas.openxmlformats.org/officeDocument/2006/customXml" ds:itemID="{570928F0-D7CA-4732-B7F3-1F945720D0AA}">
   <ds:schemaRefs>
@@ -36138,6 +35847,23 @@
 </file>
 
 <file path=customXml/itemProps2.xml><?xml version="1.0" encoding="utf-8"?>
+<ds:datastoreItem xmlns:ds="http://schemas.openxmlformats.org/officeDocument/2006/customXml" ds:itemID="{4B629362-CF15-4610-8FAC-A8E699942233}">
+  <ds:schemaRefs>
+    <ds:schemaRef ds:uri="http://schemas.microsoft.com/office/2006/documentManagement/types"/>
+    <ds:schemaRef ds:uri="http://purl.org/dc/elements/1.1/"/>
+    <ds:schemaRef ds:uri="bc8ba18a-4a58-4ad2-bfc0-6516af8e7dc2"/>
+    <ds:schemaRef ds:uri="http://purl.org/dc/terms/"/>
+    <ds:schemaRef ds:uri="http://www.w3.org/XML/1998/namespace"/>
+    <ds:schemaRef ds:uri="http://schemas.microsoft.com/office/2006/metadata/properties"/>
+    <ds:schemaRef ds:uri="http://schemas.microsoft.com/office/infopath/2007/PartnerControls"/>
+    <ds:schemaRef ds:uri="http://schemas.openxmlformats.org/package/2006/metadata/core-properties"/>
+    <ds:schemaRef ds:uri="fa937df2-abe2-4d38-b5f4-c228acba3827"/>
+    <ds:schemaRef ds:uri="http://purl.org/dc/dcmitype/"/>
+  </ds:schemaRefs>
+</ds:datastoreItem>
+</file>
+
+<file path=customXml/itemProps3.xml><?xml version="1.0" encoding="utf-8"?>
 <ds:datastoreItem xmlns:ds="http://schemas.openxmlformats.org/officeDocument/2006/customXml" ds:itemID="{06E6923A-C221-4753-B75B-BA213EEB7564}">
   <ds:schemaRefs>
     <ds:schemaRef ds:uri="bc8ba18a-4a58-4ad2-bfc0-6516af8e7dc2"/>
@@ -36154,21 +35880,4 @@
     <ds:schemaRef ds:uri="http://www.w3.org/2001/XMLSchema"/>
   </ds:schemaRefs>
 </ds:datastoreItem>
-</file>
-
-<file path=customXml/itemProps3.xml><?xml version="1.0" encoding="utf-8"?>
-<ds:datastoreItem xmlns:ds="http://schemas.openxmlformats.org/officeDocument/2006/customXml" ds:itemID="{4B629362-CF15-4610-8FAC-A8E699942233}">
-  <ds:schemaRefs>
-    <ds:schemaRef ds:uri="http://schemas.microsoft.com/office/2006/documentManagement/types"/>
-    <ds:schemaRef ds:uri="http://purl.org/dc/elements/1.1/"/>
-    <ds:schemaRef ds:uri="bc8ba18a-4a58-4ad2-bfc0-6516af8e7dc2"/>
-    <ds:schemaRef ds:uri="http://purl.org/dc/terms/"/>
-    <ds:schemaRef ds:uri="http://www.w3.org/XML/1998/namespace"/>
-    <ds:schemaRef ds:uri="http://schemas.microsoft.com/office/2006/metadata/properties"/>
-    <ds:schemaRef ds:uri="http://schemas.microsoft.com/office/infopath/2007/PartnerControls"/>
-    <ds:schemaRef ds:uri="http://schemas.openxmlformats.org/package/2006/metadata/core-properties"/>
-    <ds:schemaRef ds:uri="fa937df2-abe2-4d38-b5f4-c228acba3827"/>
-    <ds:schemaRef ds:uri="http://purl.org/dc/dcmitype/"/>
-  </ds:schemaRefs>
-</ds:datastoreItem>
 </file>
--- a/tests/report_generator/integration/reference_objectives.pptx
+++ b/tests/report_generator/integration/reference_objectives.pptx
@@ -237,7 +237,7 @@
                 <c:formatCode>General</c:formatCode>
                 <c:ptCount val="1"/>
                 <c:pt idx="0">
-                  <c:v>46.144721233689204</c:v>
+                  <c:v>48.648648648648646</c:v>
                 </c:pt>
               </c:numCache>
             </c:numRef>
@@ -290,7 +290,7 @@
                 <c:formatCode>General</c:formatCode>
                 <c:ptCount val="1"/>
                 <c:pt idx="0">
-                  <c:v>0.83036773428232502</c:v>
+                  <c:v>0.0</c:v>
                 </c:pt>
               </c:numCache>
             </c:numRef>
@@ -343,7 +343,7 @@
                 <c:formatCode>General</c:formatCode>
                 <c:ptCount val="1"/>
                 <c:pt idx="0">
-                  <c:v>41.992882562277579</c:v>
+                  <c:v>43.24324324324324</c:v>
                 </c:pt>
               </c:numCache>
             </c:numRef>
@@ -396,7 +396,7 @@
                 <c:formatCode>General</c:formatCode>
                 <c:ptCount val="1"/>
                 <c:pt idx="0">
-                  <c:v>2.7283511269276395</c:v>
+                  <c:v>5.405405405405405</c:v>
                 </c:pt>
               </c:numCache>
             </c:numRef>
@@ -451,7 +451,7 @@
                 <c:formatCode>General</c:formatCode>
                 <c:ptCount val="1"/>
                 <c:pt idx="0">
-                  <c:v>8.3036773428232511</c:v>
+                  <c:v>2.7027027027027026</c:v>
                 </c:pt>
               </c:numCache>
             </c:numRef>
@@ -669,125 +669,23 @@
           </c:dPt>
           <c:cat>
             <c:strRef>
-              <c:f>Sheet1!$A$2:$A$19</c:f>
+              <c:f>Sheet1!$A$2:$A$2</c:f>
               <c:strCache>
-                <c:ptCount val="18"/>
+                <c:ptCount val="1"/>
                 <c:pt idx="0">
-                  <c:v>architecture</c:v>
-                </c:pt>
-                <c:pt idx="1">
-                  <c:v>Utility Development</c:v>
-                </c:pt>
-                <c:pt idx="2">
                   <c:v>Unknown</c:v>
-                </c:pt>
-                <c:pt idx="3">
-                  <c:v>Team Blue</c:v>
-                </c:pt>
-                <c:pt idx="4">
-                  <c:v>Server Team</c:v>
-                </c:pt>
-                <c:pt idx="5">
-                  <c:v>Retail Operations</c:v>
-                </c:pt>
-                <c:pt idx="6">
-                  <c:v>Research</c:v>
-                </c:pt>
-                <c:pt idx="7">
-                  <c:v>PowerFX Team</c:v>
-                </c:pt>
-                <c:pt idx="8">
-                  <c:v>PLC</c:v>
-                </c:pt>
-                <c:pt idx="9">
-                  <c:v>OS team</c:v>
-                </c:pt>
-                <c:pt idx="10">
-                  <c:v>Logic Apps Team</c:v>
-                </c:pt>
-                <c:pt idx="11">
-                  <c:v>Java Team</c:v>
-                </c:pt>
-                <c:pt idx="12">
-                  <c:v>IT Department</c:v>
-                </c:pt>
-                <c:pt idx="13">
-                  <c:v>Frontend Development</c:v>
-                </c:pt>
-                <c:pt idx="14">
-                  <c:v>Development Tooling</c:v>
-                </c:pt>
-                <c:pt idx="15">
-                  <c:v>Customer Experience</c:v>
-                </c:pt>
-                <c:pt idx="16">
-                  <c:v>Backend Development</c:v>
-                </c:pt>
-                <c:pt idx="17">
-                  <c:v>Analytics Team</c:v>
                 </c:pt>
               </c:strCache>
             </c:strRef>
           </c:cat>
           <c:val>
             <c:numRef>
-              <c:f>Sheet1!$B$2:$B$19</c:f>
+              <c:f>Sheet1!$B$2:$B$2</c:f>
               <c:numCache>
                 <c:formatCode>General</c:formatCode>
-                <c:ptCount val="18"/>
+                <c:ptCount val="1"/>
                 <c:pt idx="0">
-                  <c:v>26.923076923076923</c:v>
-                </c:pt>
-                <c:pt idx="1">
-                  <c:v>47.727272727272727</c:v>
-                </c:pt>
-                <c:pt idx="2">
-                  <c:v>39.42307692307692</c:v>
-                </c:pt>
-                <c:pt idx="3">
-                  <c:v>0</c:v>
-                </c:pt>
-                <c:pt idx="4">
-                  <c:v>18.181818181818183</c:v>
-                </c:pt>
-                <c:pt idx="5">
-                  <c:v>81.818181818181813</c:v>
-                </c:pt>
-                <c:pt idx="6">
-                  <c:v>50</c:v>
-                </c:pt>
-                <c:pt idx="7">
-                  <c:v>75.806451612903231</c:v>
-                </c:pt>
-                <c:pt idx="8">
-                  <c:v>54.838709677419352</c:v>
-                </c:pt>
-                <c:pt idx="9">
-                  <c:v>40.625</c:v>
-                </c:pt>
-                <c:pt idx="10">
-                  <c:v>51.724137931034484</c:v>
-                </c:pt>
-                <c:pt idx="11">
-                  <c:v>0</c:v>
-                </c:pt>
-                <c:pt idx="12">
-                  <c:v>47.368421052631582</c:v>
-                </c:pt>
-                <c:pt idx="13">
-                  <c:v>49.541284403669728</c:v>
-                </c:pt>
-                <c:pt idx="14">
-                  <c:v>61.29032258064516</c:v>
-                </c:pt>
-                <c:pt idx="15">
-                  <c:v>11.111111111111111</c:v>
-                </c:pt>
-                <c:pt idx="16">
-                  <c:v>40.090090090090094</c:v>
-                </c:pt>
-                <c:pt idx="17">
-                  <c:v>33.333333333333336</c:v>
+                  <c:v>48.648648648648646</c:v>
                 </c:pt>
               </c:numCache>
             </c:numRef>
@@ -824,125 +722,23 @@
           <c:invertIfNegative val="0"/>
           <c:cat>
             <c:strRef>
-              <c:f>Sheet1!$A$2:$A$19</c:f>
+              <c:f>Sheet1!$A$2:$A$2</c:f>
               <c:strCache>
-                <c:ptCount val="18"/>
+                <c:ptCount val="1"/>
                 <c:pt idx="0">
-                  <c:v>architecture</c:v>
-                </c:pt>
-                <c:pt idx="1">
-                  <c:v>Utility Development</c:v>
-                </c:pt>
-                <c:pt idx="2">
                   <c:v>Unknown</c:v>
-                </c:pt>
-                <c:pt idx="3">
-                  <c:v>Team Blue</c:v>
-                </c:pt>
-                <c:pt idx="4">
-                  <c:v>Server Team</c:v>
-                </c:pt>
-                <c:pt idx="5">
-                  <c:v>Retail Operations</c:v>
-                </c:pt>
-                <c:pt idx="6">
-                  <c:v>Research</c:v>
-                </c:pt>
-                <c:pt idx="7">
-                  <c:v>PowerFX Team</c:v>
-                </c:pt>
-                <c:pt idx="8">
-                  <c:v>PLC</c:v>
-                </c:pt>
-                <c:pt idx="9">
-                  <c:v>OS team</c:v>
-                </c:pt>
-                <c:pt idx="10">
-                  <c:v>Logic Apps Team</c:v>
-                </c:pt>
-                <c:pt idx="11">
-                  <c:v>Java Team</c:v>
-                </c:pt>
-                <c:pt idx="12">
-                  <c:v>IT Department</c:v>
-                </c:pt>
-                <c:pt idx="13">
-                  <c:v>Frontend Development</c:v>
-                </c:pt>
-                <c:pt idx="14">
-                  <c:v>Development Tooling</c:v>
-                </c:pt>
-                <c:pt idx="15">
-                  <c:v>Customer Experience</c:v>
-                </c:pt>
-                <c:pt idx="16">
-                  <c:v>Backend Development</c:v>
-                </c:pt>
-                <c:pt idx="17">
-                  <c:v>Analytics Team</c:v>
                 </c:pt>
               </c:strCache>
             </c:strRef>
           </c:cat>
           <c:val>
             <c:numRef>
-              <c:f>Sheet1!$C$2:$C$19</c:f>
+              <c:f>Sheet1!$C$2:$C$2</c:f>
               <c:numCache>
                 <c:formatCode>General</c:formatCode>
-                <c:ptCount val="18"/>
+                <c:ptCount val="1"/>
                 <c:pt idx="0">
-                  <c:v>3.8461538461538463</c:v>
-                </c:pt>
-                <c:pt idx="1">
-                  <c:v>1.1363636363636365</c:v>
-                </c:pt>
-                <c:pt idx="2">
-                  <c:v>0</c:v>
-                </c:pt>
-                <c:pt idx="3">
-                  <c:v>0</c:v>
-                </c:pt>
-                <c:pt idx="4">
-                  <c:v>0</c:v>
-                </c:pt>
-                <c:pt idx="5">
-                  <c:v>0</c:v>
-                </c:pt>
-                <c:pt idx="6">
-                  <c:v>12.5</c:v>
-                </c:pt>
-                <c:pt idx="7">
-                  <c:v>0</c:v>
-                </c:pt>
-                <c:pt idx="8">
-                  <c:v>0</c:v>
-                </c:pt>
-                <c:pt idx="9">
-                  <c:v>0</c:v>
-                </c:pt>
-                <c:pt idx="10">
-                  <c:v>0</c:v>
-                </c:pt>
-                <c:pt idx="11">
-                  <c:v>0</c:v>
-                </c:pt>
-                <c:pt idx="12">
-                  <c:v>0</c:v>
-                </c:pt>
-                <c:pt idx="13">
-                  <c:v>0.91743119266055051</c:v>
-                </c:pt>
-                <c:pt idx="14">
-                  <c:v>3.225806451612903</c:v>
-                </c:pt>
-                <c:pt idx="15">
-                  <c:v>0</c:v>
-                </c:pt>
-                <c:pt idx="16">
-                  <c:v>0.90090090090090091</c:v>
-                </c:pt>
-                <c:pt idx="17">
-                  <c:v>0</c:v>
+                  <c:v>0.0</c:v>
                 </c:pt>
               </c:numCache>
             </c:numRef>
@@ -979,125 +775,23 @@
           <c:invertIfNegative val="0"/>
           <c:cat>
             <c:strRef>
-              <c:f>Sheet1!$A$2:$A$19</c:f>
+              <c:f>Sheet1!$A$2:$A$2</c:f>
               <c:strCache>
-                <c:ptCount val="18"/>
+                <c:ptCount val="1"/>
                 <c:pt idx="0">
-                  <c:v>architecture</c:v>
-                </c:pt>
-                <c:pt idx="1">
-                  <c:v>Utility Development</c:v>
-                </c:pt>
-                <c:pt idx="2">
                   <c:v>Unknown</c:v>
-                </c:pt>
-                <c:pt idx="3">
-                  <c:v>Team Blue</c:v>
-                </c:pt>
-                <c:pt idx="4">
-                  <c:v>Server Team</c:v>
-                </c:pt>
-                <c:pt idx="5">
-                  <c:v>Retail Operations</c:v>
-                </c:pt>
-                <c:pt idx="6">
-                  <c:v>Research</c:v>
-                </c:pt>
-                <c:pt idx="7">
-                  <c:v>PowerFX Team</c:v>
-                </c:pt>
-                <c:pt idx="8">
-                  <c:v>PLC</c:v>
-                </c:pt>
-                <c:pt idx="9">
-                  <c:v>OS team</c:v>
-                </c:pt>
-                <c:pt idx="10">
-                  <c:v>Logic Apps Team</c:v>
-                </c:pt>
-                <c:pt idx="11">
-                  <c:v>Java Team</c:v>
-                </c:pt>
-                <c:pt idx="12">
-                  <c:v>IT Department</c:v>
-                </c:pt>
-                <c:pt idx="13">
-                  <c:v>Frontend Development</c:v>
-                </c:pt>
-                <c:pt idx="14">
-                  <c:v>Development Tooling</c:v>
-                </c:pt>
-                <c:pt idx="15">
-                  <c:v>Customer Experience</c:v>
-                </c:pt>
-                <c:pt idx="16">
-                  <c:v>Backend Development</c:v>
-                </c:pt>
-                <c:pt idx="17">
-                  <c:v>Analytics Team</c:v>
                 </c:pt>
               </c:strCache>
             </c:strRef>
           </c:cat>
           <c:val>
             <c:numRef>
-              <c:f>Sheet1!$D$2:$D$19</c:f>
+              <c:f>Sheet1!$D$2:$D$2</c:f>
               <c:numCache>
                 <c:formatCode>General</c:formatCode>
-                <c:ptCount val="18"/>
+                <c:ptCount val="1"/>
                 <c:pt idx="0">
-                  <c:v>61.53846153846154</c:v>
-                </c:pt>
-                <c:pt idx="1">
-                  <c:v>43.18181818181818</c:v>
-                </c:pt>
-                <c:pt idx="2">
-                  <c:v>35.57692307692308</c:v>
-                </c:pt>
-                <c:pt idx="3">
-                  <c:v>50</c:v>
-                </c:pt>
-                <c:pt idx="4">
-                  <c:v>59.090909090909093</c:v>
-                </c:pt>
-                <c:pt idx="5">
-                  <c:v>18.181818181818183</c:v>
-                </c:pt>
-                <c:pt idx="6">
-                  <c:v>37.5</c:v>
-                </c:pt>
-                <c:pt idx="7">
-                  <c:v>22.580645161290324</c:v>
-                </c:pt>
-                <c:pt idx="8">
-                  <c:v>29.032258064516128</c:v>
-                </c:pt>
-                <c:pt idx="9">
-                  <c:v>42.1875</c:v>
-                </c:pt>
-                <c:pt idx="10">
-                  <c:v>48.275862068965516</c:v>
-                </c:pt>
-                <c:pt idx="11">
-                  <c:v>50</c:v>
-                </c:pt>
-                <c:pt idx="12">
-                  <c:v>52.631578947368418</c:v>
-                </c:pt>
-                <c:pt idx="13">
-                  <c:v>34.862385321100916</c:v>
-                </c:pt>
-                <c:pt idx="14">
-                  <c:v>25.806451612903224</c:v>
-                </c:pt>
-                <c:pt idx="15">
-                  <c:v>88.888888888888886</c:v>
-                </c:pt>
-                <c:pt idx="16">
-                  <c:v>51.801801801801801</c:v>
-                </c:pt>
-                <c:pt idx="17">
-                  <c:v>59.25925925925926</c:v>
+                  <c:v>43.24324324324324</c:v>
                 </c:pt>
               </c:numCache>
             </c:numRef>
@@ -1134,125 +828,23 @@
           <c:invertIfNegative val="0"/>
           <c:cat>
             <c:strRef>
-              <c:f>Sheet1!$A$2:$A$19</c:f>
+              <c:f>Sheet1!$A$2:$A$2</c:f>
               <c:strCache>
-                <c:ptCount val="18"/>
+                <c:ptCount val="1"/>
                 <c:pt idx="0">
-                  <c:v>architecture</c:v>
-                </c:pt>
-                <c:pt idx="1">
-                  <c:v>Utility Development</c:v>
-                </c:pt>
-                <c:pt idx="2">
                   <c:v>Unknown</c:v>
-                </c:pt>
-                <c:pt idx="3">
-                  <c:v>Team Blue</c:v>
-                </c:pt>
-                <c:pt idx="4">
-                  <c:v>Server Team</c:v>
-                </c:pt>
-                <c:pt idx="5">
-                  <c:v>Retail Operations</c:v>
-                </c:pt>
-                <c:pt idx="6">
-                  <c:v>Research</c:v>
-                </c:pt>
-                <c:pt idx="7">
-                  <c:v>PowerFX Team</c:v>
-                </c:pt>
-                <c:pt idx="8">
-                  <c:v>PLC</c:v>
-                </c:pt>
-                <c:pt idx="9">
-                  <c:v>OS team</c:v>
-                </c:pt>
-                <c:pt idx="10">
-                  <c:v>Logic Apps Team</c:v>
-                </c:pt>
-                <c:pt idx="11">
-                  <c:v>Java Team</c:v>
-                </c:pt>
-                <c:pt idx="12">
-                  <c:v>IT Department</c:v>
-                </c:pt>
-                <c:pt idx="13">
-                  <c:v>Frontend Development</c:v>
-                </c:pt>
-                <c:pt idx="14">
-                  <c:v>Development Tooling</c:v>
-                </c:pt>
-                <c:pt idx="15">
-                  <c:v>Customer Experience</c:v>
-                </c:pt>
-                <c:pt idx="16">
-                  <c:v>Backend Development</c:v>
-                </c:pt>
-                <c:pt idx="17">
-                  <c:v>Analytics Team</c:v>
                 </c:pt>
               </c:strCache>
             </c:strRef>
           </c:cat>
           <c:val>
             <c:numRef>
-              <c:f>Sheet1!$E$2:$E$19</c:f>
+              <c:f>Sheet1!$E$2:$E$2</c:f>
               <c:numCache>
                 <c:formatCode>General</c:formatCode>
-                <c:ptCount val="18"/>
+                <c:ptCount val="1"/>
                 <c:pt idx="0">
-                  <c:v>3.8461538461538463</c:v>
-                </c:pt>
-                <c:pt idx="1">
-                  <c:v>2.2727272727272729</c:v>
-                </c:pt>
-                <c:pt idx="2">
-                  <c:v>0</c:v>
-                </c:pt>
-                <c:pt idx="3">
-                  <c:v>0</c:v>
-                </c:pt>
-                <c:pt idx="4">
-                  <c:v>0</c:v>
-                </c:pt>
-                <c:pt idx="5">
-                  <c:v>0</c:v>
-                </c:pt>
-                <c:pt idx="6">
-                  <c:v>0</c:v>
-                </c:pt>
-                <c:pt idx="7">
-                  <c:v>0</c:v>
-                </c:pt>
-                <c:pt idx="8">
-                  <c:v>0</c:v>
-                </c:pt>
-                <c:pt idx="9">
-                  <c:v>6.25</c:v>
-                </c:pt>
-                <c:pt idx="10">
-                  <c:v>0</c:v>
-                </c:pt>
-                <c:pt idx="11">
-                  <c:v>0</c:v>
-                </c:pt>
-                <c:pt idx="12">
-                  <c:v>0</c:v>
-                </c:pt>
-                <c:pt idx="13">
-                  <c:v>8.2568807339449535</c:v>
-                </c:pt>
-                <c:pt idx="14">
-                  <c:v>6.4516129032258061</c:v>
-                </c:pt>
-                <c:pt idx="15">
-                  <c:v>0</c:v>
-                </c:pt>
-                <c:pt idx="16">
-                  <c:v>2.7027027027027026</c:v>
-                </c:pt>
-                <c:pt idx="17">
-                  <c:v>0</c:v>
+                  <c:v>5.405405405405405</c:v>
                 </c:pt>
               </c:numCache>
             </c:numRef>
@@ -1291,125 +883,23 @@
           <c:invertIfNegative val="0"/>
           <c:cat>
             <c:strRef>
-              <c:f>Sheet1!$A$2:$A$19</c:f>
+              <c:f>Sheet1!$A$2:$A$2</c:f>
               <c:strCache>
-                <c:ptCount val="18"/>
+                <c:ptCount val="1"/>
                 <c:pt idx="0">
-                  <c:v>architecture</c:v>
-                </c:pt>
-                <c:pt idx="1">
-                  <c:v>Utility Development</c:v>
-                </c:pt>
-                <c:pt idx="2">
                   <c:v>Unknown</c:v>
-                </c:pt>
-                <c:pt idx="3">
-                  <c:v>Team Blue</c:v>
-                </c:pt>
-                <c:pt idx="4">
-                  <c:v>Server Team</c:v>
-                </c:pt>
-                <c:pt idx="5">
-                  <c:v>Retail Operations</c:v>
-                </c:pt>
-                <c:pt idx="6">
-                  <c:v>Research</c:v>
-                </c:pt>
-                <c:pt idx="7">
-                  <c:v>PowerFX Team</c:v>
-                </c:pt>
-                <c:pt idx="8">
-                  <c:v>PLC</c:v>
-                </c:pt>
-                <c:pt idx="9">
-                  <c:v>OS team</c:v>
-                </c:pt>
-                <c:pt idx="10">
-                  <c:v>Logic Apps Team</c:v>
-                </c:pt>
-                <c:pt idx="11">
-                  <c:v>Java Team</c:v>
-                </c:pt>
-                <c:pt idx="12">
-                  <c:v>IT Department</c:v>
-                </c:pt>
-                <c:pt idx="13">
-                  <c:v>Frontend Development</c:v>
-                </c:pt>
-                <c:pt idx="14">
-                  <c:v>Development Tooling</c:v>
-                </c:pt>
-                <c:pt idx="15">
-                  <c:v>Customer Experience</c:v>
-                </c:pt>
-                <c:pt idx="16">
-                  <c:v>Backend Development</c:v>
-                </c:pt>
-                <c:pt idx="17">
-                  <c:v>Analytics Team</c:v>
                 </c:pt>
               </c:strCache>
             </c:strRef>
           </c:cat>
           <c:val>
             <c:numRef>
-              <c:f>Sheet1!$F$2:$F$19</c:f>
+              <c:f>Sheet1!$F$2:$F$2</c:f>
               <c:numCache>
                 <c:formatCode>General</c:formatCode>
-                <c:ptCount val="18"/>
+                <c:ptCount val="1"/>
                 <c:pt idx="0">
-                  <c:v>3.8461538461538463</c:v>
-                </c:pt>
-                <c:pt idx="1">
-                  <c:v>5.6818181818181817</c:v>
-                </c:pt>
-                <c:pt idx="2">
-                  <c:v>25</c:v>
-                </c:pt>
-                <c:pt idx="3">
-                  <c:v>50</c:v>
-                </c:pt>
-                <c:pt idx="4">
-                  <c:v>22.727272727272727</c:v>
-                </c:pt>
-                <c:pt idx="5">
-                  <c:v>0</c:v>
-                </c:pt>
-                <c:pt idx="6">
-                  <c:v>0</c:v>
-                </c:pt>
-                <c:pt idx="7">
-                  <c:v>1.6129032258064515</c:v>
-                </c:pt>
-                <c:pt idx="8">
-                  <c:v>16.129032258064516</c:v>
-                </c:pt>
-                <c:pt idx="9">
-                  <c:v>10.9375</c:v>
-                </c:pt>
-                <c:pt idx="10">
-                  <c:v>0</c:v>
-                </c:pt>
-                <c:pt idx="11">
-                  <c:v>50</c:v>
-                </c:pt>
-                <c:pt idx="12">
-                  <c:v>0</c:v>
-                </c:pt>
-                <c:pt idx="13">
-                  <c:v>6.4220183486238529</c:v>
-                </c:pt>
-                <c:pt idx="14">
-                  <c:v>3.225806451612903</c:v>
-                </c:pt>
-                <c:pt idx="15">
-                  <c:v>0</c:v>
-                </c:pt>
-                <c:pt idx="16">
-                  <c:v>4.5045045045045047</c:v>
-                </c:pt>
-                <c:pt idx="17">
-                  <c:v>7.4074074074074074</c:v>
+                  <c:v>2.7027027027027026</c:v>
                 </c:pt>
               </c:numCache>
             </c:numRef>
@@ -1682,16 +1172,16 @@
                 <c:formatCode>General</c:formatCode>
                 <c:ptCount val="4"/>
                 <c:pt idx="0">
-                  <c:v>53.191489361702125</c:v>
+                  <c:v>66.66666666666667</c:v>
                 </c:pt>
                 <c:pt idx="1">
-                  <c:v>34.865900383141764</c:v>
+                  <c:v>46.15384615384615</c:v>
                 </c:pt>
                 <c:pt idx="2">
-                  <c:v>48.559670781893004</c:v>
+                  <c:v>33.333333333333336</c:v>
                 </c:pt>
                 <c:pt idx="3">
-                  <c:v>32.89473684210526</c:v>
+                  <c:v>0</c:v>
                 </c:pt>
               </c:numCache>
             </c:numRef>
@@ -1753,13 +1243,13 @@
                 <c:formatCode>General</c:formatCode>
                 <c:ptCount val="4"/>
                 <c:pt idx="0">
-                  <c:v>2.6595744680851063</c:v>
+                  <c:v>0.0</c:v>
                 </c:pt>
                 <c:pt idx="1">
-                  <c:v>0.76628352490421459</c:v>
+                  <c:v>0.0</c:v>
                 </c:pt>
                 <c:pt idx="2">
-                  <c:v>0</c:v>
+                  <c:v>0.0</c:v>
                 </c:pt>
                 <c:pt idx="3">
                   <c:v>0</c:v>
@@ -1824,16 +1314,16 @@
                 <c:formatCode>General</c:formatCode>
                 <c:ptCount val="4"/>
                 <c:pt idx="0">
-                  <c:v>17.553191489361701</c:v>
+                  <c:v>16.666666666666668</c:v>
                 </c:pt>
                 <c:pt idx="1">
-                  <c:v>58.620689655172413</c:v>
+                  <c:v>46.15384615384615</c:v>
                 </c:pt>
                 <c:pt idx="2">
-                  <c:v>44.032921810699591</c:v>
+                  <c:v>66.66666666666667</c:v>
                 </c:pt>
                 <c:pt idx="3">
-                  <c:v>56.578947368421055</c:v>
+                  <c:v>0</c:v>
                 </c:pt>
               </c:numCache>
             </c:numRef>
@@ -1895,16 +1385,16 @@
                 <c:formatCode>General</c:formatCode>
                 <c:ptCount val="4"/>
                 <c:pt idx="0">
-                  <c:v>5.8510638297872344</c:v>
+                  <c:v>8.333333333333334</c:v>
                 </c:pt>
                 <c:pt idx="1">
-                  <c:v>1.1494252873563218</c:v>
+                  <c:v>7.6923076923076925</c:v>
                 </c:pt>
                 <c:pt idx="2">
-                  <c:v>1.2345679012345678</c:v>
+                  <c:v>0.0</c:v>
                 </c:pt>
                 <c:pt idx="3">
-                  <c:v>7.8947368421052628</c:v>
+                  <c:v>0</c:v>
                 </c:pt>
               </c:numCache>
             </c:numRef>
@@ -1968,16 +1458,16 @@
                 <c:formatCode>General</c:formatCode>
                 <c:ptCount val="4"/>
                 <c:pt idx="0">
-                  <c:v>20.74468085106383</c:v>
+                  <c:v>8.333333333333334</c:v>
                 </c:pt>
                 <c:pt idx="1">
-                  <c:v>4.5977011494252871</c:v>
+                  <c:v>0.0</c:v>
                 </c:pt>
                 <c:pt idx="2">
-                  <c:v>6.1728395061728394</c:v>
+                  <c:v>0.0</c:v>
                 </c:pt>
                 <c:pt idx="3">
-                  <c:v>2.6315789473684212</c:v>
+                  <c:v>0</c:v>
                 </c:pt>
               </c:numCache>
             </c:numRef>
@@ -2274,40 +1764,40 @@
                 <c:formatCode>General</c:formatCode>
                 <c:ptCount val="12"/>
                 <c:pt idx="0">
-                  <c:v>44.839857651245552</c:v>
+                  <c:v>0.0</c:v>
                 </c:pt>
                 <c:pt idx="1">
-                  <c:v>44.602609727164889</c:v>
+                  <c:v>0.0</c:v>
                 </c:pt>
                 <c:pt idx="2">
-                  <c:v>45.195729537366546</c:v>
+                  <c:v>0.0</c:v>
                 </c:pt>
                 <c:pt idx="3">
-                  <c:v>45.195729537366546</c:v>
+                  <c:v>0.0</c:v>
                 </c:pt>
                 <c:pt idx="4">
-                  <c:v>46.381969157769866</c:v>
+                  <c:v>0.0</c:v>
                 </c:pt>
                 <c:pt idx="5">
-                  <c:v>46.381969157769866</c:v>
+                  <c:v>0.0</c:v>
                 </c:pt>
                 <c:pt idx="6">
-                  <c:v>46.381969157769866</c:v>
+                  <c:v>0.0</c:v>
                 </c:pt>
                 <c:pt idx="7">
-                  <c:v>46.500593119810205</c:v>
+                  <c:v>2.7027027027027026</c:v>
                 </c:pt>
                 <c:pt idx="8">
-                  <c:v>46.856465005931199</c:v>
+                  <c:v>2.7027027027027026</c:v>
                 </c:pt>
                 <c:pt idx="9">
-                  <c:v>46.856465005931199</c:v>
+                  <c:v>48.648648648648646</c:v>
                 </c:pt>
                 <c:pt idx="10">
-                  <c:v>46.026097271648872</c:v>
+                  <c:v>48.648648648648646</c:v>
                 </c:pt>
                 <c:pt idx="11">
-                  <c:v>46.144721233689204</c:v>
+                  <c:v>51.351351351351354</c:v>
                 </c:pt>
               </c:numCache>
             </c:numRef>
@@ -2393,40 +1883,40 @@
                 <c:formatCode>General</c:formatCode>
                 <c:ptCount val="12"/>
                 <c:pt idx="0">
-                  <c:v>0.35587188612099646</c:v>
+                  <c:v>0.0</c:v>
                 </c:pt>
                 <c:pt idx="1">
-                  <c:v>0.47449584816132861</c:v>
+                  <c:v>0.0</c:v>
                 </c:pt>
                 <c:pt idx="2">
-                  <c:v>0.11862396204033215</c:v>
+                  <c:v>0.0</c:v>
                 </c:pt>
                 <c:pt idx="3">
-                  <c:v>1.4234875444839858</c:v>
+                  <c:v>0.0</c:v>
                 </c:pt>
                 <c:pt idx="4">
-                  <c:v>1.7793594306049823</c:v>
+                  <c:v>0.0</c:v>
                 </c:pt>
                 <c:pt idx="5">
-                  <c:v>0.83036773428232502</c:v>
+                  <c:v>0.0</c:v>
                 </c:pt>
                 <c:pt idx="6">
-                  <c:v>0.71174377224199292</c:v>
+                  <c:v>0.0</c:v>
                 </c:pt>
                 <c:pt idx="7">
-                  <c:v>2.6097271648873073</c:v>
+                  <c:v>0.0</c:v>
                 </c:pt>
                 <c:pt idx="8">
-                  <c:v>0.94899169632265723</c:v>
+                  <c:v>0.0</c:v>
                 </c:pt>
                 <c:pt idx="9">
-                  <c:v>1.0676156583629892</c:v>
+                  <c:v>0.0</c:v>
                 </c:pt>
                 <c:pt idx="10">
-                  <c:v>0.23724792408066431</c:v>
+                  <c:v>0.0</c:v>
                 </c:pt>
                 <c:pt idx="11">
-                  <c:v>0.94899169632265723</c:v>
+                  <c:v>5.405405405405405</c:v>
                 </c:pt>
               </c:numCache>
             </c:numRef>
@@ -2512,40 +2002,40 @@
                 <c:formatCode>General</c:formatCode>
                 <c:ptCount val="12"/>
                 <c:pt idx="0">
-                  <c:v>37.48517200474496</c:v>
+                  <c:v>0.0</c:v>
                 </c:pt>
                 <c:pt idx="1">
-                  <c:v>37.841043890865954</c:v>
+                  <c:v>0.0</c:v>
                 </c:pt>
                 <c:pt idx="2">
-                  <c:v>36.29893238434164</c:v>
+                  <c:v>0.0</c:v>
                 </c:pt>
                 <c:pt idx="3">
-                  <c:v>38.908659549228943</c:v>
+                  <c:v>0.0</c:v>
                 </c:pt>
                 <c:pt idx="4">
-                  <c:v>37.722419928825623</c:v>
+                  <c:v>0.0</c:v>
                 </c:pt>
                 <c:pt idx="5">
-                  <c:v>41.755634638196916</c:v>
+                  <c:v>0.0</c:v>
                 </c:pt>
                 <c:pt idx="6">
-                  <c:v>41.755634638196916</c:v>
+                  <c:v>0.0</c:v>
                 </c:pt>
                 <c:pt idx="7">
-                  <c:v>37.722419928825623</c:v>
+                  <c:v>2.7027027027027026</c:v>
                 </c:pt>
                 <c:pt idx="8">
-                  <c:v>42.941874258600237</c:v>
+                  <c:v>2.7027027027027026</c:v>
                 </c:pt>
                 <c:pt idx="9">
-                  <c:v>42.823250296559905</c:v>
+                  <c:v>24.324324324324323</c:v>
                 </c:pt>
                 <c:pt idx="10">
-                  <c:v>43.772241992882563</c:v>
+                  <c:v>45.945945945945944</c:v>
                 </c:pt>
                 <c:pt idx="11">
-                  <c:v>43.653618030842232</c:v>
+                  <c:v>40.54054054054054</c:v>
                 </c:pt>
               </c:numCache>
             </c:numRef>
@@ -2631,40 +2121,40 @@
                 <c:formatCode>General</c:formatCode>
                 <c:ptCount val="12"/>
                 <c:pt idx="0">
-                  <c:v>0.59311981020166071</c:v>
+                  <c:v>0.0</c:v>
                 </c:pt>
                 <c:pt idx="1">
-                  <c:v>0.35587188612099646</c:v>
+                  <c:v>0.0</c:v>
                 </c:pt>
                 <c:pt idx="2">
-                  <c:v>2.9655990510083039</c:v>
+                  <c:v>0.0</c:v>
                 </c:pt>
                 <c:pt idx="3">
-                  <c:v>1.66073546856465</c:v>
+                  <c:v>0.0</c:v>
                 </c:pt>
                 <c:pt idx="4">
-                  <c:v>3.3214709371293001</c:v>
+                  <c:v>0.0</c:v>
                 </c:pt>
                 <c:pt idx="5">
-                  <c:v>1.0676156583629892</c:v>
+                  <c:v>0.0</c:v>
                 </c:pt>
                 <c:pt idx="6">
-                  <c:v>0.94899169632265723</c:v>
+                  <c:v>0.0</c:v>
                 </c:pt>
                 <c:pt idx="7">
-                  <c:v>4.5077105575326213</c:v>
+                  <c:v>0.0</c:v>
                 </c:pt>
                 <c:pt idx="8">
-                  <c:v>0.83036773428232502</c:v>
+                  <c:v>0.0</c:v>
                 </c:pt>
                 <c:pt idx="9">
-                  <c:v>0.71174377224199292</c:v>
+                  <c:v>2.7027027027027026</c:v>
                 </c:pt>
                 <c:pt idx="10">
-                  <c:v>1.66073546856465</c:v>
+                  <c:v>2.7027027027027026</c:v>
                 </c:pt>
                 <c:pt idx="11">
-                  <c:v>1.4234875444839858</c:v>
+                  <c:v>0.0</c:v>
                 </c:pt>
               </c:numCache>
             </c:numRef>
@@ -2752,40 +2242,40 @@
                 <c:formatCode>General</c:formatCode>
                 <c:ptCount val="12"/>
                 <c:pt idx="0">
-                  <c:v>16.725978647686834</c:v>
+                  <c:v>100.0</c:v>
                 </c:pt>
                 <c:pt idx="1">
-                  <c:v>16.725978647686834</c:v>
+                  <c:v>100.0</c:v>
                 </c:pt>
                 <c:pt idx="2">
-                  <c:v>15.421115065243178</c:v>
+                  <c:v>100.0</c:v>
                 </c:pt>
                 <c:pt idx="3">
-                  <c:v>12.811387900355871</c:v>
+                  <c:v>100.0</c:v>
                 </c:pt>
                 <c:pt idx="4">
-                  <c:v>10.794780545670225</c:v>
+                  <c:v>100.0</c:v>
                 </c:pt>
                 <c:pt idx="5">
-                  <c:v>9.9644128113879002</c:v>
+                  <c:v>100.0</c:v>
                 </c:pt>
                 <c:pt idx="6">
-                  <c:v>10.201660735468565</c:v>
+                  <c:v>100.0</c:v>
                 </c:pt>
                 <c:pt idx="7">
-                  <c:v>8.6595492289442468</c:v>
+                  <c:v>94.5945945945946</c:v>
                 </c:pt>
                 <c:pt idx="8">
-                  <c:v>8.4223013048635824</c:v>
+                  <c:v>94.5945945945946</c:v>
                 </c:pt>
                 <c:pt idx="9">
-                  <c:v>8.5409252669039137</c:v>
+                  <c:v>24.324324324324323</c:v>
                 </c:pt>
                 <c:pt idx="10">
-                  <c:v>8.3036773428232511</c:v>
+                  <c:v>2.7027027027027026</c:v>
                 </c:pt>
                 <c:pt idx="11">
-                  <c:v>7.8291814946619214</c:v>
+                  <c:v>2.7027027027027026</c:v>
                 </c:pt>
               </c:numCache>
             </c:numRef>
@@ -3082,40 +2572,40 @@
                 <c:formatCode>General</c:formatCode>
                 <c:ptCount val="12"/>
                 <c:pt idx="0">
-                  <c:v>35.526315789473685</c:v>
+                  <c:v>0</c:v>
                 </c:pt>
                 <c:pt idx="1">
-                  <c:v>35.526315789473685</c:v>
+                  <c:v>0</c:v>
                 </c:pt>
                 <c:pt idx="2">
-                  <c:v>35.526315789473685</c:v>
+                  <c:v>0</c:v>
                 </c:pt>
                 <c:pt idx="3">
-                  <c:v>35.526315789473685</c:v>
+                  <c:v>0</c:v>
                 </c:pt>
                 <c:pt idx="4">
-                  <c:v>35.526315789473685</c:v>
+                  <c:v>0</c:v>
                 </c:pt>
                 <c:pt idx="5">
-                  <c:v>35.526315789473685</c:v>
+                  <c:v>0</c:v>
                 </c:pt>
                 <c:pt idx="6">
-                  <c:v>36.842105263157897</c:v>
+                  <c:v>0</c:v>
                 </c:pt>
                 <c:pt idx="7">
-                  <c:v>38.157894736842103</c:v>
+                  <c:v>0</c:v>
                 </c:pt>
                 <c:pt idx="8">
-                  <c:v>38.157894736842103</c:v>
+                  <c:v>0</c:v>
                 </c:pt>
                 <c:pt idx="9">
-                  <c:v>38.157894736842103</c:v>
+                  <c:v>0</c:v>
                 </c:pt>
                 <c:pt idx="10">
-                  <c:v>32.89473684210526</c:v>
+                  <c:v>0</c:v>
                 </c:pt>
                 <c:pt idx="11">
-                  <c:v>32.89473684210526</c:v>
+                  <c:v>0</c:v>
                 </c:pt>
               </c:numCache>
             </c:numRef>
@@ -3225,7 +2715,7 @@
                   <c:v>0</c:v>
                 </c:pt>
                 <c:pt idx="8">
-                  <c:v>1.3157894736842106</c:v>
+                  <c:v>0</c:v>
                 </c:pt>
                 <c:pt idx="9">
                   <c:v>0</c:v>
@@ -3320,40 +2810,40 @@
                 <c:formatCode>General</c:formatCode>
                 <c:ptCount val="12"/>
                 <c:pt idx="0">
-                  <c:v>63.157894736842103</c:v>
+                  <c:v>0</c:v>
                 </c:pt>
                 <c:pt idx="1">
-                  <c:v>63.157894736842103</c:v>
+                  <c:v>0</c:v>
                 </c:pt>
                 <c:pt idx="2">
-                  <c:v>63.157894736842103</c:v>
+                  <c:v>0</c:v>
                 </c:pt>
                 <c:pt idx="3">
-                  <c:v>63.157894736842103</c:v>
+                  <c:v>0</c:v>
                 </c:pt>
                 <c:pt idx="4">
-                  <c:v>63.157894736842103</c:v>
+                  <c:v>0</c:v>
                 </c:pt>
                 <c:pt idx="5">
-                  <c:v>63.157894736842103</c:v>
+                  <c:v>0</c:v>
                 </c:pt>
                 <c:pt idx="6">
-                  <c:v>61.842105263157897</c:v>
+                  <c:v>0</c:v>
                 </c:pt>
                 <c:pt idx="7">
-                  <c:v>57.89473684210526</c:v>
+                  <c:v>0</c:v>
                 </c:pt>
                 <c:pt idx="8">
-                  <c:v>59.210526315789473</c:v>
+                  <c:v>0</c:v>
                 </c:pt>
                 <c:pt idx="9">
-                  <c:v>60.526315789473685</c:v>
+                  <c:v>0</c:v>
                 </c:pt>
                 <c:pt idx="10">
-                  <c:v>56.578947368421055</c:v>
+                  <c:v>0</c:v>
                 </c:pt>
                 <c:pt idx="11">
-                  <c:v>67.10526315789474</c:v>
+                  <c:v>0</c:v>
                 </c:pt>
               </c:numCache>
             </c:numRef>
@@ -3460,7 +2950,7 @@
                   <c:v>0</c:v>
                 </c:pt>
                 <c:pt idx="7">
-                  <c:v>2.6315789473684212</c:v>
+                  <c:v>0</c:v>
                 </c:pt>
                 <c:pt idx="8">
                   <c:v>0</c:v>
@@ -3469,7 +2959,7 @@
                   <c:v>0</c:v>
                 </c:pt>
                 <c:pt idx="10">
-                  <c:v>7.8947368421052628</c:v>
+                  <c:v>0</c:v>
                 </c:pt>
                 <c:pt idx="11">
                   <c:v>0</c:v>
@@ -3560,37 +3050,37 @@
                 <c:formatCode>General</c:formatCode>
                 <c:ptCount val="12"/>
                 <c:pt idx="0">
-                  <c:v>1.3157894736842106</c:v>
+                  <c:v>0</c:v>
                 </c:pt>
                 <c:pt idx="1">
-                  <c:v>1.3157894736842106</c:v>
+                  <c:v>0</c:v>
                 </c:pt>
                 <c:pt idx="2">
-                  <c:v>1.3157894736842106</c:v>
+                  <c:v>0</c:v>
                 </c:pt>
                 <c:pt idx="3">
-                  <c:v>1.3157894736842106</c:v>
+                  <c:v>0</c:v>
                 </c:pt>
                 <c:pt idx="4">
-                  <c:v>1.3157894736842106</c:v>
+                  <c:v>0</c:v>
                 </c:pt>
                 <c:pt idx="5">
-                  <c:v>1.3157894736842106</c:v>
+                  <c:v>0</c:v>
                 </c:pt>
                 <c:pt idx="6">
-                  <c:v>1.3157894736842106</c:v>
+                  <c:v>0</c:v>
                 </c:pt>
                 <c:pt idx="7">
-                  <c:v>1.3157894736842106</c:v>
+                  <c:v>0</c:v>
                 </c:pt>
                 <c:pt idx="8">
-                  <c:v>1.3157894736842106</c:v>
+                  <c:v>0</c:v>
                 </c:pt>
                 <c:pt idx="9">
-                  <c:v>1.3157894736842106</c:v>
+                  <c:v>0</c:v>
                 </c:pt>
                 <c:pt idx="10">
-                  <c:v>2.6315789473684212</c:v>
+                  <c:v>0</c:v>
                 </c:pt>
                 <c:pt idx="11">
                   <c:v>0</c:v>
@@ -3890,40 +3380,40 @@
                 <c:formatCode>General</c:formatCode>
                 <c:ptCount val="12"/>
                 <c:pt idx="0">
-                  <c:v>49.794238683127574</c:v>
+                  <c:v>0.0</c:v>
                 </c:pt>
                 <c:pt idx="1">
-                  <c:v>48.971193415637863</c:v>
+                  <c:v>0.0</c:v>
                 </c:pt>
                 <c:pt idx="2">
-                  <c:v>49.382716049382715</c:v>
+                  <c:v>0.0</c:v>
                 </c:pt>
                 <c:pt idx="3">
-                  <c:v>49.794238683127574</c:v>
+                  <c:v>0.0</c:v>
                 </c:pt>
                 <c:pt idx="4">
-                  <c:v>49.794238683127574</c:v>
+                  <c:v>0.0</c:v>
                 </c:pt>
                 <c:pt idx="5">
-                  <c:v>50.205761316872426</c:v>
+                  <c:v>0.0</c:v>
                 </c:pt>
                 <c:pt idx="6">
-                  <c:v>49.794238683127574</c:v>
+                  <c:v>0.0</c:v>
                 </c:pt>
                 <c:pt idx="7">
-                  <c:v>49.794238683127574</c:v>
+                  <c:v>8.333333333333334</c:v>
                 </c:pt>
                 <c:pt idx="8">
-                  <c:v>49.382716049382715</c:v>
+                  <c:v>8.333333333333334</c:v>
                 </c:pt>
                 <c:pt idx="9">
-                  <c:v>48.971193415637863</c:v>
+                  <c:v>33.333333333333336</c:v>
                 </c:pt>
                 <c:pt idx="10">
-                  <c:v>48.971193415637863</c:v>
+                  <c:v>33.333333333333336</c:v>
                 </c:pt>
                 <c:pt idx="11">
-                  <c:v>48.559670781893004</c:v>
+                  <c:v>41.666666666666664</c:v>
                 </c:pt>
               </c:numCache>
             </c:numRef>
@@ -4009,40 +3499,40 @@
                 <c:formatCode>General</c:formatCode>
                 <c:ptCount val="12"/>
                 <c:pt idx="0">
-                  <c:v>0</c:v>
+                  <c:v>0.0</c:v>
                 </c:pt>
                 <c:pt idx="1">
-                  <c:v>0</c:v>
+                  <c:v>0.0</c:v>
                 </c:pt>
                 <c:pt idx="2">
-                  <c:v>0</c:v>
+                  <c:v>0.0</c:v>
                 </c:pt>
                 <c:pt idx="3">
-                  <c:v>0</c:v>
+                  <c:v>0.0</c:v>
                 </c:pt>
                 <c:pt idx="4">
-                  <c:v>0</c:v>
+                  <c:v>0.0</c:v>
                 </c:pt>
                 <c:pt idx="5">
-                  <c:v>0</c:v>
+                  <c:v>0.0</c:v>
                 </c:pt>
                 <c:pt idx="6">
-                  <c:v>0</c:v>
+                  <c:v>0.0</c:v>
                 </c:pt>
                 <c:pt idx="7">
-                  <c:v>1.2345679012345678</c:v>
+                  <c:v>0.0</c:v>
                 </c:pt>
                 <c:pt idx="8">
-                  <c:v>0</c:v>
+                  <c:v>0.0</c:v>
                 </c:pt>
                 <c:pt idx="9">
-                  <c:v>0</c:v>
+                  <c:v>0.0</c:v>
                 </c:pt>
                 <c:pt idx="10">
-                  <c:v>0.41152263374485598</c:v>
+                  <c:v>0.0</c:v>
                 </c:pt>
                 <c:pt idx="11">
-                  <c:v>0</c:v>
+                  <c:v>8.333333333333334</c:v>
                 </c:pt>
               </c:numCache>
             </c:numRef>
@@ -4128,40 +3618,40 @@
                 <c:formatCode>General</c:formatCode>
                 <c:ptCount val="12"/>
                 <c:pt idx="0">
-                  <c:v>39.91769547325103</c:v>
+                  <c:v>0.0</c:v>
                 </c:pt>
                 <c:pt idx="1">
-                  <c:v>39.91769547325103</c:v>
+                  <c:v>0.0</c:v>
                 </c:pt>
                 <c:pt idx="2">
-                  <c:v>40.74074074074074</c:v>
+                  <c:v>0.0</c:v>
                 </c:pt>
                 <c:pt idx="3">
-                  <c:v>40.329218106995881</c:v>
+                  <c:v>0.0</c:v>
                 </c:pt>
                 <c:pt idx="4">
-                  <c:v>40.329218106995881</c:v>
+                  <c:v>0.0</c:v>
                 </c:pt>
                 <c:pt idx="5">
-                  <c:v>41.97530864197531</c:v>
+                  <c:v>0.0</c:v>
                 </c:pt>
                 <c:pt idx="6">
-                  <c:v>42.386831275720162</c:v>
+                  <c:v>0.0</c:v>
                 </c:pt>
                 <c:pt idx="7">
-                  <c:v>39.91769547325103</c:v>
+                  <c:v>0.0</c:v>
                 </c:pt>
                 <c:pt idx="8">
-                  <c:v>42.386831275720162</c:v>
+                  <c:v>0.0</c:v>
                 </c:pt>
                 <c:pt idx="9">
-                  <c:v>43.209876543209873</c:v>
+                  <c:v>0.0</c:v>
                 </c:pt>
                 <c:pt idx="10">
-                  <c:v>44.444444444444443</c:v>
+                  <c:v>66.66666666666667</c:v>
                 </c:pt>
                 <c:pt idx="11">
-                  <c:v>44.855967078189302</c:v>
+                  <c:v>50.0</c:v>
                 </c:pt>
               </c:numCache>
             </c:numRef>
@@ -4247,40 +3737,40 @@
                 <c:formatCode>General</c:formatCode>
                 <c:ptCount val="12"/>
                 <c:pt idx="0">
-                  <c:v>0.41152263374485598</c:v>
+                  <c:v>0.0</c:v>
                 </c:pt>
                 <c:pt idx="1">
-                  <c:v>1.2345679012345678</c:v>
+                  <c:v>0.0</c:v>
                 </c:pt>
                 <c:pt idx="2">
-                  <c:v>0</c:v>
+                  <c:v>0.0</c:v>
                 </c:pt>
                 <c:pt idx="3">
-                  <c:v>0</c:v>
+                  <c:v>0.0</c:v>
                 </c:pt>
                 <c:pt idx="4">
-                  <c:v>0.41152263374485598</c:v>
+                  <c:v>0.0</c:v>
                 </c:pt>
                 <c:pt idx="5">
-                  <c:v>0.41152263374485598</c:v>
+                  <c:v>0.0</c:v>
                 </c:pt>
                 <c:pt idx="6">
-                  <c:v>0.41152263374485598</c:v>
+                  <c:v>0.0</c:v>
                 </c:pt>
                 <c:pt idx="7">
-                  <c:v>1.6460905349794239</c:v>
+                  <c:v>0.0</c:v>
                 </c:pt>
                 <c:pt idx="8">
-                  <c:v>0.82304526748971196</c:v>
+                  <c:v>0.0</c:v>
                 </c:pt>
                 <c:pt idx="9">
-                  <c:v>0.41152263374485598</c:v>
+                  <c:v>0.0</c:v>
                 </c:pt>
                 <c:pt idx="10">
-                  <c:v>0</c:v>
+                  <c:v>0.0</c:v>
                 </c:pt>
                 <c:pt idx="11">
-                  <c:v>0.41152263374485598</c:v>
+                  <c:v>0.0</c:v>
                 </c:pt>
               </c:numCache>
             </c:numRef>
@@ -4368,40 +3858,40 @@
                 <c:formatCode>General</c:formatCode>
                 <c:ptCount val="12"/>
                 <c:pt idx="0">
-                  <c:v>9.8765432098765427</c:v>
+                  <c:v>100.0</c:v>
                 </c:pt>
                 <c:pt idx="1">
-                  <c:v>9.8765432098765427</c:v>
+                  <c:v>100.0</c:v>
                 </c:pt>
                 <c:pt idx="2">
-                  <c:v>9.8765432098765427</c:v>
+                  <c:v>100.0</c:v>
                 </c:pt>
                 <c:pt idx="3">
-                  <c:v>9.8765432098765427</c:v>
+                  <c:v>100.0</c:v>
                 </c:pt>
                 <c:pt idx="4">
-                  <c:v>9.4650205761316872</c:v>
+                  <c:v>100.0</c:v>
                 </c:pt>
                 <c:pt idx="5">
-                  <c:v>7.4074074074074074</c:v>
+                  <c:v>100.0</c:v>
                 </c:pt>
                 <c:pt idx="6">
-                  <c:v>7.4074074074074074</c:v>
+                  <c:v>100.0</c:v>
                 </c:pt>
                 <c:pt idx="7">
-                  <c:v>7.4074074074074074</c:v>
+                  <c:v>91.66666666666667</c:v>
                 </c:pt>
                 <c:pt idx="8">
-                  <c:v>7.4074074074074074</c:v>
+                  <c:v>91.66666666666667</c:v>
                 </c:pt>
                 <c:pt idx="9">
-                  <c:v>7.4074074074074074</c:v>
+                  <c:v>66.66666666666667</c:v>
                 </c:pt>
                 <c:pt idx="10">
-                  <c:v>6.1728395061728394</c:v>
+                  <c:v>0.0</c:v>
                 </c:pt>
                 <c:pt idx="11">
-                  <c:v>6.1728395061728394</c:v>
+                  <c:v>0.0</c:v>
                 </c:pt>
               </c:numCache>
             </c:numRef>
@@ -4698,40 +4188,40 @@
                 <c:formatCode>General</c:formatCode>
                 <c:ptCount val="12"/>
                 <c:pt idx="0">
-                  <c:v>33.333333333333336</c:v>
+                  <c:v>0.0</c:v>
                 </c:pt>
                 <c:pt idx="1">
-                  <c:v>33.333333333333336</c:v>
+                  <c:v>0.0</c:v>
                 </c:pt>
                 <c:pt idx="2">
-                  <c:v>33.333333333333336</c:v>
+                  <c:v>0.0</c:v>
                 </c:pt>
                 <c:pt idx="3">
-                  <c:v>33.333333333333336</c:v>
+                  <c:v>0.0</c:v>
                 </c:pt>
                 <c:pt idx="4">
-                  <c:v>34.099616858237546</c:v>
+                  <c:v>0.0</c:v>
                 </c:pt>
                 <c:pt idx="5">
-                  <c:v>33.716475095785441</c:v>
+                  <c:v>0.0</c:v>
                 </c:pt>
                 <c:pt idx="6">
-                  <c:v>33.716475095785441</c:v>
+                  <c:v>0.0</c:v>
                 </c:pt>
                 <c:pt idx="7">
-                  <c:v>34.099616858237546</c:v>
+                  <c:v>0.0</c:v>
                 </c:pt>
                 <c:pt idx="8">
-                  <c:v>34.482758620689658</c:v>
+                  <c:v>0.0</c:v>
                 </c:pt>
                 <c:pt idx="9">
-                  <c:v>34.865900383141764</c:v>
+                  <c:v>46.15384615384615</c:v>
                 </c:pt>
                 <c:pt idx="10">
-                  <c:v>34.865900383141764</c:v>
+                  <c:v>46.15384615384615</c:v>
                 </c:pt>
                 <c:pt idx="11">
-                  <c:v>34.865900383141764</c:v>
+                  <c:v>46.15384615384615</c:v>
                 </c:pt>
               </c:numCache>
             </c:numRef>
@@ -4817,40 +4307,40 @@
                 <c:formatCode>General</c:formatCode>
                 <c:ptCount val="12"/>
                 <c:pt idx="0">
-                  <c:v>0.76628352490421459</c:v>
+                  <c:v>0.0</c:v>
                 </c:pt>
                 <c:pt idx="1">
-                  <c:v>1.5325670498084292</c:v>
+                  <c:v>0.0</c:v>
                 </c:pt>
                 <c:pt idx="2">
-                  <c:v>0.38314176245210729</c:v>
+                  <c:v>0.0</c:v>
                 </c:pt>
                 <c:pt idx="3">
-                  <c:v>2.2988505747126435</c:v>
+                  <c:v>0.0</c:v>
                 </c:pt>
                 <c:pt idx="4">
-                  <c:v>4.5977011494252871</c:v>
+                  <c:v>0.0</c:v>
                 </c:pt>
                 <c:pt idx="5">
-                  <c:v>1.1494252873563218</c:v>
+                  <c:v>0.0</c:v>
                 </c:pt>
                 <c:pt idx="6">
-                  <c:v>1.1494252873563218</c:v>
+                  <c:v>0.0</c:v>
                 </c:pt>
                 <c:pt idx="7">
-                  <c:v>2.2988505747126435</c:v>
+                  <c:v>0.0</c:v>
                 </c:pt>
                 <c:pt idx="8">
-                  <c:v>0.38314176245210729</c:v>
+                  <c:v>0.0</c:v>
                 </c:pt>
                 <c:pt idx="9">
-                  <c:v>1.5325670498084292</c:v>
+                  <c:v>0.0</c:v>
                 </c:pt>
                 <c:pt idx="10">
-                  <c:v>0.38314176245210729</c:v>
+                  <c:v>0.0</c:v>
                 </c:pt>
                 <c:pt idx="11">
-                  <c:v>0.38314176245210729</c:v>
+                  <c:v>0.0</c:v>
                 </c:pt>
               </c:numCache>
             </c:numRef>
@@ -4936,40 +4426,40 @@
                 <c:formatCode>General</c:formatCode>
                 <c:ptCount val="12"/>
                 <c:pt idx="0">
-                  <c:v>54.022988505747129</c:v>
+                  <c:v>0.0</c:v>
                 </c:pt>
                 <c:pt idx="1">
-                  <c:v>54.406130268199234</c:v>
+                  <c:v>0.0</c:v>
                 </c:pt>
                 <c:pt idx="2">
-                  <c:v>54.022988505747129</c:v>
+                  <c:v>0.0</c:v>
                 </c:pt>
                 <c:pt idx="3">
-                  <c:v>52.107279693486589</c:v>
+                  <c:v>0.0</c:v>
                 </c:pt>
                 <c:pt idx="4">
-                  <c:v>45.21072796934866</c:v>
+                  <c:v>0.0</c:v>
                 </c:pt>
                 <c:pt idx="5">
-                  <c:v>56.70498084291188</c:v>
+                  <c:v>0.0</c:v>
                 </c:pt>
                 <c:pt idx="6">
-                  <c:v>56.321839080459768</c:v>
+                  <c:v>0.0</c:v>
                 </c:pt>
                 <c:pt idx="7">
-                  <c:v>52.490421455938694</c:v>
+                  <c:v>7.6923076923076925</c:v>
                 </c:pt>
                 <c:pt idx="8">
-                  <c:v>59.003831417624518</c:v>
+                  <c:v>7.6923076923076925</c:v>
                 </c:pt>
                 <c:pt idx="9">
-                  <c:v>57.47126436781609</c:v>
+                  <c:v>46.15384615384615</c:v>
                 </c:pt>
                 <c:pt idx="10">
-                  <c:v>58.620689655172413</c:v>
+                  <c:v>53.84615384615385</c:v>
                 </c:pt>
                 <c:pt idx="11">
-                  <c:v>59.38697318007663</c:v>
+                  <c:v>53.84615384615385</c:v>
                 </c:pt>
               </c:numCache>
             </c:numRef>
@@ -5055,40 +4545,40 @@
                 <c:formatCode>General</c:formatCode>
                 <c:ptCount val="12"/>
                 <c:pt idx="0">
-                  <c:v>1.1494252873563218</c:v>
+                  <c:v>0.0</c:v>
                 </c:pt>
                 <c:pt idx="1">
-                  <c:v>0</c:v>
+                  <c:v>0.0</c:v>
                 </c:pt>
                 <c:pt idx="2">
-                  <c:v>1.5325670498084292</c:v>
+                  <c:v>0.0</c:v>
                 </c:pt>
                 <c:pt idx="3">
-                  <c:v>1.5325670498084292</c:v>
+                  <c:v>0.0</c:v>
                 </c:pt>
                 <c:pt idx="4">
-                  <c:v>8.0459770114942533</c:v>
+                  <c:v>0.0</c:v>
                 </c:pt>
                 <c:pt idx="5">
-                  <c:v>1.1494252873563218</c:v>
+                  <c:v>0.0</c:v>
                 </c:pt>
                 <c:pt idx="6">
-                  <c:v>1.5325670498084292</c:v>
+                  <c:v>0.0</c:v>
                 </c:pt>
                 <c:pt idx="7">
-                  <c:v>4.5977011494252871</c:v>
+                  <c:v>0.0</c:v>
                 </c:pt>
                 <c:pt idx="8">
-                  <c:v>0.38314176245210729</c:v>
+                  <c:v>0.0</c:v>
                 </c:pt>
                 <c:pt idx="9">
-                  <c:v>0.76628352490421459</c:v>
+                  <c:v>7.6923076923076925</c:v>
                 </c:pt>
                 <c:pt idx="10">
-                  <c:v>1.5325670498084292</c:v>
+                  <c:v>0.0</c:v>
                 </c:pt>
                 <c:pt idx="11">
-                  <c:v>0.76628352490421459</c:v>
+                  <c:v>0.0</c:v>
                 </c:pt>
               </c:numCache>
             </c:numRef>
@@ -5176,40 +4666,40 @@
                 <c:formatCode>General</c:formatCode>
                 <c:ptCount val="12"/>
                 <c:pt idx="0">
-                  <c:v>10.727969348659004</c:v>
+                  <c:v>100.0</c:v>
                 </c:pt>
                 <c:pt idx="1">
-                  <c:v>10.727969348659004</c:v>
+                  <c:v>100.0</c:v>
                 </c:pt>
                 <c:pt idx="2">
-                  <c:v>10.727969348659004</c:v>
+                  <c:v>100.0</c:v>
                 </c:pt>
                 <c:pt idx="3">
-                  <c:v>10.727969348659004</c:v>
+                  <c:v>100.0</c:v>
                 </c:pt>
                 <c:pt idx="4">
-                  <c:v>8.0459770114942533</c:v>
+                  <c:v>100.0</c:v>
                 </c:pt>
                 <c:pt idx="5">
-                  <c:v>7.2796934865900385</c:v>
+                  <c:v>100.0</c:v>
                 </c:pt>
                 <c:pt idx="6">
-                  <c:v>7.2796934865900385</c:v>
+                  <c:v>100.0</c:v>
                 </c:pt>
                 <c:pt idx="7">
-                  <c:v>6.5134099616858236</c:v>
+                  <c:v>92.3076923076923</c:v>
                 </c:pt>
                 <c:pt idx="8">
-                  <c:v>5.7471264367816088</c:v>
+                  <c:v>92.3076923076923</c:v>
                 </c:pt>
                 <c:pt idx="9">
-                  <c:v>5.3639846743295019</c:v>
+                  <c:v>0.0</c:v>
                 </c:pt>
                 <c:pt idx="10">
-                  <c:v>4.5977011494252871</c:v>
+                  <c:v>0.0</c:v>
                 </c:pt>
                 <c:pt idx="11">
-                  <c:v>4.5977011494252871</c:v>
+                  <c:v>0.0</c:v>
                 </c:pt>
               </c:numCache>
             </c:numRef>
@@ -5506,40 +4996,40 @@
                 <c:formatCode>General</c:formatCode>
                 <c:ptCount val="12"/>
                 <c:pt idx="0">
-                  <c:v>45.744680851063826</c:v>
+                  <c:v>0.0</c:v>
                 </c:pt>
                 <c:pt idx="1">
-                  <c:v>45.744680851063826</c:v>
+                  <c:v>0.0</c:v>
                 </c:pt>
                 <c:pt idx="2">
-                  <c:v>47.872340425531917</c:v>
+                  <c:v>0.0</c:v>
                 </c:pt>
                 <c:pt idx="3">
-                  <c:v>47.340425531914896</c:v>
+                  <c:v>0.0</c:v>
                 </c:pt>
                 <c:pt idx="4">
-                  <c:v>51.595744680851062</c:v>
+                  <c:v>0.0</c:v>
                 </c:pt>
                 <c:pt idx="5">
-                  <c:v>51.595744680851062</c:v>
+                  <c:v>0.0</c:v>
                 </c:pt>
                 <c:pt idx="6">
-                  <c:v>51.595744680851062</c:v>
+                  <c:v>0.0</c:v>
                 </c:pt>
                 <c:pt idx="7">
-                  <c:v>51.063829787234042</c:v>
+                  <c:v>0.0</c:v>
                 </c:pt>
                 <c:pt idx="8">
-                  <c:v>52.659574468085104</c:v>
+                  <c:v>0.0</c:v>
                 </c:pt>
                 <c:pt idx="9">
-                  <c:v>52.659574468085104</c:v>
+                  <c:v>66.66666666666667</c:v>
                 </c:pt>
                 <c:pt idx="10">
-                  <c:v>52.127659574468083</c:v>
+                  <c:v>66.66666666666667</c:v>
                 </c:pt>
                 <c:pt idx="11">
-                  <c:v>53.191489361702125</c:v>
+                  <c:v>66.66666666666667</c:v>
                 </c:pt>
               </c:numCache>
             </c:numRef>
@@ -5625,40 +5115,40 @@
                 <c:formatCode>General</c:formatCode>
                 <c:ptCount val="12"/>
                 <c:pt idx="0">
-                  <c:v>0.53191489361702127</c:v>
+                  <c:v>0.0</c:v>
                 </c:pt>
                 <c:pt idx="1">
-                  <c:v>0</c:v>
+                  <c:v>0.0</c:v>
                 </c:pt>
                 <c:pt idx="2">
-                  <c:v>0</c:v>
+                  <c:v>0.0</c:v>
                 </c:pt>
                 <c:pt idx="3">
-                  <c:v>3.1914893617021276</c:v>
+                  <c:v>0.0</c:v>
                 </c:pt>
                 <c:pt idx="4">
-                  <c:v>1.5957446808510638</c:v>
+                  <c:v>0.0</c:v>
                 </c:pt>
                 <c:pt idx="5">
-                  <c:v>2.1276595744680851</c:v>
+                  <c:v>0.0</c:v>
                 </c:pt>
                 <c:pt idx="6">
-                  <c:v>1.5957446808510638</c:v>
+                  <c:v>0.0</c:v>
                 </c:pt>
                 <c:pt idx="7">
-                  <c:v>6.9148936170212769</c:v>
+                  <c:v>0.0</c:v>
                 </c:pt>
                 <c:pt idx="8">
-                  <c:v>3.1914893617021276</c:v>
+                  <c:v>0.0</c:v>
                 </c:pt>
                 <c:pt idx="9">
-                  <c:v>2.6595744680851063</c:v>
+                  <c:v>0.0</c:v>
                 </c:pt>
                 <c:pt idx="10">
-                  <c:v>0</c:v>
+                  <c:v>0.0</c:v>
                 </c:pt>
                 <c:pt idx="11">
-                  <c:v>3.7234042553191489</c:v>
+                  <c:v>8.333333333333334</c:v>
                 </c:pt>
               </c:numCache>
             </c:numRef>
@@ -5744,40 +5234,40 @@
                 <c:formatCode>General</c:formatCode>
                 <c:ptCount val="12"/>
                 <c:pt idx="0">
-                  <c:v>6.3829787234042552</c:v>
+                  <c:v>0.0</c:v>
                 </c:pt>
                 <c:pt idx="1">
-                  <c:v>7.4468085106382977</c:v>
+                  <c:v>0.0</c:v>
                 </c:pt>
                 <c:pt idx="2">
-                  <c:v>0</c:v>
+                  <c:v>0.0</c:v>
                 </c:pt>
                 <c:pt idx="3">
-                  <c:v>14.893617021276595</c:v>
+                  <c:v>0.0</c:v>
                 </c:pt>
                 <c:pt idx="4">
-                  <c:v>19.148936170212767</c:v>
+                  <c:v>0.0</c:v>
                 </c:pt>
                 <c:pt idx="5">
-                  <c:v>19.148936170212767</c:v>
+                  <c:v>0.0</c:v>
                 </c:pt>
                 <c:pt idx="6">
-                  <c:v>19.680851063829788</c:v>
+                  <c:v>0.0</c:v>
                 </c:pt>
                 <c:pt idx="7">
-                  <c:v>12.23404255319149</c:v>
+                  <c:v>0.0</c:v>
                 </c:pt>
                 <c:pt idx="8">
-                  <c:v>22.340425531914892</c:v>
+                  <c:v>0.0</c:v>
                 </c:pt>
                 <c:pt idx="9">
-                  <c:v>22.340425531914892</c:v>
+                  <c:v>25.0</c:v>
                 </c:pt>
                 <c:pt idx="10">
-                  <c:v>25</c:v>
+                  <c:v>16.666666666666668</c:v>
                 </c:pt>
                 <c:pt idx="11">
-                  <c:v>17.553191489361701</c:v>
+                  <c:v>16.666666666666668</c:v>
                 </c:pt>
               </c:numCache>
             </c:numRef>
@@ -5863,40 +5353,40 @@
                 <c:formatCode>General</c:formatCode>
                 <c:ptCount val="12"/>
                 <c:pt idx="0">
-                  <c:v>0.53191489361702127</c:v>
+                  <c:v>0.0</c:v>
                 </c:pt>
                 <c:pt idx="1">
-                  <c:v>0</c:v>
+                  <c:v>0.0</c:v>
                 </c:pt>
                 <c:pt idx="2">
-                  <c:v>11.170212765957446</c:v>
+                  <c:v>0.0</c:v>
                 </c:pt>
                 <c:pt idx="3">
-                  <c:v>5.3191489361702127</c:v>
+                  <c:v>0.0</c:v>
                 </c:pt>
                 <c:pt idx="4">
-                  <c:v>3.1914893617021276</c:v>
+                  <c:v>0.0</c:v>
                 </c:pt>
                 <c:pt idx="5">
-                  <c:v>2.6595744680851063</c:v>
+                  <c:v>0.0</c:v>
                 </c:pt>
                 <c:pt idx="6">
-                  <c:v>1.5957446808510638</c:v>
+                  <c:v>0.0</c:v>
                 </c:pt>
                 <c:pt idx="7">
-                  <c:v>10.106382978723405</c:v>
+                  <c:v>0.0</c:v>
                 </c:pt>
                 <c:pt idx="8">
-                  <c:v>2.1276595744680851</c:v>
+                  <c:v>0.0</c:v>
                 </c:pt>
                 <c:pt idx="9">
-                  <c:v>1.5957446808510638</c:v>
+                  <c:v>0.0</c:v>
                 </c:pt>
                 <c:pt idx="10">
-                  <c:v>2.1276595744680851</c:v>
+                  <c:v>8.333333333333334</c:v>
                 </c:pt>
                 <c:pt idx="11">
-                  <c:v>4.7872340425531918</c:v>
+                  <c:v>0.0</c:v>
                 </c:pt>
               </c:numCache>
             </c:numRef>
@@ -5984,40 +5474,40 @@
                 <c:formatCode>General</c:formatCode>
                 <c:ptCount val="12"/>
                 <c:pt idx="0">
-                  <c:v>46.808510638297875</c:v>
+                  <c:v>100.0</c:v>
                 </c:pt>
                 <c:pt idx="1">
-                  <c:v>46.808510638297875</c:v>
+                  <c:v>100.0</c:v>
                 </c:pt>
                 <c:pt idx="2">
-                  <c:v>40.957446808510639</c:v>
+                  <c:v>100.0</c:v>
                 </c:pt>
                 <c:pt idx="3">
-                  <c:v>29.25531914893617</c:v>
+                  <c:v>100.0</c:v>
                 </c:pt>
                 <c:pt idx="4">
-                  <c:v>24.468085106382979</c:v>
+                  <c:v>100.0</c:v>
                 </c:pt>
                 <c:pt idx="5">
-                  <c:v>24.468085106382979</c:v>
+                  <c:v>100.0</c:v>
                 </c:pt>
                 <c:pt idx="6">
-                  <c:v>25.531914893617021</c:v>
+                  <c:v>100.0</c:v>
                 </c:pt>
                 <c:pt idx="7">
-                  <c:v>19.680851063829788</c:v>
+                  <c:v>100.0</c:v>
                 </c:pt>
                 <c:pt idx="8">
-                  <c:v>19.680851063829788</c:v>
+                  <c:v>100.0</c:v>
                 </c:pt>
                 <c:pt idx="9">
-                  <c:v>20.74468085106383</c:v>
+                  <c:v>8.333333333333334</c:v>
                 </c:pt>
                 <c:pt idx="10">
-                  <c:v>20.74468085106383</c:v>
+                  <c:v>8.333333333333334</c:v>
                 </c:pt>
                 <c:pt idx="11">
-                  <c:v>20.74468085106383</c:v>
+                  <c:v>8.333333333333334</c:v>
                 </c:pt>
               </c:numCache>
             </c:numRef>
@@ -10480,7 +9970,7 @@
           <a:p>
             <a:fld id="{C1255C68-584F-174D-BB81-51BF91708794}" type="datetimeFigureOut">
               <a:rPr lang="en-US" smtClean="0"/>
-              <a:t>3/13/26</a:t>
+              <a:t>3/12/26</a:t>
             </a:fld>
             <a:endParaRPr lang="en-US"/>
           </a:p>
@@ -10657,7 +10147,7 @@
           <a:p>
             <a:fld id="{A1EDAAC4-819D-C544-9EA1-C73624CFD70B}" type="datetimeFigureOut">
               <a:rPr lang="en-US" smtClean="0"/>
-              <a:t>3/13/26</a:t>
+              <a:t>3/12/26</a:t>
             </a:fld>
             <a:endParaRPr lang="en-US"/>
           </a:p>
@@ -31955,7 +31445,7 @@
           <a:p>
             <a:r>
               <a:rPr lang="en-US" dirty="0" err="1"/>
-              <a:t>March 12, 2026</a:t>
+              <a:t>March 08, 2026</a:t>
             </a:r>
             <a:endParaRPr lang="en-US" dirty="0"/>
           </a:p>
@@ -32117,7 +31607,7 @@
       </p:sp>
       <p:graphicFrame>
         <p:nvGraphicFramePr>
-          <p:cNvPr id="6" name="Chart 5">
+          <p:cNvPr id="6" name="OBJECTIVES_ARCHITECTURE_CHART">
             <a:extLst>
               <a:ext uri="{FF2B5EF4-FFF2-40B4-BE49-F238E27FC236}">
                 <a16:creationId xmlns:a16="http://schemas.microsoft.com/office/drawing/2014/main" id="{FBB521E4-96ED-814A-B322-AFBA0633E84C}"/>
@@ -32125,7 +31615,13 @@
             </a:extLst>
           </p:cNvPr>
           <p:cNvGraphicFramePr/>
-          <p:nvPr/>
+          <p:nvPr>
+            <p:extLst>
+              <p:ext uri="{D42A27DB-BD31-4B8C-83A1-F6EECF244321}">
+                <p14:modId xmlns:p14="http://schemas.microsoft.com/office/powerpoint/2010/main" val="687656309"/>
+              </p:ext>
+            </p:extLst>
+          </p:nvPr>
         </p:nvGraphicFramePr>
         <p:xfrm>
           <a:off x="478224" y="1606666"/>
@@ -32438,14 +31934,15 @@
           <a:p>
             <a:r>
               <a:rPr lang="en-US"/>
-              <a:t>Progress towards objectives between February 2026 and March 2026</a:t>
+              <a:t>Progress towards objectives between January 2026 and March 2026</a:t>
             </a:r>
+            <a:endParaRPr lang="en-US"/>
           </a:p>
         </p:txBody>
       </p:sp>
       <p:graphicFrame>
         <p:nvGraphicFramePr>
-          <p:cNvPr id="6" name="Chart 5">
+          <p:cNvPr id="6" name="OBJECTIVES_STATUS_CHART">
             <a:extLst>
               <a:ext uri="{FF2B5EF4-FFF2-40B4-BE49-F238E27FC236}">
                 <a16:creationId xmlns:a16="http://schemas.microsoft.com/office/drawing/2014/main" id="{9A17AFA3-FC96-B65B-0A6A-D4A1754157FE}"/>
@@ -32456,7 +31953,7 @@
           <p:nvPr>
             <p:extLst>
               <p:ext uri="{D42A27DB-BD31-4B8C-83A1-F6EECF244321}">
-                <p14:modId xmlns:p14="http://schemas.microsoft.com/office/powerpoint/2010/main" val="469187844"/>
+                <p14:modId xmlns:p14="http://schemas.microsoft.com/office/powerpoint/2010/main" val="1764705810"/>
               </p:ext>
             </p:extLst>
           </p:nvPr>
@@ -32747,15 +32244,15 @@
           <a:lstStyle/>
           <a:p>
             <a:r>
-              <a:rPr lang="en-US"/>
-              <a:t>Progress towards objectives per team between February 2026 and March 2026</a:t>
+              <a:rPr lang="en-US" dirty="0"/>
+              <a:t>Progress towards objectives per team between January 2026 and March 2026</a:t>
             </a:r>
           </a:p>
         </p:txBody>
       </p:sp>
       <p:graphicFrame>
         <p:nvGraphicFramePr>
-          <p:cNvPr id="6" name="Chart 5">
+          <p:cNvPr id="6" name="OBJECTIVES_TEAM_CHART">
             <a:extLst>
               <a:ext uri="{FF2B5EF4-FFF2-40B4-BE49-F238E27FC236}">
                 <a16:creationId xmlns:a16="http://schemas.microsoft.com/office/drawing/2014/main" id="{C8EC5A35-9538-D995-065E-528B18F85DED}"/>
@@ -33058,14 +32555,15 @@
           <a:p>
             <a:r>
               <a:rPr lang="en-US"/>
-              <a:t>Progress towards objectives per capability between February 2026 and March 2026</a:t>
+              <a:t>Progress towards objectives per capability between January 2026 and March 2026</a:t>
             </a:r>
+            <a:endParaRPr lang="en-US"/>
           </a:p>
         </p:txBody>
       </p:sp>
       <p:graphicFrame>
         <p:nvGraphicFramePr>
-          <p:cNvPr id="6" name="Chart 5">
+          <p:cNvPr id="6" name="OBJECTIVES_CAPABILITY_CHART">
             <a:extLst>
               <a:ext uri="{FF2B5EF4-FFF2-40B4-BE49-F238E27FC236}">
                 <a16:creationId xmlns:a16="http://schemas.microsoft.com/office/drawing/2014/main" id="{2774041C-71AE-0495-78BB-3253007E9E90}"/>
@@ -33375,7 +32873,7 @@
       </p:sp>
       <p:graphicFrame>
         <p:nvGraphicFramePr>
-          <p:cNvPr id="6" name="Chart 5">
+          <p:cNvPr id="6" name="OBJECTIVES_OVERALL_CHART">
             <a:extLst>
               <a:ext uri="{FF2B5EF4-FFF2-40B4-BE49-F238E27FC236}">
                 <a16:creationId xmlns:a16="http://schemas.microsoft.com/office/drawing/2014/main" id="{CED42228-B917-5A3E-BB6B-9871F4C489AA}"/>
@@ -33894,7 +33392,7 @@
       </p:sp>
       <p:graphicFrame>
         <p:nvGraphicFramePr>
-          <p:cNvPr id="6" name="Chart 5">
+          <p:cNvPr id="6" name="OBJECTIVES_SECURITY_CHART">
             <a:extLst>
               <a:ext uri="{FF2B5EF4-FFF2-40B4-BE49-F238E27FC236}">
                 <a16:creationId xmlns:a16="http://schemas.microsoft.com/office/drawing/2014/main" id="{EA804B61-8F8C-C6D5-94BB-B5CA583E7BE3}"/>
@@ -33902,7 +33400,13 @@
             </a:extLst>
           </p:cNvPr>
           <p:cNvGraphicFramePr/>
-          <p:nvPr/>
+          <p:nvPr>
+            <p:extLst>
+              <p:ext uri="{D42A27DB-BD31-4B8C-83A1-F6EECF244321}">
+                <p14:modId xmlns:p14="http://schemas.microsoft.com/office/powerpoint/2010/main" val="3697432841"/>
+              </p:ext>
+            </p:extLst>
+          </p:nvPr>
         </p:nvGraphicFramePr>
         <p:xfrm>
           <a:off x="478224" y="1606666"/>
@@ -34198,7 +33702,7 @@
       </p:sp>
       <p:graphicFrame>
         <p:nvGraphicFramePr>
-          <p:cNvPr id="6" name="Chart 5">
+          <p:cNvPr id="6" name="OBJECTIVES_OSH_CHART">
             <a:extLst>
               <a:ext uri="{FF2B5EF4-FFF2-40B4-BE49-F238E27FC236}">
                 <a16:creationId xmlns:a16="http://schemas.microsoft.com/office/drawing/2014/main" id="{1551057A-38E3-B1CD-A98D-FA6566BDC6A6}"/>
@@ -34206,7 +33710,13 @@
             </a:extLst>
           </p:cNvPr>
           <p:cNvGraphicFramePr/>
-          <p:nvPr/>
+          <p:nvPr>
+            <p:extLst>
+              <p:ext uri="{D42A27DB-BD31-4B8C-83A1-F6EECF244321}">
+                <p14:modId xmlns:p14="http://schemas.microsoft.com/office/powerpoint/2010/main" val="4148586428"/>
+              </p:ext>
+            </p:extLst>
+          </p:nvPr>
         </p:nvGraphicFramePr>
         <p:xfrm>
           <a:off x="478224" y="1606666"/>
@@ -34502,7 +34012,7 @@
       </p:sp>
       <p:graphicFrame>
         <p:nvGraphicFramePr>
-          <p:cNvPr id="6" name="Chart 5">
+          <p:cNvPr id="6" name="OBJECTIVES_MAINTAINABILITY_CHART">
             <a:extLst>
               <a:ext uri="{FF2B5EF4-FFF2-40B4-BE49-F238E27FC236}">
                 <a16:creationId xmlns:a16="http://schemas.microsoft.com/office/drawing/2014/main" id="{D309D7A3-6D2B-5238-FDCA-89277EA3E24A}"/>
@@ -34510,7 +34020,13 @@
             </a:extLst>
           </p:cNvPr>
           <p:cNvGraphicFramePr/>
-          <p:nvPr/>
+          <p:nvPr>
+            <p:extLst>
+              <p:ext uri="{D42A27DB-BD31-4B8C-83A1-F6EECF244321}">
+                <p14:modId xmlns:p14="http://schemas.microsoft.com/office/powerpoint/2010/main" val="3629184054"/>
+              </p:ext>
+            </p:extLst>
+          </p:nvPr>
         </p:nvGraphicFramePr>
         <p:xfrm>
           <a:off x="478224" y="1606666"/>
@@ -35596,15 +35112,6 @@
 </file>
 
 <file path=customXml/item1.xml><?xml version="1.0" encoding="utf-8"?>
-<?mso-contentType ?>
-<FormTemplates xmlns="http://schemas.microsoft.com/sharepoint/v3/contenttype/forms">
-  <Display>DocumentLibraryForm</Display>
-  <Edit>DocumentLibraryForm</Edit>
-  <New>DocumentLibraryForm</New>
-</FormTemplates>
-</file>
-
-<file path=customXml/item2.xml><?xml version="1.0" encoding="utf-8"?>
 <p:properties xmlns:p="http://schemas.microsoft.com/office/2006/metadata/properties" xmlns:xsi="http://www.w3.org/2001/XMLSchema-instance" xmlns:pc="http://schemas.microsoft.com/office/infopath/2007/PartnerControls">
   <documentManagement>
     <lcf76f155ced4ddcb4097134ff3c332f xmlns="fa937df2-abe2-4d38-b5f4-c228acba3827">
@@ -35615,7 +35122,7 @@
 </p:properties>
 </file>
 
-<file path=customXml/item3.xml><?xml version="1.0" encoding="utf-8"?>
+<file path=customXml/item2.xml><?xml version="1.0" encoding="utf-8"?>
 <ct:contentTypeSchema xmlns:ct="http://schemas.microsoft.com/office/2006/metadata/contentType" xmlns:ma="http://schemas.microsoft.com/office/2006/metadata/properties/metaAttributes" ct:_="" ma:_="" ma:contentTypeName="Document" ma:contentTypeID="0x010100398B4EB28540854BB4092730D7F67224" ma:contentTypeVersion="13" ma:contentTypeDescription="Create a new document." ma:contentTypeScope="" ma:versionID="07d6997c7358ecc3b6f0d78039f1ac55">
   <xsd:schema xmlns:xsd="http://www.w3.org/2001/XMLSchema" xmlns:xs="http://www.w3.org/2001/XMLSchema" xmlns:p="http://schemas.microsoft.com/office/2006/metadata/properties" xmlns:ns2="fa937df2-abe2-4d38-b5f4-c228acba3827" xmlns:ns3="bc8ba18a-4a58-4ad2-bfc0-6516af8e7dc2" targetNamespace="http://schemas.microsoft.com/office/2006/metadata/properties" ma:root="true" ma:fieldsID="a7d20d2c9a349b6838acf4b79389f2fd" ns2:_="" ns3:_="">
     <xsd:import namespace="fa937df2-abe2-4d38-b5f4-c228acba3827"/>
@@ -35838,15 +35345,16 @@
 </ct:contentTypeSchema>
 </file>
 
-<file path=customXml/itemProps1.xml><?xml version="1.0" encoding="utf-8"?>
-<ds:datastoreItem xmlns:ds="http://schemas.openxmlformats.org/officeDocument/2006/customXml" ds:itemID="{570928F0-D7CA-4732-B7F3-1F945720D0AA}">
-  <ds:schemaRefs>
-    <ds:schemaRef ds:uri="http://schemas.microsoft.com/sharepoint/v3/contenttype/forms"/>
-  </ds:schemaRefs>
-</ds:datastoreItem>
+<file path=customXml/item3.xml><?xml version="1.0" encoding="utf-8"?>
+<?mso-contentType ?>
+<FormTemplates xmlns="http://schemas.microsoft.com/sharepoint/v3/contenttype/forms">
+  <Display>DocumentLibraryForm</Display>
+  <Edit>DocumentLibraryForm</Edit>
+  <New>DocumentLibraryForm</New>
+</FormTemplates>
 </file>
 
-<file path=customXml/itemProps2.xml><?xml version="1.0" encoding="utf-8"?>
+<file path=customXml/itemProps1.xml><?xml version="1.0" encoding="utf-8"?>
 <ds:datastoreItem xmlns:ds="http://schemas.openxmlformats.org/officeDocument/2006/customXml" ds:itemID="{4B629362-CF15-4610-8FAC-A8E699942233}">
   <ds:schemaRefs>
     <ds:schemaRef ds:uri="http://schemas.microsoft.com/office/2006/documentManagement/types"/>
@@ -35863,7 +35371,7 @@
 </ds:datastoreItem>
 </file>
 
-<file path=customXml/itemProps3.xml><?xml version="1.0" encoding="utf-8"?>
+<file path=customXml/itemProps2.xml><?xml version="1.0" encoding="utf-8"?>
 <ds:datastoreItem xmlns:ds="http://schemas.openxmlformats.org/officeDocument/2006/customXml" ds:itemID="{06E6923A-C221-4753-B75B-BA213EEB7564}">
   <ds:schemaRefs>
     <ds:schemaRef ds:uri="bc8ba18a-4a58-4ad2-bfc0-6516af8e7dc2"/>
@@ -35880,4 +35388,12 @@
     <ds:schemaRef ds:uri="http://www.w3.org/2001/XMLSchema"/>
   </ds:schemaRefs>
 </ds:datastoreItem>
+</file>
+
+<file path=customXml/itemProps3.xml><?xml version="1.0" encoding="utf-8"?>
+<ds:datastoreItem xmlns:ds="http://schemas.openxmlformats.org/officeDocument/2006/customXml" ds:itemID="{570928F0-D7CA-4732-B7F3-1F945720D0AA}">
+  <ds:schemaRefs>
+    <ds:schemaRef ds:uri="http://schemas.microsoft.com/sharepoint/v3/contenttype/forms"/>
+  </ds:schemaRefs>
+</ds:datastoreItem>
 </file>